--- a/downloads/presentations/modules/lesson-32-executive-ai-decision-rights-and-accountability.pptx
+++ b/downloads/presentations/modules/lesson-32-executive-ai-decision-rights-and-accountability.pptx
@@ -24,9 +24,11 @@
     <p:sldId id="272" r:id="rId18"/>
     <p:sldId id="273" r:id="rId19"/>
     <p:sldId id="274" r:id="rId20"/>
+    <p:sldId id="275" r:id="rId21"/>
+    <p:sldId id="276" r:id="rId22"/>
   </p:sldIdLst>
   <p:notesMasterIdLst>
-    <p:notesMasterId r:id="rId21"/>
+    <p:notesMasterId r:id="rId23"/>
   </p:notesMasterIdLst>
   <p:sldSz cx="12192000" cy="6858000"/>
   <p:notesSz cx="6858000" cy="12192000"/>
@@ -609,8 +611,10 @@
           <a:p>
             <a:r>
               <a:rPr lang="en-US" dirty="0"/>
-              <a:t>Application to AI-Supported Workflows
-For generative AI, decision rights should clarify who approves public release of AI-assisted content. For predictive analytics, leaders should decide whether the score may inform resource allocation or only support review. For agentic AI, decision rights should define who authorizes system actions, rollback procedures, and changes to permissions. Accountability should remain tied to public health roles and legal authority.</a:t>
+              <a:t>Technical and Governance Deep Dive
+Decision rights should be defined across the full AI lifecycle. During ideation, leadership may decide whether a use case aligns with agency priorities. During review, governance may decide whether the use case is low, moderate, or high risk. During procurement, authorized officials decide whether vendor claims, contract language, and technical requirements are sufficient. During implementation, program and technical owners decide whether acceptance criteria have been met. During operations, defined owners decide whether monitoring results require adjustment, escalation, or retirement.
+A public health accountability model should separate approval authority from operational ownership. An executive may approve a use case, but the program owner remains accountable for how the workflow functions. A privacy officer may advise on data safeguards, but the program cannot treat that consultation as a substitute for ongoing compliance. A vendor may provide model documentation, but the agency must decide whether the documentation is sufficient for its context and authorities.
+Decision rights should also include stop authority. Agencies often define who can approve a tool but fail to define who can pause it. Stop authority is essential for AI because model performance, data flows, user behavior, and public conditions can change over time. A clear pause process helps staff report concerns early rather than waiting for a serious incident.</a:t>
             </a:r>
             <a:endParaRPr lang="en-US" dirty="0"/>
           </a:p>
@@ -698,10 +702,9 @@
           <a:p>
             <a:r>
               <a:rPr lang="en-US" dirty="0"/>
-              <a:t>Reflection Questions
-Which current or proposed AI use case in your agency raises this leadership or governance issue most clearly?
-Who currently has authority to make decisions about this issue, and is that authority documented?
-What evidence would governance or leadership need before approving the use case?</a:t>
+              <a:t>Risks, Failure Modes, and Guardrails
+One risk is accountability diffusion. When everyone is involved but no one is accountable, important concerns may go unresolved. A guardrail is to assign a named program owner and governance owner for every AI use case.
+Another risk is inappropriate risk acceptance by staff who lack authority. A frontline supervisor may feel pressure to continue a tool despite known concerns. A guardrail is to define which risks can be accepted at the program level and which require executive or governance approval.</a:t>
             </a:r>
             <a:endParaRPr lang="en-US" dirty="0"/>
           </a:p>
@@ -789,9 +792,8 @@
           <a:p>
             <a:r>
               <a:rPr lang="en-US" dirty="0"/>
-              <a:t>Reflection Questions
-Which staff, partners, or communities would be affected if this issue were handled poorly?
-What policy, process, or artifact should be created or updated after this module?</a:t>
+              <a:t>Application to AI-Supported Workflows
+For generative AI, decision rights should clarify who approves public release of AI-assisted content. For predictive analytics, leaders should decide whether the score may inform resource allocation or only support review. For agentic AI, decision rights should define who authorizes system actions, rollback procedures, and changes to permissions. Accountability should remain tied to public health roles and legal authority.</a:t>
             </a:r>
             <a:endParaRPr lang="en-US" dirty="0"/>
           </a:p>
@@ -879,8 +881,10 @@
           <a:p>
             <a:r>
               <a:rPr lang="en-US" dirty="0"/>
-              <a:t>Practical Exercise
-Create a decision-rights matrix for one AI use case. Include approval, data access, validation, launch, monitoring, incident escalation, risk acceptance, public communication, and retirement.</a:t>
+              <a:t>Reflection Questions
+Which current or proposed AI use case in your agency raises this leadership or governance issue most clearly?
+Who currently has authority to make decisions about this issue, and is that authority documented?
+What evidence would governance or leadership need before approving the use case?</a:t>
             </a:r>
             <a:endParaRPr lang="en-US" dirty="0"/>
           </a:p>
@@ -968,8 +972,9 @@
           <a:p>
             <a:r>
               <a:rPr lang="en-US" dirty="0"/>
-              <a:t>Before You Begin
-Choose a real or realistic public health AI use case. Document assumptions, unresolved questions, and which agency roles would need to review the artifact before it is adopted. The exercise should produce a work product that could support governance review, leadership discussion, implementation planning, or policy development.</a:t>
+              <a:t>Reflection Questions
+Which staff, partners, or communities would be affected if this issue were handled poorly?
+What policy, process, or artifact should be created or updated after this module?</a:t>
             </a:r>
             <a:endParaRPr lang="en-US" dirty="0"/>
           </a:p>
@@ -1057,8 +1062,8 @@
           <a:p>
             <a:r>
               <a:rPr lang="en-US" dirty="0"/>
-              <a:t>Expected Artifact or Evidence
-Decision-rights matrix; RACI table; risk acceptance thresholds; escalation authority list.</a:t>
+              <a:t>Practical Exercise
+Create a decision-rights matrix for one AI use case. Include approval, data access, validation, launch, monitoring, incident escalation, risk acceptance, public communication, and retirement.</a:t>
             </a:r>
             <a:endParaRPr lang="en-US" dirty="0"/>
           </a:p>
@@ -1146,8 +1151,8 @@
           <a:p>
             <a:r>
               <a:rPr lang="en-US" dirty="0"/>
-              <a:t>Expected Assignment
-Decision-rights matrix; RACI table; risk acceptance thresholds; escalation authority list.</a:t>
+              <a:t>Before You Begin
+Choose a real or realistic public health AI use case. Document assumptions, unresolved questions, and which agency roles would need to review the artifact before it is adopted. The exercise should produce a work product that could support governance review, leadership discussion, implementation planning, or policy development.</a:t>
             </a:r>
             <a:endParaRPr lang="en-US" dirty="0"/>
           </a:p>
@@ -1235,12 +1240,8 @@
           <a:p>
             <a:r>
               <a:rPr lang="en-US" dirty="0"/>
-              <a:t>Knowledge Check
-1. What is the strongest reason this module topic belongs in AI leadership and governance training?
-2. Which practice best supports accountable public health AI governance?
-3. When should an AI use case be escalated for leadership or governance review?
-4. What is weak evidence of completion for a leadership and governance module?
-5. What should leaders do when an AI use case has meaningful benefits but unresolved risks?</a:t>
+              <a:t>Expected Artifact or Evidence
+Decision-rights matrix; RACI table; risk acceptance thresholds; escalation authority list.</a:t>
             </a:r>
             <a:endParaRPr lang="en-US" dirty="0"/>
           </a:p>
@@ -1328,12 +1329,8 @@
           <a:p>
             <a:r>
               <a:rPr lang="en-US" dirty="0"/>
-              <a:t>References and Resources
-NIST Artificial Intelligence Risk Management Framework (AI RMF 1.0): https://www.nist.gov/itl/ai-risk-management-framework
-NIST Generative AI Profile: https://www.nist.gov/publications/artificial-intelligence-risk-management-framework-generative-artificial-intelligence
-NIST Privacy Framework
-CDC Public Health Data Strategy and Data Modernization resources: https://www.cdc.gov/public-health-data-strategy/php/about/index.html
-WHO Ethics and Governance of Artificial Intelligence for Health: https://www.who.int/publications/i/item/9789240029200</a:t>
+              <a:t>Expected Assignment
+Decision-rights matrix; RACI table; risk acceptance thresholds; escalation authority list.</a:t>
             </a:r>
             <a:endParaRPr lang="en-US" dirty="0"/>
           </a:p>
@@ -1421,9 +1418,12 @@
           <a:p>
             <a:r>
               <a:rPr lang="en-US" dirty="0"/>
-              <a:t>References and Resources
-OMB Memorandum M-24-10 on federal AI governance, risk management, and innovation, where relevant to public-sector governance models
-Agency strategic plans, procurement policies, privacy policies, cybersecurity policies, records policies, and equity plans</a:t>
+              <a:t>Knowledge Check
+1. What is the strongest reason this module topic belongs in AI leadership and governance training?
+2. Which practice best supports accountable public health AI governance?
+3. When should an AI use case be escalated for leadership or governance review?
+4. What is weak evidence of completion for a leadership and governance module?
+5. What should leaders do when an AI use case has meaningful benefits but unresolved risks?</a:t>
             </a:r>
             <a:endParaRPr lang="en-US" dirty="0"/>
           </a:p>
@@ -1557,6 +1557,189 @@
 </p:notes>
 </file>
 
+<file path=ppt/notesSlides/notesSlide20.xml><?xml version="1.0" encoding="utf-8"?>
+<p:notes xmlns:a="http://schemas.openxmlformats.org/drawingml/2006/main" xmlns:r="http://schemas.openxmlformats.org/officeDocument/2006/relationships" xmlns:p="http://schemas.openxmlformats.org/presentationml/2006/main">
+  <p:cSld>
+    <p:spTree>
+      <p:nvGrpSpPr>
+        <p:cNvPr id="1" name=""/>
+        <p:cNvGrpSpPr/>
+        <p:nvPr/>
+      </p:nvGrpSpPr>
+      <p:grpSpPr>
+        <a:xfrm>
+          <a:off x="0" y="0"/>
+          <a:ext cx="0" cy="0"/>
+          <a:chOff x="0" y="0"/>
+          <a:chExt cx="0" cy="0"/>
+        </a:xfrm>
+      </p:grpSpPr>
+      <p:sp>
+        <p:nvSpPr>
+          <p:cNvPr id="2" name="Slide Image Placeholder 1"/>
+          <p:cNvSpPr>
+            <a:spLocks noGrp="1" noRot="1" noChangeAspect="1"/>
+          </p:cNvSpPr>
+          <p:nvPr>
+            <p:ph type="sldImg"/>
+          </p:nvPr>
+        </p:nvSpPr>
+        <p:spPr/>
+      </p:sp>
+      <p:sp>
+        <p:nvSpPr>
+          <p:cNvPr id="3" name="Notes Placeholder 2"/>
+          <p:cNvSpPr>
+            <a:spLocks noGrp="1"/>
+          </p:cNvSpPr>
+          <p:nvPr>
+            <p:ph type="body" idx="1"/>
+          </p:nvPr>
+        </p:nvSpPr>
+        <p:spPr/>
+        <p:txBody>
+          <a:bodyPr/>
+          <a:lstStyle/>
+          <a:p>
+            <a:r>
+              <a:rPr lang="en-US" dirty="0"/>
+              <a:t>References and Resources
+NIST Artificial Intelligence Risk Management Framework (AI RMF 1.0): https://www.nist.gov/itl/ai-risk-management-framework
+NIST Generative AI Profile: https://www.nist.gov/publications/artificial-intelligence-risk-management-framework-generative-artificial-intelligence
+NIST Privacy Framework
+CDC Public Health Data Strategy and Data Modernization resources: https://www.cdc.gov/public-health-data-strategy/php/about/index.html
+WHO Ethics and Governance of Artificial Intelligence for Health: https://www.who.int/publications/i/item/9789240029200</a:t>
+            </a:r>
+            <a:endParaRPr lang="en-US" dirty="0"/>
+          </a:p>
+        </p:txBody>
+      </p:sp>
+      <p:sp>
+        <p:nvSpPr>
+          <p:cNvPr id="4" name="Slide Number Placeholder 3"/>
+          <p:cNvSpPr>
+            <a:spLocks noGrp="1"/>
+          </p:cNvSpPr>
+          <p:nvPr>
+            <p:ph type="sldNum" sz="quarter" idx="10"/>
+          </p:nvPr>
+        </p:nvSpPr>
+        <p:spPr/>
+        <p:txBody>
+          <a:bodyPr/>
+          <a:lstStyle/>
+          <a:p>
+            <a:fld id="{F7021451-1387-4CA6-816F-3879F97B5CBC}" type="slidenum">
+              <a:rPr lang="en-US"/>
+              <a:t>20</a:t>
+            </a:fld>
+            <a:endParaRPr lang="en-US"/>
+          </a:p>
+        </p:txBody>
+      </p:sp>
+    </p:spTree>
+    <p:extLst>
+      <p:ext uri="{BB962C8B-B14F-4D97-AF65-F5344CB8AC3E}">
+        <p14:creationId xmlns:p14="http://schemas.microsoft.com/office/powerpoint/2010/main" val="1024086991"/>
+      </p:ext>
+    </p:extLst>
+  </p:cSld>
+  <p:clrMapOvr>
+    <a:masterClrMapping/>
+  </p:clrMapOvr>
+</p:notes>
+</file>
+
+<file path=ppt/notesSlides/notesSlide21.xml><?xml version="1.0" encoding="utf-8"?>
+<p:notes xmlns:a="http://schemas.openxmlformats.org/drawingml/2006/main" xmlns:r="http://schemas.openxmlformats.org/officeDocument/2006/relationships" xmlns:p="http://schemas.openxmlformats.org/presentationml/2006/main">
+  <p:cSld>
+    <p:spTree>
+      <p:nvGrpSpPr>
+        <p:cNvPr id="1" name=""/>
+        <p:cNvGrpSpPr/>
+        <p:nvPr/>
+      </p:nvGrpSpPr>
+      <p:grpSpPr>
+        <a:xfrm>
+          <a:off x="0" y="0"/>
+          <a:ext cx="0" cy="0"/>
+          <a:chOff x="0" y="0"/>
+          <a:chExt cx="0" cy="0"/>
+        </a:xfrm>
+      </p:grpSpPr>
+      <p:sp>
+        <p:nvSpPr>
+          <p:cNvPr id="2" name="Slide Image Placeholder 1"/>
+          <p:cNvSpPr>
+            <a:spLocks noGrp="1" noRot="1" noChangeAspect="1"/>
+          </p:cNvSpPr>
+          <p:nvPr>
+            <p:ph type="sldImg"/>
+          </p:nvPr>
+        </p:nvSpPr>
+        <p:spPr/>
+      </p:sp>
+      <p:sp>
+        <p:nvSpPr>
+          <p:cNvPr id="3" name="Notes Placeholder 2"/>
+          <p:cNvSpPr>
+            <a:spLocks noGrp="1"/>
+          </p:cNvSpPr>
+          <p:nvPr>
+            <p:ph type="body" idx="1"/>
+          </p:nvPr>
+        </p:nvSpPr>
+        <p:spPr/>
+        <p:txBody>
+          <a:bodyPr/>
+          <a:lstStyle/>
+          <a:p>
+            <a:r>
+              <a:rPr lang="en-US" dirty="0"/>
+              <a:t>References and Resources
+OMB Memorandum M-24-10 on federal AI governance, risk management, and innovation, where relevant to public-sector governance models
+Agency strategic plans, procurement policies, privacy policies, cybersecurity policies, records policies, and equity plans</a:t>
+            </a:r>
+            <a:endParaRPr lang="en-US" dirty="0"/>
+          </a:p>
+        </p:txBody>
+      </p:sp>
+      <p:sp>
+        <p:nvSpPr>
+          <p:cNvPr id="4" name="Slide Number Placeholder 3"/>
+          <p:cNvSpPr>
+            <a:spLocks noGrp="1"/>
+          </p:cNvSpPr>
+          <p:nvPr>
+            <p:ph type="sldNum" sz="quarter" idx="10"/>
+          </p:nvPr>
+        </p:nvSpPr>
+        <p:spPr/>
+        <p:txBody>
+          <a:bodyPr/>
+          <a:lstStyle/>
+          <a:p>
+            <a:fld id="{F7021451-1387-4CA6-816F-3879F97B5CBC}" type="slidenum">
+              <a:rPr lang="en-US"/>
+              <a:t>21</a:t>
+            </a:fld>
+            <a:endParaRPr lang="en-US"/>
+          </a:p>
+        </p:txBody>
+      </p:sp>
+    </p:spTree>
+    <p:extLst>
+      <p:ext uri="{BB962C8B-B14F-4D97-AF65-F5344CB8AC3E}">
+        <p14:creationId xmlns:p14="http://schemas.microsoft.com/office/powerpoint/2010/main" val="1024086991"/>
+      </p:ext>
+    </p:extLst>
+  </p:cSld>
+  <p:clrMapOvr>
+    <a:masterClrMapping/>
+  </p:clrMapOvr>
+</p:notes>
+</file>
+
 <file path=ppt/notesSlides/notesSlide3.xml><?xml version="1.0" encoding="utf-8"?>
 <p:notes xmlns:a="http://schemas.openxmlformats.org/drawingml/2006/main" xmlns:r="http://schemas.openxmlformats.org/officeDocument/2006/relationships" xmlns:p="http://schemas.openxmlformats.org/presentationml/2006/main">
   <p:cSld>
@@ -1603,12 +1786,11 @@
           <a:p>
             <a:r>
               <a:rPr lang="en-US" dirty="0"/>
-              <a:t>Learning Objectives
-Explain why AI accountability must be assigned to people and roles rather than to tools or vendors.
-Identify executive, program, technical, privacy, legal, security, and governance responsibilities for AI decisions.
-Create a decision-rights matrix for AI use case approval, risk acceptance, monitoring, escalation, and retirement.
-Distinguish between consultative input, approval authority, and operational ownership.
-Define accountability expectations for vendor-supported AI tools and internally developed tools.</a:t>
+              <a:t>Related Playbook Plays
+Play 11: Build and Deploy AI Solutions - This lesson informs Play 11 by helping learners connect the lesson topic to build and deploy ai solutions work in the AI Playbook.
+Play 1: Vision &amp; Guardrails - This lesson informs Play 1 by helping learners connect the lesson topic to vision &amp; guardrails work in the AI Playbook sequence.
+Play 3: Establish AI Governance - This lesson informs Play 3 by helping learners connect the lesson topic to establish ai governance work in the AI Playbook sequence.
+Play 7: Prioritize Use Cases - This lesson informs Play 7 by helping learners connect the lesson topic to prioritize use cases work in the AI Playbook sequence.</a:t>
             </a:r>
             <a:endParaRPr lang="en-US" dirty="0"/>
           </a:p>
@@ -1696,9 +1878,13 @@
           <a:p>
             <a:r>
               <a:rPr lang="en-US" dirty="0"/>
-              <a:t>Module Overview
-AI governance can only work when decision rights are clear. Leaders need to know who can approve a pilot, who can accept residual risk, who can authorize use of sensitive data, who can pause a tool, and who is accountable when an AI-supported workflow affects public health action. Ambiguous accountability is especially risky in public health because AI outputs may influence investigations, communications, referrals, resource allocation, and community trust.
-This module focuses on executive decision rights and accountability structures. Learners examine how to assign ownership across strategy, risk, technical implementation, program operations, privacy, legal, cybersecurity, procurement, communications, and community accountability. The module emphasizes that accountability cannot be delegated to a vendor or to the AI system itself. Public health agencies remain accountable for how AI is selected, used, monitored, and explained.</a:t>
+              <a:t>Related Toolkit Resources
+Tool 32: Vendor Evaluation Checklist (Checklist) - Use this tool to complete or strengthen the practical exercise for the module using fictional, de-identified, or generalized.
+Tool 34: STLT AI Procurement and Vendor Addendum (Checklist) - Use this tool to complete or strengthen the practical exercise for the module using fictional, de-identified, or generalized.
+Tool 3: Equity Impact Assessment Checklist (Checklist) - Use this tool to complete or strengthen the practical exercise for the module using fictional, de-identified, or generalized.
+Tool 4: AI Policy Landscape Scan (Worksheet) - Use AI Policy Landscape Scan to translate this lesson into a documented public health AI planning, governance, implementation,.
+Tool 5: AI Environmental and Resource Impact Review (Checklist) - Use AI Environmental and Resource Impact Review to translate this lesson into a documented public health AI planning,.
+Tool 6: Human-Centered AI Decision Rule Checklist (Checklist) - Use Human-Centered AI Decision Rule Checklist to translate this lesson into a documented public health AI planning, governance,.</a:t>
             </a:r>
             <a:endParaRPr lang="en-US" dirty="0"/>
           </a:p>
@@ -1786,8 +1972,12 @@
           <a:p>
             <a:r>
               <a:rPr lang="en-US" dirty="0"/>
-              <a:t>Jurisdiction and Agency Policy Note
-This module provides national-level training guidance for public health agencies and partners. It is not legal advice and does not replace review by agency legal counsel, privacy officers, procurement officials, civil rights staff, records officers, or other authorized decision-makers. Requirements may vary by state, locality, territory, Tribe, agency, funding source, data-sharing agreement, emergency authority, and organizational policy. Learners should use this module to identify the issues that require review and should confirm applicable requirements before approving, procuring, deploying, or publicly communicating about AI-supported work.</a:t>
+              <a:t>Learning Objectives
+Explain why AI accountability must be assigned to people and roles rather than to tools or vendors.
+Identify executive, program, technical, privacy, legal, security, and governance responsibilities for AI decisions.
+Create a decision-rights matrix for AI use case approval, risk acceptance, monitoring, escalation, and retirement.
+Distinguish between consultative input, approval authority, and operational ownership.
+Define accountability expectations for vendor-supported AI tools and internally developed tools.</a:t>
             </a:r>
             <a:endParaRPr lang="en-US" dirty="0"/>
           </a:p>
@@ -1875,9 +2065,9 @@
           <a:p>
             <a:r>
               <a:rPr lang="en-US" dirty="0"/>
-              <a:t>Why This Topic Matters for Public Health AI
-AI systems can distribute responsibility across many actors. A vendor may provide the model, IT may manage access, a program may define the workflow, an epidemiologist may review the output, and leadership may approve implementation. Without a formal accountability model, each actor may assume that another party is responsible for validation, monitoring, public explanation, or incident response.
-Clear decision rights support trust and speed. When leaders know which decisions they own, they can act quickly when a tool performs poorly, when a privacy concern emerges, or when a public-facing communication needs review. Decision rights also prevent informal escalation patterns in which difficult decisions are delayed because no one is clearly authorized to accept, modify, or reject a proposed use.</a:t>
+              <a:t>Module Overview
+AI governance can only work when decision rights are clear. Leaders need to know who can approve a pilot, who can accept residual risk, who can authorize use of sensitive data, who can pause a tool, and who is accountable when an AI-supported workflow affects public health action. Ambiguous accountability is especially risky in public health because AI outputs may influence investigations, communications, referrals, resource allocation, and community trust.
+This module focuses on executive decision rights and accountability structures. Learners examine how to assign ownership across strategy, risk, technical implementation, program operations, privacy, legal, cybersecurity, procurement, communications, and community accountability. The module emphasizes that accountability cannot be delegated to a vendor or to the AI system itself. Public health agencies remain accountable for how AI is selected, used, monitored, and explained.</a:t>
             </a:r>
             <a:endParaRPr lang="en-US" dirty="0"/>
           </a:p>
@@ -1965,9 +2155,8 @@
           <a:p>
             <a:r>
               <a:rPr lang="en-US" dirty="0"/>
-              <a:t>Public Health Example
-A local health department implements an AI-assisted tool to classify incoming environmental health complaints by topic and urgency. The vendor configured the model, IT manages access, environmental health staff review the queue, and the program director owns the workflow. A complaint is misclassified and a serious housing-related concern is not routed for timely follow-up.
-A decision-rights matrix helps the agency respond. The program owner is accountable for workflow performance, the vendor must provide technical support and documentation, IT reviews logging and access, governance reviews whether use should continue, and an executive sponsor decides whether the risk requires pausing the tool. Because responsibilities are defined in advance, the agency can respond without confusion or blame shifting.</a:t>
+              <a:t>Jurisdiction and Agency Policy Note
+This module provides national-level training guidance for public health agencies and partners. It is not legal advice and does not replace review by agency legal counsel, privacy officers, procurement officials, civil rights staff, records officers, or other authorized decision-makers. Requirements may vary by state, locality, territory, Tribe, agency, funding source, data-sharing agreement, emergency authority, and organizational policy. Learners should use this module to identify the issues that require review and should confirm applicable requirements before approving, procuring, deploying, or publicly communicating about AI-supported work.</a:t>
             </a:r>
             <a:endParaRPr lang="en-US" dirty="0"/>
           </a:p>
@@ -2055,10 +2244,9 @@
           <a:p>
             <a:r>
               <a:rPr lang="en-US" dirty="0"/>
-              <a:t>Technical and Governance Deep Dive
-Decision rights should be defined across the full AI lifecycle. During ideation, leadership may decide whether a use case aligns with agency priorities. During review, governance may decide whether the use case is low, moderate, or high risk. During procurement, authorized officials decide whether vendor claims, contract language, and technical requirements are sufficient. During implementation, program and technical owners decide whether acceptance criteria have been met. During operations, defined owners decide whether monitoring results require adjustment, escalation, or retirement.
-A public health accountability model should separate approval authority from operational ownership. An executive may approve a use case, but the program owner remains accountable for how the workflow functions. A privacy officer may advise on data safeguards, but the program cannot treat that consultation as a substitute for ongoing compliance. A vendor may provide model documentation, but the agency must decide whether the documentation is sufficient for its context and authorities.
-Decision rights should also include stop authority. Agencies often define who can approve a tool but fail to define who can pause it. Stop authority is essential for AI because model performance, data flows, user behavior, and public conditions can change over time. A clear pause process helps staff report concerns early rather than waiting for a serious incident.</a:t>
+              <a:t>Why This Topic Matters for Public Health AI
+AI systems can distribute responsibility across many actors. A vendor may provide the model, IT may manage access, a program may define the workflow, an epidemiologist may review the output, and leadership may approve implementation. Without a formal accountability model, each actor may assume that another party is responsible for validation, monitoring, public explanation, or incident response.
+Clear decision rights support trust and speed. When leaders know which decisions they own, they can act quickly when a tool performs poorly, when a privacy concern emerges, or when a public-facing communication needs review. Decision rights also prevent informal escalation patterns in which difficult decisions are delayed because no one is clearly authorized to accept, modify, or reject a proposed use.</a:t>
             </a:r>
             <a:endParaRPr lang="en-US" dirty="0"/>
           </a:p>
@@ -2146,9 +2334,9 @@
           <a:p>
             <a:r>
               <a:rPr lang="en-US" dirty="0"/>
-              <a:t>Risks, Failure Modes, and Guardrails
-One risk is accountability diffusion. When everyone is involved but no one is accountable, important concerns may go unresolved. A guardrail is to assign a named program owner and governance owner for every AI use case.
-Another risk is inappropriate risk acceptance by staff who lack authority. A frontline supervisor may feel pressure to continue a tool despite known concerns. A guardrail is to define which risks can be accepted at the program level and which require executive or governance approval.</a:t>
+              <a:t>Public Health Example
+A local health department implements an AI-assisted tool to classify incoming environmental health complaints by topic and urgency. The vendor configured the model, IT manages access, environmental health staff review the queue, and the program director owns the workflow. A complaint is misclassified and a serious housing-related concern is not routed for timely follow-up.
+A decision-rights matrix helps the agency respond. The program owner is accountable for workflow performance, the vendor must provide technical support and documentation, IT reviews logging and access, governance reviews whether use should continue, and an executive sponsor decides whether the risk requires pausing the tool. Because responsibilities are defined in advance, the agency can respond without confusion or blame shifting.</a:t>
             </a:r>
             <a:endParaRPr lang="en-US" dirty="0"/>
           </a:p>
@@ -2771,7 +2959,32 @@
       </p:sp>
       <p:sp>
         <p:nvSpPr>
-          <p:cNvPr id="3" name="Text 1"/>
+          <p:cNvPr id="3" name="Shape 1"/>
+          <p:cNvSpPr/>
+          <p:nvPr/>
+        </p:nvSpPr>
+        <p:spPr>
+          <a:xfrm>
+            <a:off x="0" y="164592"/>
+            <a:ext cx="146304" cy="6693408"/>
+          </a:xfrm>
+          <a:prstGeom prst="rect">
+            <a:avLst/>
+          </a:prstGeom>
+          <a:solidFill>
+            <a:srgbClr val="2F8A28"/>
+          </a:solidFill>
+          <a:ln w="12700">
+            <a:solidFill>
+              <a:srgbClr val="2F8A28"/>
+            </a:solidFill>
+            <a:prstDash val="solid"/>
+          </a:ln>
+        </p:spPr>
+      </p:sp>
+      <p:sp>
+        <p:nvSpPr>
+          <p:cNvPr id="4" name="Text 2"/>
           <p:cNvSpPr/>
           <p:nvPr/>
         </p:nvSpPr>
@@ -2810,7 +3023,7 @@
       </p:sp>
       <p:sp>
         <p:nvSpPr>
-          <p:cNvPr id="4" name="Text 2"/>
+          <p:cNvPr id="5" name="Text 3"/>
           <p:cNvSpPr/>
           <p:nvPr/>
         </p:nvSpPr>
@@ -2849,7 +3062,7 @@
       </p:sp>
       <p:sp>
         <p:nvSpPr>
-          <p:cNvPr id="5" name="Text 3"/>
+          <p:cNvPr id="6" name="Text 4"/>
           <p:cNvSpPr/>
           <p:nvPr/>
         </p:nvSpPr>
@@ -2888,13 +3101,77 @@
       </p:sp>
       <p:sp>
         <p:nvSpPr>
-          <p:cNvPr id="6" name="Text 4"/>
+          <p:cNvPr id="7" name="Shape 5"/>
           <p:cNvSpPr/>
           <p:nvPr/>
         </p:nvSpPr>
         <p:spPr>
           <a:xfrm>
             <a:off x="640080" y="658368"/>
+            <a:ext cx="420624" cy="420624"/>
+          </a:xfrm>
+          <a:prstGeom prst="ellipse">
+            <a:avLst/>
+          </a:prstGeom>
+          <a:solidFill>
+            <a:srgbClr val="0068B7"/>
+          </a:solidFill>
+          <a:ln w="12700">
+            <a:solidFill>
+              <a:srgbClr val="0068B7"/>
+            </a:solidFill>
+            <a:prstDash val="solid"/>
+          </a:ln>
+        </p:spPr>
+      </p:sp>
+      <p:sp>
+        <p:nvSpPr>
+          <p:cNvPr id="8" name="Text 6"/>
+          <p:cNvSpPr/>
+          <p:nvPr/>
+        </p:nvSpPr>
+        <p:spPr>
+          <a:xfrm>
+            <a:off x="640080" y="731520"/>
+            <a:ext cx="420624" cy="164592"/>
+          </a:xfrm>
+          <a:prstGeom prst="rect">
+            <a:avLst/>
+          </a:prstGeom>
+          <a:noFill/>
+          <a:ln/>
+        </p:spPr>
+        <p:txBody>
+          <a:bodyPr wrap="square" lIns="0" tIns="0" rIns="0" bIns="0" rtlCol="0" anchor="ctr"/>
+          <a:lstStyle/>
+          <a:p>
+            <a:pPr algn="ctr" indent="0" marL="0">
+              <a:buNone/>
+            </a:pPr>
+            <a:r>
+              <a:rPr lang="en-US" sz="1100" b="1" dirty="0">
+                <a:solidFill>
+                  <a:srgbClr val="FFFFFF"/>
+                </a:solidFill>
+                <a:latin typeface="Aptos" pitchFamily="34" charset="0"/>
+                <a:ea typeface="Aptos" pitchFamily="34" charset="-122"/>
+                <a:cs typeface="Aptos" pitchFamily="34" charset="-120"/>
+              </a:rPr>
+              <a:t>6</a:t>
+            </a:r>
+            <a:endParaRPr lang="en-US" sz="1100" dirty="0"/>
+          </a:p>
+        </p:txBody>
+      </p:sp>
+      <p:sp>
+        <p:nvSpPr>
+          <p:cNvPr id="9" name="Text 7"/>
+          <p:cNvSpPr/>
+          <p:nvPr/>
+        </p:nvSpPr>
+        <p:spPr>
+          <a:xfrm>
+            <a:off x="640080" y="621792"/>
             <a:ext cx="10881360" cy="566928"/>
           </a:xfrm>
           <a:prstGeom prst="rect">
@@ -2921,7 +3198,7 @@
                 <a:ea typeface="Aptos Display" pitchFamily="34" charset="-122"/>
                 <a:cs typeface="Aptos Display" pitchFamily="34" charset="-120"/>
               </a:rPr>
-              <a:t>Application to AI-Supported Workflows</a:t>
+              <a:t>Technical and Governance Deep Dive</a:t>
             </a:r>
             <a:endParaRPr lang="en-US" sz="2700" dirty="0"/>
           </a:p>
@@ -2929,32 +3206,178 @@
       </p:sp>
       <p:sp>
         <p:nvSpPr>
-          <p:cNvPr id="7" name="Text 5"/>
-          <p:cNvSpPr/>
-          <p:nvPr/>
-        </p:nvSpPr>
-        <p:spPr>
-          <a:xfrm>
-            <a:off x="822960" y="1325880"/>
-            <a:ext cx="10378440" cy="4800600"/>
-          </a:xfrm>
-          <a:prstGeom prst="rect">
-            <a:avLst/>
-          </a:prstGeom>
-          <a:noFill/>
-          <a:ln/>
-        </p:spPr>
-        <p:txBody>
-          <a:bodyPr wrap="square" lIns="1016" tIns="1016" rIns="1016" bIns="1016" rtlCol="0" anchor="t">
+          <p:cNvPr id="10" name="Text 8"/>
+          <p:cNvSpPr/>
+          <p:nvPr/>
+        </p:nvSpPr>
+        <p:spPr>
+          <a:xfrm>
+            <a:off x="868680" y="1417320"/>
+            <a:ext cx="6675120" cy="4434840"/>
+          </a:xfrm>
+          <a:prstGeom prst="rect">
+            <a:avLst/>
+          </a:prstGeom>
+          <a:noFill/>
+          <a:ln/>
+        </p:spPr>
+        <p:txBody>
+          <a:bodyPr wrap="square" lIns="635" tIns="635" rIns="635" bIns="635" rtlCol="0" anchor="t">
             <a:normAutofit/>
           </a:bodyPr>
           <a:lstStyle/>
           <a:p>
+            <a:r>
+              <a:rPr lang="en-US" sz="1700" dirty="0">
+                <a:solidFill>
+                  <a:srgbClr val="17364A"/>
+                </a:solidFill>
+                <a:latin typeface="Aptos" pitchFamily="34" charset="0"/>
+                <a:ea typeface="Aptos" pitchFamily="34" charset="-122"/>
+                <a:cs typeface="Aptos" pitchFamily="34" charset="-120"/>
+              </a:rPr>
+              <a:t>Decision rights should be defined across the full AI lifecycle.</a:t>
+            </a:r>
+            <a:endParaRPr lang="en-US" sz="1700" dirty="0"/>
+          </a:p>
+          <a:p>
+            <a:r>
+              <a:rPr lang="en-US" sz="1700" dirty="0">
+                <a:solidFill>
+                  <a:srgbClr val="17364A"/>
+                </a:solidFill>
+                <a:latin typeface="Aptos" pitchFamily="34" charset="0"/>
+                <a:ea typeface="Aptos" pitchFamily="34" charset="-122"/>
+                <a:cs typeface="Aptos" pitchFamily="34" charset="-120"/>
+              </a:rPr>
+              <a:t>During ideation, leadership may decide whether a use case aligns with agency priorities.</a:t>
+            </a:r>
+            <a:endParaRPr lang="en-US" sz="1700" dirty="0"/>
+          </a:p>
+          <a:p>
+            <a:r>
+              <a:rPr lang="en-US" sz="1700" dirty="0">
+                <a:solidFill>
+                  <a:srgbClr val="17364A"/>
+                </a:solidFill>
+                <a:latin typeface="Aptos" pitchFamily="34" charset="0"/>
+                <a:ea typeface="Aptos" pitchFamily="34" charset="-122"/>
+                <a:cs typeface="Aptos" pitchFamily="34" charset="-120"/>
+              </a:rPr>
+              <a:t>During review, governance may decide whether the use case is low, moderate, or high risk.</a:t>
+            </a:r>
+            <a:endParaRPr lang="en-US" sz="1700" dirty="0"/>
+          </a:p>
+          <a:p>
+            <a:r>
+              <a:rPr lang="en-US" sz="1700" dirty="0">
+                <a:solidFill>
+                  <a:srgbClr val="17364A"/>
+                </a:solidFill>
+                <a:latin typeface="Aptos" pitchFamily="34" charset="0"/>
+                <a:ea typeface="Aptos" pitchFamily="34" charset="-122"/>
+                <a:cs typeface="Aptos" pitchFamily="34" charset="-120"/>
+              </a:rPr>
+              <a:t>During procurement, authorized officials decide whether vendor claims, contract language, and technical requirements are.</a:t>
+            </a:r>
+            <a:endParaRPr lang="en-US" sz="1700" dirty="0"/>
+          </a:p>
+        </p:txBody>
+      </p:sp>
+      <p:sp>
+        <p:nvSpPr>
+          <p:cNvPr id="11" name="Shape 9"/>
+          <p:cNvSpPr/>
+          <p:nvPr/>
+        </p:nvSpPr>
+        <p:spPr>
+          <a:xfrm>
+            <a:off x="7909560" y="1417320"/>
+            <a:ext cx="3154680" cy="1828800"/>
+          </a:xfrm>
+          <a:prstGeom prst="roundRect">
+            <a:avLst>
+              <a:gd name="adj" fmla="val 6000"/>
+            </a:avLst>
+          </a:prstGeom>
+          <a:solidFill>
+            <a:srgbClr val="EEF8ED"/>
+          </a:solidFill>
+          <a:ln w="12700">
+            <a:solidFill>
+              <a:srgbClr val="B9D7E6"/>
+            </a:solidFill>
+            <a:prstDash val="solid"/>
+          </a:ln>
+        </p:spPr>
+      </p:sp>
+      <p:sp>
+        <p:nvSpPr>
+          <p:cNvPr id="12" name="Text 10"/>
+          <p:cNvSpPr/>
+          <p:nvPr/>
+        </p:nvSpPr>
+        <p:spPr>
+          <a:xfrm>
+            <a:off x="8074152" y="1563624"/>
+            <a:ext cx="2825496" cy="201168"/>
+          </a:xfrm>
+          <a:prstGeom prst="rect">
+            <a:avLst/>
+          </a:prstGeom>
+          <a:noFill/>
+          <a:ln/>
+        </p:spPr>
+        <p:txBody>
+          <a:bodyPr wrap="square" lIns="0" tIns="0" rIns="0" bIns="0" rtlCol="0" anchor="ctr"/>
+          <a:lstStyle/>
+          <a:p>
             <a:pPr indent="0" marL="0">
               <a:buNone/>
             </a:pPr>
             <a:r>
-              <a:rPr lang="en-US" sz="1420" dirty="0">
+              <a:rPr lang="en-US" sz="950" b="1" dirty="0">
+                <a:solidFill>
+                  <a:srgbClr val="0068B7"/>
+                </a:solidFill>
+                <a:latin typeface="Aptos" pitchFamily="34" charset="0"/>
+                <a:ea typeface="Aptos" pitchFamily="34" charset="-122"/>
+                <a:cs typeface="Aptos" pitchFamily="34" charset="-120"/>
+              </a:rPr>
+              <a:t>Key idea</a:t>
+            </a:r>
+            <a:endParaRPr lang="en-US" sz="950" dirty="0"/>
+          </a:p>
+        </p:txBody>
+      </p:sp>
+      <p:sp>
+        <p:nvSpPr>
+          <p:cNvPr id="13" name="Text 11"/>
+          <p:cNvSpPr/>
+          <p:nvPr/>
+        </p:nvSpPr>
+        <p:spPr>
+          <a:xfrm>
+            <a:off x="8074152" y="1856232"/>
+            <a:ext cx="2825496" cy="1261872"/>
+          </a:xfrm>
+          <a:prstGeom prst="rect">
+            <a:avLst/>
+          </a:prstGeom>
+          <a:noFill/>
+          <a:ln/>
+        </p:spPr>
+        <p:txBody>
+          <a:bodyPr wrap="square" lIns="0" tIns="0" rIns="0" bIns="0" rtlCol="0" anchor="t">
+            <a:normAutofit/>
+          </a:bodyPr>
+          <a:lstStyle/>
+          <a:p>
+            <a:pPr indent="0" marL="0">
+              <a:buNone/>
+            </a:pPr>
+            <a:r>
+              <a:rPr lang="en-US" sz="1250" dirty="0">
                 <a:solidFill>
                   <a:srgbClr val="17364A"/>
                 </a:solidFill>
@@ -2962,9 +3385,116 @@
                 <a:ea typeface="Aptos" pitchFamily="34" charset="-122"/>
                 <a:cs typeface="Aptos" pitchFamily="34" charset="-120"/>
               </a:rPr>
-              <a:t>For generative AI, decision rights should clarify who approves public release of AI-assisted content. For predictive analytics, leaders should decide whether the score may inform resource allocation or only support review. For agentic AI, decision rights should define who authorizes system actions, rollback procedures, and changes to permissions. Accountability should remain tied to public health roles and legal authority.</a:t>
-            </a:r>
-            <a:endParaRPr lang="en-US" sz="1420" dirty="0"/>
+              <a:t>Decision rights should be defined across the full AI lifecycle.</a:t>
+            </a:r>
+            <a:endParaRPr lang="en-US" sz="1250" dirty="0"/>
+          </a:p>
+        </p:txBody>
+      </p:sp>
+      <p:sp>
+        <p:nvSpPr>
+          <p:cNvPr id="14" name="Shape 12"/>
+          <p:cNvSpPr/>
+          <p:nvPr/>
+        </p:nvSpPr>
+        <p:spPr>
+          <a:xfrm>
+            <a:off x="7909560" y="3520440"/>
+            <a:ext cx="3154680" cy="1737360"/>
+          </a:xfrm>
+          <a:prstGeom prst="roundRect">
+            <a:avLst>
+              <a:gd name="adj" fmla="val 6316"/>
+            </a:avLst>
+          </a:prstGeom>
+          <a:solidFill>
+            <a:srgbClr val="EAF6F8"/>
+          </a:solidFill>
+          <a:ln w="12700">
+            <a:solidFill>
+              <a:srgbClr val="B9D7E6"/>
+            </a:solidFill>
+            <a:prstDash val="solid"/>
+          </a:ln>
+        </p:spPr>
+      </p:sp>
+      <p:sp>
+        <p:nvSpPr>
+          <p:cNvPr id="15" name="Text 13"/>
+          <p:cNvSpPr/>
+          <p:nvPr/>
+        </p:nvSpPr>
+        <p:spPr>
+          <a:xfrm>
+            <a:off x="8074152" y="3666744"/>
+            <a:ext cx="2825496" cy="201168"/>
+          </a:xfrm>
+          <a:prstGeom prst="rect">
+            <a:avLst/>
+          </a:prstGeom>
+          <a:noFill/>
+          <a:ln/>
+        </p:spPr>
+        <p:txBody>
+          <a:bodyPr wrap="square" lIns="0" tIns="0" rIns="0" bIns="0" rtlCol="0" anchor="ctr"/>
+          <a:lstStyle/>
+          <a:p>
+            <a:pPr indent="0" marL="0">
+              <a:buNone/>
+            </a:pPr>
+            <a:r>
+              <a:rPr lang="en-US" sz="950" b="1" dirty="0">
+                <a:solidFill>
+                  <a:srgbClr val="0068B7"/>
+                </a:solidFill>
+                <a:latin typeface="Aptos" pitchFamily="34" charset="0"/>
+                <a:ea typeface="Aptos" pitchFamily="34" charset="-122"/>
+                <a:cs typeface="Aptos" pitchFamily="34" charset="-120"/>
+              </a:rPr>
+              <a:t>Use this for</a:t>
+            </a:r>
+            <a:endParaRPr lang="en-US" sz="950" dirty="0"/>
+          </a:p>
+        </p:txBody>
+      </p:sp>
+      <p:sp>
+        <p:nvSpPr>
+          <p:cNvPr id="16" name="Text 14"/>
+          <p:cNvSpPr/>
+          <p:nvPr/>
+        </p:nvSpPr>
+        <p:spPr>
+          <a:xfrm>
+            <a:off x="8074152" y="3959352"/>
+            <a:ext cx="2825496" cy="1170432"/>
+          </a:xfrm>
+          <a:prstGeom prst="rect">
+            <a:avLst/>
+          </a:prstGeom>
+          <a:noFill/>
+          <a:ln/>
+        </p:spPr>
+        <p:txBody>
+          <a:bodyPr wrap="square" lIns="0" tIns="0" rIns="0" bIns="0" rtlCol="0" anchor="t">
+            <a:normAutofit/>
+          </a:bodyPr>
+          <a:lstStyle/>
+          <a:p>
+            <a:pPr indent="0" marL="0">
+              <a:buNone/>
+            </a:pPr>
+            <a:r>
+              <a:rPr lang="en-US" sz="1250" dirty="0">
+                <a:solidFill>
+                  <a:srgbClr val="17364A"/>
+                </a:solidFill>
+                <a:latin typeface="Aptos" pitchFamily="34" charset="0"/>
+                <a:ea typeface="Aptos" pitchFamily="34" charset="-122"/>
+                <a:cs typeface="Aptos" pitchFamily="34" charset="-120"/>
+              </a:rPr>
+              <a:t>Connect the concept to public health decisions, safeguards, documentation, or implementation work.</a:t>
+            </a:r>
+            <a:endParaRPr lang="en-US" sz="1250" dirty="0"/>
           </a:p>
         </p:txBody>
       </p:sp>
@@ -3027,7 +3557,32 @@
       </p:sp>
       <p:sp>
         <p:nvSpPr>
-          <p:cNvPr id="3" name="Text 1"/>
+          <p:cNvPr id="3" name="Shape 1"/>
+          <p:cNvSpPr/>
+          <p:nvPr/>
+        </p:nvSpPr>
+        <p:spPr>
+          <a:xfrm>
+            <a:off x="0" y="164592"/>
+            <a:ext cx="146304" cy="6693408"/>
+          </a:xfrm>
+          <a:prstGeom prst="rect">
+            <a:avLst/>
+          </a:prstGeom>
+          <a:solidFill>
+            <a:srgbClr val="2F8A28"/>
+          </a:solidFill>
+          <a:ln w="12700">
+            <a:solidFill>
+              <a:srgbClr val="2F8A28"/>
+            </a:solidFill>
+            <a:prstDash val="solid"/>
+          </a:ln>
+        </p:spPr>
+      </p:sp>
+      <p:sp>
+        <p:nvSpPr>
+          <p:cNvPr id="4" name="Text 2"/>
           <p:cNvSpPr/>
           <p:nvPr/>
         </p:nvSpPr>
@@ -3066,7 +3621,7 @@
       </p:sp>
       <p:sp>
         <p:nvSpPr>
-          <p:cNvPr id="4" name="Text 2"/>
+          <p:cNvPr id="5" name="Text 3"/>
           <p:cNvSpPr/>
           <p:nvPr/>
         </p:nvSpPr>
@@ -3105,7 +3660,7 @@
       </p:sp>
       <p:sp>
         <p:nvSpPr>
-          <p:cNvPr id="5" name="Text 3"/>
+          <p:cNvPr id="6" name="Text 4"/>
           <p:cNvSpPr/>
           <p:nvPr/>
         </p:nvSpPr>
@@ -3144,13 +3699,77 @@
       </p:sp>
       <p:sp>
         <p:nvSpPr>
-          <p:cNvPr id="6" name="Text 4"/>
+          <p:cNvPr id="7" name="Shape 5"/>
           <p:cNvSpPr/>
           <p:nvPr/>
         </p:nvSpPr>
         <p:spPr>
           <a:xfrm>
             <a:off x="640080" y="658368"/>
+            <a:ext cx="420624" cy="420624"/>
+          </a:xfrm>
+          <a:prstGeom prst="ellipse">
+            <a:avLst/>
+          </a:prstGeom>
+          <a:solidFill>
+            <a:srgbClr val="0068B7"/>
+          </a:solidFill>
+          <a:ln w="12700">
+            <a:solidFill>
+              <a:srgbClr val="0068B7"/>
+            </a:solidFill>
+            <a:prstDash val="solid"/>
+          </a:ln>
+        </p:spPr>
+      </p:sp>
+      <p:sp>
+        <p:nvSpPr>
+          <p:cNvPr id="8" name="Text 6"/>
+          <p:cNvSpPr/>
+          <p:nvPr/>
+        </p:nvSpPr>
+        <p:spPr>
+          <a:xfrm>
+            <a:off x="640080" y="731520"/>
+            <a:ext cx="420624" cy="164592"/>
+          </a:xfrm>
+          <a:prstGeom prst="rect">
+            <a:avLst/>
+          </a:prstGeom>
+          <a:noFill/>
+          <a:ln/>
+        </p:spPr>
+        <p:txBody>
+          <a:bodyPr wrap="square" lIns="0" tIns="0" rIns="0" bIns="0" rtlCol="0" anchor="ctr"/>
+          <a:lstStyle/>
+          <a:p>
+            <a:pPr algn="ctr" indent="0" marL="0">
+              <a:buNone/>
+            </a:pPr>
+            <a:r>
+              <a:rPr lang="en-US" sz="1100" b="1" dirty="0">
+                <a:solidFill>
+                  <a:srgbClr val="FFFFFF"/>
+                </a:solidFill>
+                <a:latin typeface="Aptos" pitchFamily="34" charset="0"/>
+                <a:ea typeface="Aptos" pitchFamily="34" charset="-122"/>
+                <a:cs typeface="Aptos" pitchFamily="34" charset="-120"/>
+              </a:rPr>
+              <a:t>7</a:t>
+            </a:r>
+            <a:endParaRPr lang="en-US" sz="1100" dirty="0"/>
+          </a:p>
+        </p:txBody>
+      </p:sp>
+      <p:sp>
+        <p:nvSpPr>
+          <p:cNvPr id="9" name="Text 7"/>
+          <p:cNvSpPr/>
+          <p:nvPr/>
+        </p:nvSpPr>
+        <p:spPr>
+          <a:xfrm>
+            <a:off x="640080" y="621792"/>
             <a:ext cx="10881360" cy="566928"/>
           </a:xfrm>
           <a:prstGeom prst="rect">
@@ -3177,7 +3796,7 @@
                 <a:ea typeface="Aptos Display" pitchFamily="34" charset="-122"/>
                 <a:cs typeface="Aptos Display" pitchFamily="34" charset="-120"/>
               </a:rPr>
-              <a:t>Reflection Questions</a:t>
+              <a:t>Risks, Failure Modes, and Guardrails</a:t>
             </a:r>
             <a:endParaRPr lang="en-US" sz="2700" dirty="0"/>
           </a:p>
@@ -3185,32 +3804,178 @@
       </p:sp>
       <p:sp>
         <p:nvSpPr>
-          <p:cNvPr id="7" name="Text 5"/>
-          <p:cNvSpPr/>
-          <p:nvPr/>
-        </p:nvSpPr>
-        <p:spPr>
-          <a:xfrm>
-            <a:off x="822960" y="1325880"/>
-            <a:ext cx="10378440" cy="4800600"/>
-          </a:xfrm>
-          <a:prstGeom prst="rect">
-            <a:avLst/>
-          </a:prstGeom>
-          <a:noFill/>
-          <a:ln/>
-        </p:spPr>
-        <p:txBody>
-          <a:bodyPr wrap="square" lIns="1016" tIns="1016" rIns="1016" bIns="1016" rtlCol="0" anchor="t">
+          <p:cNvPr id="10" name="Text 8"/>
+          <p:cNvSpPr/>
+          <p:nvPr/>
+        </p:nvSpPr>
+        <p:spPr>
+          <a:xfrm>
+            <a:off x="868680" y="1417320"/>
+            <a:ext cx="6675120" cy="4434840"/>
+          </a:xfrm>
+          <a:prstGeom prst="rect">
+            <a:avLst/>
+          </a:prstGeom>
+          <a:noFill/>
+          <a:ln/>
+        </p:spPr>
+        <p:txBody>
+          <a:bodyPr wrap="square" lIns="635" tIns="635" rIns="635" bIns="635" rtlCol="0" anchor="t">
             <a:normAutofit/>
           </a:bodyPr>
           <a:lstStyle/>
           <a:p>
+            <a:r>
+              <a:rPr lang="en-US" sz="1700" dirty="0">
+                <a:solidFill>
+                  <a:srgbClr val="17364A"/>
+                </a:solidFill>
+                <a:latin typeface="Aptos" pitchFamily="34" charset="0"/>
+                <a:ea typeface="Aptos" pitchFamily="34" charset="-122"/>
+                <a:cs typeface="Aptos" pitchFamily="34" charset="-120"/>
+              </a:rPr>
+              <a:t>One risk is accountability diffusion.</a:t>
+            </a:r>
+            <a:endParaRPr lang="en-US" sz="1700" dirty="0"/>
+          </a:p>
+          <a:p>
+            <a:r>
+              <a:rPr lang="en-US" sz="1700" dirty="0">
+                <a:solidFill>
+                  <a:srgbClr val="17364A"/>
+                </a:solidFill>
+                <a:latin typeface="Aptos" pitchFamily="34" charset="0"/>
+                <a:ea typeface="Aptos" pitchFamily="34" charset="-122"/>
+                <a:cs typeface="Aptos" pitchFamily="34" charset="-120"/>
+              </a:rPr>
+              <a:t>When everyone is involved but no one is accountable, important concerns may go unresolved.</a:t>
+            </a:r>
+            <a:endParaRPr lang="en-US" sz="1700" dirty="0"/>
+          </a:p>
+          <a:p>
+            <a:r>
+              <a:rPr lang="en-US" sz="1700" dirty="0">
+                <a:solidFill>
+                  <a:srgbClr val="17364A"/>
+                </a:solidFill>
+                <a:latin typeface="Aptos" pitchFamily="34" charset="0"/>
+                <a:ea typeface="Aptos" pitchFamily="34" charset="-122"/>
+                <a:cs typeface="Aptos" pitchFamily="34" charset="-120"/>
+              </a:rPr>
+              <a:t>A guardrail is to assign a named program owner and governance owner for every AI use case.</a:t>
+            </a:r>
+            <a:endParaRPr lang="en-US" sz="1700" dirty="0"/>
+          </a:p>
+          <a:p>
+            <a:r>
+              <a:rPr lang="en-US" sz="1700" dirty="0">
+                <a:solidFill>
+                  <a:srgbClr val="17364A"/>
+                </a:solidFill>
+                <a:latin typeface="Aptos" pitchFamily="34" charset="0"/>
+                <a:ea typeface="Aptos" pitchFamily="34" charset="-122"/>
+                <a:cs typeface="Aptos" pitchFamily="34" charset="-120"/>
+              </a:rPr>
+              <a:t>Another risk is inappropriate risk acceptance by staff who lack authority.</a:t>
+            </a:r>
+            <a:endParaRPr lang="en-US" sz="1700" dirty="0"/>
+          </a:p>
+        </p:txBody>
+      </p:sp>
+      <p:sp>
+        <p:nvSpPr>
+          <p:cNvPr id="11" name="Shape 9"/>
+          <p:cNvSpPr/>
+          <p:nvPr/>
+        </p:nvSpPr>
+        <p:spPr>
+          <a:xfrm>
+            <a:off x="7909560" y="1417320"/>
+            <a:ext cx="3154680" cy="1828800"/>
+          </a:xfrm>
+          <a:prstGeom prst="roundRect">
+            <a:avLst>
+              <a:gd name="adj" fmla="val 6000"/>
+            </a:avLst>
+          </a:prstGeom>
+          <a:solidFill>
+            <a:srgbClr val="EEF8ED"/>
+          </a:solidFill>
+          <a:ln w="12700">
+            <a:solidFill>
+              <a:srgbClr val="B9D7E6"/>
+            </a:solidFill>
+            <a:prstDash val="solid"/>
+          </a:ln>
+        </p:spPr>
+      </p:sp>
+      <p:sp>
+        <p:nvSpPr>
+          <p:cNvPr id="12" name="Text 10"/>
+          <p:cNvSpPr/>
+          <p:nvPr/>
+        </p:nvSpPr>
+        <p:spPr>
+          <a:xfrm>
+            <a:off x="8074152" y="1563624"/>
+            <a:ext cx="2825496" cy="201168"/>
+          </a:xfrm>
+          <a:prstGeom prst="rect">
+            <a:avLst/>
+          </a:prstGeom>
+          <a:noFill/>
+          <a:ln/>
+        </p:spPr>
+        <p:txBody>
+          <a:bodyPr wrap="square" lIns="0" tIns="0" rIns="0" bIns="0" rtlCol="0" anchor="ctr"/>
+          <a:lstStyle/>
+          <a:p>
             <a:pPr indent="0" marL="0">
               <a:buNone/>
             </a:pPr>
             <a:r>
-              <a:rPr lang="en-US" sz="1420" dirty="0">
+              <a:rPr lang="en-US" sz="950" b="1" dirty="0">
+                <a:solidFill>
+                  <a:srgbClr val="0068B7"/>
+                </a:solidFill>
+                <a:latin typeface="Aptos" pitchFamily="34" charset="0"/>
+                <a:ea typeface="Aptos" pitchFamily="34" charset="-122"/>
+                <a:cs typeface="Aptos" pitchFamily="34" charset="-120"/>
+              </a:rPr>
+              <a:t>Key idea</a:t>
+            </a:r>
+            <a:endParaRPr lang="en-US" sz="950" dirty="0"/>
+          </a:p>
+        </p:txBody>
+      </p:sp>
+      <p:sp>
+        <p:nvSpPr>
+          <p:cNvPr id="13" name="Text 11"/>
+          <p:cNvSpPr/>
+          <p:nvPr/>
+        </p:nvSpPr>
+        <p:spPr>
+          <a:xfrm>
+            <a:off x="8074152" y="1856232"/>
+            <a:ext cx="2825496" cy="1261872"/>
+          </a:xfrm>
+          <a:prstGeom prst="rect">
+            <a:avLst/>
+          </a:prstGeom>
+          <a:noFill/>
+          <a:ln/>
+        </p:spPr>
+        <p:txBody>
+          <a:bodyPr wrap="square" lIns="0" tIns="0" rIns="0" bIns="0" rtlCol="0" anchor="t">
+            <a:normAutofit/>
+          </a:bodyPr>
+          <a:lstStyle/>
+          <a:p>
+            <a:pPr indent="0" marL="0">
+              <a:buNone/>
+            </a:pPr>
+            <a:r>
+              <a:rPr lang="en-US" sz="1250" dirty="0">
                 <a:solidFill>
                   <a:srgbClr val="17364A"/>
                 </a:solidFill>
@@ -3218,9 +3983,116 @@
                 <a:ea typeface="Aptos" pitchFamily="34" charset="-122"/>
                 <a:cs typeface="Aptos" pitchFamily="34" charset="-120"/>
               </a:rPr>
-              <a:t>Which current or proposed AI use case in your agency raises this leadership or governance issue most clearly? Who currently has authority to make decisions about this issue, and is that authority documented? What evidence would governance or leadership need before approving the use case?</a:t>
-            </a:r>
-            <a:endParaRPr lang="en-US" sz="1420" dirty="0"/>
+              <a:t>One risk is accountability diffusion.</a:t>
+            </a:r>
+            <a:endParaRPr lang="en-US" sz="1250" dirty="0"/>
+          </a:p>
+        </p:txBody>
+      </p:sp>
+      <p:sp>
+        <p:nvSpPr>
+          <p:cNvPr id="14" name="Shape 12"/>
+          <p:cNvSpPr/>
+          <p:nvPr/>
+        </p:nvSpPr>
+        <p:spPr>
+          <a:xfrm>
+            <a:off x="7909560" y="3520440"/>
+            <a:ext cx="3154680" cy="1737360"/>
+          </a:xfrm>
+          <a:prstGeom prst="roundRect">
+            <a:avLst>
+              <a:gd name="adj" fmla="val 6316"/>
+            </a:avLst>
+          </a:prstGeom>
+          <a:solidFill>
+            <a:srgbClr val="EAF6F8"/>
+          </a:solidFill>
+          <a:ln w="12700">
+            <a:solidFill>
+              <a:srgbClr val="B9D7E6"/>
+            </a:solidFill>
+            <a:prstDash val="solid"/>
+          </a:ln>
+        </p:spPr>
+      </p:sp>
+      <p:sp>
+        <p:nvSpPr>
+          <p:cNvPr id="15" name="Text 13"/>
+          <p:cNvSpPr/>
+          <p:nvPr/>
+        </p:nvSpPr>
+        <p:spPr>
+          <a:xfrm>
+            <a:off x="8074152" y="3666744"/>
+            <a:ext cx="2825496" cy="201168"/>
+          </a:xfrm>
+          <a:prstGeom prst="rect">
+            <a:avLst/>
+          </a:prstGeom>
+          <a:noFill/>
+          <a:ln/>
+        </p:spPr>
+        <p:txBody>
+          <a:bodyPr wrap="square" lIns="0" tIns="0" rIns="0" bIns="0" rtlCol="0" anchor="ctr"/>
+          <a:lstStyle/>
+          <a:p>
+            <a:pPr indent="0" marL="0">
+              <a:buNone/>
+            </a:pPr>
+            <a:r>
+              <a:rPr lang="en-US" sz="950" b="1" dirty="0">
+                <a:solidFill>
+                  <a:srgbClr val="0068B7"/>
+                </a:solidFill>
+                <a:latin typeface="Aptos" pitchFamily="34" charset="0"/>
+                <a:ea typeface="Aptos" pitchFamily="34" charset="-122"/>
+                <a:cs typeface="Aptos" pitchFamily="34" charset="-120"/>
+              </a:rPr>
+              <a:t>Use this for</a:t>
+            </a:r>
+            <a:endParaRPr lang="en-US" sz="950" dirty="0"/>
+          </a:p>
+        </p:txBody>
+      </p:sp>
+      <p:sp>
+        <p:nvSpPr>
+          <p:cNvPr id="16" name="Text 14"/>
+          <p:cNvSpPr/>
+          <p:nvPr/>
+        </p:nvSpPr>
+        <p:spPr>
+          <a:xfrm>
+            <a:off x="8074152" y="3959352"/>
+            <a:ext cx="2825496" cy="1170432"/>
+          </a:xfrm>
+          <a:prstGeom prst="rect">
+            <a:avLst/>
+          </a:prstGeom>
+          <a:noFill/>
+          <a:ln/>
+        </p:spPr>
+        <p:txBody>
+          <a:bodyPr wrap="square" lIns="0" tIns="0" rIns="0" bIns="0" rtlCol="0" anchor="t">
+            <a:normAutofit/>
+          </a:bodyPr>
+          <a:lstStyle/>
+          <a:p>
+            <a:pPr indent="0" marL="0">
+              <a:buNone/>
+            </a:pPr>
+            <a:r>
+              <a:rPr lang="en-US" sz="1250" dirty="0">
+                <a:solidFill>
+                  <a:srgbClr val="17364A"/>
+                </a:solidFill>
+                <a:latin typeface="Aptos" pitchFamily="34" charset="0"/>
+                <a:ea typeface="Aptos" pitchFamily="34" charset="-122"/>
+                <a:cs typeface="Aptos" pitchFamily="34" charset="-120"/>
+              </a:rPr>
+              <a:t>Connect the concept to public health decisions, safeguards, documentation, or implementation work.</a:t>
+            </a:r>
+            <a:endParaRPr lang="en-US" sz="1250" dirty="0"/>
           </a:p>
         </p:txBody>
       </p:sp>
@@ -3283,7 +4155,32 @@
       </p:sp>
       <p:sp>
         <p:nvSpPr>
-          <p:cNvPr id="3" name="Text 1"/>
+          <p:cNvPr id="3" name="Shape 1"/>
+          <p:cNvSpPr/>
+          <p:nvPr/>
+        </p:nvSpPr>
+        <p:spPr>
+          <a:xfrm>
+            <a:off x="0" y="164592"/>
+            <a:ext cx="146304" cy="6693408"/>
+          </a:xfrm>
+          <a:prstGeom prst="rect">
+            <a:avLst/>
+          </a:prstGeom>
+          <a:solidFill>
+            <a:srgbClr val="2F8A28"/>
+          </a:solidFill>
+          <a:ln w="12700">
+            <a:solidFill>
+              <a:srgbClr val="2F8A28"/>
+            </a:solidFill>
+            <a:prstDash val="solid"/>
+          </a:ln>
+        </p:spPr>
+      </p:sp>
+      <p:sp>
+        <p:nvSpPr>
+          <p:cNvPr id="4" name="Text 2"/>
           <p:cNvSpPr/>
           <p:nvPr/>
         </p:nvSpPr>
@@ -3322,7 +4219,7 @@
       </p:sp>
       <p:sp>
         <p:nvSpPr>
-          <p:cNvPr id="4" name="Text 2"/>
+          <p:cNvPr id="5" name="Text 3"/>
           <p:cNvSpPr/>
           <p:nvPr/>
         </p:nvSpPr>
@@ -3361,7 +4258,7 @@
       </p:sp>
       <p:sp>
         <p:nvSpPr>
-          <p:cNvPr id="5" name="Text 3"/>
+          <p:cNvPr id="6" name="Text 4"/>
           <p:cNvSpPr/>
           <p:nvPr/>
         </p:nvSpPr>
@@ -3400,13 +4297,77 @@
       </p:sp>
       <p:sp>
         <p:nvSpPr>
-          <p:cNvPr id="6" name="Text 4"/>
+          <p:cNvPr id="7" name="Shape 5"/>
           <p:cNvSpPr/>
           <p:nvPr/>
         </p:nvSpPr>
         <p:spPr>
           <a:xfrm>
             <a:off x="640080" y="658368"/>
+            <a:ext cx="420624" cy="420624"/>
+          </a:xfrm>
+          <a:prstGeom prst="ellipse">
+            <a:avLst/>
+          </a:prstGeom>
+          <a:solidFill>
+            <a:srgbClr val="0068B7"/>
+          </a:solidFill>
+          <a:ln w="12700">
+            <a:solidFill>
+              <a:srgbClr val="0068B7"/>
+            </a:solidFill>
+            <a:prstDash val="solid"/>
+          </a:ln>
+        </p:spPr>
+      </p:sp>
+      <p:sp>
+        <p:nvSpPr>
+          <p:cNvPr id="8" name="Text 6"/>
+          <p:cNvSpPr/>
+          <p:nvPr/>
+        </p:nvSpPr>
+        <p:spPr>
+          <a:xfrm>
+            <a:off x="640080" y="731520"/>
+            <a:ext cx="420624" cy="164592"/>
+          </a:xfrm>
+          <a:prstGeom prst="rect">
+            <a:avLst/>
+          </a:prstGeom>
+          <a:noFill/>
+          <a:ln/>
+        </p:spPr>
+        <p:txBody>
+          <a:bodyPr wrap="square" lIns="0" tIns="0" rIns="0" bIns="0" rtlCol="0" anchor="ctr"/>
+          <a:lstStyle/>
+          <a:p>
+            <a:pPr algn="ctr" indent="0" marL="0">
+              <a:buNone/>
+            </a:pPr>
+            <a:r>
+              <a:rPr lang="en-US" sz="1100" b="1" dirty="0">
+                <a:solidFill>
+                  <a:srgbClr val="FFFFFF"/>
+                </a:solidFill>
+                <a:latin typeface="Aptos" pitchFamily="34" charset="0"/>
+                <a:ea typeface="Aptos" pitchFamily="34" charset="-122"/>
+                <a:cs typeface="Aptos" pitchFamily="34" charset="-120"/>
+              </a:rPr>
+              <a:t>8</a:t>
+            </a:r>
+            <a:endParaRPr lang="en-US" sz="1100" dirty="0"/>
+          </a:p>
+        </p:txBody>
+      </p:sp>
+      <p:sp>
+        <p:nvSpPr>
+          <p:cNvPr id="9" name="Text 7"/>
+          <p:cNvSpPr/>
+          <p:nvPr/>
+        </p:nvSpPr>
+        <p:spPr>
+          <a:xfrm>
+            <a:off x="640080" y="621792"/>
             <a:ext cx="10881360" cy="566928"/>
           </a:xfrm>
           <a:prstGeom prst="rect">
@@ -3433,7 +4394,7 @@
                 <a:ea typeface="Aptos Display" pitchFamily="34" charset="-122"/>
                 <a:cs typeface="Aptos Display" pitchFamily="34" charset="-120"/>
               </a:rPr>
-              <a:t>Reflection Questions Continued</a:t>
+              <a:t>Application to AI-Supported Workflows</a:t>
             </a:r>
             <a:endParaRPr lang="en-US" sz="2700" dirty="0"/>
           </a:p>
@@ -3441,32 +4402,178 @@
       </p:sp>
       <p:sp>
         <p:nvSpPr>
-          <p:cNvPr id="7" name="Text 5"/>
-          <p:cNvSpPr/>
-          <p:nvPr/>
-        </p:nvSpPr>
-        <p:spPr>
-          <a:xfrm>
-            <a:off x="822960" y="1325880"/>
-            <a:ext cx="10378440" cy="4800600"/>
-          </a:xfrm>
-          <a:prstGeom prst="rect">
-            <a:avLst/>
-          </a:prstGeom>
-          <a:noFill/>
-          <a:ln/>
-        </p:spPr>
-        <p:txBody>
-          <a:bodyPr wrap="square" lIns="1016" tIns="1016" rIns="1016" bIns="1016" rtlCol="0" anchor="t">
+          <p:cNvPr id="10" name="Text 8"/>
+          <p:cNvSpPr/>
+          <p:nvPr/>
+        </p:nvSpPr>
+        <p:spPr>
+          <a:xfrm>
+            <a:off x="868680" y="1417320"/>
+            <a:ext cx="6675120" cy="4434840"/>
+          </a:xfrm>
+          <a:prstGeom prst="rect">
+            <a:avLst/>
+          </a:prstGeom>
+          <a:noFill/>
+          <a:ln/>
+        </p:spPr>
+        <p:txBody>
+          <a:bodyPr wrap="square" lIns="635" tIns="635" rIns="635" bIns="635" rtlCol="0" anchor="t">
             <a:normAutofit/>
           </a:bodyPr>
           <a:lstStyle/>
           <a:p>
+            <a:r>
+              <a:rPr lang="en-US" sz="1700" dirty="0">
+                <a:solidFill>
+                  <a:srgbClr val="17364A"/>
+                </a:solidFill>
+                <a:latin typeface="Aptos" pitchFamily="34" charset="0"/>
+                <a:ea typeface="Aptos" pitchFamily="34" charset="-122"/>
+                <a:cs typeface="Aptos" pitchFamily="34" charset="-120"/>
+              </a:rPr>
+              <a:t>For generative AI, decision rights should clarify who approves public release of AI-assisted content.</a:t>
+            </a:r>
+            <a:endParaRPr lang="en-US" sz="1700" dirty="0"/>
+          </a:p>
+          <a:p>
+            <a:r>
+              <a:rPr lang="en-US" sz="1700" dirty="0">
+                <a:solidFill>
+                  <a:srgbClr val="17364A"/>
+                </a:solidFill>
+                <a:latin typeface="Aptos" pitchFamily="34" charset="0"/>
+                <a:ea typeface="Aptos" pitchFamily="34" charset="-122"/>
+                <a:cs typeface="Aptos" pitchFamily="34" charset="-120"/>
+              </a:rPr>
+              <a:t>For predictive analytics, leaders should decide whether the score may inform resource allocation or only support review.</a:t>
+            </a:r>
+            <a:endParaRPr lang="en-US" sz="1700" dirty="0"/>
+          </a:p>
+          <a:p>
+            <a:r>
+              <a:rPr lang="en-US" sz="1700" dirty="0">
+                <a:solidFill>
+                  <a:srgbClr val="17364A"/>
+                </a:solidFill>
+                <a:latin typeface="Aptos" pitchFamily="34" charset="0"/>
+                <a:ea typeface="Aptos" pitchFamily="34" charset="-122"/>
+                <a:cs typeface="Aptos" pitchFamily="34" charset="-120"/>
+              </a:rPr>
+              <a:t>For agentic AI, decision rights should define who authorizes system actions, rollback procedures, and changes to permissions.</a:t>
+            </a:r>
+            <a:endParaRPr lang="en-US" sz="1700" dirty="0"/>
+          </a:p>
+          <a:p>
+            <a:r>
+              <a:rPr lang="en-US" sz="1700" dirty="0">
+                <a:solidFill>
+                  <a:srgbClr val="17364A"/>
+                </a:solidFill>
+                <a:latin typeface="Aptos" pitchFamily="34" charset="0"/>
+                <a:ea typeface="Aptos" pitchFamily="34" charset="-122"/>
+                <a:cs typeface="Aptos" pitchFamily="34" charset="-120"/>
+              </a:rPr>
+              <a:t>Accountability should remain tied to public health roles and legal authority.</a:t>
+            </a:r>
+            <a:endParaRPr lang="en-US" sz="1700" dirty="0"/>
+          </a:p>
+        </p:txBody>
+      </p:sp>
+      <p:sp>
+        <p:nvSpPr>
+          <p:cNvPr id="11" name="Shape 9"/>
+          <p:cNvSpPr/>
+          <p:nvPr/>
+        </p:nvSpPr>
+        <p:spPr>
+          <a:xfrm>
+            <a:off x="7909560" y="1417320"/>
+            <a:ext cx="3154680" cy="1828800"/>
+          </a:xfrm>
+          <a:prstGeom prst="roundRect">
+            <a:avLst>
+              <a:gd name="adj" fmla="val 6000"/>
+            </a:avLst>
+          </a:prstGeom>
+          <a:solidFill>
+            <a:srgbClr val="EEF8ED"/>
+          </a:solidFill>
+          <a:ln w="12700">
+            <a:solidFill>
+              <a:srgbClr val="B9D7E6"/>
+            </a:solidFill>
+            <a:prstDash val="solid"/>
+          </a:ln>
+        </p:spPr>
+      </p:sp>
+      <p:sp>
+        <p:nvSpPr>
+          <p:cNvPr id="12" name="Text 10"/>
+          <p:cNvSpPr/>
+          <p:nvPr/>
+        </p:nvSpPr>
+        <p:spPr>
+          <a:xfrm>
+            <a:off x="8074152" y="1563624"/>
+            <a:ext cx="2825496" cy="201168"/>
+          </a:xfrm>
+          <a:prstGeom prst="rect">
+            <a:avLst/>
+          </a:prstGeom>
+          <a:noFill/>
+          <a:ln/>
+        </p:spPr>
+        <p:txBody>
+          <a:bodyPr wrap="square" lIns="0" tIns="0" rIns="0" bIns="0" rtlCol="0" anchor="ctr"/>
+          <a:lstStyle/>
+          <a:p>
             <a:pPr indent="0" marL="0">
               <a:buNone/>
             </a:pPr>
             <a:r>
-              <a:rPr lang="en-US" sz="1420" dirty="0">
+              <a:rPr lang="en-US" sz="950" b="1" dirty="0">
+                <a:solidFill>
+                  <a:srgbClr val="0068B7"/>
+                </a:solidFill>
+                <a:latin typeface="Aptos" pitchFamily="34" charset="0"/>
+                <a:ea typeface="Aptos" pitchFamily="34" charset="-122"/>
+                <a:cs typeface="Aptos" pitchFamily="34" charset="-120"/>
+              </a:rPr>
+              <a:t>Key idea</a:t>
+            </a:r>
+            <a:endParaRPr lang="en-US" sz="950" dirty="0"/>
+          </a:p>
+        </p:txBody>
+      </p:sp>
+      <p:sp>
+        <p:nvSpPr>
+          <p:cNvPr id="13" name="Text 11"/>
+          <p:cNvSpPr/>
+          <p:nvPr/>
+        </p:nvSpPr>
+        <p:spPr>
+          <a:xfrm>
+            <a:off x="8074152" y="1856232"/>
+            <a:ext cx="2825496" cy="1261872"/>
+          </a:xfrm>
+          <a:prstGeom prst="rect">
+            <a:avLst/>
+          </a:prstGeom>
+          <a:noFill/>
+          <a:ln/>
+        </p:spPr>
+        <p:txBody>
+          <a:bodyPr wrap="square" lIns="0" tIns="0" rIns="0" bIns="0" rtlCol="0" anchor="t">
+            <a:normAutofit/>
+          </a:bodyPr>
+          <a:lstStyle/>
+          <a:p>
+            <a:pPr indent="0" marL="0">
+              <a:buNone/>
+            </a:pPr>
+            <a:r>
+              <a:rPr lang="en-US" sz="1250" dirty="0">
                 <a:solidFill>
                   <a:srgbClr val="17364A"/>
                 </a:solidFill>
@@ -3474,9 +4581,116 @@
                 <a:ea typeface="Aptos" pitchFamily="34" charset="-122"/>
                 <a:cs typeface="Aptos" pitchFamily="34" charset="-120"/>
               </a:rPr>
-              <a:t>Which staff, partners, or communities would be affected if this issue were handled poorly? What policy, process, or artifact should be created or updated after this module?</a:t>
-            </a:r>
-            <a:endParaRPr lang="en-US" sz="1420" dirty="0"/>
+              <a:t>For generative AI, decision rights should clarify who approves public release of AI-assisted content.</a:t>
+            </a:r>
+            <a:endParaRPr lang="en-US" sz="1250" dirty="0"/>
+          </a:p>
+        </p:txBody>
+      </p:sp>
+      <p:sp>
+        <p:nvSpPr>
+          <p:cNvPr id="14" name="Shape 12"/>
+          <p:cNvSpPr/>
+          <p:nvPr/>
+        </p:nvSpPr>
+        <p:spPr>
+          <a:xfrm>
+            <a:off x="7909560" y="3520440"/>
+            <a:ext cx="3154680" cy="1737360"/>
+          </a:xfrm>
+          <a:prstGeom prst="roundRect">
+            <a:avLst>
+              <a:gd name="adj" fmla="val 6316"/>
+            </a:avLst>
+          </a:prstGeom>
+          <a:solidFill>
+            <a:srgbClr val="EAF6F8"/>
+          </a:solidFill>
+          <a:ln w="12700">
+            <a:solidFill>
+              <a:srgbClr val="B9D7E6"/>
+            </a:solidFill>
+            <a:prstDash val="solid"/>
+          </a:ln>
+        </p:spPr>
+      </p:sp>
+      <p:sp>
+        <p:nvSpPr>
+          <p:cNvPr id="15" name="Text 13"/>
+          <p:cNvSpPr/>
+          <p:nvPr/>
+        </p:nvSpPr>
+        <p:spPr>
+          <a:xfrm>
+            <a:off x="8074152" y="3666744"/>
+            <a:ext cx="2825496" cy="201168"/>
+          </a:xfrm>
+          <a:prstGeom prst="rect">
+            <a:avLst/>
+          </a:prstGeom>
+          <a:noFill/>
+          <a:ln/>
+        </p:spPr>
+        <p:txBody>
+          <a:bodyPr wrap="square" lIns="0" tIns="0" rIns="0" bIns="0" rtlCol="0" anchor="ctr"/>
+          <a:lstStyle/>
+          <a:p>
+            <a:pPr indent="0" marL="0">
+              <a:buNone/>
+            </a:pPr>
+            <a:r>
+              <a:rPr lang="en-US" sz="950" b="1" dirty="0">
+                <a:solidFill>
+                  <a:srgbClr val="0068B7"/>
+                </a:solidFill>
+                <a:latin typeface="Aptos" pitchFamily="34" charset="0"/>
+                <a:ea typeface="Aptos" pitchFamily="34" charset="-122"/>
+                <a:cs typeface="Aptos" pitchFamily="34" charset="-120"/>
+              </a:rPr>
+              <a:t>Use this for</a:t>
+            </a:r>
+            <a:endParaRPr lang="en-US" sz="950" dirty="0"/>
+          </a:p>
+        </p:txBody>
+      </p:sp>
+      <p:sp>
+        <p:nvSpPr>
+          <p:cNvPr id="16" name="Text 14"/>
+          <p:cNvSpPr/>
+          <p:nvPr/>
+        </p:nvSpPr>
+        <p:spPr>
+          <a:xfrm>
+            <a:off x="8074152" y="3959352"/>
+            <a:ext cx="2825496" cy="1170432"/>
+          </a:xfrm>
+          <a:prstGeom prst="rect">
+            <a:avLst/>
+          </a:prstGeom>
+          <a:noFill/>
+          <a:ln/>
+        </p:spPr>
+        <p:txBody>
+          <a:bodyPr wrap="square" lIns="0" tIns="0" rIns="0" bIns="0" rtlCol="0" anchor="t">
+            <a:normAutofit/>
+          </a:bodyPr>
+          <a:lstStyle/>
+          <a:p>
+            <a:pPr indent="0" marL="0">
+              <a:buNone/>
+            </a:pPr>
+            <a:r>
+              <a:rPr lang="en-US" sz="1250" dirty="0">
+                <a:solidFill>
+                  <a:srgbClr val="17364A"/>
+                </a:solidFill>
+                <a:latin typeface="Aptos" pitchFamily="34" charset="0"/>
+                <a:ea typeface="Aptos" pitchFamily="34" charset="-122"/>
+                <a:cs typeface="Aptos" pitchFamily="34" charset="-120"/>
+              </a:rPr>
+              <a:t>Connect the concept to public health decisions, safeguards, documentation, or implementation work.</a:t>
+            </a:r>
+            <a:endParaRPr lang="en-US" sz="1250" dirty="0"/>
           </a:p>
         </p:txBody>
       </p:sp>
@@ -3539,7 +4753,32 @@
       </p:sp>
       <p:sp>
         <p:nvSpPr>
-          <p:cNvPr id="3" name="Text 1"/>
+          <p:cNvPr id="3" name="Shape 1"/>
+          <p:cNvSpPr/>
+          <p:nvPr/>
+        </p:nvSpPr>
+        <p:spPr>
+          <a:xfrm>
+            <a:off x="0" y="164592"/>
+            <a:ext cx="146304" cy="6693408"/>
+          </a:xfrm>
+          <a:prstGeom prst="rect">
+            <a:avLst/>
+          </a:prstGeom>
+          <a:solidFill>
+            <a:srgbClr val="2F8A28"/>
+          </a:solidFill>
+          <a:ln w="12700">
+            <a:solidFill>
+              <a:srgbClr val="2F8A28"/>
+            </a:solidFill>
+            <a:prstDash val="solid"/>
+          </a:ln>
+        </p:spPr>
+      </p:sp>
+      <p:sp>
+        <p:nvSpPr>
+          <p:cNvPr id="4" name="Text 2"/>
           <p:cNvSpPr/>
           <p:nvPr/>
         </p:nvSpPr>
@@ -3578,7 +4817,7 @@
       </p:sp>
       <p:sp>
         <p:nvSpPr>
-          <p:cNvPr id="4" name="Text 2"/>
+          <p:cNvPr id="5" name="Text 3"/>
           <p:cNvSpPr/>
           <p:nvPr/>
         </p:nvSpPr>
@@ -3617,7 +4856,7 @@
       </p:sp>
       <p:sp>
         <p:nvSpPr>
-          <p:cNvPr id="5" name="Text 3"/>
+          <p:cNvPr id="6" name="Text 4"/>
           <p:cNvSpPr/>
           <p:nvPr/>
         </p:nvSpPr>
@@ -3656,13 +4895,77 @@
       </p:sp>
       <p:sp>
         <p:nvSpPr>
-          <p:cNvPr id="6" name="Text 4"/>
+          <p:cNvPr id="7" name="Shape 5"/>
           <p:cNvSpPr/>
           <p:nvPr/>
         </p:nvSpPr>
         <p:spPr>
           <a:xfrm>
             <a:off x="640080" y="658368"/>
+            <a:ext cx="420624" cy="420624"/>
+          </a:xfrm>
+          <a:prstGeom prst="ellipse">
+            <a:avLst/>
+          </a:prstGeom>
+          <a:solidFill>
+            <a:srgbClr val="0068B7"/>
+          </a:solidFill>
+          <a:ln w="12700">
+            <a:solidFill>
+              <a:srgbClr val="0068B7"/>
+            </a:solidFill>
+            <a:prstDash val="solid"/>
+          </a:ln>
+        </p:spPr>
+      </p:sp>
+      <p:sp>
+        <p:nvSpPr>
+          <p:cNvPr id="8" name="Text 6"/>
+          <p:cNvSpPr/>
+          <p:nvPr/>
+        </p:nvSpPr>
+        <p:spPr>
+          <a:xfrm>
+            <a:off x="640080" y="731520"/>
+            <a:ext cx="420624" cy="164592"/>
+          </a:xfrm>
+          <a:prstGeom prst="rect">
+            <a:avLst/>
+          </a:prstGeom>
+          <a:noFill/>
+          <a:ln/>
+        </p:spPr>
+        <p:txBody>
+          <a:bodyPr wrap="square" lIns="0" tIns="0" rIns="0" bIns="0" rtlCol="0" anchor="ctr"/>
+          <a:lstStyle/>
+          <a:p>
+            <a:pPr algn="ctr" indent="0" marL="0">
+              <a:buNone/>
+            </a:pPr>
+            <a:r>
+              <a:rPr lang="en-US" sz="1100" b="1" dirty="0">
+                <a:solidFill>
+                  <a:srgbClr val="FFFFFF"/>
+                </a:solidFill>
+                <a:latin typeface="Aptos" pitchFamily="34" charset="0"/>
+                <a:ea typeface="Aptos" pitchFamily="34" charset="-122"/>
+                <a:cs typeface="Aptos" pitchFamily="34" charset="-120"/>
+              </a:rPr>
+              <a:t>9</a:t>
+            </a:r>
+            <a:endParaRPr lang="en-US" sz="1100" dirty="0"/>
+          </a:p>
+        </p:txBody>
+      </p:sp>
+      <p:sp>
+        <p:nvSpPr>
+          <p:cNvPr id="9" name="Text 7"/>
+          <p:cNvSpPr/>
+          <p:nvPr/>
+        </p:nvSpPr>
+        <p:spPr>
+          <a:xfrm>
+            <a:off x="640080" y="621792"/>
             <a:ext cx="10881360" cy="566928"/>
           </a:xfrm>
           <a:prstGeom prst="rect">
@@ -3689,7 +4992,7 @@
                 <a:ea typeface="Aptos Display" pitchFamily="34" charset="-122"/>
                 <a:cs typeface="Aptos Display" pitchFamily="34" charset="-120"/>
               </a:rPr>
-              <a:t>Practical Exercise</a:t>
+              <a:t>Reflection Questions</a:t>
             </a:r>
             <a:endParaRPr lang="en-US" sz="2700" dirty="0"/>
           </a:p>
@@ -3697,32 +5000,164 @@
       </p:sp>
       <p:sp>
         <p:nvSpPr>
-          <p:cNvPr id="7" name="Text 5"/>
-          <p:cNvSpPr/>
-          <p:nvPr/>
-        </p:nvSpPr>
-        <p:spPr>
-          <a:xfrm>
-            <a:off x="822960" y="1325880"/>
-            <a:ext cx="10378440" cy="4800600"/>
-          </a:xfrm>
-          <a:prstGeom prst="rect">
-            <a:avLst/>
-          </a:prstGeom>
-          <a:noFill/>
-          <a:ln/>
-        </p:spPr>
-        <p:txBody>
-          <a:bodyPr wrap="square" lIns="1016" tIns="1016" rIns="1016" bIns="1016" rtlCol="0" anchor="t">
+          <p:cNvPr id="10" name="Text 8"/>
+          <p:cNvSpPr/>
+          <p:nvPr/>
+        </p:nvSpPr>
+        <p:spPr>
+          <a:xfrm>
+            <a:off x="868680" y="1417320"/>
+            <a:ext cx="6675120" cy="4434840"/>
+          </a:xfrm>
+          <a:prstGeom prst="rect">
+            <a:avLst/>
+          </a:prstGeom>
+          <a:noFill/>
+          <a:ln/>
+        </p:spPr>
+        <p:txBody>
+          <a:bodyPr wrap="square" lIns="635" tIns="635" rIns="635" bIns="635" rtlCol="0" anchor="t">
             <a:normAutofit/>
           </a:bodyPr>
           <a:lstStyle/>
           <a:p>
+            <a:r>
+              <a:rPr lang="en-US" sz="1700" dirty="0">
+                <a:solidFill>
+                  <a:srgbClr val="17364A"/>
+                </a:solidFill>
+                <a:latin typeface="Aptos" pitchFamily="34" charset="0"/>
+                <a:ea typeface="Aptos" pitchFamily="34" charset="-122"/>
+                <a:cs typeface="Aptos" pitchFamily="34" charset="-120"/>
+              </a:rPr>
+              <a:t>Which current or proposed AI use case in your agency raises this leadership or governance issue most clearly?</a:t>
+            </a:r>
+            <a:endParaRPr lang="en-US" sz="1700" dirty="0"/>
+          </a:p>
+          <a:p>
+            <a:r>
+              <a:rPr lang="en-US" sz="1700" dirty="0">
+                <a:solidFill>
+                  <a:srgbClr val="17364A"/>
+                </a:solidFill>
+                <a:latin typeface="Aptos" pitchFamily="34" charset="0"/>
+                <a:ea typeface="Aptos" pitchFamily="34" charset="-122"/>
+                <a:cs typeface="Aptos" pitchFamily="34" charset="-120"/>
+              </a:rPr>
+              <a:t>Who currently has authority to make decisions about this issue, and is that authority documented?</a:t>
+            </a:r>
+            <a:endParaRPr lang="en-US" sz="1700" dirty="0"/>
+          </a:p>
+          <a:p>
+            <a:r>
+              <a:rPr lang="en-US" sz="1700" dirty="0">
+                <a:solidFill>
+                  <a:srgbClr val="17364A"/>
+                </a:solidFill>
+                <a:latin typeface="Aptos" pitchFamily="34" charset="0"/>
+                <a:ea typeface="Aptos" pitchFamily="34" charset="-122"/>
+                <a:cs typeface="Aptos" pitchFamily="34" charset="-120"/>
+              </a:rPr>
+              <a:t>What evidence would governance or leadership need before approving the use case?</a:t>
+            </a:r>
+            <a:endParaRPr lang="en-US" sz="1700" dirty="0"/>
+          </a:p>
+        </p:txBody>
+      </p:sp>
+      <p:sp>
+        <p:nvSpPr>
+          <p:cNvPr id="11" name="Shape 9"/>
+          <p:cNvSpPr/>
+          <p:nvPr/>
+        </p:nvSpPr>
+        <p:spPr>
+          <a:xfrm>
+            <a:off x="7909560" y="1417320"/>
+            <a:ext cx="3154680" cy="1828800"/>
+          </a:xfrm>
+          <a:prstGeom prst="roundRect">
+            <a:avLst>
+              <a:gd name="adj" fmla="val 6000"/>
+            </a:avLst>
+          </a:prstGeom>
+          <a:solidFill>
+            <a:srgbClr val="EEF8ED"/>
+          </a:solidFill>
+          <a:ln w="12700">
+            <a:solidFill>
+              <a:srgbClr val="B9D7E6"/>
+            </a:solidFill>
+            <a:prstDash val="solid"/>
+          </a:ln>
+        </p:spPr>
+      </p:sp>
+      <p:sp>
+        <p:nvSpPr>
+          <p:cNvPr id="12" name="Text 10"/>
+          <p:cNvSpPr/>
+          <p:nvPr/>
+        </p:nvSpPr>
+        <p:spPr>
+          <a:xfrm>
+            <a:off x="8074152" y="1563624"/>
+            <a:ext cx="2825496" cy="201168"/>
+          </a:xfrm>
+          <a:prstGeom prst="rect">
+            <a:avLst/>
+          </a:prstGeom>
+          <a:noFill/>
+          <a:ln/>
+        </p:spPr>
+        <p:txBody>
+          <a:bodyPr wrap="square" lIns="0" tIns="0" rIns="0" bIns="0" rtlCol="0" anchor="ctr"/>
+          <a:lstStyle/>
+          <a:p>
             <a:pPr indent="0" marL="0">
               <a:buNone/>
             </a:pPr>
             <a:r>
-              <a:rPr lang="en-US" sz="1420" dirty="0">
+              <a:rPr lang="en-US" sz="950" b="1" dirty="0">
+                <a:solidFill>
+                  <a:srgbClr val="0068B7"/>
+                </a:solidFill>
+                <a:latin typeface="Aptos" pitchFamily="34" charset="0"/>
+                <a:ea typeface="Aptos" pitchFamily="34" charset="-122"/>
+                <a:cs typeface="Aptos" pitchFamily="34" charset="-120"/>
+              </a:rPr>
+              <a:t>Key idea</a:t>
+            </a:r>
+            <a:endParaRPr lang="en-US" sz="950" dirty="0"/>
+          </a:p>
+        </p:txBody>
+      </p:sp>
+      <p:sp>
+        <p:nvSpPr>
+          <p:cNvPr id="13" name="Text 11"/>
+          <p:cNvSpPr/>
+          <p:nvPr/>
+        </p:nvSpPr>
+        <p:spPr>
+          <a:xfrm>
+            <a:off x="8074152" y="1856232"/>
+            <a:ext cx="2825496" cy="1261872"/>
+          </a:xfrm>
+          <a:prstGeom prst="rect">
+            <a:avLst/>
+          </a:prstGeom>
+          <a:noFill/>
+          <a:ln/>
+        </p:spPr>
+        <p:txBody>
+          <a:bodyPr wrap="square" lIns="0" tIns="0" rIns="0" bIns="0" rtlCol="0" anchor="t">
+            <a:normAutofit/>
+          </a:bodyPr>
+          <a:lstStyle/>
+          <a:p>
+            <a:pPr indent="0" marL="0">
+              <a:buNone/>
+            </a:pPr>
+            <a:r>
+              <a:rPr lang="en-US" sz="1250" dirty="0">
                 <a:solidFill>
                   <a:srgbClr val="17364A"/>
                 </a:solidFill>
@@ -3730,9 +5165,116 @@
                 <a:ea typeface="Aptos" pitchFamily="34" charset="-122"/>
                 <a:cs typeface="Aptos" pitchFamily="34" charset="-120"/>
               </a:rPr>
-              <a:t>Create a decision-rights matrix for one AI use case. Include approval, data access, validation, launch, monitoring, incident escalation, risk acceptance, public communication, and retirement.</a:t>
-            </a:r>
-            <a:endParaRPr lang="en-US" sz="1420" dirty="0"/>
+              <a:t>Which current or proposed AI use case in your agency raises this leadership or governance issue most clearly?</a:t>
+            </a:r>
+            <a:endParaRPr lang="en-US" sz="1250" dirty="0"/>
+          </a:p>
+        </p:txBody>
+      </p:sp>
+      <p:sp>
+        <p:nvSpPr>
+          <p:cNvPr id="14" name="Shape 12"/>
+          <p:cNvSpPr/>
+          <p:nvPr/>
+        </p:nvSpPr>
+        <p:spPr>
+          <a:xfrm>
+            <a:off x="7909560" y="3520440"/>
+            <a:ext cx="3154680" cy="1737360"/>
+          </a:xfrm>
+          <a:prstGeom prst="roundRect">
+            <a:avLst>
+              <a:gd name="adj" fmla="val 6316"/>
+            </a:avLst>
+          </a:prstGeom>
+          <a:solidFill>
+            <a:srgbClr val="EAF6F8"/>
+          </a:solidFill>
+          <a:ln w="12700">
+            <a:solidFill>
+              <a:srgbClr val="B9D7E6"/>
+            </a:solidFill>
+            <a:prstDash val="solid"/>
+          </a:ln>
+        </p:spPr>
+      </p:sp>
+      <p:sp>
+        <p:nvSpPr>
+          <p:cNvPr id="15" name="Text 13"/>
+          <p:cNvSpPr/>
+          <p:nvPr/>
+        </p:nvSpPr>
+        <p:spPr>
+          <a:xfrm>
+            <a:off x="8074152" y="3666744"/>
+            <a:ext cx="2825496" cy="201168"/>
+          </a:xfrm>
+          <a:prstGeom prst="rect">
+            <a:avLst/>
+          </a:prstGeom>
+          <a:noFill/>
+          <a:ln/>
+        </p:spPr>
+        <p:txBody>
+          <a:bodyPr wrap="square" lIns="0" tIns="0" rIns="0" bIns="0" rtlCol="0" anchor="ctr"/>
+          <a:lstStyle/>
+          <a:p>
+            <a:pPr indent="0" marL="0">
+              <a:buNone/>
+            </a:pPr>
+            <a:r>
+              <a:rPr lang="en-US" sz="950" b="1" dirty="0">
+                <a:solidFill>
+                  <a:srgbClr val="0068B7"/>
+                </a:solidFill>
+                <a:latin typeface="Aptos" pitchFamily="34" charset="0"/>
+                <a:ea typeface="Aptos" pitchFamily="34" charset="-122"/>
+                <a:cs typeface="Aptos" pitchFamily="34" charset="-120"/>
+              </a:rPr>
+              <a:t>Use this for</a:t>
+            </a:r>
+            <a:endParaRPr lang="en-US" sz="950" dirty="0"/>
+          </a:p>
+        </p:txBody>
+      </p:sp>
+      <p:sp>
+        <p:nvSpPr>
+          <p:cNvPr id="16" name="Text 14"/>
+          <p:cNvSpPr/>
+          <p:nvPr/>
+        </p:nvSpPr>
+        <p:spPr>
+          <a:xfrm>
+            <a:off x="8074152" y="3959352"/>
+            <a:ext cx="2825496" cy="1170432"/>
+          </a:xfrm>
+          <a:prstGeom prst="rect">
+            <a:avLst/>
+          </a:prstGeom>
+          <a:noFill/>
+          <a:ln/>
+        </p:spPr>
+        <p:txBody>
+          <a:bodyPr wrap="square" lIns="0" tIns="0" rIns="0" bIns="0" rtlCol="0" anchor="t">
+            <a:normAutofit/>
+          </a:bodyPr>
+          <a:lstStyle/>
+          <a:p>
+            <a:pPr indent="0" marL="0">
+              <a:buNone/>
+            </a:pPr>
+            <a:r>
+              <a:rPr lang="en-US" sz="1250" dirty="0">
+                <a:solidFill>
+                  <a:srgbClr val="17364A"/>
+                </a:solidFill>
+                <a:latin typeface="Aptos" pitchFamily="34" charset="0"/>
+                <a:ea typeface="Aptos" pitchFamily="34" charset="-122"/>
+                <a:cs typeface="Aptos" pitchFamily="34" charset="-120"/>
+              </a:rPr>
+              <a:t>Connect the concept to public health decisions, safeguards, documentation, or implementation work.</a:t>
+            </a:r>
+            <a:endParaRPr lang="en-US" sz="1250" dirty="0"/>
           </a:p>
         </p:txBody>
       </p:sp>
@@ -3795,7 +5337,32 @@
       </p:sp>
       <p:sp>
         <p:nvSpPr>
-          <p:cNvPr id="3" name="Text 1"/>
+          <p:cNvPr id="3" name="Shape 1"/>
+          <p:cNvSpPr/>
+          <p:nvPr/>
+        </p:nvSpPr>
+        <p:spPr>
+          <a:xfrm>
+            <a:off x="0" y="164592"/>
+            <a:ext cx="146304" cy="6693408"/>
+          </a:xfrm>
+          <a:prstGeom prst="rect">
+            <a:avLst/>
+          </a:prstGeom>
+          <a:solidFill>
+            <a:srgbClr val="2F8A28"/>
+          </a:solidFill>
+          <a:ln w="12700">
+            <a:solidFill>
+              <a:srgbClr val="2F8A28"/>
+            </a:solidFill>
+            <a:prstDash val="solid"/>
+          </a:ln>
+        </p:spPr>
+      </p:sp>
+      <p:sp>
+        <p:nvSpPr>
+          <p:cNvPr id="4" name="Text 2"/>
           <p:cNvSpPr/>
           <p:nvPr/>
         </p:nvSpPr>
@@ -3834,7 +5401,7 @@
       </p:sp>
       <p:sp>
         <p:nvSpPr>
-          <p:cNvPr id="4" name="Text 2"/>
+          <p:cNvPr id="5" name="Text 3"/>
           <p:cNvSpPr/>
           <p:nvPr/>
         </p:nvSpPr>
@@ -3873,7 +5440,7 @@
       </p:sp>
       <p:sp>
         <p:nvSpPr>
-          <p:cNvPr id="5" name="Text 3"/>
+          <p:cNvPr id="6" name="Text 4"/>
           <p:cNvSpPr/>
           <p:nvPr/>
         </p:nvSpPr>
@@ -3912,7 +5479,7 @@
       </p:sp>
       <p:sp>
         <p:nvSpPr>
-          <p:cNvPr id="6" name="Text 4"/>
+          <p:cNvPr id="7" name="Text 5"/>
           <p:cNvSpPr/>
           <p:nvPr/>
         </p:nvSpPr>
@@ -3945,7 +5512,7 @@
                 <a:ea typeface="Aptos Display" pitchFamily="34" charset="-122"/>
                 <a:cs typeface="Aptos Display" pitchFamily="34" charset="-120"/>
               </a:rPr>
-              <a:t>Before You Begin</a:t>
+              <a:t>Reflection Questions Continued</a:t>
             </a:r>
             <a:endParaRPr lang="en-US" sz="2700" dirty="0"/>
           </a:p>
@@ -3953,32 +5520,150 @@
       </p:sp>
       <p:sp>
         <p:nvSpPr>
-          <p:cNvPr id="7" name="Text 5"/>
-          <p:cNvSpPr/>
-          <p:nvPr/>
-        </p:nvSpPr>
-        <p:spPr>
-          <a:xfrm>
-            <a:off x="822960" y="1325880"/>
-            <a:ext cx="10378440" cy="4800600"/>
-          </a:xfrm>
-          <a:prstGeom prst="rect">
-            <a:avLst/>
-          </a:prstGeom>
-          <a:noFill/>
-          <a:ln/>
-        </p:spPr>
-        <p:txBody>
-          <a:bodyPr wrap="square" lIns="1016" tIns="1016" rIns="1016" bIns="1016" rtlCol="0" anchor="t">
+          <p:cNvPr id="8" name="Text 6"/>
+          <p:cNvSpPr/>
+          <p:nvPr/>
+        </p:nvSpPr>
+        <p:spPr>
+          <a:xfrm>
+            <a:off x="868680" y="1417320"/>
+            <a:ext cx="6675120" cy="4434840"/>
+          </a:xfrm>
+          <a:prstGeom prst="rect">
+            <a:avLst/>
+          </a:prstGeom>
+          <a:noFill/>
+          <a:ln/>
+        </p:spPr>
+        <p:txBody>
+          <a:bodyPr wrap="square" lIns="635" tIns="635" rIns="635" bIns="635" rtlCol="0" anchor="t">
             <a:normAutofit/>
           </a:bodyPr>
           <a:lstStyle/>
           <a:p>
+            <a:r>
+              <a:rPr lang="en-US" sz="1700" dirty="0">
+                <a:solidFill>
+                  <a:srgbClr val="17364A"/>
+                </a:solidFill>
+                <a:latin typeface="Aptos" pitchFamily="34" charset="0"/>
+                <a:ea typeface="Aptos" pitchFamily="34" charset="-122"/>
+                <a:cs typeface="Aptos" pitchFamily="34" charset="-120"/>
+              </a:rPr>
+              <a:t>Which staff, partners, or communities would be affected if this issue were handled poorly?</a:t>
+            </a:r>
+            <a:endParaRPr lang="en-US" sz="1700" dirty="0"/>
+          </a:p>
+          <a:p>
+            <a:r>
+              <a:rPr lang="en-US" sz="1700" dirty="0">
+                <a:solidFill>
+                  <a:srgbClr val="17364A"/>
+                </a:solidFill>
+                <a:latin typeface="Aptos" pitchFamily="34" charset="0"/>
+                <a:ea typeface="Aptos" pitchFamily="34" charset="-122"/>
+                <a:cs typeface="Aptos" pitchFamily="34" charset="-120"/>
+              </a:rPr>
+              <a:t>What policy, process, or artifact should be created or updated after this module?</a:t>
+            </a:r>
+            <a:endParaRPr lang="en-US" sz="1700" dirty="0"/>
+          </a:p>
+        </p:txBody>
+      </p:sp>
+      <p:sp>
+        <p:nvSpPr>
+          <p:cNvPr id="9" name="Shape 7"/>
+          <p:cNvSpPr/>
+          <p:nvPr/>
+        </p:nvSpPr>
+        <p:spPr>
+          <a:xfrm>
+            <a:off x="7909560" y="1417320"/>
+            <a:ext cx="3154680" cy="1828800"/>
+          </a:xfrm>
+          <a:prstGeom prst="roundRect">
+            <a:avLst>
+              <a:gd name="adj" fmla="val 6000"/>
+            </a:avLst>
+          </a:prstGeom>
+          <a:solidFill>
+            <a:srgbClr val="EEF8ED"/>
+          </a:solidFill>
+          <a:ln w="12700">
+            <a:solidFill>
+              <a:srgbClr val="B9D7E6"/>
+            </a:solidFill>
+            <a:prstDash val="solid"/>
+          </a:ln>
+        </p:spPr>
+      </p:sp>
+      <p:sp>
+        <p:nvSpPr>
+          <p:cNvPr id="10" name="Text 8"/>
+          <p:cNvSpPr/>
+          <p:nvPr/>
+        </p:nvSpPr>
+        <p:spPr>
+          <a:xfrm>
+            <a:off x="8074152" y="1563624"/>
+            <a:ext cx="2825496" cy="201168"/>
+          </a:xfrm>
+          <a:prstGeom prst="rect">
+            <a:avLst/>
+          </a:prstGeom>
+          <a:noFill/>
+          <a:ln/>
+        </p:spPr>
+        <p:txBody>
+          <a:bodyPr wrap="square" lIns="0" tIns="0" rIns="0" bIns="0" rtlCol="0" anchor="ctr"/>
+          <a:lstStyle/>
+          <a:p>
             <a:pPr indent="0" marL="0">
               <a:buNone/>
             </a:pPr>
             <a:r>
-              <a:rPr lang="en-US" sz="1420" dirty="0">
+              <a:rPr lang="en-US" sz="950" b="1" dirty="0">
+                <a:solidFill>
+                  <a:srgbClr val="0068B7"/>
+                </a:solidFill>
+                <a:latin typeface="Aptos" pitchFamily="34" charset="0"/>
+                <a:ea typeface="Aptos" pitchFamily="34" charset="-122"/>
+                <a:cs typeface="Aptos" pitchFamily="34" charset="-120"/>
+              </a:rPr>
+              <a:t>Key idea</a:t>
+            </a:r>
+            <a:endParaRPr lang="en-US" sz="950" dirty="0"/>
+          </a:p>
+        </p:txBody>
+      </p:sp>
+      <p:sp>
+        <p:nvSpPr>
+          <p:cNvPr id="11" name="Text 9"/>
+          <p:cNvSpPr/>
+          <p:nvPr/>
+        </p:nvSpPr>
+        <p:spPr>
+          <a:xfrm>
+            <a:off x="8074152" y="1856232"/>
+            <a:ext cx="2825496" cy="1261872"/>
+          </a:xfrm>
+          <a:prstGeom prst="rect">
+            <a:avLst/>
+          </a:prstGeom>
+          <a:noFill/>
+          <a:ln/>
+        </p:spPr>
+        <p:txBody>
+          <a:bodyPr wrap="square" lIns="0" tIns="0" rIns="0" bIns="0" rtlCol="0" anchor="t">
+            <a:normAutofit/>
+          </a:bodyPr>
+          <a:lstStyle/>
+          <a:p>
+            <a:pPr indent="0" marL="0">
+              <a:buNone/>
+            </a:pPr>
+            <a:r>
+              <a:rPr lang="en-US" sz="1250" dirty="0">
                 <a:solidFill>
                   <a:srgbClr val="17364A"/>
                 </a:solidFill>
@@ -3986,9 +5671,116 @@
                 <a:ea typeface="Aptos" pitchFamily="34" charset="-122"/>
                 <a:cs typeface="Aptos" pitchFamily="34" charset="-120"/>
               </a:rPr>
-              <a:t>Choose a real or realistic public health AI use case. Document assumptions, unresolved questions, and which agency roles would need to review the artifact before it is adopted. The exercise should produce a work product that could support governance review, leadership discussion, implementation planning, or policy development.</a:t>
-            </a:r>
-            <a:endParaRPr lang="en-US" sz="1420" dirty="0"/>
+              <a:t>Which staff, partners, or communities would be affected if this issue were handled poorly?</a:t>
+            </a:r>
+            <a:endParaRPr lang="en-US" sz="1250" dirty="0"/>
+          </a:p>
+        </p:txBody>
+      </p:sp>
+      <p:sp>
+        <p:nvSpPr>
+          <p:cNvPr id="12" name="Shape 10"/>
+          <p:cNvSpPr/>
+          <p:nvPr/>
+        </p:nvSpPr>
+        <p:spPr>
+          <a:xfrm>
+            <a:off x="7909560" y="3520440"/>
+            <a:ext cx="3154680" cy="1737360"/>
+          </a:xfrm>
+          <a:prstGeom prst="roundRect">
+            <a:avLst>
+              <a:gd name="adj" fmla="val 6316"/>
+            </a:avLst>
+          </a:prstGeom>
+          <a:solidFill>
+            <a:srgbClr val="EAF6F8"/>
+          </a:solidFill>
+          <a:ln w="12700">
+            <a:solidFill>
+              <a:srgbClr val="B9D7E6"/>
+            </a:solidFill>
+            <a:prstDash val="solid"/>
+          </a:ln>
+        </p:spPr>
+      </p:sp>
+      <p:sp>
+        <p:nvSpPr>
+          <p:cNvPr id="13" name="Text 11"/>
+          <p:cNvSpPr/>
+          <p:nvPr/>
+        </p:nvSpPr>
+        <p:spPr>
+          <a:xfrm>
+            <a:off x="8074152" y="3666744"/>
+            <a:ext cx="2825496" cy="201168"/>
+          </a:xfrm>
+          <a:prstGeom prst="rect">
+            <a:avLst/>
+          </a:prstGeom>
+          <a:noFill/>
+          <a:ln/>
+        </p:spPr>
+        <p:txBody>
+          <a:bodyPr wrap="square" lIns="0" tIns="0" rIns="0" bIns="0" rtlCol="0" anchor="ctr"/>
+          <a:lstStyle/>
+          <a:p>
+            <a:pPr indent="0" marL="0">
+              <a:buNone/>
+            </a:pPr>
+            <a:r>
+              <a:rPr lang="en-US" sz="950" b="1" dirty="0">
+                <a:solidFill>
+                  <a:srgbClr val="0068B7"/>
+                </a:solidFill>
+                <a:latin typeface="Aptos" pitchFamily="34" charset="0"/>
+                <a:ea typeface="Aptos" pitchFamily="34" charset="-122"/>
+                <a:cs typeface="Aptos" pitchFamily="34" charset="-120"/>
+              </a:rPr>
+              <a:t>Use this for</a:t>
+            </a:r>
+            <a:endParaRPr lang="en-US" sz="950" dirty="0"/>
+          </a:p>
+        </p:txBody>
+      </p:sp>
+      <p:sp>
+        <p:nvSpPr>
+          <p:cNvPr id="14" name="Text 12"/>
+          <p:cNvSpPr/>
+          <p:nvPr/>
+        </p:nvSpPr>
+        <p:spPr>
+          <a:xfrm>
+            <a:off x="8074152" y="3959352"/>
+            <a:ext cx="2825496" cy="1170432"/>
+          </a:xfrm>
+          <a:prstGeom prst="rect">
+            <a:avLst/>
+          </a:prstGeom>
+          <a:noFill/>
+          <a:ln/>
+        </p:spPr>
+        <p:txBody>
+          <a:bodyPr wrap="square" lIns="0" tIns="0" rIns="0" bIns="0" rtlCol="0" anchor="t">
+            <a:normAutofit/>
+          </a:bodyPr>
+          <a:lstStyle/>
+          <a:p>
+            <a:pPr indent="0" marL="0">
+              <a:buNone/>
+            </a:pPr>
+            <a:r>
+              <a:rPr lang="en-US" sz="1250" dirty="0">
+                <a:solidFill>
+                  <a:srgbClr val="17364A"/>
+                </a:solidFill>
+                <a:latin typeface="Aptos" pitchFamily="34" charset="0"/>
+                <a:ea typeface="Aptos" pitchFamily="34" charset="-122"/>
+                <a:cs typeface="Aptos" pitchFamily="34" charset="-120"/>
+              </a:rPr>
+              <a:t>Connect the concept to public health decisions, safeguards, documentation, or implementation work.</a:t>
+            </a:r>
+            <a:endParaRPr lang="en-US" sz="1250" dirty="0"/>
           </a:p>
         </p:txBody>
       </p:sp>
@@ -4051,7 +5843,32 @@
       </p:sp>
       <p:sp>
         <p:nvSpPr>
-          <p:cNvPr id="3" name="Text 1"/>
+          <p:cNvPr id="3" name="Shape 1"/>
+          <p:cNvSpPr/>
+          <p:nvPr/>
+        </p:nvSpPr>
+        <p:spPr>
+          <a:xfrm>
+            <a:off x="0" y="164592"/>
+            <a:ext cx="146304" cy="6693408"/>
+          </a:xfrm>
+          <a:prstGeom prst="rect">
+            <a:avLst/>
+          </a:prstGeom>
+          <a:solidFill>
+            <a:srgbClr val="2F8A28"/>
+          </a:solidFill>
+          <a:ln w="12700">
+            <a:solidFill>
+              <a:srgbClr val="2F8A28"/>
+            </a:solidFill>
+            <a:prstDash val="solid"/>
+          </a:ln>
+        </p:spPr>
+      </p:sp>
+      <p:sp>
+        <p:nvSpPr>
+          <p:cNvPr id="4" name="Text 2"/>
           <p:cNvSpPr/>
           <p:nvPr/>
         </p:nvSpPr>
@@ -4090,7 +5907,7 @@
       </p:sp>
       <p:sp>
         <p:nvSpPr>
-          <p:cNvPr id="4" name="Text 2"/>
+          <p:cNvPr id="5" name="Text 3"/>
           <p:cNvSpPr/>
           <p:nvPr/>
         </p:nvSpPr>
@@ -4129,7 +5946,7 @@
       </p:sp>
       <p:sp>
         <p:nvSpPr>
-          <p:cNvPr id="5" name="Text 3"/>
+          <p:cNvPr id="6" name="Text 4"/>
           <p:cNvSpPr/>
           <p:nvPr/>
         </p:nvSpPr>
@@ -4168,13 +5985,77 @@
       </p:sp>
       <p:sp>
         <p:nvSpPr>
-          <p:cNvPr id="6" name="Text 4"/>
+          <p:cNvPr id="7" name="Shape 5"/>
           <p:cNvSpPr/>
           <p:nvPr/>
         </p:nvSpPr>
         <p:spPr>
           <a:xfrm>
             <a:off x="640080" y="658368"/>
+            <a:ext cx="420624" cy="420624"/>
+          </a:xfrm>
+          <a:prstGeom prst="ellipse">
+            <a:avLst/>
+          </a:prstGeom>
+          <a:solidFill>
+            <a:srgbClr val="0068B7"/>
+          </a:solidFill>
+          <a:ln w="12700">
+            <a:solidFill>
+              <a:srgbClr val="0068B7"/>
+            </a:solidFill>
+            <a:prstDash val="solid"/>
+          </a:ln>
+        </p:spPr>
+      </p:sp>
+      <p:sp>
+        <p:nvSpPr>
+          <p:cNvPr id="8" name="Text 6"/>
+          <p:cNvSpPr/>
+          <p:nvPr/>
+        </p:nvSpPr>
+        <p:spPr>
+          <a:xfrm>
+            <a:off x="640080" y="731520"/>
+            <a:ext cx="420624" cy="164592"/>
+          </a:xfrm>
+          <a:prstGeom prst="rect">
+            <a:avLst/>
+          </a:prstGeom>
+          <a:noFill/>
+          <a:ln/>
+        </p:spPr>
+        <p:txBody>
+          <a:bodyPr wrap="square" lIns="0" tIns="0" rIns="0" bIns="0" rtlCol="0" anchor="ctr"/>
+          <a:lstStyle/>
+          <a:p>
+            <a:pPr algn="ctr" indent="0" marL="0">
+              <a:buNone/>
+            </a:pPr>
+            <a:r>
+              <a:rPr lang="en-US" sz="1100" b="1" dirty="0">
+                <a:solidFill>
+                  <a:srgbClr val="FFFFFF"/>
+                </a:solidFill>
+                <a:latin typeface="Aptos" pitchFamily="34" charset="0"/>
+                <a:ea typeface="Aptos" pitchFamily="34" charset="-122"/>
+                <a:cs typeface="Aptos" pitchFamily="34" charset="-120"/>
+              </a:rPr>
+              <a:t>10</a:t>
+            </a:r>
+            <a:endParaRPr lang="en-US" sz="1100" dirty="0"/>
+          </a:p>
+        </p:txBody>
+      </p:sp>
+      <p:sp>
+        <p:nvSpPr>
+          <p:cNvPr id="9" name="Text 7"/>
+          <p:cNvSpPr/>
+          <p:nvPr/>
+        </p:nvSpPr>
+        <p:spPr>
+          <a:xfrm>
+            <a:off x="640080" y="621792"/>
             <a:ext cx="10881360" cy="566928"/>
           </a:xfrm>
           <a:prstGeom prst="rect">
@@ -4201,7 +6082,7 @@
                 <a:ea typeface="Aptos Display" pitchFamily="34" charset="-122"/>
                 <a:cs typeface="Aptos Display" pitchFamily="34" charset="-120"/>
               </a:rPr>
-              <a:t>Expected Artifact or Evidence</a:t>
+              <a:t>Practical Exercise</a:t>
             </a:r>
             <a:endParaRPr lang="en-US" sz="2700" dirty="0"/>
           </a:p>
@@ -4209,32 +6090,150 @@
       </p:sp>
       <p:sp>
         <p:nvSpPr>
-          <p:cNvPr id="7" name="Text 5"/>
-          <p:cNvSpPr/>
-          <p:nvPr/>
-        </p:nvSpPr>
-        <p:spPr>
-          <a:xfrm>
-            <a:off x="822960" y="1325880"/>
-            <a:ext cx="10378440" cy="4800600"/>
-          </a:xfrm>
-          <a:prstGeom prst="rect">
-            <a:avLst/>
-          </a:prstGeom>
-          <a:noFill/>
-          <a:ln/>
-        </p:spPr>
-        <p:txBody>
-          <a:bodyPr wrap="square" lIns="1016" tIns="1016" rIns="1016" bIns="1016" rtlCol="0" anchor="t">
+          <p:cNvPr id="10" name="Text 8"/>
+          <p:cNvSpPr/>
+          <p:nvPr/>
+        </p:nvSpPr>
+        <p:spPr>
+          <a:xfrm>
+            <a:off x="868680" y="1417320"/>
+            <a:ext cx="6675120" cy="4434840"/>
+          </a:xfrm>
+          <a:prstGeom prst="rect">
+            <a:avLst/>
+          </a:prstGeom>
+          <a:noFill/>
+          <a:ln/>
+        </p:spPr>
+        <p:txBody>
+          <a:bodyPr wrap="square" lIns="635" tIns="635" rIns="635" bIns="635" rtlCol="0" anchor="t">
             <a:normAutofit/>
           </a:bodyPr>
           <a:lstStyle/>
           <a:p>
+            <a:r>
+              <a:rPr lang="en-US" sz="1700" dirty="0">
+                <a:solidFill>
+                  <a:srgbClr val="17364A"/>
+                </a:solidFill>
+                <a:latin typeface="Aptos" pitchFamily="34" charset="0"/>
+                <a:ea typeface="Aptos" pitchFamily="34" charset="-122"/>
+                <a:cs typeface="Aptos" pitchFamily="34" charset="-120"/>
+              </a:rPr>
+              <a:t>Create a decision-rights matrix for one AI use case.</a:t>
+            </a:r>
+            <a:endParaRPr lang="en-US" sz="1700" dirty="0"/>
+          </a:p>
+          <a:p>
+            <a:r>
+              <a:rPr lang="en-US" sz="1700" dirty="0">
+                <a:solidFill>
+                  <a:srgbClr val="17364A"/>
+                </a:solidFill>
+                <a:latin typeface="Aptos" pitchFamily="34" charset="0"/>
+                <a:ea typeface="Aptos" pitchFamily="34" charset="-122"/>
+                <a:cs typeface="Aptos" pitchFamily="34" charset="-120"/>
+              </a:rPr>
+              <a:t>Include approval, data access, validation, launch, monitoring, incident escalation, risk acceptance, public communication,.</a:t>
+            </a:r>
+            <a:endParaRPr lang="en-US" sz="1700" dirty="0"/>
+          </a:p>
+        </p:txBody>
+      </p:sp>
+      <p:sp>
+        <p:nvSpPr>
+          <p:cNvPr id="11" name="Shape 9"/>
+          <p:cNvSpPr/>
+          <p:nvPr/>
+        </p:nvSpPr>
+        <p:spPr>
+          <a:xfrm>
+            <a:off x="7909560" y="1417320"/>
+            <a:ext cx="3154680" cy="1828800"/>
+          </a:xfrm>
+          <a:prstGeom prst="roundRect">
+            <a:avLst>
+              <a:gd name="adj" fmla="val 6000"/>
+            </a:avLst>
+          </a:prstGeom>
+          <a:solidFill>
+            <a:srgbClr val="EEF8ED"/>
+          </a:solidFill>
+          <a:ln w="12700">
+            <a:solidFill>
+              <a:srgbClr val="B9D7E6"/>
+            </a:solidFill>
+            <a:prstDash val="solid"/>
+          </a:ln>
+        </p:spPr>
+      </p:sp>
+      <p:sp>
+        <p:nvSpPr>
+          <p:cNvPr id="12" name="Text 10"/>
+          <p:cNvSpPr/>
+          <p:nvPr/>
+        </p:nvSpPr>
+        <p:spPr>
+          <a:xfrm>
+            <a:off x="8074152" y="1563624"/>
+            <a:ext cx="2825496" cy="201168"/>
+          </a:xfrm>
+          <a:prstGeom prst="rect">
+            <a:avLst/>
+          </a:prstGeom>
+          <a:noFill/>
+          <a:ln/>
+        </p:spPr>
+        <p:txBody>
+          <a:bodyPr wrap="square" lIns="0" tIns="0" rIns="0" bIns="0" rtlCol="0" anchor="ctr"/>
+          <a:lstStyle/>
+          <a:p>
             <a:pPr indent="0" marL="0">
               <a:buNone/>
             </a:pPr>
             <a:r>
-              <a:rPr lang="en-US" sz="1420" dirty="0">
+              <a:rPr lang="en-US" sz="950" b="1" dirty="0">
+                <a:solidFill>
+                  <a:srgbClr val="0068B7"/>
+                </a:solidFill>
+                <a:latin typeface="Aptos" pitchFamily="34" charset="0"/>
+                <a:ea typeface="Aptos" pitchFamily="34" charset="-122"/>
+                <a:cs typeface="Aptos" pitchFamily="34" charset="-120"/>
+              </a:rPr>
+              <a:t>Key idea</a:t>
+            </a:r>
+            <a:endParaRPr lang="en-US" sz="950" dirty="0"/>
+          </a:p>
+        </p:txBody>
+      </p:sp>
+      <p:sp>
+        <p:nvSpPr>
+          <p:cNvPr id="13" name="Text 11"/>
+          <p:cNvSpPr/>
+          <p:nvPr/>
+        </p:nvSpPr>
+        <p:spPr>
+          <a:xfrm>
+            <a:off x="8074152" y="1856232"/>
+            <a:ext cx="2825496" cy="1261872"/>
+          </a:xfrm>
+          <a:prstGeom prst="rect">
+            <a:avLst/>
+          </a:prstGeom>
+          <a:noFill/>
+          <a:ln/>
+        </p:spPr>
+        <p:txBody>
+          <a:bodyPr wrap="square" lIns="0" tIns="0" rIns="0" bIns="0" rtlCol="0" anchor="t">
+            <a:normAutofit/>
+          </a:bodyPr>
+          <a:lstStyle/>
+          <a:p>
+            <a:pPr indent="0" marL="0">
+              <a:buNone/>
+            </a:pPr>
+            <a:r>
+              <a:rPr lang="en-US" sz="1250" dirty="0">
                 <a:solidFill>
                   <a:srgbClr val="17364A"/>
                 </a:solidFill>
@@ -4242,9 +6241,116 @@
                 <a:ea typeface="Aptos" pitchFamily="34" charset="-122"/>
                 <a:cs typeface="Aptos" pitchFamily="34" charset="-120"/>
               </a:rPr>
-              <a:t>Decision-rights matrix; RACI table; risk acceptance thresholds; escalation authority list.</a:t>
-            </a:r>
-            <a:endParaRPr lang="en-US" sz="1420" dirty="0"/>
+              <a:t>Create a decision-rights matrix for one AI use case.</a:t>
+            </a:r>
+            <a:endParaRPr lang="en-US" sz="1250" dirty="0"/>
+          </a:p>
+        </p:txBody>
+      </p:sp>
+      <p:sp>
+        <p:nvSpPr>
+          <p:cNvPr id="14" name="Shape 12"/>
+          <p:cNvSpPr/>
+          <p:nvPr/>
+        </p:nvSpPr>
+        <p:spPr>
+          <a:xfrm>
+            <a:off x="7909560" y="3520440"/>
+            <a:ext cx="3154680" cy="1737360"/>
+          </a:xfrm>
+          <a:prstGeom prst="roundRect">
+            <a:avLst>
+              <a:gd name="adj" fmla="val 6316"/>
+            </a:avLst>
+          </a:prstGeom>
+          <a:solidFill>
+            <a:srgbClr val="EAF6F8"/>
+          </a:solidFill>
+          <a:ln w="12700">
+            <a:solidFill>
+              <a:srgbClr val="B9D7E6"/>
+            </a:solidFill>
+            <a:prstDash val="solid"/>
+          </a:ln>
+        </p:spPr>
+      </p:sp>
+      <p:sp>
+        <p:nvSpPr>
+          <p:cNvPr id="15" name="Text 13"/>
+          <p:cNvSpPr/>
+          <p:nvPr/>
+        </p:nvSpPr>
+        <p:spPr>
+          <a:xfrm>
+            <a:off x="8074152" y="3666744"/>
+            <a:ext cx="2825496" cy="201168"/>
+          </a:xfrm>
+          <a:prstGeom prst="rect">
+            <a:avLst/>
+          </a:prstGeom>
+          <a:noFill/>
+          <a:ln/>
+        </p:spPr>
+        <p:txBody>
+          <a:bodyPr wrap="square" lIns="0" tIns="0" rIns="0" bIns="0" rtlCol="0" anchor="ctr"/>
+          <a:lstStyle/>
+          <a:p>
+            <a:pPr indent="0" marL="0">
+              <a:buNone/>
+            </a:pPr>
+            <a:r>
+              <a:rPr lang="en-US" sz="950" b="1" dirty="0">
+                <a:solidFill>
+                  <a:srgbClr val="0068B7"/>
+                </a:solidFill>
+                <a:latin typeface="Aptos" pitchFamily="34" charset="0"/>
+                <a:ea typeface="Aptos" pitchFamily="34" charset="-122"/>
+                <a:cs typeface="Aptos" pitchFamily="34" charset="-120"/>
+              </a:rPr>
+              <a:t>Use this for</a:t>
+            </a:r>
+            <a:endParaRPr lang="en-US" sz="950" dirty="0"/>
+          </a:p>
+        </p:txBody>
+      </p:sp>
+      <p:sp>
+        <p:nvSpPr>
+          <p:cNvPr id="16" name="Text 14"/>
+          <p:cNvSpPr/>
+          <p:nvPr/>
+        </p:nvSpPr>
+        <p:spPr>
+          <a:xfrm>
+            <a:off x="8074152" y="3959352"/>
+            <a:ext cx="2825496" cy="1170432"/>
+          </a:xfrm>
+          <a:prstGeom prst="rect">
+            <a:avLst/>
+          </a:prstGeom>
+          <a:noFill/>
+          <a:ln/>
+        </p:spPr>
+        <p:txBody>
+          <a:bodyPr wrap="square" lIns="0" tIns="0" rIns="0" bIns="0" rtlCol="0" anchor="t">
+            <a:normAutofit/>
+          </a:bodyPr>
+          <a:lstStyle/>
+          <a:p>
+            <a:pPr indent="0" marL="0">
+              <a:buNone/>
+            </a:pPr>
+            <a:r>
+              <a:rPr lang="en-US" sz="1250" dirty="0">
+                <a:solidFill>
+                  <a:srgbClr val="17364A"/>
+                </a:solidFill>
+                <a:latin typeface="Aptos" pitchFamily="34" charset="0"/>
+                <a:ea typeface="Aptos" pitchFamily="34" charset="-122"/>
+                <a:cs typeface="Aptos" pitchFamily="34" charset="-120"/>
+              </a:rPr>
+              <a:t>Connect the concept to public health decisions, safeguards, documentation, or implementation work.</a:t>
+            </a:r>
+            <a:endParaRPr lang="en-US" sz="1250" dirty="0"/>
           </a:p>
         </p:txBody>
       </p:sp>
@@ -4307,7 +6413,32 @@
       </p:sp>
       <p:sp>
         <p:nvSpPr>
-          <p:cNvPr id="3" name="Text 1"/>
+          <p:cNvPr id="3" name="Shape 1"/>
+          <p:cNvSpPr/>
+          <p:nvPr/>
+        </p:nvSpPr>
+        <p:spPr>
+          <a:xfrm>
+            <a:off x="0" y="164592"/>
+            <a:ext cx="146304" cy="6693408"/>
+          </a:xfrm>
+          <a:prstGeom prst="rect">
+            <a:avLst/>
+          </a:prstGeom>
+          <a:solidFill>
+            <a:srgbClr val="2F8A28"/>
+          </a:solidFill>
+          <a:ln w="12700">
+            <a:solidFill>
+              <a:srgbClr val="2F8A28"/>
+            </a:solidFill>
+            <a:prstDash val="solid"/>
+          </a:ln>
+        </p:spPr>
+      </p:sp>
+      <p:sp>
+        <p:nvSpPr>
+          <p:cNvPr id="4" name="Text 2"/>
           <p:cNvSpPr/>
           <p:nvPr/>
         </p:nvSpPr>
@@ -4346,7 +6477,7 @@
       </p:sp>
       <p:sp>
         <p:nvSpPr>
-          <p:cNvPr id="4" name="Text 2"/>
+          <p:cNvPr id="5" name="Text 3"/>
           <p:cNvSpPr/>
           <p:nvPr/>
         </p:nvSpPr>
@@ -4385,7 +6516,7 @@
       </p:sp>
       <p:sp>
         <p:nvSpPr>
-          <p:cNvPr id="5" name="Text 3"/>
+          <p:cNvPr id="6" name="Text 4"/>
           <p:cNvSpPr/>
           <p:nvPr/>
         </p:nvSpPr>
@@ -4424,13 +6555,77 @@
       </p:sp>
       <p:sp>
         <p:nvSpPr>
-          <p:cNvPr id="6" name="Text 4"/>
+          <p:cNvPr id="7" name="Shape 5"/>
           <p:cNvSpPr/>
           <p:nvPr/>
         </p:nvSpPr>
         <p:spPr>
           <a:xfrm>
             <a:off x="640080" y="658368"/>
+            <a:ext cx="420624" cy="420624"/>
+          </a:xfrm>
+          <a:prstGeom prst="ellipse">
+            <a:avLst/>
+          </a:prstGeom>
+          <a:solidFill>
+            <a:srgbClr val="0068B7"/>
+          </a:solidFill>
+          <a:ln w="12700">
+            <a:solidFill>
+              <a:srgbClr val="0068B7"/>
+            </a:solidFill>
+            <a:prstDash val="solid"/>
+          </a:ln>
+        </p:spPr>
+      </p:sp>
+      <p:sp>
+        <p:nvSpPr>
+          <p:cNvPr id="8" name="Text 6"/>
+          <p:cNvSpPr/>
+          <p:nvPr/>
+        </p:nvSpPr>
+        <p:spPr>
+          <a:xfrm>
+            <a:off x="640080" y="731520"/>
+            <a:ext cx="420624" cy="164592"/>
+          </a:xfrm>
+          <a:prstGeom prst="rect">
+            <a:avLst/>
+          </a:prstGeom>
+          <a:noFill/>
+          <a:ln/>
+        </p:spPr>
+        <p:txBody>
+          <a:bodyPr wrap="square" lIns="0" tIns="0" rIns="0" bIns="0" rtlCol="0" anchor="ctr"/>
+          <a:lstStyle/>
+          <a:p>
+            <a:pPr algn="ctr" indent="0" marL="0">
+              <a:buNone/>
+            </a:pPr>
+            <a:r>
+              <a:rPr lang="en-US" sz="1100" b="1" dirty="0">
+                <a:solidFill>
+                  <a:srgbClr val="FFFFFF"/>
+                </a:solidFill>
+                <a:latin typeface="Aptos" pitchFamily="34" charset="0"/>
+                <a:ea typeface="Aptos" pitchFamily="34" charset="-122"/>
+                <a:cs typeface="Aptos" pitchFamily="34" charset="-120"/>
+              </a:rPr>
+              <a:t>11</a:t>
+            </a:r>
+            <a:endParaRPr lang="en-US" sz="1100" dirty="0"/>
+          </a:p>
+        </p:txBody>
+      </p:sp>
+      <p:sp>
+        <p:nvSpPr>
+          <p:cNvPr id="9" name="Text 7"/>
+          <p:cNvSpPr/>
+          <p:nvPr/>
+        </p:nvSpPr>
+        <p:spPr>
+          <a:xfrm>
+            <a:off x="640080" y="621792"/>
             <a:ext cx="10881360" cy="566928"/>
           </a:xfrm>
           <a:prstGeom prst="rect">
@@ -4457,7 +6652,7 @@
                 <a:ea typeface="Aptos Display" pitchFamily="34" charset="-122"/>
                 <a:cs typeface="Aptos Display" pitchFamily="34" charset="-120"/>
               </a:rPr>
-              <a:t>Expected Assignment</a:t>
+              <a:t>Before You Begin</a:t>
             </a:r>
             <a:endParaRPr lang="en-US" sz="2700" dirty="0"/>
           </a:p>
@@ -4465,14 +6660,14 @@
       </p:sp>
       <p:sp>
         <p:nvSpPr>
-          <p:cNvPr id="7" name="Text 5"/>
-          <p:cNvSpPr/>
-          <p:nvPr/>
-        </p:nvSpPr>
-        <p:spPr>
-          <a:xfrm>
-            <a:off x="822960" y="1325880"/>
-            <a:ext cx="10378440" cy="4800600"/>
+          <p:cNvPr id="10" name="Text 8"/>
+          <p:cNvSpPr/>
+          <p:nvPr/>
+        </p:nvSpPr>
+        <p:spPr>
+          <a:xfrm>
+            <a:off x="868680" y="1417320"/>
+            <a:ext cx="6675120" cy="4434840"/>
           </a:xfrm>
           <a:prstGeom prst="rect">
             <a:avLst/>
@@ -4487,7 +6682,7 @@
           <a:lstStyle/>
           <a:p>
             <a:r>
-              <a:rPr lang="en-US" sz="1450" dirty="0">
+              <a:rPr lang="en-US" sz="1700" dirty="0">
                 <a:solidFill>
                   <a:srgbClr val="17364A"/>
                 </a:solidFill>
@@ -4495,9 +6690,251 @@
                 <a:ea typeface="Aptos" pitchFamily="34" charset="-122"/>
                 <a:cs typeface="Aptos" pitchFamily="34" charset="-120"/>
               </a:rPr>
-              <a:t>Decision-rights matrix; RACI table; risk acceptance thresholds; escalation authority list.</a:t>
-            </a:r>
-            <a:endParaRPr lang="en-US" sz="1450" dirty="0"/>
+              <a:t>Choose a real or realistic public health AI use case.</a:t>
+            </a:r>
+            <a:endParaRPr lang="en-US" sz="1700" dirty="0"/>
+          </a:p>
+          <a:p>
+            <a:r>
+              <a:rPr lang="en-US" sz="1700" dirty="0">
+                <a:solidFill>
+                  <a:srgbClr val="17364A"/>
+                </a:solidFill>
+                <a:latin typeface="Aptos" pitchFamily="34" charset="0"/>
+                <a:ea typeface="Aptos" pitchFamily="34" charset="-122"/>
+                <a:cs typeface="Aptos" pitchFamily="34" charset="-120"/>
+              </a:rPr>
+              <a:t>Document assumptions, unresolved questions, and which agency roles would need to review the artifact before it is adopted.</a:t>
+            </a:r>
+            <a:endParaRPr lang="en-US" sz="1700" dirty="0"/>
+          </a:p>
+          <a:p>
+            <a:r>
+              <a:rPr lang="en-US" sz="1700" dirty="0">
+                <a:solidFill>
+                  <a:srgbClr val="17364A"/>
+                </a:solidFill>
+                <a:latin typeface="Aptos" pitchFamily="34" charset="0"/>
+                <a:ea typeface="Aptos" pitchFamily="34" charset="-122"/>
+                <a:cs typeface="Aptos" pitchFamily="34" charset="-120"/>
+              </a:rPr>
+              <a:t>The exercise should produce a work product that could support governance review, leadership discussion, implementation.</a:t>
+            </a:r>
+            <a:endParaRPr lang="en-US" sz="1700" dirty="0"/>
+          </a:p>
+        </p:txBody>
+      </p:sp>
+      <p:sp>
+        <p:nvSpPr>
+          <p:cNvPr id="11" name="Shape 9"/>
+          <p:cNvSpPr/>
+          <p:nvPr/>
+        </p:nvSpPr>
+        <p:spPr>
+          <a:xfrm>
+            <a:off x="7909560" y="1417320"/>
+            <a:ext cx="3154680" cy="1828800"/>
+          </a:xfrm>
+          <a:prstGeom prst="roundRect">
+            <a:avLst>
+              <a:gd name="adj" fmla="val 6000"/>
+            </a:avLst>
+          </a:prstGeom>
+          <a:solidFill>
+            <a:srgbClr val="EEF8ED"/>
+          </a:solidFill>
+          <a:ln w="12700">
+            <a:solidFill>
+              <a:srgbClr val="B9D7E6"/>
+            </a:solidFill>
+            <a:prstDash val="solid"/>
+          </a:ln>
+        </p:spPr>
+      </p:sp>
+      <p:sp>
+        <p:nvSpPr>
+          <p:cNvPr id="12" name="Text 10"/>
+          <p:cNvSpPr/>
+          <p:nvPr/>
+        </p:nvSpPr>
+        <p:spPr>
+          <a:xfrm>
+            <a:off x="8074152" y="1563624"/>
+            <a:ext cx="2825496" cy="201168"/>
+          </a:xfrm>
+          <a:prstGeom prst="rect">
+            <a:avLst/>
+          </a:prstGeom>
+          <a:noFill/>
+          <a:ln/>
+        </p:spPr>
+        <p:txBody>
+          <a:bodyPr wrap="square" lIns="0" tIns="0" rIns="0" bIns="0" rtlCol="0" anchor="ctr"/>
+          <a:lstStyle/>
+          <a:p>
+            <a:pPr indent="0" marL="0">
+              <a:buNone/>
+            </a:pPr>
+            <a:r>
+              <a:rPr lang="en-US" sz="950" b="1" dirty="0">
+                <a:solidFill>
+                  <a:srgbClr val="0068B7"/>
+                </a:solidFill>
+                <a:latin typeface="Aptos" pitchFamily="34" charset="0"/>
+                <a:ea typeface="Aptos" pitchFamily="34" charset="-122"/>
+                <a:cs typeface="Aptos" pitchFamily="34" charset="-120"/>
+              </a:rPr>
+              <a:t>Key idea</a:t>
+            </a:r>
+            <a:endParaRPr lang="en-US" sz="950" dirty="0"/>
+          </a:p>
+        </p:txBody>
+      </p:sp>
+      <p:sp>
+        <p:nvSpPr>
+          <p:cNvPr id="13" name="Text 11"/>
+          <p:cNvSpPr/>
+          <p:nvPr/>
+        </p:nvSpPr>
+        <p:spPr>
+          <a:xfrm>
+            <a:off x="8074152" y="1856232"/>
+            <a:ext cx="2825496" cy="1261872"/>
+          </a:xfrm>
+          <a:prstGeom prst="rect">
+            <a:avLst/>
+          </a:prstGeom>
+          <a:noFill/>
+          <a:ln/>
+        </p:spPr>
+        <p:txBody>
+          <a:bodyPr wrap="square" lIns="0" tIns="0" rIns="0" bIns="0" rtlCol="0" anchor="t">
+            <a:normAutofit/>
+          </a:bodyPr>
+          <a:lstStyle/>
+          <a:p>
+            <a:pPr indent="0" marL="0">
+              <a:buNone/>
+            </a:pPr>
+            <a:r>
+              <a:rPr lang="en-US" sz="1250" dirty="0">
+                <a:solidFill>
+                  <a:srgbClr val="17364A"/>
+                </a:solidFill>
+                <a:latin typeface="Aptos" pitchFamily="34" charset="0"/>
+                <a:ea typeface="Aptos" pitchFamily="34" charset="-122"/>
+                <a:cs typeface="Aptos" pitchFamily="34" charset="-120"/>
+              </a:rPr>
+              <a:t>Choose a real or realistic public health AI use case.</a:t>
+            </a:r>
+            <a:endParaRPr lang="en-US" sz="1250" dirty="0"/>
+          </a:p>
+        </p:txBody>
+      </p:sp>
+      <p:sp>
+        <p:nvSpPr>
+          <p:cNvPr id="14" name="Shape 12"/>
+          <p:cNvSpPr/>
+          <p:nvPr/>
+        </p:nvSpPr>
+        <p:spPr>
+          <a:xfrm>
+            <a:off x="7909560" y="3520440"/>
+            <a:ext cx="3154680" cy="1737360"/>
+          </a:xfrm>
+          <a:prstGeom prst="roundRect">
+            <a:avLst>
+              <a:gd name="adj" fmla="val 6316"/>
+            </a:avLst>
+          </a:prstGeom>
+          <a:solidFill>
+            <a:srgbClr val="EAF6F8"/>
+          </a:solidFill>
+          <a:ln w="12700">
+            <a:solidFill>
+              <a:srgbClr val="B9D7E6"/>
+            </a:solidFill>
+            <a:prstDash val="solid"/>
+          </a:ln>
+        </p:spPr>
+      </p:sp>
+      <p:sp>
+        <p:nvSpPr>
+          <p:cNvPr id="15" name="Text 13"/>
+          <p:cNvSpPr/>
+          <p:nvPr/>
+        </p:nvSpPr>
+        <p:spPr>
+          <a:xfrm>
+            <a:off x="8074152" y="3666744"/>
+            <a:ext cx="2825496" cy="201168"/>
+          </a:xfrm>
+          <a:prstGeom prst="rect">
+            <a:avLst/>
+          </a:prstGeom>
+          <a:noFill/>
+          <a:ln/>
+        </p:spPr>
+        <p:txBody>
+          <a:bodyPr wrap="square" lIns="0" tIns="0" rIns="0" bIns="0" rtlCol="0" anchor="ctr"/>
+          <a:lstStyle/>
+          <a:p>
+            <a:pPr indent="0" marL="0">
+              <a:buNone/>
+            </a:pPr>
+            <a:r>
+              <a:rPr lang="en-US" sz="950" b="1" dirty="0">
+                <a:solidFill>
+                  <a:srgbClr val="0068B7"/>
+                </a:solidFill>
+                <a:latin typeface="Aptos" pitchFamily="34" charset="0"/>
+                <a:ea typeface="Aptos" pitchFamily="34" charset="-122"/>
+                <a:cs typeface="Aptos" pitchFamily="34" charset="-120"/>
+              </a:rPr>
+              <a:t>Use this for</a:t>
+            </a:r>
+            <a:endParaRPr lang="en-US" sz="950" dirty="0"/>
+          </a:p>
+        </p:txBody>
+      </p:sp>
+      <p:sp>
+        <p:nvSpPr>
+          <p:cNvPr id="16" name="Text 14"/>
+          <p:cNvSpPr/>
+          <p:nvPr/>
+        </p:nvSpPr>
+        <p:spPr>
+          <a:xfrm>
+            <a:off x="8074152" y="3959352"/>
+            <a:ext cx="2825496" cy="1170432"/>
+          </a:xfrm>
+          <a:prstGeom prst="rect">
+            <a:avLst/>
+          </a:prstGeom>
+          <a:noFill/>
+          <a:ln/>
+        </p:spPr>
+        <p:txBody>
+          <a:bodyPr wrap="square" lIns="0" tIns="0" rIns="0" bIns="0" rtlCol="0" anchor="t">
+            <a:normAutofit/>
+          </a:bodyPr>
+          <a:lstStyle/>
+          <a:p>
+            <a:pPr indent="0" marL="0">
+              <a:buNone/>
+            </a:pPr>
+            <a:r>
+              <a:rPr lang="en-US" sz="1250" dirty="0">
+                <a:solidFill>
+                  <a:srgbClr val="17364A"/>
+                </a:solidFill>
+                <a:latin typeface="Aptos" pitchFamily="34" charset="0"/>
+                <a:ea typeface="Aptos" pitchFamily="34" charset="-122"/>
+                <a:cs typeface="Aptos" pitchFamily="34" charset="-120"/>
+              </a:rPr>
+              <a:t>Connect the concept to public health decisions, safeguards, documentation, or implementation work.</a:t>
+            </a:r>
+            <a:endParaRPr lang="en-US" sz="1250" dirty="0"/>
           </a:p>
         </p:txBody>
       </p:sp>
@@ -4560,7 +6997,32 @@
       </p:sp>
       <p:sp>
         <p:nvSpPr>
-          <p:cNvPr id="3" name="Text 1"/>
+          <p:cNvPr id="3" name="Shape 1"/>
+          <p:cNvSpPr/>
+          <p:nvPr/>
+        </p:nvSpPr>
+        <p:spPr>
+          <a:xfrm>
+            <a:off x="0" y="164592"/>
+            <a:ext cx="146304" cy="6693408"/>
+          </a:xfrm>
+          <a:prstGeom prst="rect">
+            <a:avLst/>
+          </a:prstGeom>
+          <a:solidFill>
+            <a:srgbClr val="2F8A28"/>
+          </a:solidFill>
+          <a:ln w="12700">
+            <a:solidFill>
+              <a:srgbClr val="2F8A28"/>
+            </a:solidFill>
+            <a:prstDash val="solid"/>
+          </a:ln>
+        </p:spPr>
+      </p:sp>
+      <p:sp>
+        <p:nvSpPr>
+          <p:cNvPr id="4" name="Text 2"/>
           <p:cNvSpPr/>
           <p:nvPr/>
         </p:nvSpPr>
@@ -4599,7 +7061,7 @@
       </p:sp>
       <p:sp>
         <p:nvSpPr>
-          <p:cNvPr id="4" name="Text 2"/>
+          <p:cNvPr id="5" name="Text 3"/>
           <p:cNvSpPr/>
           <p:nvPr/>
         </p:nvSpPr>
@@ -4638,7 +7100,7 @@
       </p:sp>
       <p:sp>
         <p:nvSpPr>
-          <p:cNvPr id="5" name="Text 3"/>
+          <p:cNvPr id="6" name="Text 4"/>
           <p:cNvSpPr/>
           <p:nvPr/>
         </p:nvSpPr>
@@ -4677,13 +7139,77 @@
       </p:sp>
       <p:sp>
         <p:nvSpPr>
-          <p:cNvPr id="6" name="Text 4"/>
+          <p:cNvPr id="7" name="Shape 5"/>
           <p:cNvSpPr/>
           <p:nvPr/>
         </p:nvSpPr>
         <p:spPr>
           <a:xfrm>
             <a:off x="640080" y="658368"/>
+            <a:ext cx="420624" cy="420624"/>
+          </a:xfrm>
+          <a:prstGeom prst="ellipse">
+            <a:avLst/>
+          </a:prstGeom>
+          <a:solidFill>
+            <a:srgbClr val="0068B7"/>
+          </a:solidFill>
+          <a:ln w="12700">
+            <a:solidFill>
+              <a:srgbClr val="0068B7"/>
+            </a:solidFill>
+            <a:prstDash val="solid"/>
+          </a:ln>
+        </p:spPr>
+      </p:sp>
+      <p:sp>
+        <p:nvSpPr>
+          <p:cNvPr id="8" name="Text 6"/>
+          <p:cNvSpPr/>
+          <p:nvPr/>
+        </p:nvSpPr>
+        <p:spPr>
+          <a:xfrm>
+            <a:off x="640080" y="731520"/>
+            <a:ext cx="420624" cy="164592"/>
+          </a:xfrm>
+          <a:prstGeom prst="rect">
+            <a:avLst/>
+          </a:prstGeom>
+          <a:noFill/>
+          <a:ln/>
+        </p:spPr>
+        <p:txBody>
+          <a:bodyPr wrap="square" lIns="0" tIns="0" rIns="0" bIns="0" rtlCol="0" anchor="ctr"/>
+          <a:lstStyle/>
+          <a:p>
+            <a:pPr algn="ctr" indent="0" marL="0">
+              <a:buNone/>
+            </a:pPr>
+            <a:r>
+              <a:rPr lang="en-US" sz="1100" b="1" dirty="0">
+                <a:solidFill>
+                  <a:srgbClr val="FFFFFF"/>
+                </a:solidFill>
+                <a:latin typeface="Aptos" pitchFamily="34" charset="0"/>
+                <a:ea typeface="Aptos" pitchFamily="34" charset="-122"/>
+                <a:cs typeface="Aptos" pitchFamily="34" charset="-120"/>
+              </a:rPr>
+              <a:t>12</a:t>
+            </a:r>
+            <a:endParaRPr lang="en-US" sz="1100" dirty="0"/>
+          </a:p>
+        </p:txBody>
+      </p:sp>
+      <p:sp>
+        <p:nvSpPr>
+          <p:cNvPr id="9" name="Text 7"/>
+          <p:cNvSpPr/>
+          <p:nvPr/>
+        </p:nvSpPr>
+        <p:spPr>
+          <a:xfrm>
+            <a:off x="640080" y="621792"/>
             <a:ext cx="10881360" cy="566928"/>
           </a:xfrm>
           <a:prstGeom prst="rect">
@@ -4710,7 +7236,7 @@
                 <a:ea typeface="Aptos Display" pitchFamily="34" charset="-122"/>
                 <a:cs typeface="Aptos Display" pitchFamily="34" charset="-120"/>
               </a:rPr>
-              <a:t>Knowledge Check</a:t>
+              <a:t>Expected Artifact or Evidence</a:t>
             </a:r>
             <a:endParaRPr lang="en-US" sz="2700" dirty="0"/>
           </a:p>
@@ -4718,14 +7244,14 @@
       </p:sp>
       <p:sp>
         <p:nvSpPr>
-          <p:cNvPr id="7" name="Text 5"/>
-          <p:cNvSpPr/>
-          <p:nvPr/>
-        </p:nvSpPr>
-        <p:spPr>
-          <a:xfrm>
-            <a:off x="822960" y="1325880"/>
-            <a:ext cx="10378440" cy="4800600"/>
+          <p:cNvPr id="10" name="Text 8"/>
+          <p:cNvSpPr/>
+          <p:nvPr/>
+        </p:nvSpPr>
+        <p:spPr>
+          <a:xfrm>
+            <a:off x="868680" y="1417320"/>
+            <a:ext cx="6675120" cy="4434840"/>
           </a:xfrm>
           <a:prstGeom prst="rect">
             <a:avLst/>
@@ -4740,7 +7266,7 @@
           <a:lstStyle/>
           <a:p>
             <a:r>
-              <a:rPr lang="en-US" sz="1450" dirty="0">
+              <a:rPr lang="en-US" sz="1700" dirty="0">
                 <a:solidFill>
                   <a:srgbClr val="17364A"/>
                 </a:solidFill>
@@ -4748,13 +7274,106 @@
                 <a:ea typeface="Aptos" pitchFamily="34" charset="-122"/>
                 <a:cs typeface="Aptos" pitchFamily="34" charset="-120"/>
               </a:rPr>
-              <a:t>1. What is the strongest reason this module topic belongs in AI leadership and governance training?</a:t>
-            </a:r>
-            <a:endParaRPr lang="en-US" sz="1450" dirty="0"/>
-          </a:p>
-          <a:p>
-            <a:r>
-              <a:rPr lang="en-US" sz="1450" dirty="0">
+              <a:t>Decision-rights matrix; RACI table; risk acceptance thresholds; escalation authority list.</a:t>
+            </a:r>
+            <a:endParaRPr lang="en-US" sz="1700" dirty="0"/>
+          </a:p>
+        </p:txBody>
+      </p:sp>
+      <p:sp>
+        <p:nvSpPr>
+          <p:cNvPr id="11" name="Shape 9"/>
+          <p:cNvSpPr/>
+          <p:nvPr/>
+        </p:nvSpPr>
+        <p:spPr>
+          <a:xfrm>
+            <a:off x="7909560" y="1417320"/>
+            <a:ext cx="3154680" cy="1828800"/>
+          </a:xfrm>
+          <a:prstGeom prst="roundRect">
+            <a:avLst>
+              <a:gd name="adj" fmla="val 6000"/>
+            </a:avLst>
+          </a:prstGeom>
+          <a:solidFill>
+            <a:srgbClr val="EEF8ED"/>
+          </a:solidFill>
+          <a:ln w="12700">
+            <a:solidFill>
+              <a:srgbClr val="B9D7E6"/>
+            </a:solidFill>
+            <a:prstDash val="solid"/>
+          </a:ln>
+        </p:spPr>
+      </p:sp>
+      <p:sp>
+        <p:nvSpPr>
+          <p:cNvPr id="12" name="Text 10"/>
+          <p:cNvSpPr/>
+          <p:nvPr/>
+        </p:nvSpPr>
+        <p:spPr>
+          <a:xfrm>
+            <a:off x="8074152" y="1563624"/>
+            <a:ext cx="2825496" cy="201168"/>
+          </a:xfrm>
+          <a:prstGeom prst="rect">
+            <a:avLst/>
+          </a:prstGeom>
+          <a:noFill/>
+          <a:ln/>
+        </p:spPr>
+        <p:txBody>
+          <a:bodyPr wrap="square" lIns="0" tIns="0" rIns="0" bIns="0" rtlCol="0" anchor="ctr"/>
+          <a:lstStyle/>
+          <a:p>
+            <a:pPr indent="0" marL="0">
+              <a:buNone/>
+            </a:pPr>
+            <a:r>
+              <a:rPr lang="en-US" sz="950" b="1" dirty="0">
+                <a:solidFill>
+                  <a:srgbClr val="0068B7"/>
+                </a:solidFill>
+                <a:latin typeface="Aptos" pitchFamily="34" charset="0"/>
+                <a:ea typeface="Aptos" pitchFamily="34" charset="-122"/>
+                <a:cs typeface="Aptos" pitchFamily="34" charset="-120"/>
+              </a:rPr>
+              <a:t>Key idea</a:t>
+            </a:r>
+            <a:endParaRPr lang="en-US" sz="950" dirty="0"/>
+          </a:p>
+        </p:txBody>
+      </p:sp>
+      <p:sp>
+        <p:nvSpPr>
+          <p:cNvPr id="13" name="Text 11"/>
+          <p:cNvSpPr/>
+          <p:nvPr/>
+        </p:nvSpPr>
+        <p:spPr>
+          <a:xfrm>
+            <a:off x="8074152" y="1856232"/>
+            <a:ext cx="2825496" cy="1261872"/>
+          </a:xfrm>
+          <a:prstGeom prst="rect">
+            <a:avLst/>
+          </a:prstGeom>
+          <a:noFill/>
+          <a:ln/>
+        </p:spPr>
+        <p:txBody>
+          <a:bodyPr wrap="square" lIns="0" tIns="0" rIns="0" bIns="0" rtlCol="0" anchor="t">
+            <a:normAutofit/>
+          </a:bodyPr>
+          <a:lstStyle/>
+          <a:p>
+            <a:pPr indent="0" marL="0">
+              <a:buNone/>
+            </a:pPr>
+            <a:r>
+              <a:rPr lang="en-US" sz="1250" dirty="0">
                 <a:solidFill>
                   <a:srgbClr val="17364A"/>
                 </a:solidFill>
@@ -4762,13 +7381,106 @@
                 <a:ea typeface="Aptos" pitchFamily="34" charset="-122"/>
                 <a:cs typeface="Aptos" pitchFamily="34" charset="-120"/>
               </a:rPr>
-              <a:t>2. Which practice best supports accountable public health AI governance?</a:t>
-            </a:r>
-            <a:endParaRPr lang="en-US" sz="1450" dirty="0"/>
-          </a:p>
-          <a:p>
-            <a:r>
-              <a:rPr lang="en-US" sz="1450" dirty="0">
+              <a:t>Decision-rights matrix; RACI table; risk acceptance thresholds; escalation authority list.</a:t>
+            </a:r>
+            <a:endParaRPr lang="en-US" sz="1250" dirty="0"/>
+          </a:p>
+        </p:txBody>
+      </p:sp>
+      <p:sp>
+        <p:nvSpPr>
+          <p:cNvPr id="14" name="Shape 12"/>
+          <p:cNvSpPr/>
+          <p:nvPr/>
+        </p:nvSpPr>
+        <p:spPr>
+          <a:xfrm>
+            <a:off x="7909560" y="3520440"/>
+            <a:ext cx="3154680" cy="1737360"/>
+          </a:xfrm>
+          <a:prstGeom prst="roundRect">
+            <a:avLst>
+              <a:gd name="adj" fmla="val 6316"/>
+            </a:avLst>
+          </a:prstGeom>
+          <a:solidFill>
+            <a:srgbClr val="EAF6F8"/>
+          </a:solidFill>
+          <a:ln w="12700">
+            <a:solidFill>
+              <a:srgbClr val="B9D7E6"/>
+            </a:solidFill>
+            <a:prstDash val="solid"/>
+          </a:ln>
+        </p:spPr>
+      </p:sp>
+      <p:sp>
+        <p:nvSpPr>
+          <p:cNvPr id="15" name="Text 13"/>
+          <p:cNvSpPr/>
+          <p:nvPr/>
+        </p:nvSpPr>
+        <p:spPr>
+          <a:xfrm>
+            <a:off x="8074152" y="3666744"/>
+            <a:ext cx="2825496" cy="201168"/>
+          </a:xfrm>
+          <a:prstGeom prst="rect">
+            <a:avLst/>
+          </a:prstGeom>
+          <a:noFill/>
+          <a:ln/>
+        </p:spPr>
+        <p:txBody>
+          <a:bodyPr wrap="square" lIns="0" tIns="0" rIns="0" bIns="0" rtlCol="0" anchor="ctr"/>
+          <a:lstStyle/>
+          <a:p>
+            <a:pPr indent="0" marL="0">
+              <a:buNone/>
+            </a:pPr>
+            <a:r>
+              <a:rPr lang="en-US" sz="950" b="1" dirty="0">
+                <a:solidFill>
+                  <a:srgbClr val="0068B7"/>
+                </a:solidFill>
+                <a:latin typeface="Aptos" pitchFamily="34" charset="0"/>
+                <a:ea typeface="Aptos" pitchFamily="34" charset="-122"/>
+                <a:cs typeface="Aptos" pitchFamily="34" charset="-120"/>
+              </a:rPr>
+              <a:t>Use this for</a:t>
+            </a:r>
+            <a:endParaRPr lang="en-US" sz="950" dirty="0"/>
+          </a:p>
+        </p:txBody>
+      </p:sp>
+      <p:sp>
+        <p:nvSpPr>
+          <p:cNvPr id="16" name="Text 14"/>
+          <p:cNvSpPr/>
+          <p:nvPr/>
+        </p:nvSpPr>
+        <p:spPr>
+          <a:xfrm>
+            <a:off x="8074152" y="3959352"/>
+            <a:ext cx="2825496" cy="1170432"/>
+          </a:xfrm>
+          <a:prstGeom prst="rect">
+            <a:avLst/>
+          </a:prstGeom>
+          <a:noFill/>
+          <a:ln/>
+        </p:spPr>
+        <p:txBody>
+          <a:bodyPr wrap="square" lIns="0" tIns="0" rIns="0" bIns="0" rtlCol="0" anchor="t">
+            <a:normAutofit/>
+          </a:bodyPr>
+          <a:lstStyle/>
+          <a:p>
+            <a:pPr indent="0" marL="0">
+              <a:buNone/>
+            </a:pPr>
+            <a:r>
+              <a:rPr lang="en-US" sz="1250" dirty="0">
                 <a:solidFill>
                   <a:srgbClr val="17364A"/>
                 </a:solidFill>
@@ -4776,37 +7488,9 @@
                 <a:ea typeface="Aptos" pitchFamily="34" charset="-122"/>
                 <a:cs typeface="Aptos" pitchFamily="34" charset="-120"/>
               </a:rPr>
-              <a:t>3. When should an AI use case be escalated for leadership or governance review?</a:t>
-            </a:r>
-            <a:endParaRPr lang="en-US" sz="1450" dirty="0"/>
-          </a:p>
-          <a:p>
-            <a:r>
-              <a:rPr lang="en-US" sz="1450" dirty="0">
-                <a:solidFill>
-                  <a:srgbClr val="17364A"/>
-                </a:solidFill>
-                <a:latin typeface="Aptos" pitchFamily="34" charset="0"/>
-                <a:ea typeface="Aptos" pitchFamily="34" charset="-122"/>
-                <a:cs typeface="Aptos" pitchFamily="34" charset="-120"/>
-              </a:rPr>
-              <a:t>4. What is weak evidence of completion for a leadership and governance module?</a:t>
-            </a:r>
-            <a:endParaRPr lang="en-US" sz="1450" dirty="0"/>
-          </a:p>
-          <a:p>
-            <a:r>
-              <a:rPr lang="en-US" sz="1450" dirty="0">
-                <a:solidFill>
-                  <a:srgbClr val="17364A"/>
-                </a:solidFill>
-                <a:latin typeface="Aptos" pitchFamily="34" charset="0"/>
-                <a:ea typeface="Aptos" pitchFamily="34" charset="-122"/>
-                <a:cs typeface="Aptos" pitchFamily="34" charset="-120"/>
-              </a:rPr>
-              <a:t>5. What should leaders do when an AI use case has meaningful benefits but unresolved risks?</a:t>
-            </a:r>
-            <a:endParaRPr lang="en-US" sz="1450" dirty="0"/>
+              <a:t>Connect the concept to public health decisions, safeguards, documentation, or implementation work.</a:t>
+            </a:r>
+            <a:endParaRPr lang="en-US" sz="1250" dirty="0"/>
           </a:p>
         </p:txBody>
       </p:sp>
@@ -4869,7 +7553,32 @@
       </p:sp>
       <p:sp>
         <p:nvSpPr>
-          <p:cNvPr id="3" name="Text 1"/>
+          <p:cNvPr id="3" name="Shape 1"/>
+          <p:cNvSpPr/>
+          <p:nvPr/>
+        </p:nvSpPr>
+        <p:spPr>
+          <a:xfrm>
+            <a:off x="0" y="164592"/>
+            <a:ext cx="146304" cy="6693408"/>
+          </a:xfrm>
+          <a:prstGeom prst="rect">
+            <a:avLst/>
+          </a:prstGeom>
+          <a:solidFill>
+            <a:srgbClr val="2F8A28"/>
+          </a:solidFill>
+          <a:ln w="12700">
+            <a:solidFill>
+              <a:srgbClr val="2F8A28"/>
+            </a:solidFill>
+            <a:prstDash val="solid"/>
+          </a:ln>
+        </p:spPr>
+      </p:sp>
+      <p:sp>
+        <p:nvSpPr>
+          <p:cNvPr id="4" name="Text 2"/>
           <p:cNvSpPr/>
           <p:nvPr/>
         </p:nvSpPr>
@@ -4908,7 +7617,7 @@
       </p:sp>
       <p:sp>
         <p:nvSpPr>
-          <p:cNvPr id="4" name="Text 2"/>
+          <p:cNvPr id="5" name="Text 3"/>
           <p:cNvSpPr/>
           <p:nvPr/>
         </p:nvSpPr>
@@ -4947,7 +7656,7 @@
       </p:sp>
       <p:sp>
         <p:nvSpPr>
-          <p:cNvPr id="5" name="Text 3"/>
+          <p:cNvPr id="6" name="Text 4"/>
           <p:cNvSpPr/>
           <p:nvPr/>
         </p:nvSpPr>
@@ -4986,13 +7695,77 @@
       </p:sp>
       <p:sp>
         <p:nvSpPr>
-          <p:cNvPr id="6" name="Text 4"/>
+          <p:cNvPr id="7" name="Shape 5"/>
           <p:cNvSpPr/>
           <p:nvPr/>
         </p:nvSpPr>
         <p:spPr>
           <a:xfrm>
             <a:off x="640080" y="658368"/>
+            <a:ext cx="420624" cy="420624"/>
+          </a:xfrm>
+          <a:prstGeom prst="ellipse">
+            <a:avLst/>
+          </a:prstGeom>
+          <a:solidFill>
+            <a:srgbClr val="0068B7"/>
+          </a:solidFill>
+          <a:ln w="12700">
+            <a:solidFill>
+              <a:srgbClr val="0068B7"/>
+            </a:solidFill>
+            <a:prstDash val="solid"/>
+          </a:ln>
+        </p:spPr>
+      </p:sp>
+      <p:sp>
+        <p:nvSpPr>
+          <p:cNvPr id="8" name="Text 6"/>
+          <p:cNvSpPr/>
+          <p:nvPr/>
+        </p:nvSpPr>
+        <p:spPr>
+          <a:xfrm>
+            <a:off x="640080" y="731520"/>
+            <a:ext cx="420624" cy="164592"/>
+          </a:xfrm>
+          <a:prstGeom prst="rect">
+            <a:avLst/>
+          </a:prstGeom>
+          <a:noFill/>
+          <a:ln/>
+        </p:spPr>
+        <p:txBody>
+          <a:bodyPr wrap="square" lIns="0" tIns="0" rIns="0" bIns="0" rtlCol="0" anchor="ctr"/>
+          <a:lstStyle/>
+          <a:p>
+            <a:pPr algn="ctr" indent="0" marL="0">
+              <a:buNone/>
+            </a:pPr>
+            <a:r>
+              <a:rPr lang="en-US" sz="1100" b="1" dirty="0">
+                <a:solidFill>
+                  <a:srgbClr val="FFFFFF"/>
+                </a:solidFill>
+                <a:latin typeface="Aptos" pitchFamily="34" charset="0"/>
+                <a:ea typeface="Aptos" pitchFamily="34" charset="-122"/>
+                <a:cs typeface="Aptos" pitchFamily="34" charset="-120"/>
+              </a:rPr>
+              <a:t>13</a:t>
+            </a:r>
+            <a:endParaRPr lang="en-US" sz="1100" dirty="0"/>
+          </a:p>
+        </p:txBody>
+      </p:sp>
+      <p:sp>
+        <p:nvSpPr>
+          <p:cNvPr id="9" name="Text 7"/>
+          <p:cNvSpPr/>
+          <p:nvPr/>
+        </p:nvSpPr>
+        <p:spPr>
+          <a:xfrm>
+            <a:off x="640080" y="621792"/>
             <a:ext cx="10881360" cy="566928"/>
           </a:xfrm>
           <a:prstGeom prst="rect">
@@ -5019,7 +7792,7 @@
                 <a:ea typeface="Aptos Display" pitchFamily="34" charset="-122"/>
                 <a:cs typeface="Aptos Display" pitchFamily="34" charset="-120"/>
               </a:rPr>
-              <a:t>References and Resources</a:t>
+              <a:t>Expected Assignment</a:t>
             </a:r>
             <a:endParaRPr lang="en-US" sz="2700" dirty="0"/>
           </a:p>
@@ -5027,14 +7800,14 @@
       </p:sp>
       <p:sp>
         <p:nvSpPr>
-          <p:cNvPr id="7" name="Text 5"/>
-          <p:cNvSpPr/>
-          <p:nvPr/>
-        </p:nvSpPr>
-        <p:spPr>
-          <a:xfrm>
-            <a:off x="822960" y="1325880"/>
-            <a:ext cx="10378440" cy="4800600"/>
+          <p:cNvPr id="10" name="Text 8"/>
+          <p:cNvSpPr/>
+          <p:nvPr/>
+        </p:nvSpPr>
+        <p:spPr>
+          <a:xfrm>
+            <a:off x="868680" y="1417320"/>
+            <a:ext cx="6675120" cy="4434840"/>
           </a:xfrm>
           <a:prstGeom prst="rect">
             <a:avLst/>
@@ -5049,7 +7822,7 @@
           <a:lstStyle/>
           <a:p>
             <a:r>
-              <a:rPr lang="en-US" sz="1450" dirty="0">
+              <a:rPr lang="en-US" sz="1700" dirty="0">
                 <a:solidFill>
                   <a:srgbClr val="17364A"/>
                 </a:solidFill>
@@ -5057,13 +7830,106 @@
                 <a:ea typeface="Aptos" pitchFamily="34" charset="-122"/>
                 <a:cs typeface="Aptos" pitchFamily="34" charset="-120"/>
               </a:rPr>
-              <a:t>NIST Artificial Intelligence Risk Management Framework (AI RMF 1.0): https://www.nist.gov/itl/ai-risk-management-framework</a:t>
-            </a:r>
-            <a:endParaRPr lang="en-US" sz="1450" dirty="0"/>
-          </a:p>
-          <a:p>
-            <a:r>
-              <a:rPr lang="en-US" sz="1450" dirty="0">
+              <a:t>Decision-rights matrix; RACI table; risk acceptance thresholds; escalation authority list.</a:t>
+            </a:r>
+            <a:endParaRPr lang="en-US" sz="1700" dirty="0"/>
+          </a:p>
+        </p:txBody>
+      </p:sp>
+      <p:sp>
+        <p:nvSpPr>
+          <p:cNvPr id="11" name="Shape 9"/>
+          <p:cNvSpPr/>
+          <p:nvPr/>
+        </p:nvSpPr>
+        <p:spPr>
+          <a:xfrm>
+            <a:off x="7909560" y="1417320"/>
+            <a:ext cx="3154680" cy="1828800"/>
+          </a:xfrm>
+          <a:prstGeom prst="roundRect">
+            <a:avLst>
+              <a:gd name="adj" fmla="val 6000"/>
+            </a:avLst>
+          </a:prstGeom>
+          <a:solidFill>
+            <a:srgbClr val="EEF8ED"/>
+          </a:solidFill>
+          <a:ln w="12700">
+            <a:solidFill>
+              <a:srgbClr val="B9D7E6"/>
+            </a:solidFill>
+            <a:prstDash val="solid"/>
+          </a:ln>
+        </p:spPr>
+      </p:sp>
+      <p:sp>
+        <p:nvSpPr>
+          <p:cNvPr id="12" name="Text 10"/>
+          <p:cNvSpPr/>
+          <p:nvPr/>
+        </p:nvSpPr>
+        <p:spPr>
+          <a:xfrm>
+            <a:off x="8074152" y="1563624"/>
+            <a:ext cx="2825496" cy="201168"/>
+          </a:xfrm>
+          <a:prstGeom prst="rect">
+            <a:avLst/>
+          </a:prstGeom>
+          <a:noFill/>
+          <a:ln/>
+        </p:spPr>
+        <p:txBody>
+          <a:bodyPr wrap="square" lIns="0" tIns="0" rIns="0" bIns="0" rtlCol="0" anchor="ctr"/>
+          <a:lstStyle/>
+          <a:p>
+            <a:pPr indent="0" marL="0">
+              <a:buNone/>
+            </a:pPr>
+            <a:r>
+              <a:rPr lang="en-US" sz="950" b="1" dirty="0">
+                <a:solidFill>
+                  <a:srgbClr val="0068B7"/>
+                </a:solidFill>
+                <a:latin typeface="Aptos" pitchFamily="34" charset="0"/>
+                <a:ea typeface="Aptos" pitchFamily="34" charset="-122"/>
+                <a:cs typeface="Aptos" pitchFamily="34" charset="-120"/>
+              </a:rPr>
+              <a:t>Key idea</a:t>
+            </a:r>
+            <a:endParaRPr lang="en-US" sz="950" dirty="0"/>
+          </a:p>
+        </p:txBody>
+      </p:sp>
+      <p:sp>
+        <p:nvSpPr>
+          <p:cNvPr id="13" name="Text 11"/>
+          <p:cNvSpPr/>
+          <p:nvPr/>
+        </p:nvSpPr>
+        <p:spPr>
+          <a:xfrm>
+            <a:off x="8074152" y="1856232"/>
+            <a:ext cx="2825496" cy="1261872"/>
+          </a:xfrm>
+          <a:prstGeom prst="rect">
+            <a:avLst/>
+          </a:prstGeom>
+          <a:noFill/>
+          <a:ln/>
+        </p:spPr>
+        <p:txBody>
+          <a:bodyPr wrap="square" lIns="0" tIns="0" rIns="0" bIns="0" rtlCol="0" anchor="t">
+            <a:normAutofit/>
+          </a:bodyPr>
+          <a:lstStyle/>
+          <a:p>
+            <a:pPr indent="0" marL="0">
+              <a:buNone/>
+            </a:pPr>
+            <a:r>
+              <a:rPr lang="en-US" sz="1250" dirty="0">
                 <a:solidFill>
                   <a:srgbClr val="17364A"/>
                 </a:solidFill>
@@ -5071,13 +7937,106 @@
                 <a:ea typeface="Aptos" pitchFamily="34" charset="-122"/>
                 <a:cs typeface="Aptos" pitchFamily="34" charset="-120"/>
               </a:rPr>
-              <a:t>NIST Generative AI Profile: https://www.nist.gov/publications/artificial-intelligence-risk-management-framework-generative-artificial-intelligence</a:t>
-            </a:r>
-            <a:endParaRPr lang="en-US" sz="1450" dirty="0"/>
-          </a:p>
-          <a:p>
-            <a:r>
-              <a:rPr lang="en-US" sz="1450" dirty="0">
+              <a:t>Decision-rights matrix; RACI table; risk acceptance thresholds; escalation authority list.</a:t>
+            </a:r>
+            <a:endParaRPr lang="en-US" sz="1250" dirty="0"/>
+          </a:p>
+        </p:txBody>
+      </p:sp>
+      <p:sp>
+        <p:nvSpPr>
+          <p:cNvPr id="14" name="Shape 12"/>
+          <p:cNvSpPr/>
+          <p:nvPr/>
+        </p:nvSpPr>
+        <p:spPr>
+          <a:xfrm>
+            <a:off x="7909560" y="3520440"/>
+            <a:ext cx="3154680" cy="1737360"/>
+          </a:xfrm>
+          <a:prstGeom prst="roundRect">
+            <a:avLst>
+              <a:gd name="adj" fmla="val 6316"/>
+            </a:avLst>
+          </a:prstGeom>
+          <a:solidFill>
+            <a:srgbClr val="EAF6F8"/>
+          </a:solidFill>
+          <a:ln w="12700">
+            <a:solidFill>
+              <a:srgbClr val="B9D7E6"/>
+            </a:solidFill>
+            <a:prstDash val="solid"/>
+          </a:ln>
+        </p:spPr>
+      </p:sp>
+      <p:sp>
+        <p:nvSpPr>
+          <p:cNvPr id="15" name="Text 13"/>
+          <p:cNvSpPr/>
+          <p:nvPr/>
+        </p:nvSpPr>
+        <p:spPr>
+          <a:xfrm>
+            <a:off x="8074152" y="3666744"/>
+            <a:ext cx="2825496" cy="201168"/>
+          </a:xfrm>
+          <a:prstGeom prst="rect">
+            <a:avLst/>
+          </a:prstGeom>
+          <a:noFill/>
+          <a:ln/>
+        </p:spPr>
+        <p:txBody>
+          <a:bodyPr wrap="square" lIns="0" tIns="0" rIns="0" bIns="0" rtlCol="0" anchor="ctr"/>
+          <a:lstStyle/>
+          <a:p>
+            <a:pPr indent="0" marL="0">
+              <a:buNone/>
+            </a:pPr>
+            <a:r>
+              <a:rPr lang="en-US" sz="950" b="1" dirty="0">
+                <a:solidFill>
+                  <a:srgbClr val="0068B7"/>
+                </a:solidFill>
+                <a:latin typeface="Aptos" pitchFamily="34" charset="0"/>
+                <a:ea typeface="Aptos" pitchFamily="34" charset="-122"/>
+                <a:cs typeface="Aptos" pitchFamily="34" charset="-120"/>
+              </a:rPr>
+              <a:t>Use this for</a:t>
+            </a:r>
+            <a:endParaRPr lang="en-US" sz="950" dirty="0"/>
+          </a:p>
+        </p:txBody>
+      </p:sp>
+      <p:sp>
+        <p:nvSpPr>
+          <p:cNvPr id="16" name="Text 14"/>
+          <p:cNvSpPr/>
+          <p:nvPr/>
+        </p:nvSpPr>
+        <p:spPr>
+          <a:xfrm>
+            <a:off x="8074152" y="3959352"/>
+            <a:ext cx="2825496" cy="1170432"/>
+          </a:xfrm>
+          <a:prstGeom prst="rect">
+            <a:avLst/>
+          </a:prstGeom>
+          <a:noFill/>
+          <a:ln/>
+        </p:spPr>
+        <p:txBody>
+          <a:bodyPr wrap="square" lIns="0" tIns="0" rIns="0" bIns="0" rtlCol="0" anchor="t">
+            <a:normAutofit/>
+          </a:bodyPr>
+          <a:lstStyle/>
+          <a:p>
+            <a:pPr indent="0" marL="0">
+              <a:buNone/>
+            </a:pPr>
+            <a:r>
+              <a:rPr lang="en-US" sz="1250" dirty="0">
                 <a:solidFill>
                   <a:srgbClr val="17364A"/>
                 </a:solidFill>
@@ -5085,37 +8044,9 @@
                 <a:ea typeface="Aptos" pitchFamily="34" charset="-122"/>
                 <a:cs typeface="Aptos" pitchFamily="34" charset="-120"/>
               </a:rPr>
-              <a:t>NIST Privacy Framework</a:t>
-            </a:r>
-            <a:endParaRPr lang="en-US" sz="1450" dirty="0"/>
-          </a:p>
-          <a:p>
-            <a:r>
-              <a:rPr lang="en-US" sz="1450" dirty="0">
-                <a:solidFill>
-                  <a:srgbClr val="17364A"/>
-                </a:solidFill>
-                <a:latin typeface="Aptos" pitchFamily="34" charset="0"/>
-                <a:ea typeface="Aptos" pitchFamily="34" charset="-122"/>
-                <a:cs typeface="Aptos" pitchFamily="34" charset="-120"/>
-              </a:rPr>
-              <a:t>CDC Public Health Data Strategy and Data Modernization resources: https://www.cdc.gov/public-health-data-strategy/php/about/index.html</a:t>
-            </a:r>
-            <a:endParaRPr lang="en-US" sz="1450" dirty="0"/>
-          </a:p>
-          <a:p>
-            <a:r>
-              <a:rPr lang="en-US" sz="1450" dirty="0">
-                <a:solidFill>
-                  <a:srgbClr val="17364A"/>
-                </a:solidFill>
-                <a:latin typeface="Aptos" pitchFamily="34" charset="0"/>
-                <a:ea typeface="Aptos" pitchFamily="34" charset="-122"/>
-                <a:cs typeface="Aptos" pitchFamily="34" charset="-120"/>
-              </a:rPr>
-              <a:t>WHO Ethics and Governance of Artificial Intelligence for Health: https://www.who.int/publications/i/item/9789240029200</a:t>
-            </a:r>
-            <a:endParaRPr lang="en-US" sz="1450" dirty="0"/>
+              <a:t>Connect the concept to public health decisions, safeguards, documentation, or implementation work.</a:t>
+            </a:r>
+            <a:endParaRPr lang="en-US" sz="1250" dirty="0"/>
           </a:p>
         </p:txBody>
       </p:sp>
@@ -5178,7 +8109,32 @@
       </p:sp>
       <p:sp>
         <p:nvSpPr>
-          <p:cNvPr id="3" name="Text 1"/>
+          <p:cNvPr id="3" name="Shape 1"/>
+          <p:cNvSpPr/>
+          <p:nvPr/>
+        </p:nvSpPr>
+        <p:spPr>
+          <a:xfrm>
+            <a:off x="0" y="164592"/>
+            <a:ext cx="146304" cy="6693408"/>
+          </a:xfrm>
+          <a:prstGeom prst="rect">
+            <a:avLst/>
+          </a:prstGeom>
+          <a:solidFill>
+            <a:srgbClr val="2F8A28"/>
+          </a:solidFill>
+          <a:ln w="12700">
+            <a:solidFill>
+              <a:srgbClr val="2F8A28"/>
+            </a:solidFill>
+            <a:prstDash val="solid"/>
+          </a:ln>
+        </p:spPr>
+      </p:sp>
+      <p:sp>
+        <p:nvSpPr>
+          <p:cNvPr id="4" name="Text 2"/>
           <p:cNvSpPr/>
           <p:nvPr/>
         </p:nvSpPr>
@@ -5217,7 +8173,7 @@
       </p:sp>
       <p:sp>
         <p:nvSpPr>
-          <p:cNvPr id="4" name="Text 2"/>
+          <p:cNvPr id="5" name="Text 3"/>
           <p:cNvSpPr/>
           <p:nvPr/>
         </p:nvSpPr>
@@ -5256,7 +8212,7 @@
       </p:sp>
       <p:sp>
         <p:nvSpPr>
-          <p:cNvPr id="5" name="Text 3"/>
+          <p:cNvPr id="6" name="Text 4"/>
           <p:cNvSpPr/>
           <p:nvPr/>
         </p:nvSpPr>
@@ -5295,13 +8251,77 @@
       </p:sp>
       <p:sp>
         <p:nvSpPr>
-          <p:cNvPr id="6" name="Text 4"/>
+          <p:cNvPr id="7" name="Shape 5"/>
           <p:cNvSpPr/>
           <p:nvPr/>
         </p:nvSpPr>
         <p:spPr>
           <a:xfrm>
             <a:off x="640080" y="658368"/>
+            <a:ext cx="420624" cy="420624"/>
+          </a:xfrm>
+          <a:prstGeom prst="ellipse">
+            <a:avLst/>
+          </a:prstGeom>
+          <a:solidFill>
+            <a:srgbClr val="0068B7"/>
+          </a:solidFill>
+          <a:ln w="12700">
+            <a:solidFill>
+              <a:srgbClr val="0068B7"/>
+            </a:solidFill>
+            <a:prstDash val="solid"/>
+          </a:ln>
+        </p:spPr>
+      </p:sp>
+      <p:sp>
+        <p:nvSpPr>
+          <p:cNvPr id="8" name="Text 6"/>
+          <p:cNvSpPr/>
+          <p:nvPr/>
+        </p:nvSpPr>
+        <p:spPr>
+          <a:xfrm>
+            <a:off x="640080" y="731520"/>
+            <a:ext cx="420624" cy="164592"/>
+          </a:xfrm>
+          <a:prstGeom prst="rect">
+            <a:avLst/>
+          </a:prstGeom>
+          <a:noFill/>
+          <a:ln/>
+        </p:spPr>
+        <p:txBody>
+          <a:bodyPr wrap="square" lIns="0" tIns="0" rIns="0" bIns="0" rtlCol="0" anchor="ctr"/>
+          <a:lstStyle/>
+          <a:p>
+            <a:pPr algn="ctr" indent="0" marL="0">
+              <a:buNone/>
+            </a:pPr>
+            <a:r>
+              <a:rPr lang="en-US" sz="1100" b="1" dirty="0">
+                <a:solidFill>
+                  <a:srgbClr val="FFFFFF"/>
+                </a:solidFill>
+                <a:latin typeface="Aptos" pitchFamily="34" charset="0"/>
+                <a:ea typeface="Aptos" pitchFamily="34" charset="-122"/>
+                <a:cs typeface="Aptos" pitchFamily="34" charset="-120"/>
+              </a:rPr>
+              <a:t>14</a:t>
+            </a:r>
+            <a:endParaRPr lang="en-US" sz="1100" dirty="0"/>
+          </a:p>
+        </p:txBody>
+      </p:sp>
+      <p:sp>
+        <p:nvSpPr>
+          <p:cNvPr id="9" name="Text 7"/>
+          <p:cNvSpPr/>
+          <p:nvPr/>
+        </p:nvSpPr>
+        <p:spPr>
+          <a:xfrm>
+            <a:off x="640080" y="621792"/>
             <a:ext cx="10881360" cy="566928"/>
           </a:xfrm>
           <a:prstGeom prst="rect">
@@ -5328,7 +8348,7 @@
                 <a:ea typeface="Aptos Display" pitchFamily="34" charset="-122"/>
                 <a:cs typeface="Aptos Display" pitchFamily="34" charset="-120"/>
               </a:rPr>
-              <a:t>References and Resources Continued</a:t>
+              <a:t>Knowledge Check</a:t>
             </a:r>
             <a:endParaRPr lang="en-US" sz="2700" dirty="0"/>
           </a:p>
@@ -5336,14 +8356,14 @@
       </p:sp>
       <p:sp>
         <p:nvSpPr>
-          <p:cNvPr id="7" name="Text 5"/>
-          <p:cNvSpPr/>
-          <p:nvPr/>
-        </p:nvSpPr>
-        <p:spPr>
-          <a:xfrm>
-            <a:off x="822960" y="1325880"/>
-            <a:ext cx="10378440" cy="4800600"/>
+          <p:cNvPr id="10" name="Text 8"/>
+          <p:cNvSpPr/>
+          <p:nvPr/>
+        </p:nvSpPr>
+        <p:spPr>
+          <a:xfrm>
+            <a:off x="868680" y="1417320"/>
+            <a:ext cx="6675120" cy="4434840"/>
           </a:xfrm>
           <a:prstGeom prst="rect">
             <a:avLst/>
@@ -5358,7 +8378,7 @@
           <a:lstStyle/>
           <a:p>
             <a:r>
-              <a:rPr lang="en-US" sz="1450" dirty="0">
+              <a:rPr lang="en-US" sz="1700" dirty="0">
                 <a:solidFill>
                   <a:srgbClr val="17364A"/>
                 </a:solidFill>
@@ -5366,13 +8386,13 @@
                 <a:ea typeface="Aptos" pitchFamily="34" charset="-122"/>
                 <a:cs typeface="Aptos" pitchFamily="34" charset="-120"/>
               </a:rPr>
-              <a:t>OMB Memorandum M-24-10 on federal AI governance, risk management, and innovation, where relevant to public-sector governance models</a:t>
-            </a:r>
-            <a:endParaRPr lang="en-US" sz="1450" dirty="0"/>
-          </a:p>
-          <a:p>
-            <a:r>
-              <a:rPr lang="en-US" sz="1450" dirty="0">
+              <a:t>1. What is the strongest reason this module topic belongs in AI leadership and governance training?</a:t>
+            </a:r>
+            <a:endParaRPr lang="en-US" sz="1700" dirty="0"/>
+          </a:p>
+          <a:p>
+            <a:r>
+              <a:rPr lang="en-US" sz="1700" dirty="0">
                 <a:solidFill>
                   <a:srgbClr val="17364A"/>
                 </a:solidFill>
@@ -5380,9 +8400,251 @@
                 <a:ea typeface="Aptos" pitchFamily="34" charset="-122"/>
                 <a:cs typeface="Aptos" pitchFamily="34" charset="-120"/>
               </a:rPr>
-              <a:t>Agency strategic plans, procurement policies, privacy policies, cybersecurity policies, records policies, and equity plans</a:t>
-            </a:r>
-            <a:endParaRPr lang="en-US" sz="1450" dirty="0"/>
+              <a:t>2. Which practice best supports accountable public health AI governance?</a:t>
+            </a:r>
+            <a:endParaRPr lang="en-US" sz="1700" dirty="0"/>
+          </a:p>
+          <a:p>
+            <a:r>
+              <a:rPr lang="en-US" sz="1700" dirty="0">
+                <a:solidFill>
+                  <a:srgbClr val="17364A"/>
+                </a:solidFill>
+                <a:latin typeface="Aptos" pitchFamily="34" charset="0"/>
+                <a:ea typeface="Aptos" pitchFamily="34" charset="-122"/>
+                <a:cs typeface="Aptos" pitchFamily="34" charset="-120"/>
+              </a:rPr>
+              <a:t>3. When should an AI use case be escalated for leadership or governance review?</a:t>
+            </a:r>
+            <a:endParaRPr lang="en-US" sz="1700" dirty="0"/>
+          </a:p>
+          <a:p>
+            <a:r>
+              <a:rPr lang="en-US" sz="1700" dirty="0">
+                <a:solidFill>
+                  <a:srgbClr val="17364A"/>
+                </a:solidFill>
+                <a:latin typeface="Aptos" pitchFamily="34" charset="0"/>
+                <a:ea typeface="Aptos" pitchFamily="34" charset="-122"/>
+                <a:cs typeface="Aptos" pitchFamily="34" charset="-120"/>
+              </a:rPr>
+              <a:t>4. What is weak evidence of completion for a leadership and governance module?</a:t>
+            </a:r>
+            <a:endParaRPr lang="en-US" sz="1700" dirty="0"/>
+          </a:p>
+        </p:txBody>
+      </p:sp>
+      <p:sp>
+        <p:nvSpPr>
+          <p:cNvPr id="11" name="Shape 9"/>
+          <p:cNvSpPr/>
+          <p:nvPr/>
+        </p:nvSpPr>
+        <p:spPr>
+          <a:xfrm>
+            <a:off x="7909560" y="1417320"/>
+            <a:ext cx="3154680" cy="1828800"/>
+          </a:xfrm>
+          <a:prstGeom prst="roundRect">
+            <a:avLst>
+              <a:gd name="adj" fmla="val 6000"/>
+            </a:avLst>
+          </a:prstGeom>
+          <a:solidFill>
+            <a:srgbClr val="EEF8ED"/>
+          </a:solidFill>
+          <a:ln w="12700">
+            <a:solidFill>
+              <a:srgbClr val="B9D7E6"/>
+            </a:solidFill>
+            <a:prstDash val="solid"/>
+          </a:ln>
+        </p:spPr>
+      </p:sp>
+      <p:sp>
+        <p:nvSpPr>
+          <p:cNvPr id="12" name="Text 10"/>
+          <p:cNvSpPr/>
+          <p:nvPr/>
+        </p:nvSpPr>
+        <p:spPr>
+          <a:xfrm>
+            <a:off x="8074152" y="1563624"/>
+            <a:ext cx="2825496" cy="201168"/>
+          </a:xfrm>
+          <a:prstGeom prst="rect">
+            <a:avLst/>
+          </a:prstGeom>
+          <a:noFill/>
+          <a:ln/>
+        </p:spPr>
+        <p:txBody>
+          <a:bodyPr wrap="square" lIns="0" tIns="0" rIns="0" bIns="0" rtlCol="0" anchor="ctr"/>
+          <a:lstStyle/>
+          <a:p>
+            <a:pPr indent="0" marL="0">
+              <a:buNone/>
+            </a:pPr>
+            <a:r>
+              <a:rPr lang="en-US" sz="950" b="1" dirty="0">
+                <a:solidFill>
+                  <a:srgbClr val="0068B7"/>
+                </a:solidFill>
+                <a:latin typeface="Aptos" pitchFamily="34" charset="0"/>
+                <a:ea typeface="Aptos" pitchFamily="34" charset="-122"/>
+                <a:cs typeface="Aptos" pitchFamily="34" charset="-120"/>
+              </a:rPr>
+              <a:t>Key idea</a:t>
+            </a:r>
+            <a:endParaRPr lang="en-US" sz="950" dirty="0"/>
+          </a:p>
+        </p:txBody>
+      </p:sp>
+      <p:sp>
+        <p:nvSpPr>
+          <p:cNvPr id="13" name="Text 11"/>
+          <p:cNvSpPr/>
+          <p:nvPr/>
+        </p:nvSpPr>
+        <p:spPr>
+          <a:xfrm>
+            <a:off x="8074152" y="1856232"/>
+            <a:ext cx="2825496" cy="1261872"/>
+          </a:xfrm>
+          <a:prstGeom prst="rect">
+            <a:avLst/>
+          </a:prstGeom>
+          <a:noFill/>
+          <a:ln/>
+        </p:spPr>
+        <p:txBody>
+          <a:bodyPr wrap="square" lIns="0" tIns="0" rIns="0" bIns="0" rtlCol="0" anchor="t">
+            <a:normAutofit/>
+          </a:bodyPr>
+          <a:lstStyle/>
+          <a:p>
+            <a:pPr indent="0" marL="0">
+              <a:buNone/>
+            </a:pPr>
+            <a:r>
+              <a:rPr lang="en-US" sz="1250" dirty="0">
+                <a:solidFill>
+                  <a:srgbClr val="17364A"/>
+                </a:solidFill>
+                <a:latin typeface="Aptos" pitchFamily="34" charset="0"/>
+                <a:ea typeface="Aptos" pitchFamily="34" charset="-122"/>
+                <a:cs typeface="Aptos" pitchFamily="34" charset="-120"/>
+              </a:rPr>
+              <a:t>1. What is the strongest reason this module topic belongs in AI leadership and governance training?</a:t>
+            </a:r>
+            <a:endParaRPr lang="en-US" sz="1250" dirty="0"/>
+          </a:p>
+        </p:txBody>
+      </p:sp>
+      <p:sp>
+        <p:nvSpPr>
+          <p:cNvPr id="14" name="Shape 12"/>
+          <p:cNvSpPr/>
+          <p:nvPr/>
+        </p:nvSpPr>
+        <p:spPr>
+          <a:xfrm>
+            <a:off x="7909560" y="3520440"/>
+            <a:ext cx="3154680" cy="1737360"/>
+          </a:xfrm>
+          <a:prstGeom prst="roundRect">
+            <a:avLst>
+              <a:gd name="adj" fmla="val 6316"/>
+            </a:avLst>
+          </a:prstGeom>
+          <a:solidFill>
+            <a:srgbClr val="EAF6F8"/>
+          </a:solidFill>
+          <a:ln w="12700">
+            <a:solidFill>
+              <a:srgbClr val="B9D7E6"/>
+            </a:solidFill>
+            <a:prstDash val="solid"/>
+          </a:ln>
+        </p:spPr>
+      </p:sp>
+      <p:sp>
+        <p:nvSpPr>
+          <p:cNvPr id="15" name="Text 13"/>
+          <p:cNvSpPr/>
+          <p:nvPr/>
+        </p:nvSpPr>
+        <p:spPr>
+          <a:xfrm>
+            <a:off x="8074152" y="3666744"/>
+            <a:ext cx="2825496" cy="201168"/>
+          </a:xfrm>
+          <a:prstGeom prst="rect">
+            <a:avLst/>
+          </a:prstGeom>
+          <a:noFill/>
+          <a:ln/>
+        </p:spPr>
+        <p:txBody>
+          <a:bodyPr wrap="square" lIns="0" tIns="0" rIns="0" bIns="0" rtlCol="0" anchor="ctr"/>
+          <a:lstStyle/>
+          <a:p>
+            <a:pPr indent="0" marL="0">
+              <a:buNone/>
+            </a:pPr>
+            <a:r>
+              <a:rPr lang="en-US" sz="950" b="1" dirty="0">
+                <a:solidFill>
+                  <a:srgbClr val="0068B7"/>
+                </a:solidFill>
+                <a:latin typeface="Aptos" pitchFamily="34" charset="0"/>
+                <a:ea typeface="Aptos" pitchFamily="34" charset="-122"/>
+                <a:cs typeface="Aptos" pitchFamily="34" charset="-120"/>
+              </a:rPr>
+              <a:t>Use this for</a:t>
+            </a:r>
+            <a:endParaRPr lang="en-US" sz="950" dirty="0"/>
+          </a:p>
+        </p:txBody>
+      </p:sp>
+      <p:sp>
+        <p:nvSpPr>
+          <p:cNvPr id="16" name="Text 14"/>
+          <p:cNvSpPr/>
+          <p:nvPr/>
+        </p:nvSpPr>
+        <p:spPr>
+          <a:xfrm>
+            <a:off x="8074152" y="3959352"/>
+            <a:ext cx="2825496" cy="1170432"/>
+          </a:xfrm>
+          <a:prstGeom prst="rect">
+            <a:avLst/>
+          </a:prstGeom>
+          <a:noFill/>
+          <a:ln/>
+        </p:spPr>
+        <p:txBody>
+          <a:bodyPr wrap="square" lIns="0" tIns="0" rIns="0" bIns="0" rtlCol="0" anchor="t">
+            <a:normAutofit/>
+          </a:bodyPr>
+          <a:lstStyle/>
+          <a:p>
+            <a:pPr indent="0" marL="0">
+              <a:buNone/>
+            </a:pPr>
+            <a:r>
+              <a:rPr lang="en-US" sz="1250" dirty="0">
+                <a:solidFill>
+                  <a:srgbClr val="17364A"/>
+                </a:solidFill>
+                <a:latin typeface="Aptos" pitchFamily="34" charset="0"/>
+                <a:ea typeface="Aptos" pitchFamily="34" charset="-122"/>
+                <a:cs typeface="Aptos" pitchFamily="34" charset="-120"/>
+              </a:rPr>
+              <a:t>Connect the concept to public health decisions, safeguards, documentation, or implementation work.</a:t>
+            </a:r>
+            <a:endParaRPr lang="en-US" sz="1250" dirty="0"/>
           </a:p>
         </p:txBody>
       </p:sp>
@@ -5445,7 +8707,32 @@
       </p:sp>
       <p:sp>
         <p:nvSpPr>
-          <p:cNvPr id="3" name="Text 1"/>
+          <p:cNvPr id="3" name="Shape 1"/>
+          <p:cNvSpPr/>
+          <p:nvPr/>
+        </p:nvSpPr>
+        <p:spPr>
+          <a:xfrm>
+            <a:off x="0" y="164592"/>
+            <a:ext cx="146304" cy="6693408"/>
+          </a:xfrm>
+          <a:prstGeom prst="rect">
+            <a:avLst/>
+          </a:prstGeom>
+          <a:solidFill>
+            <a:srgbClr val="2F8A28"/>
+          </a:solidFill>
+          <a:ln w="12700">
+            <a:solidFill>
+              <a:srgbClr val="2F8A28"/>
+            </a:solidFill>
+            <a:prstDash val="solid"/>
+          </a:ln>
+        </p:spPr>
+      </p:sp>
+      <p:sp>
+        <p:nvSpPr>
+          <p:cNvPr id="4" name="Text 2"/>
           <p:cNvSpPr/>
           <p:nvPr/>
         </p:nvSpPr>
@@ -5484,7 +8771,7 @@
       </p:sp>
       <p:sp>
         <p:nvSpPr>
-          <p:cNvPr id="4" name="Text 2"/>
+          <p:cNvPr id="5" name="Text 3"/>
           <p:cNvSpPr/>
           <p:nvPr/>
         </p:nvSpPr>
@@ -5523,7 +8810,7 @@
       </p:sp>
       <p:sp>
         <p:nvSpPr>
-          <p:cNvPr id="5" name="Text 3"/>
+          <p:cNvPr id="6" name="Text 4"/>
           <p:cNvSpPr/>
           <p:nvPr/>
         </p:nvSpPr>
@@ -5562,7 +8849,7 @@
       </p:sp>
       <p:sp>
         <p:nvSpPr>
-          <p:cNvPr id="6" name="Text 4"/>
+          <p:cNvPr id="7" name="Text 5"/>
           <p:cNvSpPr/>
           <p:nvPr/>
         </p:nvSpPr>
@@ -5595,7 +8882,7 @@
                 <a:ea typeface="Aptos Display" pitchFamily="34" charset="-122"/>
                 <a:cs typeface="Aptos Display" pitchFamily="34" charset="-120"/>
               </a:rPr>
-              <a:t>Module Context</a:t>
+              <a:t>What this module helps you do</a:t>
             </a:r>
             <a:endParaRPr lang="en-US" sz="2700" dirty="0"/>
           </a:p>
@@ -5603,14 +8890,14 @@
       </p:sp>
       <p:sp>
         <p:nvSpPr>
-          <p:cNvPr id="7" name="Text 5"/>
-          <p:cNvSpPr/>
-          <p:nvPr/>
-        </p:nvSpPr>
-        <p:spPr>
-          <a:xfrm>
-            <a:off x="822960" y="1325880"/>
-            <a:ext cx="10378440" cy="1371600"/>
+          <p:cNvPr id="8" name="Text 6"/>
+          <p:cNvSpPr/>
+          <p:nvPr/>
+        </p:nvSpPr>
+        <p:spPr>
+          <a:xfrm>
+            <a:off x="868680" y="1417320"/>
+            <a:ext cx="6675120" cy="3291840"/>
           </a:xfrm>
           <a:prstGeom prst="rect">
             <a:avLst/>
@@ -5625,7 +8912,7 @@
           <a:lstStyle/>
           <a:p>
             <a:r>
-              <a:rPr lang="en-US" sz="1600" dirty="0">
+              <a:rPr lang="en-US" sz="1700" dirty="0">
                 <a:solidFill>
                   <a:srgbClr val="17364A"/>
                 </a:solidFill>
@@ -5633,13 +8920,13 @@
                 <a:ea typeface="Aptos" pitchFamily="34" charset="-122"/>
                 <a:cs typeface="Aptos" pitchFamily="34" charset="-120"/>
               </a:rPr>
-              <a:t>Level: advanced/leadership</a:t>
-            </a:r>
-            <a:endParaRPr lang="en-US" sz="1600" dirty="0"/>
-          </a:p>
-          <a:p>
-            <a:r>
-              <a:rPr lang="en-US" sz="1600" dirty="0">
+              <a:t>AI governance can only work when decision rights are clear.</a:t>
+            </a:r>
+            <a:endParaRPr lang="en-US" sz="1700" dirty="0"/>
+          </a:p>
+          <a:p>
+            <a:r>
+              <a:rPr lang="en-US" sz="1700" dirty="0">
                 <a:solidFill>
                   <a:srgbClr val="17364A"/>
                 </a:solidFill>
@@ -5647,13 +8934,13 @@
                 <a:ea typeface="Aptos" pitchFamily="34" charset="-122"/>
                 <a:cs typeface="Aptos" pitchFamily="34" charset="-120"/>
               </a:rPr>
-              <a:t>Primary track: Public Health Executive Leadership Track</a:t>
-            </a:r>
-            <a:endParaRPr lang="en-US" sz="1600" dirty="0"/>
-          </a:p>
-          <a:p>
-            <a:r>
-              <a:rPr lang="en-US" sz="1600" dirty="0">
+              <a:t>Leaders need to know who can approve a pilot, who can accept residual risk, who can authorize use of sensitive data, who can pause a tool, and who.</a:t>
+            </a:r>
+            <a:endParaRPr lang="en-US" sz="1700" dirty="0"/>
+          </a:p>
+          <a:p>
+            <a:r>
+              <a:rPr lang="en-US" sz="1700" dirty="0">
                 <a:solidFill>
                   <a:srgbClr val="17364A"/>
                 </a:solidFill>
@@ -5661,31 +8948,111 @@
                 <a:ea typeface="Aptos" pitchFamily="34" charset="-122"/>
                 <a:cs typeface="Aptos" pitchFamily="34" charset="-120"/>
               </a:rPr>
-              <a:t>Appears in tracks: governance-security</a:t>
-            </a:r>
-            <a:endParaRPr lang="en-US" sz="1600" dirty="0"/>
-          </a:p>
-        </p:txBody>
-      </p:sp>
-      <p:sp>
-        <p:nvSpPr>
-          <p:cNvPr id="8" name="Text 6"/>
-          <p:cNvSpPr/>
-          <p:nvPr/>
-        </p:nvSpPr>
-        <p:spPr>
-          <a:xfrm>
-            <a:off x="822960" y="2743200"/>
-            <a:ext cx="10378440" cy="2834640"/>
-          </a:xfrm>
-          <a:prstGeom prst="rect">
-            <a:avLst/>
-          </a:prstGeom>
-          <a:noFill/>
-          <a:ln/>
-        </p:spPr>
-        <p:txBody>
-          <a:bodyPr wrap="square" lIns="1016" tIns="1016" rIns="1016" bIns="1016" rtlCol="0" anchor="t">
+              <a:t>Ambiguous accountability is especially risky in public health because AI outputs may influence investigations, communications, referrals, resource.</a:t>
+            </a:r>
+            <a:endParaRPr lang="en-US" sz="1700" dirty="0"/>
+          </a:p>
+          <a:p>
+            <a:r>
+              <a:rPr lang="en-US" sz="1700" dirty="0">
+                <a:solidFill>
+                  <a:srgbClr val="17364A"/>
+                </a:solidFill>
+                <a:latin typeface="Aptos" pitchFamily="34" charset="0"/>
+                <a:ea typeface="Aptos" pitchFamily="34" charset="-122"/>
+                <a:cs typeface="Aptos" pitchFamily="34" charset="-120"/>
+              </a:rPr>
+              <a:t>This module focuses on executive decision rights and accountability structures.</a:t>
+            </a:r>
+            <a:endParaRPr lang="en-US" sz="1700" dirty="0"/>
+          </a:p>
+        </p:txBody>
+      </p:sp>
+      <p:sp>
+        <p:nvSpPr>
+          <p:cNvPr id="9" name="Shape 7"/>
+          <p:cNvSpPr/>
+          <p:nvPr/>
+        </p:nvSpPr>
+        <p:spPr>
+          <a:xfrm>
+            <a:off x="7909560" y="1417320"/>
+            <a:ext cx="3154680" cy="1920240"/>
+          </a:xfrm>
+          <a:prstGeom prst="roundRect">
+            <a:avLst>
+              <a:gd name="adj" fmla="val 5714"/>
+            </a:avLst>
+          </a:prstGeom>
+          <a:solidFill>
+            <a:srgbClr val="EAF6F8"/>
+          </a:solidFill>
+          <a:ln w="12700">
+            <a:solidFill>
+              <a:srgbClr val="B9D7E6"/>
+            </a:solidFill>
+            <a:prstDash val="solid"/>
+          </a:ln>
+        </p:spPr>
+      </p:sp>
+      <p:sp>
+        <p:nvSpPr>
+          <p:cNvPr id="10" name="Text 8"/>
+          <p:cNvSpPr/>
+          <p:nvPr/>
+        </p:nvSpPr>
+        <p:spPr>
+          <a:xfrm>
+            <a:off x="8074152" y="1563624"/>
+            <a:ext cx="2825496" cy="201168"/>
+          </a:xfrm>
+          <a:prstGeom prst="rect">
+            <a:avLst/>
+          </a:prstGeom>
+          <a:noFill/>
+          <a:ln/>
+        </p:spPr>
+        <p:txBody>
+          <a:bodyPr wrap="square" lIns="0" tIns="0" rIns="0" bIns="0" rtlCol="0" anchor="ctr"/>
+          <a:lstStyle/>
+          <a:p>
+            <a:pPr indent="0" marL="0">
+              <a:buNone/>
+            </a:pPr>
+            <a:r>
+              <a:rPr lang="en-US" sz="950" b="1" dirty="0">
+                <a:solidFill>
+                  <a:srgbClr val="0068B7"/>
+                </a:solidFill>
+                <a:latin typeface="Aptos" pitchFamily="34" charset="0"/>
+                <a:ea typeface="Aptos" pitchFamily="34" charset="-122"/>
+                <a:cs typeface="Aptos" pitchFamily="34" charset="-120"/>
+              </a:rPr>
+              <a:t>Module details</a:t>
+            </a:r>
+            <a:endParaRPr lang="en-US" sz="950" dirty="0"/>
+          </a:p>
+        </p:txBody>
+      </p:sp>
+      <p:sp>
+        <p:nvSpPr>
+          <p:cNvPr id="11" name="Text 9"/>
+          <p:cNvSpPr/>
+          <p:nvPr/>
+        </p:nvSpPr>
+        <p:spPr>
+          <a:xfrm>
+            <a:off x="8074152" y="1856232"/>
+            <a:ext cx="2825496" cy="1353312"/>
+          </a:xfrm>
+          <a:prstGeom prst="rect">
+            <a:avLst/>
+          </a:prstGeom>
+          <a:noFill/>
+          <a:ln/>
+        </p:spPr>
+        <p:txBody>
+          <a:bodyPr wrap="square" lIns="0" tIns="0" rIns="0" bIns="0" rtlCol="0" anchor="t">
             <a:normAutofit/>
           </a:bodyPr>
           <a:lstStyle/>
@@ -5694,7 +9061,7 @@
               <a:buNone/>
             </a:pPr>
             <a:r>
-              <a:rPr lang="en-US" sz="1400" dirty="0">
+              <a:rPr lang="en-US" sz="1250" dirty="0">
                 <a:solidFill>
                   <a:srgbClr val="17364A"/>
                 </a:solidFill>
@@ -5702,9 +9069,1254 @@
                 <a:ea typeface="Aptos" pitchFamily="34" charset="-122"/>
                 <a:cs typeface="Aptos" pitchFamily="34" charset="-120"/>
               </a:rPr>
-              <a:t>AI governance can only work when decision rights are clear. Leaders need to know who can approve a pilot, who can accept residual risk, who can authorize use of sensitive data, who can pause a tool, and who is accountable when an AI-supported workflow affects public health action. Ambiguous accountability is especially risky in public health because AI outputs may influence investigations, communications, referrals, resource allocation, and community trust. This module focuses on executive decision rights and accountability structures. Learners examine how to assign ownership across strategy, risk, technical implementation, program operations, privacy, legal, cybersecurity, procurement, communications, and community accountability. The module emphasizes that accountability cannot be delegated to a vendor or to the AI system itself. Public health agencies remain accountable for how AI is selected, used, monitored, and explained.</a:t>
-            </a:r>
-            <a:endParaRPr lang="en-US" sz="1400" dirty="0"/>
+              <a:t>Level: advanced/leadership</a:t>
+            </a:r>
+            <a:endParaRPr lang="en-US" sz="1250" dirty="0"/>
+          </a:p>
+          <a:p>
+            <a:pPr indent="0" marL="0">
+              <a:buNone/>
+            </a:pPr>
+            <a:r>
+              <a:rPr lang="en-US" sz="1250" dirty="0">
+                <a:solidFill>
+                  <a:srgbClr val="17364A"/>
+                </a:solidFill>
+                <a:latin typeface="Aptos" pitchFamily="34" charset="0"/>
+                <a:ea typeface="Aptos" pitchFamily="34" charset="-122"/>
+                <a:cs typeface="Aptos" pitchFamily="34" charset="-120"/>
+              </a:rPr>
+              <a:t>Primary track: Public Health Executive Leadership Track</a:t>
+            </a:r>
+            <a:endParaRPr lang="en-US" sz="1250" dirty="0"/>
+          </a:p>
+          <a:p>
+            <a:pPr indent="0" marL="0">
+              <a:buNone/>
+            </a:pPr>
+            <a:r>
+              <a:rPr lang="en-US" sz="1250" dirty="0">
+                <a:solidFill>
+                  <a:srgbClr val="17364A"/>
+                </a:solidFill>
+                <a:latin typeface="Aptos" pitchFamily="34" charset="0"/>
+                <a:ea typeface="Aptos" pitchFamily="34" charset="-122"/>
+                <a:cs typeface="Aptos" pitchFamily="34" charset="-120"/>
+              </a:rPr>
+              <a:t>Appears in tracks: governance-security</a:t>
+            </a:r>
+            <a:endParaRPr lang="en-US" sz="1250" dirty="0"/>
+          </a:p>
+        </p:txBody>
+      </p:sp>
+      <p:sp>
+        <p:nvSpPr>
+          <p:cNvPr id="12" name="Shape 10"/>
+          <p:cNvSpPr/>
+          <p:nvPr/>
+        </p:nvSpPr>
+        <p:spPr>
+          <a:xfrm>
+            <a:off x="7909560" y="3611880"/>
+            <a:ext cx="3154680" cy="1783080"/>
+          </a:xfrm>
+          <a:prstGeom prst="roundRect">
+            <a:avLst>
+              <a:gd name="adj" fmla="val 6154"/>
+            </a:avLst>
+          </a:prstGeom>
+          <a:solidFill>
+            <a:srgbClr val="EEF8ED"/>
+          </a:solidFill>
+          <a:ln w="12700">
+            <a:solidFill>
+              <a:srgbClr val="B9D7E6"/>
+            </a:solidFill>
+            <a:prstDash val="solid"/>
+          </a:ln>
+        </p:spPr>
+      </p:sp>
+      <p:sp>
+        <p:nvSpPr>
+          <p:cNvPr id="13" name="Text 11"/>
+          <p:cNvSpPr/>
+          <p:nvPr/>
+        </p:nvSpPr>
+        <p:spPr>
+          <a:xfrm>
+            <a:off x="8074152" y="3758184"/>
+            <a:ext cx="2825496" cy="201168"/>
+          </a:xfrm>
+          <a:prstGeom prst="rect">
+            <a:avLst/>
+          </a:prstGeom>
+          <a:noFill/>
+          <a:ln/>
+        </p:spPr>
+        <p:txBody>
+          <a:bodyPr wrap="square" lIns="0" tIns="0" rIns="0" bIns="0" rtlCol="0" anchor="ctr"/>
+          <a:lstStyle/>
+          <a:p>
+            <a:pPr indent="0" marL="0">
+              <a:buNone/>
+            </a:pPr>
+            <a:r>
+              <a:rPr lang="en-US" sz="950" b="1" dirty="0">
+                <a:solidFill>
+                  <a:srgbClr val="0068B7"/>
+                </a:solidFill>
+                <a:latin typeface="Aptos" pitchFamily="34" charset="0"/>
+                <a:ea typeface="Aptos" pitchFamily="34" charset="-122"/>
+                <a:cs typeface="Aptos" pitchFamily="34" charset="-120"/>
+              </a:rPr>
+              <a:t>Learning approach</a:t>
+            </a:r>
+            <a:endParaRPr lang="en-US" sz="950" dirty="0"/>
+          </a:p>
+        </p:txBody>
+      </p:sp>
+      <p:sp>
+        <p:nvSpPr>
+          <p:cNvPr id="14" name="Text 12"/>
+          <p:cNvSpPr/>
+          <p:nvPr/>
+        </p:nvSpPr>
+        <p:spPr>
+          <a:xfrm>
+            <a:off x="8074152" y="4050792"/>
+            <a:ext cx="2825496" cy="1216152"/>
+          </a:xfrm>
+          <a:prstGeom prst="rect">
+            <a:avLst/>
+          </a:prstGeom>
+          <a:noFill/>
+          <a:ln/>
+        </p:spPr>
+        <p:txBody>
+          <a:bodyPr wrap="square" lIns="0" tIns="0" rIns="0" bIns="0" rtlCol="0" anchor="t">
+            <a:normAutofit/>
+          </a:bodyPr>
+          <a:lstStyle/>
+          <a:p>
+            <a:pPr indent="0" marL="0">
+              <a:buNone/>
+            </a:pPr>
+            <a:r>
+              <a:rPr lang="en-US" sz="1250" dirty="0">
+                <a:solidFill>
+                  <a:srgbClr val="17364A"/>
+                </a:solidFill>
+                <a:latin typeface="Aptos" pitchFamily="34" charset="0"/>
+                <a:ea typeface="Aptos" pitchFamily="34" charset="-122"/>
+                <a:cs typeface="Aptos" pitchFamily="34" charset="-120"/>
+              </a:rPr>
+              <a:t>Review the core ideas, complete the practical exercise, check your understanding, and use the related plays and tools to apply the lesson.</a:t>
+            </a:r>
+            <a:endParaRPr lang="en-US" sz="1250" dirty="0"/>
+          </a:p>
+        </p:txBody>
+      </p:sp>
+    </p:spTree>
+  </p:cSld>
+  <p:clrMapOvr>
+    <a:masterClrMapping/>
+  </p:clrMapOvr>
+</p:sld>
+</file>
+
+<file path=ppt/slides/slide20.xml><?xml version="1.0" encoding="utf-8"?>
+<p:sld xmlns:a="http://schemas.openxmlformats.org/drawingml/2006/main" xmlns:r="http://schemas.openxmlformats.org/officeDocument/2006/relationships" xmlns:p="http://schemas.openxmlformats.org/presentationml/2006/main">
+  <p:cSld name="Slide 20">
+    <p:bg>
+      <p:bgPr>
+        <a:solidFill>
+          <a:srgbClr val="F7FBFD"/>
+        </a:solidFill>
+      </p:bgPr>
+    </p:bg>
+    <p:spTree>
+      <p:nvGrpSpPr>
+        <p:cNvPr id="1" name=""/>
+        <p:cNvGrpSpPr/>
+        <p:nvPr/>
+      </p:nvGrpSpPr>
+      <p:grpSpPr>
+        <a:xfrm>
+          <a:off x="0" y="0"/>
+          <a:ext cx="0" cy="0"/>
+          <a:chOff x="0" y="0"/>
+          <a:chExt cx="0" cy="0"/>
+        </a:xfrm>
+      </p:grpSpPr>
+      <p:sp>
+        <p:nvSpPr>
+          <p:cNvPr id="2" name="Shape 0"/>
+          <p:cNvSpPr/>
+          <p:nvPr/>
+        </p:nvSpPr>
+        <p:spPr>
+          <a:xfrm>
+            <a:off x="0" y="0"/>
+            <a:ext cx="12191695" cy="164592"/>
+          </a:xfrm>
+          <a:prstGeom prst="rect">
+            <a:avLst/>
+          </a:prstGeom>
+          <a:solidFill>
+            <a:srgbClr val="0068B7"/>
+          </a:solidFill>
+          <a:ln w="12700">
+            <a:solidFill>
+              <a:srgbClr val="0068B7"/>
+            </a:solidFill>
+            <a:prstDash val="solid"/>
+          </a:ln>
+        </p:spPr>
+      </p:sp>
+      <p:sp>
+        <p:nvSpPr>
+          <p:cNvPr id="3" name="Shape 1"/>
+          <p:cNvSpPr/>
+          <p:nvPr/>
+        </p:nvSpPr>
+        <p:spPr>
+          <a:xfrm>
+            <a:off x="0" y="164592"/>
+            <a:ext cx="146304" cy="6693408"/>
+          </a:xfrm>
+          <a:prstGeom prst="rect">
+            <a:avLst/>
+          </a:prstGeom>
+          <a:solidFill>
+            <a:srgbClr val="2F8A28"/>
+          </a:solidFill>
+          <a:ln w="12700">
+            <a:solidFill>
+              <a:srgbClr val="2F8A28"/>
+            </a:solidFill>
+            <a:prstDash val="solid"/>
+          </a:ln>
+        </p:spPr>
+      </p:sp>
+      <p:sp>
+        <p:nvSpPr>
+          <p:cNvPr id="4" name="Text 2"/>
+          <p:cNvSpPr/>
+          <p:nvPr/>
+        </p:nvSpPr>
+        <p:spPr>
+          <a:xfrm>
+            <a:off x="502920" y="292608"/>
+            <a:ext cx="10149840" cy="256032"/>
+          </a:xfrm>
+          <a:prstGeom prst="rect">
+            <a:avLst/>
+          </a:prstGeom>
+          <a:noFill/>
+          <a:ln/>
+        </p:spPr>
+        <p:txBody>
+          <a:bodyPr wrap="square" lIns="0" tIns="0" rIns="0" bIns="0" rtlCol="0" anchor="ctr"/>
+          <a:lstStyle/>
+          <a:p>
+            <a:pPr indent="0" marL="0">
+              <a:buNone/>
+            </a:pPr>
+            <a:r>
+              <a:rPr lang="en-US" sz="900" b="1" dirty="0">
+                <a:solidFill>
+                  <a:srgbClr val="5F7181"/>
+                </a:solidFill>
+                <a:latin typeface="Aptos" pitchFamily="34" charset="0"/>
+                <a:ea typeface="Aptos" pitchFamily="34" charset="-122"/>
+                <a:cs typeface="Aptos" pitchFamily="34" charset="-120"/>
+              </a:rPr>
+              <a:t>Executive AI Decision Rights and Accountability</a:t>
+            </a:r>
+            <a:endParaRPr lang="en-US" sz="900" dirty="0"/>
+          </a:p>
+        </p:txBody>
+      </p:sp>
+      <p:sp>
+        <p:nvSpPr>
+          <p:cNvPr id="5" name="Text 3"/>
+          <p:cNvSpPr/>
+          <p:nvPr/>
+        </p:nvSpPr>
+        <p:spPr>
+          <a:xfrm>
+            <a:off x="502920" y="6537960"/>
+            <a:ext cx="7772400" cy="201168"/>
+          </a:xfrm>
+          <a:prstGeom prst="rect">
+            <a:avLst/>
+          </a:prstGeom>
+          <a:noFill/>
+          <a:ln/>
+        </p:spPr>
+        <p:txBody>
+          <a:bodyPr wrap="square" lIns="0" tIns="0" rIns="0" bIns="0" rtlCol="0" anchor="ctr"/>
+          <a:lstStyle/>
+          <a:p>
+            <a:pPr indent="0" marL="0">
+              <a:buNone/>
+            </a:pPr>
+            <a:r>
+              <a:rPr lang="en-US" sz="800" dirty="0">
+                <a:solidFill>
+                  <a:srgbClr val="5F7181"/>
+                </a:solidFill>
+                <a:latin typeface="Aptos" pitchFamily="34" charset="0"/>
+                <a:ea typeface="Aptos" pitchFamily="34" charset="-122"/>
+                <a:cs typeface="Aptos" pitchFamily="34" charset="-120"/>
+              </a:rPr>
+              <a:t>AI Playbook and Toolkit for Public Health Departments</a:t>
+            </a:r>
+            <a:endParaRPr lang="en-US" sz="800" dirty="0"/>
+          </a:p>
+        </p:txBody>
+      </p:sp>
+      <p:sp>
+        <p:nvSpPr>
+          <p:cNvPr id="6" name="Text 4"/>
+          <p:cNvSpPr/>
+          <p:nvPr/>
+        </p:nvSpPr>
+        <p:spPr>
+          <a:xfrm>
+            <a:off x="9966960" y="6537960"/>
+            <a:ext cx="1645920" cy="201168"/>
+          </a:xfrm>
+          <a:prstGeom prst="rect">
+            <a:avLst/>
+          </a:prstGeom>
+          <a:noFill/>
+          <a:ln/>
+        </p:spPr>
+        <p:txBody>
+          <a:bodyPr wrap="square" lIns="0" tIns="0" rIns="0" bIns="0" rtlCol="0" anchor="ctr"/>
+          <a:lstStyle/>
+          <a:p>
+            <a:pPr algn="r" indent="0" marL="0">
+              <a:buNone/>
+            </a:pPr>
+            <a:r>
+              <a:rPr lang="en-US" sz="800" dirty="0">
+                <a:solidFill>
+                  <a:srgbClr val="5F7181"/>
+                </a:solidFill>
+                <a:latin typeface="Aptos" pitchFamily="34" charset="0"/>
+                <a:ea typeface="Aptos" pitchFamily="34" charset="-122"/>
+                <a:cs typeface="Aptos" pitchFamily="34" charset="-120"/>
+              </a:rPr>
+              <a:t>© Paula Soper</a:t>
+            </a:r>
+            <a:endParaRPr lang="en-US" sz="800" dirty="0"/>
+          </a:p>
+        </p:txBody>
+      </p:sp>
+      <p:sp>
+        <p:nvSpPr>
+          <p:cNvPr id="7" name="Shape 5"/>
+          <p:cNvSpPr/>
+          <p:nvPr/>
+        </p:nvSpPr>
+        <p:spPr>
+          <a:xfrm>
+            <a:off x="640080" y="658368"/>
+            <a:ext cx="420624" cy="420624"/>
+          </a:xfrm>
+          <a:prstGeom prst="ellipse">
+            <a:avLst/>
+          </a:prstGeom>
+          <a:solidFill>
+            <a:srgbClr val="0068B7"/>
+          </a:solidFill>
+          <a:ln w="12700">
+            <a:solidFill>
+              <a:srgbClr val="0068B7"/>
+            </a:solidFill>
+            <a:prstDash val="solid"/>
+          </a:ln>
+        </p:spPr>
+      </p:sp>
+      <p:sp>
+        <p:nvSpPr>
+          <p:cNvPr id="8" name="Text 6"/>
+          <p:cNvSpPr/>
+          <p:nvPr/>
+        </p:nvSpPr>
+        <p:spPr>
+          <a:xfrm>
+            <a:off x="640080" y="731520"/>
+            <a:ext cx="420624" cy="164592"/>
+          </a:xfrm>
+          <a:prstGeom prst="rect">
+            <a:avLst/>
+          </a:prstGeom>
+          <a:noFill/>
+          <a:ln/>
+        </p:spPr>
+        <p:txBody>
+          <a:bodyPr wrap="square" lIns="0" tIns="0" rIns="0" bIns="0" rtlCol="0" anchor="ctr"/>
+          <a:lstStyle/>
+          <a:p>
+            <a:pPr algn="ctr" indent="0" marL="0">
+              <a:buNone/>
+            </a:pPr>
+            <a:r>
+              <a:rPr lang="en-US" sz="1100" b="1" dirty="0">
+                <a:solidFill>
+                  <a:srgbClr val="FFFFFF"/>
+                </a:solidFill>
+                <a:latin typeface="Aptos" pitchFamily="34" charset="0"/>
+                <a:ea typeface="Aptos" pitchFamily="34" charset="-122"/>
+                <a:cs typeface="Aptos" pitchFamily="34" charset="-120"/>
+              </a:rPr>
+              <a:t>15</a:t>
+            </a:r>
+            <a:endParaRPr lang="en-US" sz="1100" dirty="0"/>
+          </a:p>
+        </p:txBody>
+      </p:sp>
+      <p:sp>
+        <p:nvSpPr>
+          <p:cNvPr id="9" name="Text 7"/>
+          <p:cNvSpPr/>
+          <p:nvPr/>
+        </p:nvSpPr>
+        <p:spPr>
+          <a:xfrm>
+            <a:off x="640080" y="621792"/>
+            <a:ext cx="10881360" cy="566928"/>
+          </a:xfrm>
+          <a:prstGeom prst="rect">
+            <a:avLst/>
+          </a:prstGeom>
+          <a:noFill/>
+          <a:ln/>
+        </p:spPr>
+        <p:txBody>
+          <a:bodyPr wrap="square" lIns="0" tIns="0" rIns="0" bIns="0" rtlCol="0" anchor="ctr">
+            <a:normAutofit/>
+          </a:bodyPr>
+          <a:lstStyle/>
+          <a:p>
+            <a:pPr indent="0" marL="0">
+              <a:buNone/>
+            </a:pPr>
+            <a:r>
+              <a:rPr lang="en-US" sz="2700" b="1" dirty="0">
+                <a:solidFill>
+                  <a:srgbClr val="003A63"/>
+                </a:solidFill>
+                <a:latin typeface="Aptos Display" pitchFamily="34" charset="0"/>
+                <a:ea typeface="Aptos Display" pitchFamily="34" charset="-122"/>
+                <a:cs typeface="Aptos Display" pitchFamily="34" charset="-120"/>
+              </a:rPr>
+              <a:t>References and Resources</a:t>
+            </a:r>
+            <a:endParaRPr lang="en-US" sz="2700" dirty="0"/>
+          </a:p>
+        </p:txBody>
+      </p:sp>
+      <p:sp>
+        <p:nvSpPr>
+          <p:cNvPr id="10" name="Text 8"/>
+          <p:cNvSpPr/>
+          <p:nvPr/>
+        </p:nvSpPr>
+        <p:spPr>
+          <a:xfrm>
+            <a:off x="868680" y="1417320"/>
+            <a:ext cx="6675120" cy="4434840"/>
+          </a:xfrm>
+          <a:prstGeom prst="rect">
+            <a:avLst/>
+          </a:prstGeom>
+          <a:noFill/>
+          <a:ln/>
+        </p:spPr>
+        <p:txBody>
+          <a:bodyPr wrap="square" lIns="635" tIns="635" rIns="635" bIns="635" rtlCol="0" anchor="t">
+            <a:normAutofit/>
+          </a:bodyPr>
+          <a:lstStyle/>
+          <a:p>
+            <a:r>
+              <a:rPr lang="en-US" sz="1700" dirty="0">
+                <a:solidFill>
+                  <a:srgbClr val="17364A"/>
+                </a:solidFill>
+                <a:latin typeface="Aptos" pitchFamily="34" charset="0"/>
+                <a:ea typeface="Aptos" pitchFamily="34" charset="-122"/>
+                <a:cs typeface="Aptos" pitchFamily="34" charset="-120"/>
+              </a:rPr>
+              <a:t>NIST Artificial Intelligence Risk Management Framework (AI RMF 1.0): https://www.nist.gov/itl/ai-risk-management-framework</a:t>
+            </a:r>
+            <a:endParaRPr lang="en-US" sz="1700" dirty="0"/>
+          </a:p>
+          <a:p>
+            <a:r>
+              <a:rPr lang="en-US" sz="1700" dirty="0">
+                <a:solidFill>
+                  <a:srgbClr val="17364A"/>
+                </a:solidFill>
+                <a:latin typeface="Aptos" pitchFamily="34" charset="0"/>
+                <a:ea typeface="Aptos" pitchFamily="34" charset="-122"/>
+                <a:cs typeface="Aptos" pitchFamily="34" charset="-120"/>
+              </a:rPr>
+              <a:t>NIST Generative AI Profile:.</a:t>
+            </a:r>
+            <a:endParaRPr lang="en-US" sz="1700" dirty="0"/>
+          </a:p>
+          <a:p>
+            <a:r>
+              <a:rPr lang="en-US" sz="1700" dirty="0">
+                <a:solidFill>
+                  <a:srgbClr val="17364A"/>
+                </a:solidFill>
+                <a:latin typeface="Aptos" pitchFamily="34" charset="0"/>
+                <a:ea typeface="Aptos" pitchFamily="34" charset="-122"/>
+                <a:cs typeface="Aptos" pitchFamily="34" charset="-120"/>
+              </a:rPr>
+              <a:t>NIST Privacy Framework</a:t>
+            </a:r>
+            <a:endParaRPr lang="en-US" sz="1700" dirty="0"/>
+          </a:p>
+          <a:p>
+            <a:r>
+              <a:rPr lang="en-US" sz="1700" dirty="0">
+                <a:solidFill>
+                  <a:srgbClr val="17364A"/>
+                </a:solidFill>
+                <a:latin typeface="Aptos" pitchFamily="34" charset="0"/>
+                <a:ea typeface="Aptos" pitchFamily="34" charset="-122"/>
+                <a:cs typeface="Aptos" pitchFamily="34" charset="-120"/>
+              </a:rPr>
+              <a:t>CDC Public Health Data Strategy and Data Modernization resources:.</a:t>
+            </a:r>
+            <a:endParaRPr lang="en-US" sz="1700" dirty="0"/>
+          </a:p>
+        </p:txBody>
+      </p:sp>
+      <p:sp>
+        <p:nvSpPr>
+          <p:cNvPr id="11" name="Shape 9"/>
+          <p:cNvSpPr/>
+          <p:nvPr/>
+        </p:nvSpPr>
+        <p:spPr>
+          <a:xfrm>
+            <a:off x="7909560" y="1417320"/>
+            <a:ext cx="3154680" cy="1828800"/>
+          </a:xfrm>
+          <a:prstGeom prst="roundRect">
+            <a:avLst>
+              <a:gd name="adj" fmla="val 6000"/>
+            </a:avLst>
+          </a:prstGeom>
+          <a:solidFill>
+            <a:srgbClr val="EEF8ED"/>
+          </a:solidFill>
+          <a:ln w="12700">
+            <a:solidFill>
+              <a:srgbClr val="B9D7E6"/>
+            </a:solidFill>
+            <a:prstDash val="solid"/>
+          </a:ln>
+        </p:spPr>
+      </p:sp>
+      <p:sp>
+        <p:nvSpPr>
+          <p:cNvPr id="12" name="Text 10"/>
+          <p:cNvSpPr/>
+          <p:nvPr/>
+        </p:nvSpPr>
+        <p:spPr>
+          <a:xfrm>
+            <a:off x="8074152" y="1563624"/>
+            <a:ext cx="2825496" cy="201168"/>
+          </a:xfrm>
+          <a:prstGeom prst="rect">
+            <a:avLst/>
+          </a:prstGeom>
+          <a:noFill/>
+          <a:ln/>
+        </p:spPr>
+        <p:txBody>
+          <a:bodyPr wrap="square" lIns="0" tIns="0" rIns="0" bIns="0" rtlCol="0" anchor="ctr"/>
+          <a:lstStyle/>
+          <a:p>
+            <a:pPr indent="0" marL="0">
+              <a:buNone/>
+            </a:pPr>
+            <a:r>
+              <a:rPr lang="en-US" sz="950" b="1" dirty="0">
+                <a:solidFill>
+                  <a:srgbClr val="0068B7"/>
+                </a:solidFill>
+                <a:latin typeface="Aptos" pitchFamily="34" charset="0"/>
+                <a:ea typeface="Aptos" pitchFamily="34" charset="-122"/>
+                <a:cs typeface="Aptos" pitchFamily="34" charset="-120"/>
+              </a:rPr>
+              <a:t>Key idea</a:t>
+            </a:r>
+            <a:endParaRPr lang="en-US" sz="950" dirty="0"/>
+          </a:p>
+        </p:txBody>
+      </p:sp>
+      <p:sp>
+        <p:nvSpPr>
+          <p:cNvPr id="13" name="Text 11"/>
+          <p:cNvSpPr/>
+          <p:nvPr/>
+        </p:nvSpPr>
+        <p:spPr>
+          <a:xfrm>
+            <a:off x="8074152" y="1856232"/>
+            <a:ext cx="2825496" cy="1261872"/>
+          </a:xfrm>
+          <a:prstGeom prst="rect">
+            <a:avLst/>
+          </a:prstGeom>
+          <a:noFill/>
+          <a:ln/>
+        </p:spPr>
+        <p:txBody>
+          <a:bodyPr wrap="square" lIns="0" tIns="0" rIns="0" bIns="0" rtlCol="0" anchor="t">
+            <a:normAutofit/>
+          </a:bodyPr>
+          <a:lstStyle/>
+          <a:p>
+            <a:pPr indent="0" marL="0">
+              <a:buNone/>
+            </a:pPr>
+            <a:r>
+              <a:rPr lang="en-US" sz="1250" dirty="0">
+                <a:solidFill>
+                  <a:srgbClr val="17364A"/>
+                </a:solidFill>
+                <a:latin typeface="Aptos" pitchFamily="34" charset="0"/>
+                <a:ea typeface="Aptos" pitchFamily="34" charset="-122"/>
+                <a:cs typeface="Aptos" pitchFamily="34" charset="-120"/>
+              </a:rPr>
+              <a:t>NIST Artificial Intelligence Risk Management Framework (AI RMF 1.0): https://www.nist.gov/itl/ai-risk-management-framework</a:t>
+            </a:r>
+            <a:endParaRPr lang="en-US" sz="1250" dirty="0"/>
+          </a:p>
+        </p:txBody>
+      </p:sp>
+      <p:sp>
+        <p:nvSpPr>
+          <p:cNvPr id="14" name="Shape 12"/>
+          <p:cNvSpPr/>
+          <p:nvPr/>
+        </p:nvSpPr>
+        <p:spPr>
+          <a:xfrm>
+            <a:off x="7909560" y="3520440"/>
+            <a:ext cx="3154680" cy="1737360"/>
+          </a:xfrm>
+          <a:prstGeom prst="roundRect">
+            <a:avLst>
+              <a:gd name="adj" fmla="val 6316"/>
+            </a:avLst>
+          </a:prstGeom>
+          <a:solidFill>
+            <a:srgbClr val="EAF6F8"/>
+          </a:solidFill>
+          <a:ln w="12700">
+            <a:solidFill>
+              <a:srgbClr val="B9D7E6"/>
+            </a:solidFill>
+            <a:prstDash val="solid"/>
+          </a:ln>
+        </p:spPr>
+      </p:sp>
+      <p:sp>
+        <p:nvSpPr>
+          <p:cNvPr id="15" name="Text 13"/>
+          <p:cNvSpPr/>
+          <p:nvPr/>
+        </p:nvSpPr>
+        <p:spPr>
+          <a:xfrm>
+            <a:off x="8074152" y="3666744"/>
+            <a:ext cx="2825496" cy="201168"/>
+          </a:xfrm>
+          <a:prstGeom prst="rect">
+            <a:avLst/>
+          </a:prstGeom>
+          <a:noFill/>
+          <a:ln/>
+        </p:spPr>
+        <p:txBody>
+          <a:bodyPr wrap="square" lIns="0" tIns="0" rIns="0" bIns="0" rtlCol="0" anchor="ctr"/>
+          <a:lstStyle/>
+          <a:p>
+            <a:pPr indent="0" marL="0">
+              <a:buNone/>
+            </a:pPr>
+            <a:r>
+              <a:rPr lang="en-US" sz="950" b="1" dirty="0">
+                <a:solidFill>
+                  <a:srgbClr val="0068B7"/>
+                </a:solidFill>
+                <a:latin typeface="Aptos" pitchFamily="34" charset="0"/>
+                <a:ea typeface="Aptos" pitchFamily="34" charset="-122"/>
+                <a:cs typeface="Aptos" pitchFamily="34" charset="-120"/>
+              </a:rPr>
+              <a:t>Use this for</a:t>
+            </a:r>
+            <a:endParaRPr lang="en-US" sz="950" dirty="0"/>
+          </a:p>
+        </p:txBody>
+      </p:sp>
+      <p:sp>
+        <p:nvSpPr>
+          <p:cNvPr id="16" name="Text 14"/>
+          <p:cNvSpPr/>
+          <p:nvPr/>
+        </p:nvSpPr>
+        <p:spPr>
+          <a:xfrm>
+            <a:off x="8074152" y="3959352"/>
+            <a:ext cx="2825496" cy="1170432"/>
+          </a:xfrm>
+          <a:prstGeom prst="rect">
+            <a:avLst/>
+          </a:prstGeom>
+          <a:noFill/>
+          <a:ln/>
+        </p:spPr>
+        <p:txBody>
+          <a:bodyPr wrap="square" lIns="0" tIns="0" rIns="0" bIns="0" rtlCol="0" anchor="t">
+            <a:normAutofit/>
+          </a:bodyPr>
+          <a:lstStyle/>
+          <a:p>
+            <a:pPr indent="0" marL="0">
+              <a:buNone/>
+            </a:pPr>
+            <a:r>
+              <a:rPr lang="en-US" sz="1250" dirty="0">
+                <a:solidFill>
+                  <a:srgbClr val="17364A"/>
+                </a:solidFill>
+                <a:latin typeface="Aptos" pitchFamily="34" charset="0"/>
+                <a:ea typeface="Aptos" pitchFamily="34" charset="-122"/>
+                <a:cs typeface="Aptos" pitchFamily="34" charset="-120"/>
+              </a:rPr>
+              <a:t>Connect the concept to public health decisions, safeguards, documentation, or implementation work.</a:t>
+            </a:r>
+            <a:endParaRPr lang="en-US" sz="1250" dirty="0"/>
+          </a:p>
+        </p:txBody>
+      </p:sp>
+    </p:spTree>
+  </p:cSld>
+  <p:clrMapOvr>
+    <a:masterClrMapping/>
+  </p:clrMapOvr>
+</p:sld>
+</file>
+
+<file path=ppt/slides/slide21.xml><?xml version="1.0" encoding="utf-8"?>
+<p:sld xmlns:a="http://schemas.openxmlformats.org/drawingml/2006/main" xmlns:r="http://schemas.openxmlformats.org/officeDocument/2006/relationships" xmlns:p="http://schemas.openxmlformats.org/presentationml/2006/main">
+  <p:cSld name="Slide 21">
+    <p:bg>
+      <p:bgPr>
+        <a:solidFill>
+          <a:srgbClr val="F7FBFD"/>
+        </a:solidFill>
+      </p:bgPr>
+    </p:bg>
+    <p:spTree>
+      <p:nvGrpSpPr>
+        <p:cNvPr id="1" name=""/>
+        <p:cNvGrpSpPr/>
+        <p:nvPr/>
+      </p:nvGrpSpPr>
+      <p:grpSpPr>
+        <a:xfrm>
+          <a:off x="0" y="0"/>
+          <a:ext cx="0" cy="0"/>
+          <a:chOff x="0" y="0"/>
+          <a:chExt cx="0" cy="0"/>
+        </a:xfrm>
+      </p:grpSpPr>
+      <p:sp>
+        <p:nvSpPr>
+          <p:cNvPr id="2" name="Shape 0"/>
+          <p:cNvSpPr/>
+          <p:nvPr/>
+        </p:nvSpPr>
+        <p:spPr>
+          <a:xfrm>
+            <a:off x="0" y="0"/>
+            <a:ext cx="12191695" cy="164592"/>
+          </a:xfrm>
+          <a:prstGeom prst="rect">
+            <a:avLst/>
+          </a:prstGeom>
+          <a:solidFill>
+            <a:srgbClr val="0068B7"/>
+          </a:solidFill>
+          <a:ln w="12700">
+            <a:solidFill>
+              <a:srgbClr val="0068B7"/>
+            </a:solidFill>
+            <a:prstDash val="solid"/>
+          </a:ln>
+        </p:spPr>
+      </p:sp>
+      <p:sp>
+        <p:nvSpPr>
+          <p:cNvPr id="3" name="Shape 1"/>
+          <p:cNvSpPr/>
+          <p:nvPr/>
+        </p:nvSpPr>
+        <p:spPr>
+          <a:xfrm>
+            <a:off x="0" y="164592"/>
+            <a:ext cx="146304" cy="6693408"/>
+          </a:xfrm>
+          <a:prstGeom prst="rect">
+            <a:avLst/>
+          </a:prstGeom>
+          <a:solidFill>
+            <a:srgbClr val="2F8A28"/>
+          </a:solidFill>
+          <a:ln w="12700">
+            <a:solidFill>
+              <a:srgbClr val="2F8A28"/>
+            </a:solidFill>
+            <a:prstDash val="solid"/>
+          </a:ln>
+        </p:spPr>
+      </p:sp>
+      <p:sp>
+        <p:nvSpPr>
+          <p:cNvPr id="4" name="Text 2"/>
+          <p:cNvSpPr/>
+          <p:nvPr/>
+        </p:nvSpPr>
+        <p:spPr>
+          <a:xfrm>
+            <a:off x="502920" y="292608"/>
+            <a:ext cx="10149840" cy="256032"/>
+          </a:xfrm>
+          <a:prstGeom prst="rect">
+            <a:avLst/>
+          </a:prstGeom>
+          <a:noFill/>
+          <a:ln/>
+        </p:spPr>
+        <p:txBody>
+          <a:bodyPr wrap="square" lIns="0" tIns="0" rIns="0" bIns="0" rtlCol="0" anchor="ctr"/>
+          <a:lstStyle/>
+          <a:p>
+            <a:pPr indent="0" marL="0">
+              <a:buNone/>
+            </a:pPr>
+            <a:r>
+              <a:rPr lang="en-US" sz="900" b="1" dirty="0">
+                <a:solidFill>
+                  <a:srgbClr val="5F7181"/>
+                </a:solidFill>
+                <a:latin typeface="Aptos" pitchFamily="34" charset="0"/>
+                <a:ea typeface="Aptos" pitchFamily="34" charset="-122"/>
+                <a:cs typeface="Aptos" pitchFamily="34" charset="-120"/>
+              </a:rPr>
+              <a:t>Executive AI Decision Rights and Accountability</a:t>
+            </a:r>
+            <a:endParaRPr lang="en-US" sz="900" dirty="0"/>
+          </a:p>
+        </p:txBody>
+      </p:sp>
+      <p:sp>
+        <p:nvSpPr>
+          <p:cNvPr id="5" name="Text 3"/>
+          <p:cNvSpPr/>
+          <p:nvPr/>
+        </p:nvSpPr>
+        <p:spPr>
+          <a:xfrm>
+            <a:off x="502920" y="6537960"/>
+            <a:ext cx="7772400" cy="201168"/>
+          </a:xfrm>
+          <a:prstGeom prst="rect">
+            <a:avLst/>
+          </a:prstGeom>
+          <a:noFill/>
+          <a:ln/>
+        </p:spPr>
+        <p:txBody>
+          <a:bodyPr wrap="square" lIns="0" tIns="0" rIns="0" bIns="0" rtlCol="0" anchor="ctr"/>
+          <a:lstStyle/>
+          <a:p>
+            <a:pPr indent="0" marL="0">
+              <a:buNone/>
+            </a:pPr>
+            <a:r>
+              <a:rPr lang="en-US" sz="800" dirty="0">
+                <a:solidFill>
+                  <a:srgbClr val="5F7181"/>
+                </a:solidFill>
+                <a:latin typeface="Aptos" pitchFamily="34" charset="0"/>
+                <a:ea typeface="Aptos" pitchFamily="34" charset="-122"/>
+                <a:cs typeface="Aptos" pitchFamily="34" charset="-120"/>
+              </a:rPr>
+              <a:t>AI Playbook and Toolkit for Public Health Departments</a:t>
+            </a:r>
+            <a:endParaRPr lang="en-US" sz="800" dirty="0"/>
+          </a:p>
+        </p:txBody>
+      </p:sp>
+      <p:sp>
+        <p:nvSpPr>
+          <p:cNvPr id="6" name="Text 4"/>
+          <p:cNvSpPr/>
+          <p:nvPr/>
+        </p:nvSpPr>
+        <p:spPr>
+          <a:xfrm>
+            <a:off x="9966960" y="6537960"/>
+            <a:ext cx="1645920" cy="201168"/>
+          </a:xfrm>
+          <a:prstGeom prst="rect">
+            <a:avLst/>
+          </a:prstGeom>
+          <a:noFill/>
+          <a:ln/>
+        </p:spPr>
+        <p:txBody>
+          <a:bodyPr wrap="square" lIns="0" tIns="0" rIns="0" bIns="0" rtlCol="0" anchor="ctr"/>
+          <a:lstStyle/>
+          <a:p>
+            <a:pPr algn="r" indent="0" marL="0">
+              <a:buNone/>
+            </a:pPr>
+            <a:r>
+              <a:rPr lang="en-US" sz="800" dirty="0">
+                <a:solidFill>
+                  <a:srgbClr val="5F7181"/>
+                </a:solidFill>
+                <a:latin typeface="Aptos" pitchFamily="34" charset="0"/>
+                <a:ea typeface="Aptos" pitchFamily="34" charset="-122"/>
+                <a:cs typeface="Aptos" pitchFamily="34" charset="-120"/>
+              </a:rPr>
+              <a:t>© Paula Soper</a:t>
+            </a:r>
+            <a:endParaRPr lang="en-US" sz="800" dirty="0"/>
+          </a:p>
+        </p:txBody>
+      </p:sp>
+      <p:sp>
+        <p:nvSpPr>
+          <p:cNvPr id="7" name="Text 5"/>
+          <p:cNvSpPr/>
+          <p:nvPr/>
+        </p:nvSpPr>
+        <p:spPr>
+          <a:xfrm>
+            <a:off x="640080" y="658368"/>
+            <a:ext cx="10881360" cy="566928"/>
+          </a:xfrm>
+          <a:prstGeom prst="rect">
+            <a:avLst/>
+          </a:prstGeom>
+          <a:noFill/>
+          <a:ln/>
+        </p:spPr>
+        <p:txBody>
+          <a:bodyPr wrap="square" lIns="0" tIns="0" rIns="0" bIns="0" rtlCol="0" anchor="ctr">
+            <a:normAutofit/>
+          </a:bodyPr>
+          <a:lstStyle/>
+          <a:p>
+            <a:pPr indent="0" marL="0">
+              <a:buNone/>
+            </a:pPr>
+            <a:r>
+              <a:rPr lang="en-US" sz="2700" b="1" dirty="0">
+                <a:solidFill>
+                  <a:srgbClr val="003A63"/>
+                </a:solidFill>
+                <a:latin typeface="Aptos Display" pitchFamily="34" charset="0"/>
+                <a:ea typeface="Aptos Display" pitchFamily="34" charset="-122"/>
+                <a:cs typeface="Aptos Display" pitchFamily="34" charset="-120"/>
+              </a:rPr>
+              <a:t>References and Resources Continued</a:t>
+            </a:r>
+            <a:endParaRPr lang="en-US" sz="2700" dirty="0"/>
+          </a:p>
+        </p:txBody>
+      </p:sp>
+      <p:sp>
+        <p:nvSpPr>
+          <p:cNvPr id="8" name="Text 6"/>
+          <p:cNvSpPr/>
+          <p:nvPr/>
+        </p:nvSpPr>
+        <p:spPr>
+          <a:xfrm>
+            <a:off x="868680" y="1417320"/>
+            <a:ext cx="6675120" cy="4434840"/>
+          </a:xfrm>
+          <a:prstGeom prst="rect">
+            <a:avLst/>
+          </a:prstGeom>
+          <a:noFill/>
+          <a:ln/>
+        </p:spPr>
+        <p:txBody>
+          <a:bodyPr wrap="square" lIns="635" tIns="635" rIns="635" bIns="635" rtlCol="0" anchor="t">
+            <a:normAutofit/>
+          </a:bodyPr>
+          <a:lstStyle/>
+          <a:p>
+            <a:r>
+              <a:rPr lang="en-US" sz="1700" dirty="0">
+                <a:solidFill>
+                  <a:srgbClr val="17364A"/>
+                </a:solidFill>
+                <a:latin typeface="Aptos" pitchFamily="34" charset="0"/>
+                <a:ea typeface="Aptos" pitchFamily="34" charset="-122"/>
+                <a:cs typeface="Aptos" pitchFamily="34" charset="-120"/>
+              </a:rPr>
+              <a:t>OMB Memorandum M-24-10 on federal AI governance, risk management, and innovation, where relevant to public-sector governance.</a:t>
+            </a:r>
+            <a:endParaRPr lang="en-US" sz="1700" dirty="0"/>
+          </a:p>
+          <a:p>
+            <a:r>
+              <a:rPr lang="en-US" sz="1700" dirty="0">
+                <a:solidFill>
+                  <a:srgbClr val="17364A"/>
+                </a:solidFill>
+                <a:latin typeface="Aptos" pitchFamily="34" charset="0"/>
+                <a:ea typeface="Aptos" pitchFamily="34" charset="-122"/>
+                <a:cs typeface="Aptos" pitchFamily="34" charset="-120"/>
+              </a:rPr>
+              <a:t>Agency strategic plans, procurement policies, privacy policies, cybersecurity policies, records policies, and equity plans</a:t>
+            </a:r>
+            <a:endParaRPr lang="en-US" sz="1700" dirty="0"/>
+          </a:p>
+        </p:txBody>
+      </p:sp>
+      <p:sp>
+        <p:nvSpPr>
+          <p:cNvPr id="9" name="Shape 7"/>
+          <p:cNvSpPr/>
+          <p:nvPr/>
+        </p:nvSpPr>
+        <p:spPr>
+          <a:xfrm>
+            <a:off x="7909560" y="1417320"/>
+            <a:ext cx="3154680" cy="1828800"/>
+          </a:xfrm>
+          <a:prstGeom prst="roundRect">
+            <a:avLst>
+              <a:gd name="adj" fmla="val 6000"/>
+            </a:avLst>
+          </a:prstGeom>
+          <a:solidFill>
+            <a:srgbClr val="EEF8ED"/>
+          </a:solidFill>
+          <a:ln w="12700">
+            <a:solidFill>
+              <a:srgbClr val="B9D7E6"/>
+            </a:solidFill>
+            <a:prstDash val="solid"/>
+          </a:ln>
+        </p:spPr>
+      </p:sp>
+      <p:sp>
+        <p:nvSpPr>
+          <p:cNvPr id="10" name="Text 8"/>
+          <p:cNvSpPr/>
+          <p:nvPr/>
+        </p:nvSpPr>
+        <p:spPr>
+          <a:xfrm>
+            <a:off x="8074152" y="1563624"/>
+            <a:ext cx="2825496" cy="201168"/>
+          </a:xfrm>
+          <a:prstGeom prst="rect">
+            <a:avLst/>
+          </a:prstGeom>
+          <a:noFill/>
+          <a:ln/>
+        </p:spPr>
+        <p:txBody>
+          <a:bodyPr wrap="square" lIns="0" tIns="0" rIns="0" bIns="0" rtlCol="0" anchor="ctr"/>
+          <a:lstStyle/>
+          <a:p>
+            <a:pPr indent="0" marL="0">
+              <a:buNone/>
+            </a:pPr>
+            <a:r>
+              <a:rPr lang="en-US" sz="950" b="1" dirty="0">
+                <a:solidFill>
+                  <a:srgbClr val="0068B7"/>
+                </a:solidFill>
+                <a:latin typeface="Aptos" pitchFamily="34" charset="0"/>
+                <a:ea typeface="Aptos" pitchFamily="34" charset="-122"/>
+                <a:cs typeface="Aptos" pitchFamily="34" charset="-120"/>
+              </a:rPr>
+              <a:t>Key idea</a:t>
+            </a:r>
+            <a:endParaRPr lang="en-US" sz="950" dirty="0"/>
+          </a:p>
+        </p:txBody>
+      </p:sp>
+      <p:sp>
+        <p:nvSpPr>
+          <p:cNvPr id="11" name="Text 9"/>
+          <p:cNvSpPr/>
+          <p:nvPr/>
+        </p:nvSpPr>
+        <p:spPr>
+          <a:xfrm>
+            <a:off x="8074152" y="1856232"/>
+            <a:ext cx="2825496" cy="1261872"/>
+          </a:xfrm>
+          <a:prstGeom prst="rect">
+            <a:avLst/>
+          </a:prstGeom>
+          <a:noFill/>
+          <a:ln/>
+        </p:spPr>
+        <p:txBody>
+          <a:bodyPr wrap="square" lIns="0" tIns="0" rIns="0" bIns="0" rtlCol="0" anchor="t">
+            <a:normAutofit/>
+          </a:bodyPr>
+          <a:lstStyle/>
+          <a:p>
+            <a:pPr indent="0" marL="0">
+              <a:buNone/>
+            </a:pPr>
+            <a:r>
+              <a:rPr lang="en-US" sz="1250" dirty="0">
+                <a:solidFill>
+                  <a:srgbClr val="17364A"/>
+                </a:solidFill>
+                <a:latin typeface="Aptos" pitchFamily="34" charset="0"/>
+                <a:ea typeface="Aptos" pitchFamily="34" charset="-122"/>
+                <a:cs typeface="Aptos" pitchFamily="34" charset="-120"/>
+              </a:rPr>
+              <a:t>OMB Memorandum M-24-10 on federal AI governance, risk management, and innovation, where relevant to public-sector governance.</a:t>
+            </a:r>
+            <a:endParaRPr lang="en-US" sz="1250" dirty="0"/>
+          </a:p>
+        </p:txBody>
+      </p:sp>
+      <p:sp>
+        <p:nvSpPr>
+          <p:cNvPr id="12" name="Shape 10"/>
+          <p:cNvSpPr/>
+          <p:nvPr/>
+        </p:nvSpPr>
+        <p:spPr>
+          <a:xfrm>
+            <a:off x="7909560" y="3520440"/>
+            <a:ext cx="3154680" cy="1737360"/>
+          </a:xfrm>
+          <a:prstGeom prst="roundRect">
+            <a:avLst>
+              <a:gd name="adj" fmla="val 6316"/>
+            </a:avLst>
+          </a:prstGeom>
+          <a:solidFill>
+            <a:srgbClr val="EAF6F8"/>
+          </a:solidFill>
+          <a:ln w="12700">
+            <a:solidFill>
+              <a:srgbClr val="B9D7E6"/>
+            </a:solidFill>
+            <a:prstDash val="solid"/>
+          </a:ln>
+        </p:spPr>
+      </p:sp>
+      <p:sp>
+        <p:nvSpPr>
+          <p:cNvPr id="13" name="Text 11"/>
+          <p:cNvSpPr/>
+          <p:nvPr/>
+        </p:nvSpPr>
+        <p:spPr>
+          <a:xfrm>
+            <a:off x="8074152" y="3666744"/>
+            <a:ext cx="2825496" cy="201168"/>
+          </a:xfrm>
+          <a:prstGeom prst="rect">
+            <a:avLst/>
+          </a:prstGeom>
+          <a:noFill/>
+          <a:ln/>
+        </p:spPr>
+        <p:txBody>
+          <a:bodyPr wrap="square" lIns="0" tIns="0" rIns="0" bIns="0" rtlCol="0" anchor="ctr"/>
+          <a:lstStyle/>
+          <a:p>
+            <a:pPr indent="0" marL="0">
+              <a:buNone/>
+            </a:pPr>
+            <a:r>
+              <a:rPr lang="en-US" sz="950" b="1" dirty="0">
+                <a:solidFill>
+                  <a:srgbClr val="0068B7"/>
+                </a:solidFill>
+                <a:latin typeface="Aptos" pitchFamily="34" charset="0"/>
+                <a:ea typeface="Aptos" pitchFamily="34" charset="-122"/>
+                <a:cs typeface="Aptos" pitchFamily="34" charset="-120"/>
+              </a:rPr>
+              <a:t>Use this for</a:t>
+            </a:r>
+            <a:endParaRPr lang="en-US" sz="950" dirty="0"/>
+          </a:p>
+        </p:txBody>
+      </p:sp>
+      <p:sp>
+        <p:nvSpPr>
+          <p:cNvPr id="14" name="Text 12"/>
+          <p:cNvSpPr/>
+          <p:nvPr/>
+        </p:nvSpPr>
+        <p:spPr>
+          <a:xfrm>
+            <a:off x="8074152" y="3959352"/>
+            <a:ext cx="2825496" cy="1170432"/>
+          </a:xfrm>
+          <a:prstGeom prst="rect">
+            <a:avLst/>
+          </a:prstGeom>
+          <a:noFill/>
+          <a:ln/>
+        </p:spPr>
+        <p:txBody>
+          <a:bodyPr wrap="square" lIns="0" tIns="0" rIns="0" bIns="0" rtlCol="0" anchor="t">
+            <a:normAutofit/>
+          </a:bodyPr>
+          <a:lstStyle/>
+          <a:p>
+            <a:pPr indent="0" marL="0">
+              <a:buNone/>
+            </a:pPr>
+            <a:r>
+              <a:rPr lang="en-US" sz="1250" dirty="0">
+                <a:solidFill>
+                  <a:srgbClr val="17364A"/>
+                </a:solidFill>
+                <a:latin typeface="Aptos" pitchFamily="34" charset="0"/>
+                <a:ea typeface="Aptos" pitchFamily="34" charset="-122"/>
+                <a:cs typeface="Aptos" pitchFamily="34" charset="-120"/>
+              </a:rPr>
+              <a:t>Connect the concept to public health decisions, safeguards, documentation, or implementation work.</a:t>
+            </a:r>
+            <a:endParaRPr lang="en-US" sz="1250" dirty="0"/>
           </a:p>
         </p:txBody>
       </p:sp>
@@ -5767,7 +10379,32 @@
       </p:sp>
       <p:sp>
         <p:nvSpPr>
-          <p:cNvPr id="3" name="Text 1"/>
+          <p:cNvPr id="3" name="Shape 1"/>
+          <p:cNvSpPr/>
+          <p:nvPr/>
+        </p:nvSpPr>
+        <p:spPr>
+          <a:xfrm>
+            <a:off x="0" y="164592"/>
+            <a:ext cx="146304" cy="6693408"/>
+          </a:xfrm>
+          <a:prstGeom prst="rect">
+            <a:avLst/>
+          </a:prstGeom>
+          <a:solidFill>
+            <a:srgbClr val="2F8A28"/>
+          </a:solidFill>
+          <a:ln w="12700">
+            <a:solidFill>
+              <a:srgbClr val="2F8A28"/>
+            </a:solidFill>
+            <a:prstDash val="solid"/>
+          </a:ln>
+        </p:spPr>
+      </p:sp>
+      <p:sp>
+        <p:nvSpPr>
+          <p:cNvPr id="4" name="Text 2"/>
           <p:cNvSpPr/>
           <p:nvPr/>
         </p:nvSpPr>
@@ -5806,7 +10443,7 @@
       </p:sp>
       <p:sp>
         <p:nvSpPr>
-          <p:cNvPr id="4" name="Text 2"/>
+          <p:cNvPr id="5" name="Text 3"/>
           <p:cNvSpPr/>
           <p:nvPr/>
         </p:nvSpPr>
@@ -5845,7 +10482,7 @@
       </p:sp>
       <p:sp>
         <p:nvSpPr>
-          <p:cNvPr id="5" name="Text 3"/>
+          <p:cNvPr id="6" name="Text 4"/>
           <p:cNvSpPr/>
           <p:nvPr/>
         </p:nvSpPr>
@@ -5884,7 +10521,7 @@
       </p:sp>
       <p:sp>
         <p:nvSpPr>
-          <p:cNvPr id="6" name="Text 4"/>
+          <p:cNvPr id="7" name="Text 5"/>
           <p:cNvSpPr/>
           <p:nvPr/>
         </p:nvSpPr>
@@ -5917,7 +10554,7 @@
                 <a:ea typeface="Aptos Display" pitchFamily="34" charset="-122"/>
                 <a:cs typeface="Aptos Display" pitchFamily="34" charset="-120"/>
               </a:rPr>
-              <a:t>Learning Objectives</a:t>
+              <a:t>How this module connects to the playbook</a:t>
             </a:r>
             <a:endParaRPr lang="en-US" sz="2700" dirty="0"/>
           </a:p>
@@ -5925,14 +10562,14 @@
       </p:sp>
       <p:sp>
         <p:nvSpPr>
-          <p:cNvPr id="7" name="Text 5"/>
-          <p:cNvSpPr/>
-          <p:nvPr/>
-        </p:nvSpPr>
-        <p:spPr>
-          <a:xfrm>
-            <a:off x="822960" y="1325880"/>
-            <a:ext cx="10378440" cy="4800600"/>
+          <p:cNvPr id="8" name="Text 6"/>
+          <p:cNvSpPr/>
+          <p:nvPr/>
+        </p:nvSpPr>
+        <p:spPr>
+          <a:xfrm>
+            <a:off x="868680" y="1417320"/>
+            <a:ext cx="6903720" cy="4480560"/>
           </a:xfrm>
           <a:prstGeom prst="rect">
             <a:avLst/>
@@ -5947,7 +10584,7 @@
           <a:lstStyle/>
           <a:p>
             <a:r>
-              <a:rPr lang="en-US" sz="1450" dirty="0">
+              <a:rPr lang="en-US" sz="1540" dirty="0">
                 <a:solidFill>
                   <a:srgbClr val="17364A"/>
                 </a:solidFill>
@@ -5955,13 +10592,13 @@
                 <a:ea typeface="Aptos" pitchFamily="34" charset="-122"/>
                 <a:cs typeface="Aptos" pitchFamily="34" charset="-120"/>
               </a:rPr>
-              <a:t>Explain why AI accountability must be assigned to people and roles rather than to tools or vendors.</a:t>
-            </a:r>
-            <a:endParaRPr lang="en-US" sz="1450" dirty="0"/>
-          </a:p>
-          <a:p>
-            <a:r>
-              <a:rPr lang="en-US" sz="1450" dirty="0">
+              <a:t>Play 11: Build and Deploy AI Solutions - This lesson informs Play 11 by helping learners connect the lesson topic to build and deploy.</a:t>
+            </a:r>
+            <a:endParaRPr lang="en-US" sz="1540" dirty="0"/>
+          </a:p>
+          <a:p>
+            <a:r>
+              <a:rPr lang="en-US" sz="1540" dirty="0">
                 <a:solidFill>
                   <a:srgbClr val="17364A"/>
                 </a:solidFill>
@@ -5969,13 +10606,13 @@
                 <a:ea typeface="Aptos" pitchFamily="34" charset="-122"/>
                 <a:cs typeface="Aptos" pitchFamily="34" charset="-120"/>
               </a:rPr>
-              <a:t>Identify executive, program, technical, privacy, legal, security, and governance responsibilities for AI decisions.</a:t>
-            </a:r>
-            <a:endParaRPr lang="en-US" sz="1450" dirty="0"/>
-          </a:p>
-          <a:p>
-            <a:r>
-              <a:rPr lang="en-US" sz="1450" dirty="0">
+              <a:t>Play 1: Vision &amp; Guardrails - This lesson informs Play 1 by helping learners connect the lesson topic to vision &amp; guardrails work in.</a:t>
+            </a:r>
+            <a:endParaRPr lang="en-US" sz="1540" dirty="0"/>
+          </a:p>
+          <a:p>
+            <a:r>
+              <a:rPr lang="en-US" sz="1540" dirty="0">
                 <a:solidFill>
                   <a:srgbClr val="17364A"/>
                 </a:solidFill>
@@ -5983,13 +10620,13 @@
                 <a:ea typeface="Aptos" pitchFamily="34" charset="-122"/>
                 <a:cs typeface="Aptos" pitchFamily="34" charset="-120"/>
               </a:rPr>
-              <a:t>Create a decision-rights matrix for AI use case approval, risk acceptance, monitoring, escalation, and retirement.</a:t>
-            </a:r>
-            <a:endParaRPr lang="en-US" sz="1450" dirty="0"/>
-          </a:p>
-          <a:p>
-            <a:r>
-              <a:rPr lang="en-US" sz="1450" dirty="0">
+              <a:t>Play 3: Establish AI Governance - This lesson informs Play 3 by helping learners connect the lesson topic to establish ai governance.</a:t>
+            </a:r>
+            <a:endParaRPr lang="en-US" sz="1540" dirty="0"/>
+          </a:p>
+          <a:p>
+            <a:r>
+              <a:rPr lang="en-US" sz="1540" dirty="0">
                 <a:solidFill>
                   <a:srgbClr val="17364A"/>
                 </a:solidFill>
@@ -5997,13 +10634,106 @@
                 <a:ea typeface="Aptos" pitchFamily="34" charset="-122"/>
                 <a:cs typeface="Aptos" pitchFamily="34" charset="-120"/>
               </a:rPr>
-              <a:t>Distinguish between consultative input, approval authority, and operational ownership.</a:t>
-            </a:r>
-            <a:endParaRPr lang="en-US" sz="1450" dirty="0"/>
-          </a:p>
-          <a:p>
-            <a:r>
-              <a:rPr lang="en-US" sz="1450" dirty="0">
+              <a:t>Play 7: Prioritize Use Cases - This lesson informs Play 7 by helping learners connect the lesson topic to prioritize use cases work.</a:t>
+            </a:r>
+            <a:endParaRPr lang="en-US" sz="1540" dirty="0"/>
+          </a:p>
+        </p:txBody>
+      </p:sp>
+      <p:sp>
+        <p:nvSpPr>
+          <p:cNvPr id="9" name="Shape 7"/>
+          <p:cNvSpPr/>
+          <p:nvPr/>
+        </p:nvSpPr>
+        <p:spPr>
+          <a:xfrm>
+            <a:off x="8046720" y="1417320"/>
+            <a:ext cx="3063240" cy="2103120"/>
+          </a:xfrm>
+          <a:prstGeom prst="roundRect">
+            <a:avLst>
+              <a:gd name="adj" fmla="val 5217"/>
+            </a:avLst>
+          </a:prstGeom>
+          <a:solidFill>
+            <a:srgbClr val="EEF8ED"/>
+          </a:solidFill>
+          <a:ln w="12700">
+            <a:solidFill>
+              <a:srgbClr val="B9D7E6"/>
+            </a:solidFill>
+            <a:prstDash val="solid"/>
+          </a:ln>
+        </p:spPr>
+      </p:sp>
+      <p:sp>
+        <p:nvSpPr>
+          <p:cNvPr id="10" name="Text 8"/>
+          <p:cNvSpPr/>
+          <p:nvPr/>
+        </p:nvSpPr>
+        <p:spPr>
+          <a:xfrm>
+            <a:off x="8211312" y="1563624"/>
+            <a:ext cx="2734056" cy="201168"/>
+          </a:xfrm>
+          <a:prstGeom prst="rect">
+            <a:avLst/>
+          </a:prstGeom>
+          <a:noFill/>
+          <a:ln/>
+        </p:spPr>
+        <p:txBody>
+          <a:bodyPr wrap="square" lIns="0" tIns="0" rIns="0" bIns="0" rtlCol="0" anchor="ctr"/>
+          <a:lstStyle/>
+          <a:p>
+            <a:pPr indent="0" marL="0">
+              <a:buNone/>
+            </a:pPr>
+            <a:r>
+              <a:rPr lang="en-US" sz="950" b="1" dirty="0">
+                <a:solidFill>
+                  <a:srgbClr val="0068B7"/>
+                </a:solidFill>
+                <a:latin typeface="Aptos" pitchFamily="34" charset="0"/>
+                <a:ea typeface="Aptos" pitchFamily="34" charset="-122"/>
+                <a:cs typeface="Aptos" pitchFamily="34" charset="-120"/>
+              </a:rPr>
+              <a:t>Apply the lesson</a:t>
+            </a:r>
+            <a:endParaRPr lang="en-US" sz="950" dirty="0"/>
+          </a:p>
+        </p:txBody>
+      </p:sp>
+      <p:sp>
+        <p:nvSpPr>
+          <p:cNvPr id="11" name="Text 9"/>
+          <p:cNvSpPr/>
+          <p:nvPr/>
+        </p:nvSpPr>
+        <p:spPr>
+          <a:xfrm>
+            <a:off x="8211312" y="1856232"/>
+            <a:ext cx="2734056" cy="1536192"/>
+          </a:xfrm>
+          <a:prstGeom prst="rect">
+            <a:avLst/>
+          </a:prstGeom>
+          <a:noFill/>
+          <a:ln/>
+        </p:spPr>
+        <p:txBody>
+          <a:bodyPr wrap="square" lIns="0" tIns="0" rIns="0" bIns="0" rtlCol="0" anchor="t">
+            <a:normAutofit/>
+          </a:bodyPr>
+          <a:lstStyle/>
+          <a:p>
+            <a:pPr indent="0" marL="0">
+              <a:buNone/>
+            </a:pPr>
+            <a:r>
+              <a:rPr lang="en-US" sz="1250" dirty="0">
                 <a:solidFill>
                   <a:srgbClr val="17364A"/>
                 </a:solidFill>
@@ -6011,9 +10741,116 @@
                 <a:ea typeface="Aptos" pitchFamily="34" charset="-122"/>
                 <a:cs typeface="Aptos" pitchFamily="34" charset="-120"/>
               </a:rPr>
-              <a:t>Define accountability expectations for vendor-supported AI tools and internally developed tools.</a:t>
-            </a:r>
-            <a:endParaRPr lang="en-US" sz="1450" dirty="0"/>
+              <a:t>Use the related plays to identify decisions, participants, timing, approvals, and documentation needed for responsible implementation.</a:t>
+            </a:r>
+            <a:endParaRPr lang="en-US" sz="1250" dirty="0"/>
+          </a:p>
+        </p:txBody>
+      </p:sp>
+      <p:sp>
+        <p:nvSpPr>
+          <p:cNvPr id="12" name="Shape 10"/>
+          <p:cNvSpPr/>
+          <p:nvPr/>
+        </p:nvSpPr>
+        <p:spPr>
+          <a:xfrm>
+            <a:off x="8046720" y="3794760"/>
+            <a:ext cx="3063240" cy="1508760"/>
+          </a:xfrm>
+          <a:prstGeom prst="roundRect">
+            <a:avLst>
+              <a:gd name="adj" fmla="val 7273"/>
+            </a:avLst>
+          </a:prstGeom>
+          <a:solidFill>
+            <a:srgbClr val="FFF4D9"/>
+          </a:solidFill>
+          <a:ln w="12700">
+            <a:solidFill>
+              <a:srgbClr val="B9D7E6"/>
+            </a:solidFill>
+            <a:prstDash val="solid"/>
+          </a:ln>
+        </p:spPr>
+      </p:sp>
+      <p:sp>
+        <p:nvSpPr>
+          <p:cNvPr id="13" name="Text 11"/>
+          <p:cNvSpPr/>
+          <p:nvPr/>
+        </p:nvSpPr>
+        <p:spPr>
+          <a:xfrm>
+            <a:off x="8211312" y="3941064"/>
+            <a:ext cx="2734056" cy="201168"/>
+          </a:xfrm>
+          <a:prstGeom prst="rect">
+            <a:avLst/>
+          </a:prstGeom>
+          <a:noFill/>
+          <a:ln/>
+        </p:spPr>
+        <p:txBody>
+          <a:bodyPr wrap="square" lIns="0" tIns="0" rIns="0" bIns="0" rtlCol="0" anchor="ctr"/>
+          <a:lstStyle/>
+          <a:p>
+            <a:pPr indent="0" marL="0">
+              <a:buNone/>
+            </a:pPr>
+            <a:r>
+              <a:rPr lang="en-US" sz="950" b="1" dirty="0">
+                <a:solidFill>
+                  <a:srgbClr val="0068B7"/>
+                </a:solidFill>
+                <a:latin typeface="Aptos" pitchFamily="34" charset="0"/>
+                <a:ea typeface="Aptos" pitchFamily="34" charset="-122"/>
+                <a:cs typeface="Aptos" pitchFamily="34" charset="-120"/>
+              </a:rPr>
+              <a:t>Keep in mind</a:t>
+            </a:r>
+            <a:endParaRPr lang="en-US" sz="950" dirty="0"/>
+          </a:p>
+        </p:txBody>
+      </p:sp>
+      <p:sp>
+        <p:nvSpPr>
+          <p:cNvPr id="14" name="Text 12"/>
+          <p:cNvSpPr/>
+          <p:nvPr/>
+        </p:nvSpPr>
+        <p:spPr>
+          <a:xfrm>
+            <a:off x="8211312" y="4233672"/>
+            <a:ext cx="2734056" cy="941832"/>
+          </a:xfrm>
+          <a:prstGeom prst="rect">
+            <a:avLst/>
+          </a:prstGeom>
+          <a:noFill/>
+          <a:ln/>
+        </p:spPr>
+        <p:txBody>
+          <a:bodyPr wrap="square" lIns="0" tIns="0" rIns="0" bIns="0" rtlCol="0" anchor="t">
+            <a:normAutofit/>
+          </a:bodyPr>
+          <a:lstStyle/>
+          <a:p>
+            <a:pPr indent="0" marL="0">
+              <a:buNone/>
+            </a:pPr>
+            <a:r>
+              <a:rPr lang="en-US" sz="1250" dirty="0">
+                <a:solidFill>
+                  <a:srgbClr val="17364A"/>
+                </a:solidFill>
+                <a:latin typeface="Aptos" pitchFamily="34" charset="0"/>
+                <a:ea typeface="Aptos" pitchFamily="34" charset="-122"/>
+                <a:cs typeface="Aptos" pitchFamily="34" charset="-120"/>
+              </a:rPr>
+              <a:t>The playbook connection helps turn training into agency work, not just individual knowledge.</a:t>
+            </a:r>
+            <a:endParaRPr lang="en-US" sz="1250" dirty="0"/>
           </a:p>
         </p:txBody>
       </p:sp>
@@ -6076,7 +10913,32 @@
       </p:sp>
       <p:sp>
         <p:nvSpPr>
-          <p:cNvPr id="3" name="Text 1"/>
+          <p:cNvPr id="3" name="Shape 1"/>
+          <p:cNvSpPr/>
+          <p:nvPr/>
+        </p:nvSpPr>
+        <p:spPr>
+          <a:xfrm>
+            <a:off x="0" y="164592"/>
+            <a:ext cx="146304" cy="6693408"/>
+          </a:xfrm>
+          <a:prstGeom prst="rect">
+            <a:avLst/>
+          </a:prstGeom>
+          <a:solidFill>
+            <a:srgbClr val="2F8A28"/>
+          </a:solidFill>
+          <a:ln w="12700">
+            <a:solidFill>
+              <a:srgbClr val="2F8A28"/>
+            </a:solidFill>
+            <a:prstDash val="solid"/>
+          </a:ln>
+        </p:spPr>
+      </p:sp>
+      <p:sp>
+        <p:nvSpPr>
+          <p:cNvPr id="4" name="Text 2"/>
           <p:cNvSpPr/>
           <p:nvPr/>
         </p:nvSpPr>
@@ -6115,7 +10977,7 @@
       </p:sp>
       <p:sp>
         <p:nvSpPr>
-          <p:cNvPr id="4" name="Text 2"/>
+          <p:cNvPr id="5" name="Text 3"/>
           <p:cNvSpPr/>
           <p:nvPr/>
         </p:nvSpPr>
@@ -6154,7 +11016,7 @@
       </p:sp>
       <p:sp>
         <p:nvSpPr>
-          <p:cNvPr id="5" name="Text 3"/>
+          <p:cNvPr id="6" name="Text 4"/>
           <p:cNvSpPr/>
           <p:nvPr/>
         </p:nvSpPr>
@@ -6193,7 +11055,7 @@
       </p:sp>
       <p:sp>
         <p:nvSpPr>
-          <p:cNvPr id="6" name="Text 4"/>
+          <p:cNvPr id="7" name="Text 5"/>
           <p:cNvSpPr/>
           <p:nvPr/>
         </p:nvSpPr>
@@ -6226,7 +11088,7 @@
                 <a:ea typeface="Aptos Display" pitchFamily="34" charset="-122"/>
                 <a:cs typeface="Aptos Display" pitchFamily="34" charset="-120"/>
               </a:rPr>
-              <a:t>Module Overview</a:t>
+              <a:t>Related toolkit resources</a:t>
             </a:r>
             <a:endParaRPr lang="en-US" sz="2700" dirty="0"/>
           </a:p>
@@ -6234,32 +11096,192 @@
       </p:sp>
       <p:sp>
         <p:nvSpPr>
-          <p:cNvPr id="7" name="Text 5"/>
-          <p:cNvSpPr/>
-          <p:nvPr/>
-        </p:nvSpPr>
-        <p:spPr>
-          <a:xfrm>
-            <a:off x="822960" y="1325880"/>
-            <a:ext cx="10378440" cy="4800600"/>
-          </a:xfrm>
-          <a:prstGeom prst="rect">
-            <a:avLst/>
-          </a:prstGeom>
-          <a:noFill/>
-          <a:ln/>
-        </p:spPr>
-        <p:txBody>
-          <a:bodyPr wrap="square" lIns="1016" tIns="1016" rIns="1016" bIns="1016" rtlCol="0" anchor="t">
+          <p:cNvPr id="8" name="Text 6"/>
+          <p:cNvSpPr/>
+          <p:nvPr/>
+        </p:nvSpPr>
+        <p:spPr>
+          <a:xfrm>
+            <a:off x="868680" y="1417320"/>
+            <a:ext cx="6903720" cy="4480560"/>
+          </a:xfrm>
+          <a:prstGeom prst="rect">
+            <a:avLst/>
+          </a:prstGeom>
+          <a:noFill/>
+          <a:ln/>
+        </p:spPr>
+        <p:txBody>
+          <a:bodyPr wrap="square" lIns="635" tIns="635" rIns="635" bIns="635" rtlCol="0" anchor="t">
             <a:normAutofit/>
           </a:bodyPr>
           <a:lstStyle/>
           <a:p>
+            <a:r>
+              <a:rPr lang="en-US" sz="1460" dirty="0">
+                <a:solidFill>
+                  <a:srgbClr val="17364A"/>
+                </a:solidFill>
+                <a:latin typeface="Aptos" pitchFamily="34" charset="0"/>
+                <a:ea typeface="Aptos" pitchFamily="34" charset="-122"/>
+                <a:cs typeface="Aptos" pitchFamily="34" charset="-120"/>
+              </a:rPr>
+              <a:t>Tool 32: Vendor Evaluation Checklist (Checklist) - Use this tool to complete or strengthen the practical exercise for the module.</a:t>
+            </a:r>
+            <a:endParaRPr lang="en-US" sz="1460" dirty="0"/>
+          </a:p>
+          <a:p>
+            <a:r>
+              <a:rPr lang="en-US" sz="1460" dirty="0">
+                <a:solidFill>
+                  <a:srgbClr val="17364A"/>
+                </a:solidFill>
+                <a:latin typeface="Aptos" pitchFamily="34" charset="0"/>
+                <a:ea typeface="Aptos" pitchFamily="34" charset="-122"/>
+                <a:cs typeface="Aptos" pitchFamily="34" charset="-120"/>
+              </a:rPr>
+              <a:t>Tool 34: STLT AI Procurement and Vendor Addendum (Checklist) - Use this tool to complete or strengthen the practical exercise for the.</a:t>
+            </a:r>
+            <a:endParaRPr lang="en-US" sz="1460" dirty="0"/>
+          </a:p>
+          <a:p>
+            <a:r>
+              <a:rPr lang="en-US" sz="1460" dirty="0">
+                <a:solidFill>
+                  <a:srgbClr val="17364A"/>
+                </a:solidFill>
+                <a:latin typeface="Aptos" pitchFamily="34" charset="0"/>
+                <a:ea typeface="Aptos" pitchFamily="34" charset="-122"/>
+                <a:cs typeface="Aptos" pitchFamily="34" charset="-120"/>
+              </a:rPr>
+              <a:t>Tool 3: Equity Impact Assessment Checklist (Checklist) - Use this tool to complete or strengthen the practical exercise for the.</a:t>
+            </a:r>
+            <a:endParaRPr lang="en-US" sz="1460" dirty="0"/>
+          </a:p>
+          <a:p>
+            <a:r>
+              <a:rPr lang="en-US" sz="1460" dirty="0">
+                <a:solidFill>
+                  <a:srgbClr val="17364A"/>
+                </a:solidFill>
+                <a:latin typeface="Aptos" pitchFamily="34" charset="0"/>
+                <a:ea typeface="Aptos" pitchFamily="34" charset="-122"/>
+                <a:cs typeface="Aptos" pitchFamily="34" charset="-120"/>
+              </a:rPr>
+              <a:t>Tool 4: AI Policy Landscape Scan (Worksheet) - Use AI Policy Landscape Scan to translate this lesson into a documented public health.</a:t>
+            </a:r>
+            <a:endParaRPr lang="en-US" sz="1460" dirty="0"/>
+          </a:p>
+          <a:p>
+            <a:r>
+              <a:rPr lang="en-US" sz="1460" dirty="0">
+                <a:solidFill>
+                  <a:srgbClr val="17364A"/>
+                </a:solidFill>
+                <a:latin typeface="Aptos" pitchFamily="34" charset="0"/>
+                <a:ea typeface="Aptos" pitchFamily="34" charset="-122"/>
+                <a:cs typeface="Aptos" pitchFamily="34" charset="-120"/>
+              </a:rPr>
+              <a:t>Tool 5: AI Environmental and Resource Impact Review (Checklist) - Use AI Environmental and Resource Impact Review to translate this.</a:t>
+            </a:r>
+            <a:endParaRPr lang="en-US" sz="1460" dirty="0"/>
+          </a:p>
+        </p:txBody>
+      </p:sp>
+      <p:sp>
+        <p:nvSpPr>
+          <p:cNvPr id="9" name="Shape 7"/>
+          <p:cNvSpPr/>
+          <p:nvPr/>
+        </p:nvSpPr>
+        <p:spPr>
+          <a:xfrm>
+            <a:off x="8046720" y="1417320"/>
+            <a:ext cx="3063240" cy="2103120"/>
+          </a:xfrm>
+          <a:prstGeom prst="roundRect">
+            <a:avLst>
+              <a:gd name="adj" fmla="val 5217"/>
+            </a:avLst>
+          </a:prstGeom>
+          <a:solidFill>
+            <a:srgbClr val="EAF6F8"/>
+          </a:solidFill>
+          <a:ln w="12700">
+            <a:solidFill>
+              <a:srgbClr val="B9D7E6"/>
+            </a:solidFill>
+            <a:prstDash val="solid"/>
+          </a:ln>
+        </p:spPr>
+      </p:sp>
+      <p:sp>
+        <p:nvSpPr>
+          <p:cNvPr id="10" name="Text 8"/>
+          <p:cNvSpPr/>
+          <p:nvPr/>
+        </p:nvSpPr>
+        <p:spPr>
+          <a:xfrm>
+            <a:off x="8211312" y="1563624"/>
+            <a:ext cx="2734056" cy="201168"/>
+          </a:xfrm>
+          <a:prstGeom prst="rect">
+            <a:avLst/>
+          </a:prstGeom>
+          <a:noFill/>
+          <a:ln/>
+        </p:spPr>
+        <p:txBody>
+          <a:bodyPr wrap="square" lIns="0" tIns="0" rIns="0" bIns="0" rtlCol="0" anchor="ctr"/>
+          <a:lstStyle/>
+          <a:p>
             <a:pPr indent="0" marL="0">
               <a:buNone/>
             </a:pPr>
             <a:r>
-              <a:rPr lang="en-US" sz="1420" dirty="0">
+              <a:rPr lang="en-US" sz="950" b="1" dirty="0">
+                <a:solidFill>
+                  <a:srgbClr val="0068B7"/>
+                </a:solidFill>
+                <a:latin typeface="Aptos" pitchFamily="34" charset="0"/>
+                <a:ea typeface="Aptos" pitchFamily="34" charset="-122"/>
+                <a:cs typeface="Aptos" pitchFamily="34" charset="-120"/>
+              </a:rPr>
+              <a:t>Use the tools</a:t>
+            </a:r>
+            <a:endParaRPr lang="en-US" sz="950" dirty="0"/>
+          </a:p>
+        </p:txBody>
+      </p:sp>
+      <p:sp>
+        <p:nvSpPr>
+          <p:cNvPr id="11" name="Text 9"/>
+          <p:cNvSpPr/>
+          <p:nvPr/>
+        </p:nvSpPr>
+        <p:spPr>
+          <a:xfrm>
+            <a:off x="8211312" y="1856232"/>
+            <a:ext cx="2734056" cy="1536192"/>
+          </a:xfrm>
+          <a:prstGeom prst="rect">
+            <a:avLst/>
+          </a:prstGeom>
+          <a:noFill/>
+          <a:ln/>
+        </p:spPr>
+        <p:txBody>
+          <a:bodyPr wrap="square" lIns="0" tIns="0" rIns="0" bIns="0" rtlCol="0" anchor="t">
+            <a:normAutofit/>
+          </a:bodyPr>
+          <a:lstStyle/>
+          <a:p>
+            <a:pPr indent="0" marL="0">
+              <a:buNone/>
+            </a:pPr>
+            <a:r>
+              <a:rPr lang="en-US" sz="1250" dirty="0">
                 <a:solidFill>
                   <a:srgbClr val="17364A"/>
                 </a:solidFill>
@@ -6267,9 +11289,116 @@
                 <a:ea typeface="Aptos" pitchFamily="34" charset="-122"/>
                 <a:cs typeface="Aptos" pitchFamily="34" charset="-120"/>
               </a:rPr>
-              <a:t>AI governance can only work when decision rights are clear. Leaders need to know who can approve a pilot, who can accept residual risk, who can authorize use of sensitive data, who can pause a tool, and who is accountable when an AI-supported workflow affects public health action. Ambiguous accountability is especially risky in public health because AI outputs may influence investigations, communications, referrals, resource allocation, and community trust. This module focuses on executive decision rights and accountability structures. Learners examine how to assign ownership across strategy, risk, technical implementation, program operations, privacy, legal, cybersecurity, procurement, communications, and community accountability. The module emphasizes that accountability cannot be delegated to a vendor or to the AI system itself. Public health agencies remain accountable for how AI is selected, used, monitored, and explained.</a:t>
-            </a:r>
-            <a:endParaRPr lang="en-US" sz="1420" dirty="0"/>
+              <a:t>Use linked tools when your department needs a structured worksheet, template, checklist, review process, or documentation artifact.</a:t>
+            </a:r>
+            <a:endParaRPr lang="en-US" sz="1250" dirty="0"/>
+          </a:p>
+        </p:txBody>
+      </p:sp>
+      <p:sp>
+        <p:nvSpPr>
+          <p:cNvPr id="12" name="Shape 10"/>
+          <p:cNvSpPr/>
+          <p:nvPr/>
+        </p:nvSpPr>
+        <p:spPr>
+          <a:xfrm>
+            <a:off x="8046720" y="3794760"/>
+            <a:ext cx="3063240" cy="1508760"/>
+          </a:xfrm>
+          <a:prstGeom prst="roundRect">
+            <a:avLst>
+              <a:gd name="adj" fmla="val 7273"/>
+            </a:avLst>
+          </a:prstGeom>
+          <a:solidFill>
+            <a:srgbClr val="EEF8ED"/>
+          </a:solidFill>
+          <a:ln w="12700">
+            <a:solidFill>
+              <a:srgbClr val="B9D7E6"/>
+            </a:solidFill>
+            <a:prstDash val="solid"/>
+          </a:ln>
+        </p:spPr>
+      </p:sp>
+      <p:sp>
+        <p:nvSpPr>
+          <p:cNvPr id="13" name="Text 11"/>
+          <p:cNvSpPr/>
+          <p:nvPr/>
+        </p:nvSpPr>
+        <p:spPr>
+          <a:xfrm>
+            <a:off x="8211312" y="3941064"/>
+            <a:ext cx="2734056" cy="201168"/>
+          </a:xfrm>
+          <a:prstGeom prst="rect">
+            <a:avLst/>
+          </a:prstGeom>
+          <a:noFill/>
+          <a:ln/>
+        </p:spPr>
+        <p:txBody>
+          <a:bodyPr wrap="square" lIns="0" tIns="0" rIns="0" bIns="0" rtlCol="0" anchor="ctr"/>
+          <a:lstStyle/>
+          <a:p>
+            <a:pPr indent="0" marL="0">
+              <a:buNone/>
+            </a:pPr>
+            <a:r>
+              <a:rPr lang="en-US" sz="950" b="1" dirty="0">
+                <a:solidFill>
+                  <a:srgbClr val="0068B7"/>
+                </a:solidFill>
+                <a:latin typeface="Aptos" pitchFamily="34" charset="0"/>
+                <a:ea typeface="Aptos" pitchFamily="34" charset="-122"/>
+                <a:cs typeface="Aptos" pitchFamily="34" charset="-120"/>
+              </a:rPr>
+              <a:t>Avoid duplication</a:t>
+            </a:r>
+            <a:endParaRPr lang="en-US" sz="950" dirty="0"/>
+          </a:p>
+        </p:txBody>
+      </p:sp>
+      <p:sp>
+        <p:nvSpPr>
+          <p:cNvPr id="14" name="Text 12"/>
+          <p:cNvSpPr/>
+          <p:nvPr/>
+        </p:nvSpPr>
+        <p:spPr>
+          <a:xfrm>
+            <a:off x="8211312" y="4233672"/>
+            <a:ext cx="2734056" cy="941832"/>
+          </a:xfrm>
+          <a:prstGeom prst="rect">
+            <a:avLst/>
+          </a:prstGeom>
+          <a:noFill/>
+          <a:ln/>
+        </p:spPr>
+        <p:txBody>
+          <a:bodyPr wrap="square" lIns="0" tIns="0" rIns="0" bIns="0" rtlCol="0" anchor="t">
+            <a:normAutofit/>
+          </a:bodyPr>
+          <a:lstStyle/>
+          <a:p>
+            <a:pPr indent="0" marL="0">
+              <a:buNone/>
+            </a:pPr>
+            <a:r>
+              <a:rPr lang="en-US" sz="1250" dirty="0">
+                <a:solidFill>
+                  <a:srgbClr val="17364A"/>
+                </a:solidFill>
+                <a:latin typeface="Aptos" pitchFamily="34" charset="0"/>
+                <a:ea typeface="Aptos" pitchFamily="34" charset="-122"/>
+                <a:cs typeface="Aptos" pitchFamily="34" charset="-120"/>
+              </a:rPr>
+              <a:t>If your department already has a strong equivalent tool, adapt or use the existing process instead of recreating it.</a:t>
+            </a:r>
+            <a:endParaRPr lang="en-US" sz="1250" dirty="0"/>
           </a:p>
         </p:txBody>
       </p:sp>
@@ -6332,7 +11461,32 @@
       </p:sp>
       <p:sp>
         <p:nvSpPr>
-          <p:cNvPr id="3" name="Text 1"/>
+          <p:cNvPr id="3" name="Shape 1"/>
+          <p:cNvSpPr/>
+          <p:nvPr/>
+        </p:nvSpPr>
+        <p:spPr>
+          <a:xfrm>
+            <a:off x="0" y="164592"/>
+            <a:ext cx="146304" cy="6693408"/>
+          </a:xfrm>
+          <a:prstGeom prst="rect">
+            <a:avLst/>
+          </a:prstGeom>
+          <a:solidFill>
+            <a:srgbClr val="2F8A28"/>
+          </a:solidFill>
+          <a:ln w="12700">
+            <a:solidFill>
+              <a:srgbClr val="2F8A28"/>
+            </a:solidFill>
+            <a:prstDash val="solid"/>
+          </a:ln>
+        </p:spPr>
+      </p:sp>
+      <p:sp>
+        <p:nvSpPr>
+          <p:cNvPr id="4" name="Text 2"/>
           <p:cNvSpPr/>
           <p:nvPr/>
         </p:nvSpPr>
@@ -6371,7 +11525,7 @@
       </p:sp>
       <p:sp>
         <p:nvSpPr>
-          <p:cNvPr id="4" name="Text 2"/>
+          <p:cNvPr id="5" name="Text 3"/>
           <p:cNvSpPr/>
           <p:nvPr/>
         </p:nvSpPr>
@@ -6410,7 +11564,7 @@
       </p:sp>
       <p:sp>
         <p:nvSpPr>
-          <p:cNvPr id="5" name="Text 3"/>
+          <p:cNvPr id="6" name="Text 4"/>
           <p:cNvSpPr/>
           <p:nvPr/>
         </p:nvSpPr>
@@ -6449,13 +11603,77 @@
       </p:sp>
       <p:sp>
         <p:nvSpPr>
-          <p:cNvPr id="6" name="Text 4"/>
+          <p:cNvPr id="7" name="Shape 5"/>
           <p:cNvSpPr/>
           <p:nvPr/>
         </p:nvSpPr>
         <p:spPr>
           <a:xfrm>
             <a:off x="640080" y="658368"/>
+            <a:ext cx="420624" cy="420624"/>
+          </a:xfrm>
+          <a:prstGeom prst="ellipse">
+            <a:avLst/>
+          </a:prstGeom>
+          <a:solidFill>
+            <a:srgbClr val="0068B7"/>
+          </a:solidFill>
+          <a:ln w="12700">
+            <a:solidFill>
+              <a:srgbClr val="0068B7"/>
+            </a:solidFill>
+            <a:prstDash val="solid"/>
+          </a:ln>
+        </p:spPr>
+      </p:sp>
+      <p:sp>
+        <p:nvSpPr>
+          <p:cNvPr id="8" name="Text 6"/>
+          <p:cNvSpPr/>
+          <p:nvPr/>
+        </p:nvSpPr>
+        <p:spPr>
+          <a:xfrm>
+            <a:off x="640080" y="731520"/>
+            <a:ext cx="420624" cy="164592"/>
+          </a:xfrm>
+          <a:prstGeom prst="rect">
+            <a:avLst/>
+          </a:prstGeom>
+          <a:noFill/>
+          <a:ln/>
+        </p:spPr>
+        <p:txBody>
+          <a:bodyPr wrap="square" lIns="0" tIns="0" rIns="0" bIns="0" rtlCol="0" anchor="ctr"/>
+          <a:lstStyle/>
+          <a:p>
+            <a:pPr algn="ctr" indent="0" marL="0">
+              <a:buNone/>
+            </a:pPr>
+            <a:r>
+              <a:rPr lang="en-US" sz="1100" b="1" dirty="0">
+                <a:solidFill>
+                  <a:srgbClr val="FFFFFF"/>
+                </a:solidFill>
+                <a:latin typeface="Aptos" pitchFamily="34" charset="0"/>
+                <a:ea typeface="Aptos" pitchFamily="34" charset="-122"/>
+                <a:cs typeface="Aptos" pitchFamily="34" charset="-120"/>
+              </a:rPr>
+              <a:t>1</a:t>
+            </a:r>
+            <a:endParaRPr lang="en-US" sz="1100" dirty="0"/>
+          </a:p>
+        </p:txBody>
+      </p:sp>
+      <p:sp>
+        <p:nvSpPr>
+          <p:cNvPr id="9" name="Text 7"/>
+          <p:cNvSpPr/>
+          <p:nvPr/>
+        </p:nvSpPr>
+        <p:spPr>
+          <a:xfrm>
+            <a:off x="640080" y="621792"/>
             <a:ext cx="10881360" cy="566928"/>
           </a:xfrm>
           <a:prstGeom prst="rect">
@@ -6482,7 +11700,7 @@
                 <a:ea typeface="Aptos Display" pitchFamily="34" charset="-122"/>
                 <a:cs typeface="Aptos Display" pitchFamily="34" charset="-120"/>
               </a:rPr>
-              <a:t>Jurisdiction and Agency Policy Note</a:t>
+              <a:t>Learning Objectives</a:t>
             </a:r>
             <a:endParaRPr lang="en-US" sz="2700" dirty="0"/>
           </a:p>
@@ -6490,32 +11708,178 @@
       </p:sp>
       <p:sp>
         <p:nvSpPr>
-          <p:cNvPr id="7" name="Text 5"/>
-          <p:cNvSpPr/>
-          <p:nvPr/>
-        </p:nvSpPr>
-        <p:spPr>
-          <a:xfrm>
-            <a:off x="822960" y="1325880"/>
-            <a:ext cx="10378440" cy="4800600"/>
-          </a:xfrm>
-          <a:prstGeom prst="rect">
-            <a:avLst/>
-          </a:prstGeom>
-          <a:noFill/>
-          <a:ln/>
-        </p:spPr>
-        <p:txBody>
-          <a:bodyPr wrap="square" lIns="1016" tIns="1016" rIns="1016" bIns="1016" rtlCol="0" anchor="t">
+          <p:cNvPr id="10" name="Text 8"/>
+          <p:cNvSpPr/>
+          <p:nvPr/>
+        </p:nvSpPr>
+        <p:spPr>
+          <a:xfrm>
+            <a:off x="868680" y="1417320"/>
+            <a:ext cx="6675120" cy="4434840"/>
+          </a:xfrm>
+          <a:prstGeom prst="rect">
+            <a:avLst/>
+          </a:prstGeom>
+          <a:noFill/>
+          <a:ln/>
+        </p:spPr>
+        <p:txBody>
+          <a:bodyPr wrap="square" lIns="635" tIns="635" rIns="635" bIns="635" rtlCol="0" anchor="t">
             <a:normAutofit/>
           </a:bodyPr>
           <a:lstStyle/>
           <a:p>
+            <a:r>
+              <a:rPr lang="en-US" sz="1700" dirty="0">
+                <a:solidFill>
+                  <a:srgbClr val="17364A"/>
+                </a:solidFill>
+                <a:latin typeface="Aptos" pitchFamily="34" charset="0"/>
+                <a:ea typeface="Aptos" pitchFamily="34" charset="-122"/>
+                <a:cs typeface="Aptos" pitchFamily="34" charset="-120"/>
+              </a:rPr>
+              <a:t>Explain why AI accountability must be assigned to people and roles rather than to tools or vendors.</a:t>
+            </a:r>
+            <a:endParaRPr lang="en-US" sz="1700" dirty="0"/>
+          </a:p>
+          <a:p>
+            <a:r>
+              <a:rPr lang="en-US" sz="1700" dirty="0">
+                <a:solidFill>
+                  <a:srgbClr val="17364A"/>
+                </a:solidFill>
+                <a:latin typeface="Aptos" pitchFamily="34" charset="0"/>
+                <a:ea typeface="Aptos" pitchFamily="34" charset="-122"/>
+                <a:cs typeface="Aptos" pitchFamily="34" charset="-120"/>
+              </a:rPr>
+              <a:t>Identify executive, program, technical, privacy, legal, security, and governance responsibilities for AI decisions.</a:t>
+            </a:r>
+            <a:endParaRPr lang="en-US" sz="1700" dirty="0"/>
+          </a:p>
+          <a:p>
+            <a:r>
+              <a:rPr lang="en-US" sz="1700" dirty="0">
+                <a:solidFill>
+                  <a:srgbClr val="17364A"/>
+                </a:solidFill>
+                <a:latin typeface="Aptos" pitchFamily="34" charset="0"/>
+                <a:ea typeface="Aptos" pitchFamily="34" charset="-122"/>
+                <a:cs typeface="Aptos" pitchFamily="34" charset="-120"/>
+              </a:rPr>
+              <a:t>Create a decision-rights matrix for AI use case approval, risk acceptance, monitoring, escalation, and retirement.</a:t>
+            </a:r>
+            <a:endParaRPr lang="en-US" sz="1700" dirty="0"/>
+          </a:p>
+          <a:p>
+            <a:r>
+              <a:rPr lang="en-US" sz="1700" dirty="0">
+                <a:solidFill>
+                  <a:srgbClr val="17364A"/>
+                </a:solidFill>
+                <a:latin typeface="Aptos" pitchFamily="34" charset="0"/>
+                <a:ea typeface="Aptos" pitchFamily="34" charset="-122"/>
+                <a:cs typeface="Aptos" pitchFamily="34" charset="-120"/>
+              </a:rPr>
+              <a:t>Distinguish between consultative input, approval authority, and operational ownership.</a:t>
+            </a:r>
+            <a:endParaRPr lang="en-US" sz="1700" dirty="0"/>
+          </a:p>
+        </p:txBody>
+      </p:sp>
+      <p:sp>
+        <p:nvSpPr>
+          <p:cNvPr id="11" name="Shape 9"/>
+          <p:cNvSpPr/>
+          <p:nvPr/>
+        </p:nvSpPr>
+        <p:spPr>
+          <a:xfrm>
+            <a:off x="7909560" y="1417320"/>
+            <a:ext cx="3154680" cy="1828800"/>
+          </a:xfrm>
+          <a:prstGeom prst="roundRect">
+            <a:avLst>
+              <a:gd name="adj" fmla="val 6000"/>
+            </a:avLst>
+          </a:prstGeom>
+          <a:solidFill>
+            <a:srgbClr val="EEF8ED"/>
+          </a:solidFill>
+          <a:ln w="12700">
+            <a:solidFill>
+              <a:srgbClr val="B9D7E6"/>
+            </a:solidFill>
+            <a:prstDash val="solid"/>
+          </a:ln>
+        </p:spPr>
+      </p:sp>
+      <p:sp>
+        <p:nvSpPr>
+          <p:cNvPr id="12" name="Text 10"/>
+          <p:cNvSpPr/>
+          <p:nvPr/>
+        </p:nvSpPr>
+        <p:spPr>
+          <a:xfrm>
+            <a:off x="8074152" y="1563624"/>
+            <a:ext cx="2825496" cy="201168"/>
+          </a:xfrm>
+          <a:prstGeom prst="rect">
+            <a:avLst/>
+          </a:prstGeom>
+          <a:noFill/>
+          <a:ln/>
+        </p:spPr>
+        <p:txBody>
+          <a:bodyPr wrap="square" lIns="0" tIns="0" rIns="0" bIns="0" rtlCol="0" anchor="ctr"/>
+          <a:lstStyle/>
+          <a:p>
             <a:pPr indent="0" marL="0">
               <a:buNone/>
             </a:pPr>
             <a:r>
-              <a:rPr lang="en-US" sz="1420" dirty="0">
+              <a:rPr lang="en-US" sz="950" b="1" dirty="0">
+                <a:solidFill>
+                  <a:srgbClr val="0068B7"/>
+                </a:solidFill>
+                <a:latin typeface="Aptos" pitchFamily="34" charset="0"/>
+                <a:ea typeface="Aptos" pitchFamily="34" charset="-122"/>
+                <a:cs typeface="Aptos" pitchFamily="34" charset="-120"/>
+              </a:rPr>
+              <a:t>Key idea</a:t>
+            </a:r>
+            <a:endParaRPr lang="en-US" sz="950" dirty="0"/>
+          </a:p>
+        </p:txBody>
+      </p:sp>
+      <p:sp>
+        <p:nvSpPr>
+          <p:cNvPr id="13" name="Text 11"/>
+          <p:cNvSpPr/>
+          <p:nvPr/>
+        </p:nvSpPr>
+        <p:spPr>
+          <a:xfrm>
+            <a:off x="8074152" y="1856232"/>
+            <a:ext cx="2825496" cy="1261872"/>
+          </a:xfrm>
+          <a:prstGeom prst="rect">
+            <a:avLst/>
+          </a:prstGeom>
+          <a:noFill/>
+          <a:ln/>
+        </p:spPr>
+        <p:txBody>
+          <a:bodyPr wrap="square" lIns="0" tIns="0" rIns="0" bIns="0" rtlCol="0" anchor="t">
+            <a:normAutofit/>
+          </a:bodyPr>
+          <a:lstStyle/>
+          <a:p>
+            <a:pPr indent="0" marL="0">
+              <a:buNone/>
+            </a:pPr>
+            <a:r>
+              <a:rPr lang="en-US" sz="1250" dirty="0">
                 <a:solidFill>
                   <a:srgbClr val="17364A"/>
                 </a:solidFill>
@@ -6523,9 +11887,116 @@
                 <a:ea typeface="Aptos" pitchFamily="34" charset="-122"/>
                 <a:cs typeface="Aptos" pitchFamily="34" charset="-120"/>
               </a:rPr>
-              <a:t>This module provides national-level training guidance for public health agencies and partners. It is not legal advice and does not replace review by agency legal counsel, privacy officers, procurement officials, civil rights staff, records officers, or other authorized decision-makers. Requirements may vary by state, locality, territory, Tribe, agency, funding source, data-sharing agreement, emergency authority, and organizational policy. Learners should use this module to identify the issues that require review and should confirm applicable requirements before approving, procuring, deploying, or publicly communicating about AI-supported work.</a:t>
-            </a:r>
-            <a:endParaRPr lang="en-US" sz="1420" dirty="0"/>
+              <a:t>Explain why AI accountability must be assigned to people and roles rather than to tools or vendors.</a:t>
+            </a:r>
+            <a:endParaRPr lang="en-US" sz="1250" dirty="0"/>
+          </a:p>
+        </p:txBody>
+      </p:sp>
+      <p:sp>
+        <p:nvSpPr>
+          <p:cNvPr id="14" name="Shape 12"/>
+          <p:cNvSpPr/>
+          <p:nvPr/>
+        </p:nvSpPr>
+        <p:spPr>
+          <a:xfrm>
+            <a:off x="7909560" y="3520440"/>
+            <a:ext cx="3154680" cy="1737360"/>
+          </a:xfrm>
+          <a:prstGeom prst="roundRect">
+            <a:avLst>
+              <a:gd name="adj" fmla="val 6316"/>
+            </a:avLst>
+          </a:prstGeom>
+          <a:solidFill>
+            <a:srgbClr val="EAF6F8"/>
+          </a:solidFill>
+          <a:ln w="12700">
+            <a:solidFill>
+              <a:srgbClr val="B9D7E6"/>
+            </a:solidFill>
+            <a:prstDash val="solid"/>
+          </a:ln>
+        </p:spPr>
+      </p:sp>
+      <p:sp>
+        <p:nvSpPr>
+          <p:cNvPr id="15" name="Text 13"/>
+          <p:cNvSpPr/>
+          <p:nvPr/>
+        </p:nvSpPr>
+        <p:spPr>
+          <a:xfrm>
+            <a:off x="8074152" y="3666744"/>
+            <a:ext cx="2825496" cy="201168"/>
+          </a:xfrm>
+          <a:prstGeom prst="rect">
+            <a:avLst/>
+          </a:prstGeom>
+          <a:noFill/>
+          <a:ln/>
+        </p:spPr>
+        <p:txBody>
+          <a:bodyPr wrap="square" lIns="0" tIns="0" rIns="0" bIns="0" rtlCol="0" anchor="ctr"/>
+          <a:lstStyle/>
+          <a:p>
+            <a:pPr indent="0" marL="0">
+              <a:buNone/>
+            </a:pPr>
+            <a:r>
+              <a:rPr lang="en-US" sz="950" b="1" dirty="0">
+                <a:solidFill>
+                  <a:srgbClr val="0068B7"/>
+                </a:solidFill>
+                <a:latin typeface="Aptos" pitchFamily="34" charset="0"/>
+                <a:ea typeface="Aptos" pitchFamily="34" charset="-122"/>
+                <a:cs typeface="Aptos" pitchFamily="34" charset="-120"/>
+              </a:rPr>
+              <a:t>Use this for</a:t>
+            </a:r>
+            <a:endParaRPr lang="en-US" sz="950" dirty="0"/>
+          </a:p>
+        </p:txBody>
+      </p:sp>
+      <p:sp>
+        <p:nvSpPr>
+          <p:cNvPr id="16" name="Text 14"/>
+          <p:cNvSpPr/>
+          <p:nvPr/>
+        </p:nvSpPr>
+        <p:spPr>
+          <a:xfrm>
+            <a:off x="8074152" y="3959352"/>
+            <a:ext cx="2825496" cy="1170432"/>
+          </a:xfrm>
+          <a:prstGeom prst="rect">
+            <a:avLst/>
+          </a:prstGeom>
+          <a:noFill/>
+          <a:ln/>
+        </p:spPr>
+        <p:txBody>
+          <a:bodyPr wrap="square" lIns="0" tIns="0" rIns="0" bIns="0" rtlCol="0" anchor="t">
+            <a:normAutofit/>
+          </a:bodyPr>
+          <a:lstStyle/>
+          <a:p>
+            <a:pPr indent="0" marL="0">
+              <a:buNone/>
+            </a:pPr>
+            <a:r>
+              <a:rPr lang="en-US" sz="1250" dirty="0">
+                <a:solidFill>
+                  <a:srgbClr val="17364A"/>
+                </a:solidFill>
+                <a:latin typeface="Aptos" pitchFamily="34" charset="0"/>
+                <a:ea typeface="Aptos" pitchFamily="34" charset="-122"/>
+                <a:cs typeface="Aptos" pitchFamily="34" charset="-120"/>
+              </a:rPr>
+              <a:t>Connect the concept to public health decisions, safeguards, documentation, or implementation work.</a:t>
+            </a:r>
+            <a:endParaRPr lang="en-US" sz="1250" dirty="0"/>
           </a:p>
         </p:txBody>
       </p:sp>
@@ -6588,7 +12059,32 @@
       </p:sp>
       <p:sp>
         <p:nvSpPr>
-          <p:cNvPr id="3" name="Text 1"/>
+          <p:cNvPr id="3" name="Shape 1"/>
+          <p:cNvSpPr/>
+          <p:nvPr/>
+        </p:nvSpPr>
+        <p:spPr>
+          <a:xfrm>
+            <a:off x="0" y="164592"/>
+            <a:ext cx="146304" cy="6693408"/>
+          </a:xfrm>
+          <a:prstGeom prst="rect">
+            <a:avLst/>
+          </a:prstGeom>
+          <a:solidFill>
+            <a:srgbClr val="2F8A28"/>
+          </a:solidFill>
+          <a:ln w="12700">
+            <a:solidFill>
+              <a:srgbClr val="2F8A28"/>
+            </a:solidFill>
+            <a:prstDash val="solid"/>
+          </a:ln>
+        </p:spPr>
+      </p:sp>
+      <p:sp>
+        <p:nvSpPr>
+          <p:cNvPr id="4" name="Text 2"/>
           <p:cNvSpPr/>
           <p:nvPr/>
         </p:nvSpPr>
@@ -6627,7 +12123,7 @@
       </p:sp>
       <p:sp>
         <p:nvSpPr>
-          <p:cNvPr id="4" name="Text 2"/>
+          <p:cNvPr id="5" name="Text 3"/>
           <p:cNvSpPr/>
           <p:nvPr/>
         </p:nvSpPr>
@@ -6666,7 +12162,7 @@
       </p:sp>
       <p:sp>
         <p:nvSpPr>
-          <p:cNvPr id="5" name="Text 3"/>
+          <p:cNvPr id="6" name="Text 4"/>
           <p:cNvSpPr/>
           <p:nvPr/>
         </p:nvSpPr>
@@ -6705,13 +12201,77 @@
       </p:sp>
       <p:sp>
         <p:nvSpPr>
-          <p:cNvPr id="6" name="Text 4"/>
+          <p:cNvPr id="7" name="Shape 5"/>
           <p:cNvSpPr/>
           <p:nvPr/>
         </p:nvSpPr>
         <p:spPr>
           <a:xfrm>
             <a:off x="640080" y="658368"/>
+            <a:ext cx="420624" cy="420624"/>
+          </a:xfrm>
+          <a:prstGeom prst="ellipse">
+            <a:avLst/>
+          </a:prstGeom>
+          <a:solidFill>
+            <a:srgbClr val="0068B7"/>
+          </a:solidFill>
+          <a:ln w="12700">
+            <a:solidFill>
+              <a:srgbClr val="0068B7"/>
+            </a:solidFill>
+            <a:prstDash val="solid"/>
+          </a:ln>
+        </p:spPr>
+      </p:sp>
+      <p:sp>
+        <p:nvSpPr>
+          <p:cNvPr id="8" name="Text 6"/>
+          <p:cNvSpPr/>
+          <p:nvPr/>
+        </p:nvSpPr>
+        <p:spPr>
+          <a:xfrm>
+            <a:off x="640080" y="731520"/>
+            <a:ext cx="420624" cy="164592"/>
+          </a:xfrm>
+          <a:prstGeom prst="rect">
+            <a:avLst/>
+          </a:prstGeom>
+          <a:noFill/>
+          <a:ln/>
+        </p:spPr>
+        <p:txBody>
+          <a:bodyPr wrap="square" lIns="0" tIns="0" rIns="0" bIns="0" rtlCol="0" anchor="ctr"/>
+          <a:lstStyle/>
+          <a:p>
+            <a:pPr algn="ctr" indent="0" marL="0">
+              <a:buNone/>
+            </a:pPr>
+            <a:r>
+              <a:rPr lang="en-US" sz="1100" b="1" dirty="0">
+                <a:solidFill>
+                  <a:srgbClr val="FFFFFF"/>
+                </a:solidFill>
+                <a:latin typeface="Aptos" pitchFamily="34" charset="0"/>
+                <a:ea typeface="Aptos" pitchFamily="34" charset="-122"/>
+                <a:cs typeface="Aptos" pitchFamily="34" charset="-120"/>
+              </a:rPr>
+              <a:t>2</a:t>
+            </a:r>
+            <a:endParaRPr lang="en-US" sz="1100" dirty="0"/>
+          </a:p>
+        </p:txBody>
+      </p:sp>
+      <p:sp>
+        <p:nvSpPr>
+          <p:cNvPr id="9" name="Text 7"/>
+          <p:cNvSpPr/>
+          <p:nvPr/>
+        </p:nvSpPr>
+        <p:spPr>
+          <a:xfrm>
+            <a:off x="640080" y="621792"/>
             <a:ext cx="10881360" cy="566928"/>
           </a:xfrm>
           <a:prstGeom prst="rect">
@@ -6738,7 +12298,7 @@
                 <a:ea typeface="Aptos Display" pitchFamily="34" charset="-122"/>
                 <a:cs typeface="Aptos Display" pitchFamily="34" charset="-120"/>
               </a:rPr>
-              <a:t>Why This Topic Matters for Public Health AI</a:t>
+              <a:t>Module Overview</a:t>
             </a:r>
             <a:endParaRPr lang="en-US" sz="2700" dirty="0"/>
           </a:p>
@@ -6746,32 +12306,178 @@
       </p:sp>
       <p:sp>
         <p:nvSpPr>
-          <p:cNvPr id="7" name="Text 5"/>
-          <p:cNvSpPr/>
-          <p:nvPr/>
-        </p:nvSpPr>
-        <p:spPr>
-          <a:xfrm>
-            <a:off x="822960" y="1325880"/>
-            <a:ext cx="10378440" cy="4800600"/>
-          </a:xfrm>
-          <a:prstGeom prst="rect">
-            <a:avLst/>
-          </a:prstGeom>
-          <a:noFill/>
-          <a:ln/>
-        </p:spPr>
-        <p:txBody>
-          <a:bodyPr wrap="square" lIns="1016" tIns="1016" rIns="1016" bIns="1016" rtlCol="0" anchor="t">
+          <p:cNvPr id="10" name="Text 8"/>
+          <p:cNvSpPr/>
+          <p:nvPr/>
+        </p:nvSpPr>
+        <p:spPr>
+          <a:xfrm>
+            <a:off x="868680" y="1417320"/>
+            <a:ext cx="6675120" cy="4434840"/>
+          </a:xfrm>
+          <a:prstGeom prst="rect">
+            <a:avLst/>
+          </a:prstGeom>
+          <a:noFill/>
+          <a:ln/>
+        </p:spPr>
+        <p:txBody>
+          <a:bodyPr wrap="square" lIns="635" tIns="635" rIns="635" bIns="635" rtlCol="0" anchor="t">
             <a:normAutofit/>
           </a:bodyPr>
           <a:lstStyle/>
           <a:p>
+            <a:r>
+              <a:rPr lang="en-US" sz="1700" dirty="0">
+                <a:solidFill>
+                  <a:srgbClr val="17364A"/>
+                </a:solidFill>
+                <a:latin typeface="Aptos" pitchFamily="34" charset="0"/>
+                <a:ea typeface="Aptos" pitchFamily="34" charset="-122"/>
+                <a:cs typeface="Aptos" pitchFamily="34" charset="-120"/>
+              </a:rPr>
+              <a:t>AI governance can only work when decision rights are clear.</a:t>
+            </a:r>
+            <a:endParaRPr lang="en-US" sz="1700" dirty="0"/>
+          </a:p>
+          <a:p>
+            <a:r>
+              <a:rPr lang="en-US" sz="1700" dirty="0">
+                <a:solidFill>
+                  <a:srgbClr val="17364A"/>
+                </a:solidFill>
+                <a:latin typeface="Aptos" pitchFamily="34" charset="0"/>
+                <a:ea typeface="Aptos" pitchFamily="34" charset="-122"/>
+                <a:cs typeface="Aptos" pitchFamily="34" charset="-120"/>
+              </a:rPr>
+              <a:t>Leaders need to know who can approve a pilot, who can accept residual risk, who can authorize use of sensitive data, who.</a:t>
+            </a:r>
+            <a:endParaRPr lang="en-US" sz="1700" dirty="0"/>
+          </a:p>
+          <a:p>
+            <a:r>
+              <a:rPr lang="en-US" sz="1700" dirty="0">
+                <a:solidFill>
+                  <a:srgbClr val="17364A"/>
+                </a:solidFill>
+                <a:latin typeface="Aptos" pitchFamily="34" charset="0"/>
+                <a:ea typeface="Aptos" pitchFamily="34" charset="-122"/>
+                <a:cs typeface="Aptos" pitchFamily="34" charset="-120"/>
+              </a:rPr>
+              <a:t>Ambiguous accountability is especially risky in public health because AI outputs may influence investigations,.</a:t>
+            </a:r>
+            <a:endParaRPr lang="en-US" sz="1700" dirty="0"/>
+          </a:p>
+          <a:p>
+            <a:r>
+              <a:rPr lang="en-US" sz="1700" dirty="0">
+                <a:solidFill>
+                  <a:srgbClr val="17364A"/>
+                </a:solidFill>
+                <a:latin typeface="Aptos" pitchFamily="34" charset="0"/>
+                <a:ea typeface="Aptos" pitchFamily="34" charset="-122"/>
+                <a:cs typeface="Aptos" pitchFamily="34" charset="-120"/>
+              </a:rPr>
+              <a:t>This module focuses on executive decision rights and accountability structures.</a:t>
+            </a:r>
+            <a:endParaRPr lang="en-US" sz="1700" dirty="0"/>
+          </a:p>
+        </p:txBody>
+      </p:sp>
+      <p:sp>
+        <p:nvSpPr>
+          <p:cNvPr id="11" name="Shape 9"/>
+          <p:cNvSpPr/>
+          <p:nvPr/>
+        </p:nvSpPr>
+        <p:spPr>
+          <a:xfrm>
+            <a:off x="7909560" y="1417320"/>
+            <a:ext cx="3154680" cy="1828800"/>
+          </a:xfrm>
+          <a:prstGeom prst="roundRect">
+            <a:avLst>
+              <a:gd name="adj" fmla="val 6000"/>
+            </a:avLst>
+          </a:prstGeom>
+          <a:solidFill>
+            <a:srgbClr val="EEF8ED"/>
+          </a:solidFill>
+          <a:ln w="12700">
+            <a:solidFill>
+              <a:srgbClr val="B9D7E6"/>
+            </a:solidFill>
+            <a:prstDash val="solid"/>
+          </a:ln>
+        </p:spPr>
+      </p:sp>
+      <p:sp>
+        <p:nvSpPr>
+          <p:cNvPr id="12" name="Text 10"/>
+          <p:cNvSpPr/>
+          <p:nvPr/>
+        </p:nvSpPr>
+        <p:spPr>
+          <a:xfrm>
+            <a:off x="8074152" y="1563624"/>
+            <a:ext cx="2825496" cy="201168"/>
+          </a:xfrm>
+          <a:prstGeom prst="rect">
+            <a:avLst/>
+          </a:prstGeom>
+          <a:noFill/>
+          <a:ln/>
+        </p:spPr>
+        <p:txBody>
+          <a:bodyPr wrap="square" lIns="0" tIns="0" rIns="0" bIns="0" rtlCol="0" anchor="ctr"/>
+          <a:lstStyle/>
+          <a:p>
             <a:pPr indent="0" marL="0">
               <a:buNone/>
             </a:pPr>
             <a:r>
-              <a:rPr lang="en-US" sz="1420" dirty="0">
+              <a:rPr lang="en-US" sz="950" b="1" dirty="0">
+                <a:solidFill>
+                  <a:srgbClr val="0068B7"/>
+                </a:solidFill>
+                <a:latin typeface="Aptos" pitchFamily="34" charset="0"/>
+                <a:ea typeface="Aptos" pitchFamily="34" charset="-122"/>
+                <a:cs typeface="Aptos" pitchFamily="34" charset="-120"/>
+              </a:rPr>
+              <a:t>Key idea</a:t>
+            </a:r>
+            <a:endParaRPr lang="en-US" sz="950" dirty="0"/>
+          </a:p>
+        </p:txBody>
+      </p:sp>
+      <p:sp>
+        <p:nvSpPr>
+          <p:cNvPr id="13" name="Text 11"/>
+          <p:cNvSpPr/>
+          <p:nvPr/>
+        </p:nvSpPr>
+        <p:spPr>
+          <a:xfrm>
+            <a:off x="8074152" y="1856232"/>
+            <a:ext cx="2825496" cy="1261872"/>
+          </a:xfrm>
+          <a:prstGeom prst="rect">
+            <a:avLst/>
+          </a:prstGeom>
+          <a:noFill/>
+          <a:ln/>
+        </p:spPr>
+        <p:txBody>
+          <a:bodyPr wrap="square" lIns="0" tIns="0" rIns="0" bIns="0" rtlCol="0" anchor="t">
+            <a:normAutofit/>
+          </a:bodyPr>
+          <a:lstStyle/>
+          <a:p>
+            <a:pPr indent="0" marL="0">
+              <a:buNone/>
+            </a:pPr>
+            <a:r>
+              <a:rPr lang="en-US" sz="1250" dirty="0">
                 <a:solidFill>
                   <a:srgbClr val="17364A"/>
                 </a:solidFill>
@@ -6779,9 +12485,116 @@
                 <a:ea typeface="Aptos" pitchFamily="34" charset="-122"/>
                 <a:cs typeface="Aptos" pitchFamily="34" charset="-120"/>
               </a:rPr>
-              <a:t>AI systems can distribute responsibility across many actors. A vendor may provide the model, IT may manage access, a program may define the workflow, an epidemiologist may review the output, and leadership may approve implementation. Without a formal accountability model, each actor may assume that another party is responsible for validation, monitoring, public explanation, or incident response. Clear decision rights support trust and speed. When leaders know which decisions they own, they can act quickly when a tool performs poorly, when a privacy concern emerges, or when a public-facing communication needs review. Decision rights also prevent informal escalation patterns in which difficult decisions are delayed because no one is clearly authorized to accept, modify, or reject a proposed use.</a:t>
-            </a:r>
-            <a:endParaRPr lang="en-US" sz="1420" dirty="0"/>
+              <a:t>AI governance can only work when decision rights are clear.</a:t>
+            </a:r>
+            <a:endParaRPr lang="en-US" sz="1250" dirty="0"/>
+          </a:p>
+        </p:txBody>
+      </p:sp>
+      <p:sp>
+        <p:nvSpPr>
+          <p:cNvPr id="14" name="Shape 12"/>
+          <p:cNvSpPr/>
+          <p:nvPr/>
+        </p:nvSpPr>
+        <p:spPr>
+          <a:xfrm>
+            <a:off x="7909560" y="3520440"/>
+            <a:ext cx="3154680" cy="1737360"/>
+          </a:xfrm>
+          <a:prstGeom prst="roundRect">
+            <a:avLst>
+              <a:gd name="adj" fmla="val 6316"/>
+            </a:avLst>
+          </a:prstGeom>
+          <a:solidFill>
+            <a:srgbClr val="EAF6F8"/>
+          </a:solidFill>
+          <a:ln w="12700">
+            <a:solidFill>
+              <a:srgbClr val="B9D7E6"/>
+            </a:solidFill>
+            <a:prstDash val="solid"/>
+          </a:ln>
+        </p:spPr>
+      </p:sp>
+      <p:sp>
+        <p:nvSpPr>
+          <p:cNvPr id="15" name="Text 13"/>
+          <p:cNvSpPr/>
+          <p:nvPr/>
+        </p:nvSpPr>
+        <p:spPr>
+          <a:xfrm>
+            <a:off x="8074152" y="3666744"/>
+            <a:ext cx="2825496" cy="201168"/>
+          </a:xfrm>
+          <a:prstGeom prst="rect">
+            <a:avLst/>
+          </a:prstGeom>
+          <a:noFill/>
+          <a:ln/>
+        </p:spPr>
+        <p:txBody>
+          <a:bodyPr wrap="square" lIns="0" tIns="0" rIns="0" bIns="0" rtlCol="0" anchor="ctr"/>
+          <a:lstStyle/>
+          <a:p>
+            <a:pPr indent="0" marL="0">
+              <a:buNone/>
+            </a:pPr>
+            <a:r>
+              <a:rPr lang="en-US" sz="950" b="1" dirty="0">
+                <a:solidFill>
+                  <a:srgbClr val="0068B7"/>
+                </a:solidFill>
+                <a:latin typeface="Aptos" pitchFamily="34" charset="0"/>
+                <a:ea typeface="Aptos" pitchFamily="34" charset="-122"/>
+                <a:cs typeface="Aptos" pitchFamily="34" charset="-120"/>
+              </a:rPr>
+              <a:t>Use this for</a:t>
+            </a:r>
+            <a:endParaRPr lang="en-US" sz="950" dirty="0"/>
+          </a:p>
+        </p:txBody>
+      </p:sp>
+      <p:sp>
+        <p:nvSpPr>
+          <p:cNvPr id="16" name="Text 14"/>
+          <p:cNvSpPr/>
+          <p:nvPr/>
+        </p:nvSpPr>
+        <p:spPr>
+          <a:xfrm>
+            <a:off x="8074152" y="3959352"/>
+            <a:ext cx="2825496" cy="1170432"/>
+          </a:xfrm>
+          <a:prstGeom prst="rect">
+            <a:avLst/>
+          </a:prstGeom>
+          <a:noFill/>
+          <a:ln/>
+        </p:spPr>
+        <p:txBody>
+          <a:bodyPr wrap="square" lIns="0" tIns="0" rIns="0" bIns="0" rtlCol="0" anchor="t">
+            <a:normAutofit/>
+          </a:bodyPr>
+          <a:lstStyle/>
+          <a:p>
+            <a:pPr indent="0" marL="0">
+              <a:buNone/>
+            </a:pPr>
+            <a:r>
+              <a:rPr lang="en-US" sz="1250" dirty="0">
+                <a:solidFill>
+                  <a:srgbClr val="17364A"/>
+                </a:solidFill>
+                <a:latin typeface="Aptos" pitchFamily="34" charset="0"/>
+                <a:ea typeface="Aptos" pitchFamily="34" charset="-122"/>
+                <a:cs typeface="Aptos" pitchFamily="34" charset="-120"/>
+              </a:rPr>
+              <a:t>Connect the concept to public health decisions, safeguards, documentation, or implementation work.</a:t>
+            </a:r>
+            <a:endParaRPr lang="en-US" sz="1250" dirty="0"/>
           </a:p>
         </p:txBody>
       </p:sp>
@@ -6844,7 +12657,32 @@
       </p:sp>
       <p:sp>
         <p:nvSpPr>
-          <p:cNvPr id="3" name="Text 1"/>
+          <p:cNvPr id="3" name="Shape 1"/>
+          <p:cNvSpPr/>
+          <p:nvPr/>
+        </p:nvSpPr>
+        <p:spPr>
+          <a:xfrm>
+            <a:off x="0" y="164592"/>
+            <a:ext cx="146304" cy="6693408"/>
+          </a:xfrm>
+          <a:prstGeom prst="rect">
+            <a:avLst/>
+          </a:prstGeom>
+          <a:solidFill>
+            <a:srgbClr val="2F8A28"/>
+          </a:solidFill>
+          <a:ln w="12700">
+            <a:solidFill>
+              <a:srgbClr val="2F8A28"/>
+            </a:solidFill>
+            <a:prstDash val="solid"/>
+          </a:ln>
+        </p:spPr>
+      </p:sp>
+      <p:sp>
+        <p:nvSpPr>
+          <p:cNvPr id="4" name="Text 2"/>
           <p:cNvSpPr/>
           <p:nvPr/>
         </p:nvSpPr>
@@ -6883,7 +12721,7 @@
       </p:sp>
       <p:sp>
         <p:nvSpPr>
-          <p:cNvPr id="4" name="Text 2"/>
+          <p:cNvPr id="5" name="Text 3"/>
           <p:cNvSpPr/>
           <p:nvPr/>
         </p:nvSpPr>
@@ -6922,7 +12760,7 @@
       </p:sp>
       <p:sp>
         <p:nvSpPr>
-          <p:cNvPr id="5" name="Text 3"/>
+          <p:cNvPr id="6" name="Text 4"/>
           <p:cNvSpPr/>
           <p:nvPr/>
         </p:nvSpPr>
@@ -6961,13 +12799,77 @@
       </p:sp>
       <p:sp>
         <p:nvSpPr>
-          <p:cNvPr id="6" name="Text 4"/>
+          <p:cNvPr id="7" name="Shape 5"/>
           <p:cNvSpPr/>
           <p:nvPr/>
         </p:nvSpPr>
         <p:spPr>
           <a:xfrm>
             <a:off x="640080" y="658368"/>
+            <a:ext cx="420624" cy="420624"/>
+          </a:xfrm>
+          <a:prstGeom prst="ellipse">
+            <a:avLst/>
+          </a:prstGeom>
+          <a:solidFill>
+            <a:srgbClr val="0068B7"/>
+          </a:solidFill>
+          <a:ln w="12700">
+            <a:solidFill>
+              <a:srgbClr val="0068B7"/>
+            </a:solidFill>
+            <a:prstDash val="solid"/>
+          </a:ln>
+        </p:spPr>
+      </p:sp>
+      <p:sp>
+        <p:nvSpPr>
+          <p:cNvPr id="8" name="Text 6"/>
+          <p:cNvSpPr/>
+          <p:nvPr/>
+        </p:nvSpPr>
+        <p:spPr>
+          <a:xfrm>
+            <a:off x="640080" y="731520"/>
+            <a:ext cx="420624" cy="164592"/>
+          </a:xfrm>
+          <a:prstGeom prst="rect">
+            <a:avLst/>
+          </a:prstGeom>
+          <a:noFill/>
+          <a:ln/>
+        </p:spPr>
+        <p:txBody>
+          <a:bodyPr wrap="square" lIns="0" tIns="0" rIns="0" bIns="0" rtlCol="0" anchor="ctr"/>
+          <a:lstStyle/>
+          <a:p>
+            <a:pPr algn="ctr" indent="0" marL="0">
+              <a:buNone/>
+            </a:pPr>
+            <a:r>
+              <a:rPr lang="en-US" sz="1100" b="1" dirty="0">
+                <a:solidFill>
+                  <a:srgbClr val="FFFFFF"/>
+                </a:solidFill>
+                <a:latin typeface="Aptos" pitchFamily="34" charset="0"/>
+                <a:ea typeface="Aptos" pitchFamily="34" charset="-122"/>
+                <a:cs typeface="Aptos" pitchFamily="34" charset="-120"/>
+              </a:rPr>
+              <a:t>3</a:t>
+            </a:r>
+            <a:endParaRPr lang="en-US" sz="1100" dirty="0"/>
+          </a:p>
+        </p:txBody>
+      </p:sp>
+      <p:sp>
+        <p:nvSpPr>
+          <p:cNvPr id="9" name="Text 7"/>
+          <p:cNvSpPr/>
+          <p:nvPr/>
+        </p:nvSpPr>
+        <p:spPr>
+          <a:xfrm>
+            <a:off x="640080" y="621792"/>
             <a:ext cx="10881360" cy="566928"/>
           </a:xfrm>
           <a:prstGeom prst="rect">
@@ -6994,7 +12896,7 @@
                 <a:ea typeface="Aptos Display" pitchFamily="34" charset="-122"/>
                 <a:cs typeface="Aptos Display" pitchFamily="34" charset="-120"/>
               </a:rPr>
-              <a:t>Public Health Example</a:t>
+              <a:t>Jurisdiction and Agency Policy Note</a:t>
             </a:r>
             <a:endParaRPr lang="en-US" sz="2700" dirty="0"/>
           </a:p>
@@ -7002,32 +12904,178 @@
       </p:sp>
       <p:sp>
         <p:nvSpPr>
-          <p:cNvPr id="7" name="Text 5"/>
-          <p:cNvSpPr/>
-          <p:nvPr/>
-        </p:nvSpPr>
-        <p:spPr>
-          <a:xfrm>
-            <a:off x="822960" y="1325880"/>
-            <a:ext cx="10378440" cy="4800600"/>
-          </a:xfrm>
-          <a:prstGeom prst="rect">
-            <a:avLst/>
-          </a:prstGeom>
-          <a:noFill/>
-          <a:ln/>
-        </p:spPr>
-        <p:txBody>
-          <a:bodyPr wrap="square" lIns="1016" tIns="1016" rIns="1016" bIns="1016" rtlCol="0" anchor="t">
+          <p:cNvPr id="10" name="Text 8"/>
+          <p:cNvSpPr/>
+          <p:nvPr/>
+        </p:nvSpPr>
+        <p:spPr>
+          <a:xfrm>
+            <a:off x="868680" y="1417320"/>
+            <a:ext cx="6675120" cy="4434840"/>
+          </a:xfrm>
+          <a:prstGeom prst="rect">
+            <a:avLst/>
+          </a:prstGeom>
+          <a:noFill/>
+          <a:ln/>
+        </p:spPr>
+        <p:txBody>
+          <a:bodyPr wrap="square" lIns="635" tIns="635" rIns="635" bIns="635" rtlCol="0" anchor="t">
             <a:normAutofit/>
           </a:bodyPr>
           <a:lstStyle/>
           <a:p>
+            <a:r>
+              <a:rPr lang="en-US" sz="1700" dirty="0">
+                <a:solidFill>
+                  <a:srgbClr val="17364A"/>
+                </a:solidFill>
+                <a:latin typeface="Aptos" pitchFamily="34" charset="0"/>
+                <a:ea typeface="Aptos" pitchFamily="34" charset="-122"/>
+                <a:cs typeface="Aptos" pitchFamily="34" charset="-120"/>
+              </a:rPr>
+              <a:t>This module provides national-level training guidance for public health agencies and partners.</a:t>
+            </a:r>
+            <a:endParaRPr lang="en-US" sz="1700" dirty="0"/>
+          </a:p>
+          <a:p>
+            <a:r>
+              <a:rPr lang="en-US" sz="1700" dirty="0">
+                <a:solidFill>
+                  <a:srgbClr val="17364A"/>
+                </a:solidFill>
+                <a:latin typeface="Aptos" pitchFamily="34" charset="0"/>
+                <a:ea typeface="Aptos" pitchFamily="34" charset="-122"/>
+                <a:cs typeface="Aptos" pitchFamily="34" charset="-120"/>
+              </a:rPr>
+              <a:t>It is not legal advice and does not replace review by agency legal counsel, privacy officers, procurement officials, civil.</a:t>
+            </a:r>
+            <a:endParaRPr lang="en-US" sz="1700" dirty="0"/>
+          </a:p>
+          <a:p>
+            <a:r>
+              <a:rPr lang="en-US" sz="1700" dirty="0">
+                <a:solidFill>
+                  <a:srgbClr val="17364A"/>
+                </a:solidFill>
+                <a:latin typeface="Aptos" pitchFamily="34" charset="0"/>
+                <a:ea typeface="Aptos" pitchFamily="34" charset="-122"/>
+                <a:cs typeface="Aptos" pitchFamily="34" charset="-120"/>
+              </a:rPr>
+              <a:t>Requirements may vary by state, locality, territory, Tribe, agency, funding source, data-sharing agreement, emergency.</a:t>
+            </a:r>
+            <a:endParaRPr lang="en-US" sz="1700" dirty="0"/>
+          </a:p>
+          <a:p>
+            <a:r>
+              <a:rPr lang="en-US" sz="1700" dirty="0">
+                <a:solidFill>
+                  <a:srgbClr val="17364A"/>
+                </a:solidFill>
+                <a:latin typeface="Aptos" pitchFamily="34" charset="0"/>
+                <a:ea typeface="Aptos" pitchFamily="34" charset="-122"/>
+                <a:cs typeface="Aptos" pitchFamily="34" charset="-120"/>
+              </a:rPr>
+              <a:t>Learners should use this module to identify the issues that require review and should confirm applicable requirements.</a:t>
+            </a:r>
+            <a:endParaRPr lang="en-US" sz="1700" dirty="0"/>
+          </a:p>
+        </p:txBody>
+      </p:sp>
+      <p:sp>
+        <p:nvSpPr>
+          <p:cNvPr id="11" name="Shape 9"/>
+          <p:cNvSpPr/>
+          <p:nvPr/>
+        </p:nvSpPr>
+        <p:spPr>
+          <a:xfrm>
+            <a:off x="7909560" y="1417320"/>
+            <a:ext cx="3154680" cy="1828800"/>
+          </a:xfrm>
+          <a:prstGeom prst="roundRect">
+            <a:avLst>
+              <a:gd name="adj" fmla="val 6000"/>
+            </a:avLst>
+          </a:prstGeom>
+          <a:solidFill>
+            <a:srgbClr val="EEF8ED"/>
+          </a:solidFill>
+          <a:ln w="12700">
+            <a:solidFill>
+              <a:srgbClr val="B9D7E6"/>
+            </a:solidFill>
+            <a:prstDash val="solid"/>
+          </a:ln>
+        </p:spPr>
+      </p:sp>
+      <p:sp>
+        <p:nvSpPr>
+          <p:cNvPr id="12" name="Text 10"/>
+          <p:cNvSpPr/>
+          <p:nvPr/>
+        </p:nvSpPr>
+        <p:spPr>
+          <a:xfrm>
+            <a:off x="8074152" y="1563624"/>
+            <a:ext cx="2825496" cy="201168"/>
+          </a:xfrm>
+          <a:prstGeom prst="rect">
+            <a:avLst/>
+          </a:prstGeom>
+          <a:noFill/>
+          <a:ln/>
+        </p:spPr>
+        <p:txBody>
+          <a:bodyPr wrap="square" lIns="0" tIns="0" rIns="0" bIns="0" rtlCol="0" anchor="ctr"/>
+          <a:lstStyle/>
+          <a:p>
             <a:pPr indent="0" marL="0">
               <a:buNone/>
             </a:pPr>
             <a:r>
-              <a:rPr lang="en-US" sz="1420" dirty="0">
+              <a:rPr lang="en-US" sz="950" b="1" dirty="0">
+                <a:solidFill>
+                  <a:srgbClr val="0068B7"/>
+                </a:solidFill>
+                <a:latin typeface="Aptos" pitchFamily="34" charset="0"/>
+                <a:ea typeface="Aptos" pitchFamily="34" charset="-122"/>
+                <a:cs typeface="Aptos" pitchFamily="34" charset="-120"/>
+              </a:rPr>
+              <a:t>Key idea</a:t>
+            </a:r>
+            <a:endParaRPr lang="en-US" sz="950" dirty="0"/>
+          </a:p>
+        </p:txBody>
+      </p:sp>
+      <p:sp>
+        <p:nvSpPr>
+          <p:cNvPr id="13" name="Text 11"/>
+          <p:cNvSpPr/>
+          <p:nvPr/>
+        </p:nvSpPr>
+        <p:spPr>
+          <a:xfrm>
+            <a:off x="8074152" y="1856232"/>
+            <a:ext cx="2825496" cy="1261872"/>
+          </a:xfrm>
+          <a:prstGeom prst="rect">
+            <a:avLst/>
+          </a:prstGeom>
+          <a:noFill/>
+          <a:ln/>
+        </p:spPr>
+        <p:txBody>
+          <a:bodyPr wrap="square" lIns="0" tIns="0" rIns="0" bIns="0" rtlCol="0" anchor="t">
+            <a:normAutofit/>
+          </a:bodyPr>
+          <a:lstStyle/>
+          <a:p>
+            <a:pPr indent="0" marL="0">
+              <a:buNone/>
+            </a:pPr>
+            <a:r>
+              <a:rPr lang="en-US" sz="1250" dirty="0">
                 <a:solidFill>
                   <a:srgbClr val="17364A"/>
                 </a:solidFill>
@@ -7035,9 +13083,116 @@
                 <a:ea typeface="Aptos" pitchFamily="34" charset="-122"/>
                 <a:cs typeface="Aptos" pitchFamily="34" charset="-120"/>
               </a:rPr>
-              <a:t>A local health department implements an AI-assisted tool to classify incoming environmental health complaints by topic and urgency. The vendor configured the model, IT manages access, environmental health staff review the queue, and the program director owns the workflow. A complaint is misclassified and a serious housing-related concern is not routed for timely follow-up. A decision-rights matrix helps the agency respond. The program owner is accountable for workflow performance, the vendor must provide technical support and documentation, IT reviews logging and access, governance reviews whether use should continue, and an executive sponsor decides whether the risk requires pausing the tool. Because responsibilities are defined in advance, the agency can respond without confusion or blame shifting.</a:t>
-            </a:r>
-            <a:endParaRPr lang="en-US" sz="1420" dirty="0"/>
+              <a:t>This module provides national-level training guidance for public health agencies and partners.</a:t>
+            </a:r>
+            <a:endParaRPr lang="en-US" sz="1250" dirty="0"/>
+          </a:p>
+        </p:txBody>
+      </p:sp>
+      <p:sp>
+        <p:nvSpPr>
+          <p:cNvPr id="14" name="Shape 12"/>
+          <p:cNvSpPr/>
+          <p:nvPr/>
+        </p:nvSpPr>
+        <p:spPr>
+          <a:xfrm>
+            <a:off x="7909560" y="3520440"/>
+            <a:ext cx="3154680" cy="1737360"/>
+          </a:xfrm>
+          <a:prstGeom prst="roundRect">
+            <a:avLst>
+              <a:gd name="adj" fmla="val 6316"/>
+            </a:avLst>
+          </a:prstGeom>
+          <a:solidFill>
+            <a:srgbClr val="EAF6F8"/>
+          </a:solidFill>
+          <a:ln w="12700">
+            <a:solidFill>
+              <a:srgbClr val="B9D7E6"/>
+            </a:solidFill>
+            <a:prstDash val="solid"/>
+          </a:ln>
+        </p:spPr>
+      </p:sp>
+      <p:sp>
+        <p:nvSpPr>
+          <p:cNvPr id="15" name="Text 13"/>
+          <p:cNvSpPr/>
+          <p:nvPr/>
+        </p:nvSpPr>
+        <p:spPr>
+          <a:xfrm>
+            <a:off x="8074152" y="3666744"/>
+            <a:ext cx="2825496" cy="201168"/>
+          </a:xfrm>
+          <a:prstGeom prst="rect">
+            <a:avLst/>
+          </a:prstGeom>
+          <a:noFill/>
+          <a:ln/>
+        </p:spPr>
+        <p:txBody>
+          <a:bodyPr wrap="square" lIns="0" tIns="0" rIns="0" bIns="0" rtlCol="0" anchor="ctr"/>
+          <a:lstStyle/>
+          <a:p>
+            <a:pPr indent="0" marL="0">
+              <a:buNone/>
+            </a:pPr>
+            <a:r>
+              <a:rPr lang="en-US" sz="950" b="1" dirty="0">
+                <a:solidFill>
+                  <a:srgbClr val="0068B7"/>
+                </a:solidFill>
+                <a:latin typeface="Aptos" pitchFamily="34" charset="0"/>
+                <a:ea typeface="Aptos" pitchFamily="34" charset="-122"/>
+                <a:cs typeface="Aptos" pitchFamily="34" charset="-120"/>
+              </a:rPr>
+              <a:t>Use this for</a:t>
+            </a:r>
+            <a:endParaRPr lang="en-US" sz="950" dirty="0"/>
+          </a:p>
+        </p:txBody>
+      </p:sp>
+      <p:sp>
+        <p:nvSpPr>
+          <p:cNvPr id="16" name="Text 14"/>
+          <p:cNvSpPr/>
+          <p:nvPr/>
+        </p:nvSpPr>
+        <p:spPr>
+          <a:xfrm>
+            <a:off x="8074152" y="3959352"/>
+            <a:ext cx="2825496" cy="1170432"/>
+          </a:xfrm>
+          <a:prstGeom prst="rect">
+            <a:avLst/>
+          </a:prstGeom>
+          <a:noFill/>
+          <a:ln/>
+        </p:spPr>
+        <p:txBody>
+          <a:bodyPr wrap="square" lIns="0" tIns="0" rIns="0" bIns="0" rtlCol="0" anchor="t">
+            <a:normAutofit/>
+          </a:bodyPr>
+          <a:lstStyle/>
+          <a:p>
+            <a:pPr indent="0" marL="0">
+              <a:buNone/>
+            </a:pPr>
+            <a:r>
+              <a:rPr lang="en-US" sz="1250" dirty="0">
+                <a:solidFill>
+                  <a:srgbClr val="17364A"/>
+                </a:solidFill>
+                <a:latin typeface="Aptos" pitchFamily="34" charset="0"/>
+                <a:ea typeface="Aptos" pitchFamily="34" charset="-122"/>
+                <a:cs typeface="Aptos" pitchFamily="34" charset="-120"/>
+              </a:rPr>
+              <a:t>Connect the concept to public health decisions, safeguards, documentation, or implementation work.</a:t>
+            </a:r>
+            <a:endParaRPr lang="en-US" sz="1250" dirty="0"/>
           </a:p>
         </p:txBody>
       </p:sp>
@@ -7100,7 +13255,32 @@
       </p:sp>
       <p:sp>
         <p:nvSpPr>
-          <p:cNvPr id="3" name="Text 1"/>
+          <p:cNvPr id="3" name="Shape 1"/>
+          <p:cNvSpPr/>
+          <p:nvPr/>
+        </p:nvSpPr>
+        <p:spPr>
+          <a:xfrm>
+            <a:off x="0" y="164592"/>
+            <a:ext cx="146304" cy="6693408"/>
+          </a:xfrm>
+          <a:prstGeom prst="rect">
+            <a:avLst/>
+          </a:prstGeom>
+          <a:solidFill>
+            <a:srgbClr val="2F8A28"/>
+          </a:solidFill>
+          <a:ln w="12700">
+            <a:solidFill>
+              <a:srgbClr val="2F8A28"/>
+            </a:solidFill>
+            <a:prstDash val="solid"/>
+          </a:ln>
+        </p:spPr>
+      </p:sp>
+      <p:sp>
+        <p:nvSpPr>
+          <p:cNvPr id="4" name="Text 2"/>
           <p:cNvSpPr/>
           <p:nvPr/>
         </p:nvSpPr>
@@ -7139,7 +13319,7 @@
       </p:sp>
       <p:sp>
         <p:nvSpPr>
-          <p:cNvPr id="4" name="Text 2"/>
+          <p:cNvPr id="5" name="Text 3"/>
           <p:cNvSpPr/>
           <p:nvPr/>
         </p:nvSpPr>
@@ -7178,7 +13358,7 @@
       </p:sp>
       <p:sp>
         <p:nvSpPr>
-          <p:cNvPr id="5" name="Text 3"/>
+          <p:cNvPr id="6" name="Text 4"/>
           <p:cNvSpPr/>
           <p:nvPr/>
         </p:nvSpPr>
@@ -7217,13 +13397,77 @@
       </p:sp>
       <p:sp>
         <p:nvSpPr>
-          <p:cNvPr id="6" name="Text 4"/>
+          <p:cNvPr id="7" name="Shape 5"/>
           <p:cNvSpPr/>
           <p:nvPr/>
         </p:nvSpPr>
         <p:spPr>
           <a:xfrm>
             <a:off x="640080" y="658368"/>
+            <a:ext cx="420624" cy="420624"/>
+          </a:xfrm>
+          <a:prstGeom prst="ellipse">
+            <a:avLst/>
+          </a:prstGeom>
+          <a:solidFill>
+            <a:srgbClr val="0068B7"/>
+          </a:solidFill>
+          <a:ln w="12700">
+            <a:solidFill>
+              <a:srgbClr val="0068B7"/>
+            </a:solidFill>
+            <a:prstDash val="solid"/>
+          </a:ln>
+        </p:spPr>
+      </p:sp>
+      <p:sp>
+        <p:nvSpPr>
+          <p:cNvPr id="8" name="Text 6"/>
+          <p:cNvSpPr/>
+          <p:nvPr/>
+        </p:nvSpPr>
+        <p:spPr>
+          <a:xfrm>
+            <a:off x="640080" y="731520"/>
+            <a:ext cx="420624" cy="164592"/>
+          </a:xfrm>
+          <a:prstGeom prst="rect">
+            <a:avLst/>
+          </a:prstGeom>
+          <a:noFill/>
+          <a:ln/>
+        </p:spPr>
+        <p:txBody>
+          <a:bodyPr wrap="square" lIns="0" tIns="0" rIns="0" bIns="0" rtlCol="0" anchor="ctr"/>
+          <a:lstStyle/>
+          <a:p>
+            <a:pPr algn="ctr" indent="0" marL="0">
+              <a:buNone/>
+            </a:pPr>
+            <a:r>
+              <a:rPr lang="en-US" sz="1100" b="1" dirty="0">
+                <a:solidFill>
+                  <a:srgbClr val="FFFFFF"/>
+                </a:solidFill>
+                <a:latin typeface="Aptos" pitchFamily="34" charset="0"/>
+                <a:ea typeface="Aptos" pitchFamily="34" charset="-122"/>
+                <a:cs typeface="Aptos" pitchFamily="34" charset="-120"/>
+              </a:rPr>
+              <a:t>4</a:t>
+            </a:r>
+            <a:endParaRPr lang="en-US" sz="1100" dirty="0"/>
+          </a:p>
+        </p:txBody>
+      </p:sp>
+      <p:sp>
+        <p:nvSpPr>
+          <p:cNvPr id="9" name="Text 7"/>
+          <p:cNvSpPr/>
+          <p:nvPr/>
+        </p:nvSpPr>
+        <p:spPr>
+          <a:xfrm>
+            <a:off x="640080" y="621792"/>
             <a:ext cx="10881360" cy="566928"/>
           </a:xfrm>
           <a:prstGeom prst="rect">
@@ -7250,7 +13494,7 @@
                 <a:ea typeface="Aptos Display" pitchFamily="34" charset="-122"/>
                 <a:cs typeface="Aptos Display" pitchFamily="34" charset="-120"/>
               </a:rPr>
-              <a:t>Technical and Governance Deep Dive</a:t>
+              <a:t>Why This Topic Matters for Public Health AI</a:t>
             </a:r>
             <a:endParaRPr lang="en-US" sz="2700" dirty="0"/>
           </a:p>
@@ -7258,32 +13502,178 @@
       </p:sp>
       <p:sp>
         <p:nvSpPr>
-          <p:cNvPr id="7" name="Text 5"/>
-          <p:cNvSpPr/>
-          <p:nvPr/>
-        </p:nvSpPr>
-        <p:spPr>
-          <a:xfrm>
-            <a:off x="822960" y="1325880"/>
-            <a:ext cx="10378440" cy="4800600"/>
-          </a:xfrm>
-          <a:prstGeom prst="rect">
-            <a:avLst/>
-          </a:prstGeom>
-          <a:noFill/>
-          <a:ln/>
-        </p:spPr>
-        <p:txBody>
-          <a:bodyPr wrap="square" lIns="1016" tIns="1016" rIns="1016" bIns="1016" rtlCol="0" anchor="t">
+          <p:cNvPr id="10" name="Text 8"/>
+          <p:cNvSpPr/>
+          <p:nvPr/>
+        </p:nvSpPr>
+        <p:spPr>
+          <a:xfrm>
+            <a:off x="868680" y="1417320"/>
+            <a:ext cx="6675120" cy="4434840"/>
+          </a:xfrm>
+          <a:prstGeom prst="rect">
+            <a:avLst/>
+          </a:prstGeom>
+          <a:noFill/>
+          <a:ln/>
+        </p:spPr>
+        <p:txBody>
+          <a:bodyPr wrap="square" lIns="635" tIns="635" rIns="635" bIns="635" rtlCol="0" anchor="t">
             <a:normAutofit/>
           </a:bodyPr>
           <a:lstStyle/>
           <a:p>
+            <a:r>
+              <a:rPr lang="en-US" sz="1700" dirty="0">
+                <a:solidFill>
+                  <a:srgbClr val="17364A"/>
+                </a:solidFill>
+                <a:latin typeface="Aptos" pitchFamily="34" charset="0"/>
+                <a:ea typeface="Aptos" pitchFamily="34" charset="-122"/>
+                <a:cs typeface="Aptos" pitchFamily="34" charset="-120"/>
+              </a:rPr>
+              <a:t>AI systems can distribute responsibility across many actors.</a:t>
+            </a:r>
+            <a:endParaRPr lang="en-US" sz="1700" dirty="0"/>
+          </a:p>
+          <a:p>
+            <a:r>
+              <a:rPr lang="en-US" sz="1700" dirty="0">
+                <a:solidFill>
+                  <a:srgbClr val="17364A"/>
+                </a:solidFill>
+                <a:latin typeface="Aptos" pitchFamily="34" charset="0"/>
+                <a:ea typeface="Aptos" pitchFamily="34" charset="-122"/>
+                <a:cs typeface="Aptos" pitchFamily="34" charset="-120"/>
+              </a:rPr>
+              <a:t>A vendor may provide the model, IT may manage access, a program may define the workflow, an epidemiologist may review the.</a:t>
+            </a:r>
+            <a:endParaRPr lang="en-US" sz="1700" dirty="0"/>
+          </a:p>
+          <a:p>
+            <a:r>
+              <a:rPr lang="en-US" sz="1700" dirty="0">
+                <a:solidFill>
+                  <a:srgbClr val="17364A"/>
+                </a:solidFill>
+                <a:latin typeface="Aptos" pitchFamily="34" charset="0"/>
+                <a:ea typeface="Aptos" pitchFamily="34" charset="-122"/>
+                <a:cs typeface="Aptos" pitchFamily="34" charset="-120"/>
+              </a:rPr>
+              <a:t>Without a formal accountability model, each actor may assume that another party is responsible for validation, monitoring,.</a:t>
+            </a:r>
+            <a:endParaRPr lang="en-US" sz="1700" dirty="0"/>
+          </a:p>
+          <a:p>
+            <a:r>
+              <a:rPr lang="en-US" sz="1700" dirty="0">
+                <a:solidFill>
+                  <a:srgbClr val="17364A"/>
+                </a:solidFill>
+                <a:latin typeface="Aptos" pitchFamily="34" charset="0"/>
+                <a:ea typeface="Aptos" pitchFamily="34" charset="-122"/>
+                <a:cs typeface="Aptos" pitchFamily="34" charset="-120"/>
+              </a:rPr>
+              <a:t>Clear decision rights support trust and speed.</a:t>
+            </a:r>
+            <a:endParaRPr lang="en-US" sz="1700" dirty="0"/>
+          </a:p>
+        </p:txBody>
+      </p:sp>
+      <p:sp>
+        <p:nvSpPr>
+          <p:cNvPr id="11" name="Shape 9"/>
+          <p:cNvSpPr/>
+          <p:nvPr/>
+        </p:nvSpPr>
+        <p:spPr>
+          <a:xfrm>
+            <a:off x="7909560" y="1417320"/>
+            <a:ext cx="3154680" cy="1828800"/>
+          </a:xfrm>
+          <a:prstGeom prst="roundRect">
+            <a:avLst>
+              <a:gd name="adj" fmla="val 6000"/>
+            </a:avLst>
+          </a:prstGeom>
+          <a:solidFill>
+            <a:srgbClr val="EEF8ED"/>
+          </a:solidFill>
+          <a:ln w="12700">
+            <a:solidFill>
+              <a:srgbClr val="B9D7E6"/>
+            </a:solidFill>
+            <a:prstDash val="solid"/>
+          </a:ln>
+        </p:spPr>
+      </p:sp>
+      <p:sp>
+        <p:nvSpPr>
+          <p:cNvPr id="12" name="Text 10"/>
+          <p:cNvSpPr/>
+          <p:nvPr/>
+        </p:nvSpPr>
+        <p:spPr>
+          <a:xfrm>
+            <a:off x="8074152" y="1563624"/>
+            <a:ext cx="2825496" cy="201168"/>
+          </a:xfrm>
+          <a:prstGeom prst="rect">
+            <a:avLst/>
+          </a:prstGeom>
+          <a:noFill/>
+          <a:ln/>
+        </p:spPr>
+        <p:txBody>
+          <a:bodyPr wrap="square" lIns="0" tIns="0" rIns="0" bIns="0" rtlCol="0" anchor="ctr"/>
+          <a:lstStyle/>
+          <a:p>
             <a:pPr indent="0" marL="0">
               <a:buNone/>
             </a:pPr>
             <a:r>
-              <a:rPr lang="en-US" sz="1420" dirty="0">
+              <a:rPr lang="en-US" sz="950" b="1" dirty="0">
+                <a:solidFill>
+                  <a:srgbClr val="0068B7"/>
+                </a:solidFill>
+                <a:latin typeface="Aptos" pitchFamily="34" charset="0"/>
+                <a:ea typeface="Aptos" pitchFamily="34" charset="-122"/>
+                <a:cs typeface="Aptos" pitchFamily="34" charset="-120"/>
+              </a:rPr>
+              <a:t>Key idea</a:t>
+            </a:r>
+            <a:endParaRPr lang="en-US" sz="950" dirty="0"/>
+          </a:p>
+        </p:txBody>
+      </p:sp>
+      <p:sp>
+        <p:nvSpPr>
+          <p:cNvPr id="13" name="Text 11"/>
+          <p:cNvSpPr/>
+          <p:nvPr/>
+        </p:nvSpPr>
+        <p:spPr>
+          <a:xfrm>
+            <a:off x="8074152" y="1856232"/>
+            <a:ext cx="2825496" cy="1261872"/>
+          </a:xfrm>
+          <a:prstGeom prst="rect">
+            <a:avLst/>
+          </a:prstGeom>
+          <a:noFill/>
+          <a:ln/>
+        </p:spPr>
+        <p:txBody>
+          <a:bodyPr wrap="square" lIns="0" tIns="0" rIns="0" bIns="0" rtlCol="0" anchor="t">
+            <a:normAutofit/>
+          </a:bodyPr>
+          <a:lstStyle/>
+          <a:p>
+            <a:pPr indent="0" marL="0">
+              <a:buNone/>
+            </a:pPr>
+            <a:r>
+              <a:rPr lang="en-US" sz="1250" dirty="0">
                 <a:solidFill>
                   <a:srgbClr val="17364A"/>
                 </a:solidFill>
@@ -7291,9 +13681,116 @@
                 <a:ea typeface="Aptos" pitchFamily="34" charset="-122"/>
                 <a:cs typeface="Aptos" pitchFamily="34" charset="-120"/>
               </a:rPr>
-              <a:t>Decision rights should be defined across the full AI lifecycle. During ideation, leadership may decide whether a use case aligns with agency priorities. During review, governance may decide whether the use case is low, moderate, or high risk. During procurement, authorized officials decide whether vendor claims, contract language, and technical requirements are sufficient. During implementation, program and technical owners decide whether acceptance criteria have been met. During operations, defined owners decide whether monitoring results require adjustment, escalation, or retirement. A public health accountability model should separate approval authority from operational ownership. An executive may approve a use case, but the program owner remains accountable for how the workflow functions. A privacy officer may advise on data safeguards, but the program cannot treat that consultation as a substitute for ongoing compliance. A vendor may provide model documentation, but the agency must decide whether the documentation is sufficient for its context and authorities. Decision rights should also include stop authority. Agencies often define who can approve a tool but fail to define who can pause it. Stop authority is essential for AI because model performance, data flows, user behavior, and public conditions can change over time. A clear pause process helps staff report concerns early rather than waiting for a serious incident.</a:t>
-            </a:r>
-            <a:endParaRPr lang="en-US" sz="1420" dirty="0"/>
+              <a:t>AI systems can distribute responsibility across many actors.</a:t>
+            </a:r>
+            <a:endParaRPr lang="en-US" sz="1250" dirty="0"/>
+          </a:p>
+        </p:txBody>
+      </p:sp>
+      <p:sp>
+        <p:nvSpPr>
+          <p:cNvPr id="14" name="Shape 12"/>
+          <p:cNvSpPr/>
+          <p:nvPr/>
+        </p:nvSpPr>
+        <p:spPr>
+          <a:xfrm>
+            <a:off x="7909560" y="3520440"/>
+            <a:ext cx="3154680" cy="1737360"/>
+          </a:xfrm>
+          <a:prstGeom prst="roundRect">
+            <a:avLst>
+              <a:gd name="adj" fmla="val 6316"/>
+            </a:avLst>
+          </a:prstGeom>
+          <a:solidFill>
+            <a:srgbClr val="EAF6F8"/>
+          </a:solidFill>
+          <a:ln w="12700">
+            <a:solidFill>
+              <a:srgbClr val="B9D7E6"/>
+            </a:solidFill>
+            <a:prstDash val="solid"/>
+          </a:ln>
+        </p:spPr>
+      </p:sp>
+      <p:sp>
+        <p:nvSpPr>
+          <p:cNvPr id="15" name="Text 13"/>
+          <p:cNvSpPr/>
+          <p:nvPr/>
+        </p:nvSpPr>
+        <p:spPr>
+          <a:xfrm>
+            <a:off x="8074152" y="3666744"/>
+            <a:ext cx="2825496" cy="201168"/>
+          </a:xfrm>
+          <a:prstGeom prst="rect">
+            <a:avLst/>
+          </a:prstGeom>
+          <a:noFill/>
+          <a:ln/>
+        </p:spPr>
+        <p:txBody>
+          <a:bodyPr wrap="square" lIns="0" tIns="0" rIns="0" bIns="0" rtlCol="0" anchor="ctr"/>
+          <a:lstStyle/>
+          <a:p>
+            <a:pPr indent="0" marL="0">
+              <a:buNone/>
+            </a:pPr>
+            <a:r>
+              <a:rPr lang="en-US" sz="950" b="1" dirty="0">
+                <a:solidFill>
+                  <a:srgbClr val="0068B7"/>
+                </a:solidFill>
+                <a:latin typeface="Aptos" pitchFamily="34" charset="0"/>
+                <a:ea typeface="Aptos" pitchFamily="34" charset="-122"/>
+                <a:cs typeface="Aptos" pitchFamily="34" charset="-120"/>
+              </a:rPr>
+              <a:t>Use this for</a:t>
+            </a:r>
+            <a:endParaRPr lang="en-US" sz="950" dirty="0"/>
+          </a:p>
+        </p:txBody>
+      </p:sp>
+      <p:sp>
+        <p:nvSpPr>
+          <p:cNvPr id="16" name="Text 14"/>
+          <p:cNvSpPr/>
+          <p:nvPr/>
+        </p:nvSpPr>
+        <p:spPr>
+          <a:xfrm>
+            <a:off x="8074152" y="3959352"/>
+            <a:ext cx="2825496" cy="1170432"/>
+          </a:xfrm>
+          <a:prstGeom prst="rect">
+            <a:avLst/>
+          </a:prstGeom>
+          <a:noFill/>
+          <a:ln/>
+        </p:spPr>
+        <p:txBody>
+          <a:bodyPr wrap="square" lIns="0" tIns="0" rIns="0" bIns="0" rtlCol="0" anchor="t">
+            <a:normAutofit/>
+          </a:bodyPr>
+          <a:lstStyle/>
+          <a:p>
+            <a:pPr indent="0" marL="0">
+              <a:buNone/>
+            </a:pPr>
+            <a:r>
+              <a:rPr lang="en-US" sz="1250" dirty="0">
+                <a:solidFill>
+                  <a:srgbClr val="17364A"/>
+                </a:solidFill>
+                <a:latin typeface="Aptos" pitchFamily="34" charset="0"/>
+                <a:ea typeface="Aptos" pitchFamily="34" charset="-122"/>
+                <a:cs typeface="Aptos" pitchFamily="34" charset="-120"/>
+              </a:rPr>
+              <a:t>Connect the concept to public health decisions, safeguards, documentation, or implementation work.</a:t>
+            </a:r>
+            <a:endParaRPr lang="en-US" sz="1250" dirty="0"/>
           </a:p>
         </p:txBody>
       </p:sp>
@@ -7356,7 +13853,32 @@
       </p:sp>
       <p:sp>
         <p:nvSpPr>
-          <p:cNvPr id="3" name="Text 1"/>
+          <p:cNvPr id="3" name="Shape 1"/>
+          <p:cNvSpPr/>
+          <p:nvPr/>
+        </p:nvSpPr>
+        <p:spPr>
+          <a:xfrm>
+            <a:off x="0" y="164592"/>
+            <a:ext cx="146304" cy="6693408"/>
+          </a:xfrm>
+          <a:prstGeom prst="rect">
+            <a:avLst/>
+          </a:prstGeom>
+          <a:solidFill>
+            <a:srgbClr val="2F8A28"/>
+          </a:solidFill>
+          <a:ln w="12700">
+            <a:solidFill>
+              <a:srgbClr val="2F8A28"/>
+            </a:solidFill>
+            <a:prstDash val="solid"/>
+          </a:ln>
+        </p:spPr>
+      </p:sp>
+      <p:sp>
+        <p:nvSpPr>
+          <p:cNvPr id="4" name="Text 2"/>
           <p:cNvSpPr/>
           <p:nvPr/>
         </p:nvSpPr>
@@ -7395,7 +13917,7 @@
       </p:sp>
       <p:sp>
         <p:nvSpPr>
-          <p:cNvPr id="4" name="Text 2"/>
+          <p:cNvPr id="5" name="Text 3"/>
           <p:cNvSpPr/>
           <p:nvPr/>
         </p:nvSpPr>
@@ -7434,7 +13956,7 @@
       </p:sp>
       <p:sp>
         <p:nvSpPr>
-          <p:cNvPr id="5" name="Text 3"/>
+          <p:cNvPr id="6" name="Text 4"/>
           <p:cNvSpPr/>
           <p:nvPr/>
         </p:nvSpPr>
@@ -7473,13 +13995,77 @@
       </p:sp>
       <p:sp>
         <p:nvSpPr>
-          <p:cNvPr id="6" name="Text 4"/>
+          <p:cNvPr id="7" name="Shape 5"/>
           <p:cNvSpPr/>
           <p:nvPr/>
         </p:nvSpPr>
         <p:spPr>
           <a:xfrm>
             <a:off x="640080" y="658368"/>
+            <a:ext cx="420624" cy="420624"/>
+          </a:xfrm>
+          <a:prstGeom prst="ellipse">
+            <a:avLst/>
+          </a:prstGeom>
+          <a:solidFill>
+            <a:srgbClr val="0068B7"/>
+          </a:solidFill>
+          <a:ln w="12700">
+            <a:solidFill>
+              <a:srgbClr val="0068B7"/>
+            </a:solidFill>
+            <a:prstDash val="solid"/>
+          </a:ln>
+        </p:spPr>
+      </p:sp>
+      <p:sp>
+        <p:nvSpPr>
+          <p:cNvPr id="8" name="Text 6"/>
+          <p:cNvSpPr/>
+          <p:nvPr/>
+        </p:nvSpPr>
+        <p:spPr>
+          <a:xfrm>
+            <a:off x="640080" y="731520"/>
+            <a:ext cx="420624" cy="164592"/>
+          </a:xfrm>
+          <a:prstGeom prst="rect">
+            <a:avLst/>
+          </a:prstGeom>
+          <a:noFill/>
+          <a:ln/>
+        </p:spPr>
+        <p:txBody>
+          <a:bodyPr wrap="square" lIns="0" tIns="0" rIns="0" bIns="0" rtlCol="0" anchor="ctr"/>
+          <a:lstStyle/>
+          <a:p>
+            <a:pPr algn="ctr" indent="0" marL="0">
+              <a:buNone/>
+            </a:pPr>
+            <a:r>
+              <a:rPr lang="en-US" sz="1100" b="1" dirty="0">
+                <a:solidFill>
+                  <a:srgbClr val="FFFFFF"/>
+                </a:solidFill>
+                <a:latin typeface="Aptos" pitchFamily="34" charset="0"/>
+                <a:ea typeface="Aptos" pitchFamily="34" charset="-122"/>
+                <a:cs typeface="Aptos" pitchFamily="34" charset="-120"/>
+              </a:rPr>
+              <a:t>5</a:t>
+            </a:r>
+            <a:endParaRPr lang="en-US" sz="1100" dirty="0"/>
+          </a:p>
+        </p:txBody>
+      </p:sp>
+      <p:sp>
+        <p:nvSpPr>
+          <p:cNvPr id="9" name="Text 7"/>
+          <p:cNvSpPr/>
+          <p:nvPr/>
+        </p:nvSpPr>
+        <p:spPr>
+          <a:xfrm>
+            <a:off x="640080" y="621792"/>
             <a:ext cx="10881360" cy="566928"/>
           </a:xfrm>
           <a:prstGeom prst="rect">
@@ -7506,7 +14092,7 @@
                 <a:ea typeface="Aptos Display" pitchFamily="34" charset="-122"/>
                 <a:cs typeface="Aptos Display" pitchFamily="34" charset="-120"/>
               </a:rPr>
-              <a:t>Risks, Failure Modes, and Guardrails</a:t>
+              <a:t>Public Health Example</a:t>
             </a:r>
             <a:endParaRPr lang="en-US" sz="2700" dirty="0"/>
           </a:p>
@@ -7514,32 +14100,178 @@
       </p:sp>
       <p:sp>
         <p:nvSpPr>
-          <p:cNvPr id="7" name="Text 5"/>
-          <p:cNvSpPr/>
-          <p:nvPr/>
-        </p:nvSpPr>
-        <p:spPr>
-          <a:xfrm>
-            <a:off x="822960" y="1325880"/>
-            <a:ext cx="10378440" cy="4800600"/>
-          </a:xfrm>
-          <a:prstGeom prst="rect">
-            <a:avLst/>
-          </a:prstGeom>
-          <a:noFill/>
-          <a:ln/>
-        </p:spPr>
-        <p:txBody>
-          <a:bodyPr wrap="square" lIns="1016" tIns="1016" rIns="1016" bIns="1016" rtlCol="0" anchor="t">
+          <p:cNvPr id="10" name="Text 8"/>
+          <p:cNvSpPr/>
+          <p:nvPr/>
+        </p:nvSpPr>
+        <p:spPr>
+          <a:xfrm>
+            <a:off x="868680" y="1417320"/>
+            <a:ext cx="6675120" cy="4434840"/>
+          </a:xfrm>
+          <a:prstGeom prst="rect">
+            <a:avLst/>
+          </a:prstGeom>
+          <a:noFill/>
+          <a:ln/>
+        </p:spPr>
+        <p:txBody>
+          <a:bodyPr wrap="square" lIns="635" tIns="635" rIns="635" bIns="635" rtlCol="0" anchor="t">
             <a:normAutofit/>
           </a:bodyPr>
           <a:lstStyle/>
           <a:p>
+            <a:r>
+              <a:rPr lang="en-US" sz="1700" dirty="0">
+                <a:solidFill>
+                  <a:srgbClr val="17364A"/>
+                </a:solidFill>
+                <a:latin typeface="Aptos" pitchFamily="34" charset="0"/>
+                <a:ea typeface="Aptos" pitchFamily="34" charset="-122"/>
+                <a:cs typeface="Aptos" pitchFamily="34" charset="-120"/>
+              </a:rPr>
+              <a:t>A local health department implements an AI-assisted tool to classify incoming environmental health complaints by topic and.</a:t>
+            </a:r>
+            <a:endParaRPr lang="en-US" sz="1700" dirty="0"/>
+          </a:p>
+          <a:p>
+            <a:r>
+              <a:rPr lang="en-US" sz="1700" dirty="0">
+                <a:solidFill>
+                  <a:srgbClr val="17364A"/>
+                </a:solidFill>
+                <a:latin typeface="Aptos" pitchFamily="34" charset="0"/>
+                <a:ea typeface="Aptos" pitchFamily="34" charset="-122"/>
+                <a:cs typeface="Aptos" pitchFamily="34" charset="-120"/>
+              </a:rPr>
+              <a:t>The vendor configured the model, IT manages access, environmental health staff review the queue, and the program director.</a:t>
+            </a:r>
+            <a:endParaRPr lang="en-US" sz="1700" dirty="0"/>
+          </a:p>
+          <a:p>
+            <a:r>
+              <a:rPr lang="en-US" sz="1700" dirty="0">
+                <a:solidFill>
+                  <a:srgbClr val="17364A"/>
+                </a:solidFill>
+                <a:latin typeface="Aptos" pitchFamily="34" charset="0"/>
+                <a:ea typeface="Aptos" pitchFamily="34" charset="-122"/>
+                <a:cs typeface="Aptos" pitchFamily="34" charset="-120"/>
+              </a:rPr>
+              <a:t>A complaint is misclassified and a serious housing-related concern is not routed for timely follow-up.</a:t>
+            </a:r>
+            <a:endParaRPr lang="en-US" sz="1700" dirty="0"/>
+          </a:p>
+          <a:p>
+            <a:r>
+              <a:rPr lang="en-US" sz="1700" dirty="0">
+                <a:solidFill>
+                  <a:srgbClr val="17364A"/>
+                </a:solidFill>
+                <a:latin typeface="Aptos" pitchFamily="34" charset="0"/>
+                <a:ea typeface="Aptos" pitchFamily="34" charset="-122"/>
+                <a:cs typeface="Aptos" pitchFamily="34" charset="-120"/>
+              </a:rPr>
+              <a:t>A decision-rights matrix helps the agency respond.</a:t>
+            </a:r>
+            <a:endParaRPr lang="en-US" sz="1700" dirty="0"/>
+          </a:p>
+        </p:txBody>
+      </p:sp>
+      <p:sp>
+        <p:nvSpPr>
+          <p:cNvPr id="11" name="Shape 9"/>
+          <p:cNvSpPr/>
+          <p:nvPr/>
+        </p:nvSpPr>
+        <p:spPr>
+          <a:xfrm>
+            <a:off x="7909560" y="1417320"/>
+            <a:ext cx="3154680" cy="1828800"/>
+          </a:xfrm>
+          <a:prstGeom prst="roundRect">
+            <a:avLst>
+              <a:gd name="adj" fmla="val 6000"/>
+            </a:avLst>
+          </a:prstGeom>
+          <a:solidFill>
+            <a:srgbClr val="EEF8ED"/>
+          </a:solidFill>
+          <a:ln w="12700">
+            <a:solidFill>
+              <a:srgbClr val="B9D7E6"/>
+            </a:solidFill>
+            <a:prstDash val="solid"/>
+          </a:ln>
+        </p:spPr>
+      </p:sp>
+      <p:sp>
+        <p:nvSpPr>
+          <p:cNvPr id="12" name="Text 10"/>
+          <p:cNvSpPr/>
+          <p:nvPr/>
+        </p:nvSpPr>
+        <p:spPr>
+          <a:xfrm>
+            <a:off x="8074152" y="1563624"/>
+            <a:ext cx="2825496" cy="201168"/>
+          </a:xfrm>
+          <a:prstGeom prst="rect">
+            <a:avLst/>
+          </a:prstGeom>
+          <a:noFill/>
+          <a:ln/>
+        </p:spPr>
+        <p:txBody>
+          <a:bodyPr wrap="square" lIns="0" tIns="0" rIns="0" bIns="0" rtlCol="0" anchor="ctr"/>
+          <a:lstStyle/>
+          <a:p>
             <a:pPr indent="0" marL="0">
               <a:buNone/>
             </a:pPr>
             <a:r>
-              <a:rPr lang="en-US" sz="1420" dirty="0">
+              <a:rPr lang="en-US" sz="950" b="1" dirty="0">
+                <a:solidFill>
+                  <a:srgbClr val="0068B7"/>
+                </a:solidFill>
+                <a:latin typeface="Aptos" pitchFamily="34" charset="0"/>
+                <a:ea typeface="Aptos" pitchFamily="34" charset="-122"/>
+                <a:cs typeface="Aptos" pitchFamily="34" charset="-120"/>
+              </a:rPr>
+              <a:t>Key idea</a:t>
+            </a:r>
+            <a:endParaRPr lang="en-US" sz="950" dirty="0"/>
+          </a:p>
+        </p:txBody>
+      </p:sp>
+      <p:sp>
+        <p:nvSpPr>
+          <p:cNvPr id="13" name="Text 11"/>
+          <p:cNvSpPr/>
+          <p:nvPr/>
+        </p:nvSpPr>
+        <p:spPr>
+          <a:xfrm>
+            <a:off x="8074152" y="1856232"/>
+            <a:ext cx="2825496" cy="1261872"/>
+          </a:xfrm>
+          <a:prstGeom prst="rect">
+            <a:avLst/>
+          </a:prstGeom>
+          <a:noFill/>
+          <a:ln/>
+        </p:spPr>
+        <p:txBody>
+          <a:bodyPr wrap="square" lIns="0" tIns="0" rIns="0" bIns="0" rtlCol="0" anchor="t">
+            <a:normAutofit/>
+          </a:bodyPr>
+          <a:lstStyle/>
+          <a:p>
+            <a:pPr indent="0" marL="0">
+              <a:buNone/>
+            </a:pPr>
+            <a:r>
+              <a:rPr lang="en-US" sz="1250" dirty="0">
                 <a:solidFill>
                   <a:srgbClr val="17364A"/>
                 </a:solidFill>
@@ -7547,9 +14279,116 @@
                 <a:ea typeface="Aptos" pitchFamily="34" charset="-122"/>
                 <a:cs typeface="Aptos" pitchFamily="34" charset="-120"/>
               </a:rPr>
-              <a:t>One risk is accountability diffusion. When everyone is involved but no one is accountable, important concerns may go unresolved. A guardrail is to assign a named program owner and governance owner for every AI use case. Another risk is inappropriate risk acceptance by staff who lack authority. A frontline supervisor may feel pressure to continue a tool despite known concerns. A guardrail is to define which risks can be accepted at the program level and which require executive or governance approval.</a:t>
-            </a:r>
-            <a:endParaRPr lang="en-US" sz="1420" dirty="0"/>
+              <a:t>A local health department implements an AI-assisted tool to classify incoming environmental health complaints by topic and.</a:t>
+            </a:r>
+            <a:endParaRPr lang="en-US" sz="1250" dirty="0"/>
+          </a:p>
+        </p:txBody>
+      </p:sp>
+      <p:sp>
+        <p:nvSpPr>
+          <p:cNvPr id="14" name="Shape 12"/>
+          <p:cNvSpPr/>
+          <p:nvPr/>
+        </p:nvSpPr>
+        <p:spPr>
+          <a:xfrm>
+            <a:off x="7909560" y="3520440"/>
+            <a:ext cx="3154680" cy="1737360"/>
+          </a:xfrm>
+          <a:prstGeom prst="roundRect">
+            <a:avLst>
+              <a:gd name="adj" fmla="val 6316"/>
+            </a:avLst>
+          </a:prstGeom>
+          <a:solidFill>
+            <a:srgbClr val="EAF6F8"/>
+          </a:solidFill>
+          <a:ln w="12700">
+            <a:solidFill>
+              <a:srgbClr val="B9D7E6"/>
+            </a:solidFill>
+            <a:prstDash val="solid"/>
+          </a:ln>
+        </p:spPr>
+      </p:sp>
+      <p:sp>
+        <p:nvSpPr>
+          <p:cNvPr id="15" name="Text 13"/>
+          <p:cNvSpPr/>
+          <p:nvPr/>
+        </p:nvSpPr>
+        <p:spPr>
+          <a:xfrm>
+            <a:off x="8074152" y="3666744"/>
+            <a:ext cx="2825496" cy="201168"/>
+          </a:xfrm>
+          <a:prstGeom prst="rect">
+            <a:avLst/>
+          </a:prstGeom>
+          <a:noFill/>
+          <a:ln/>
+        </p:spPr>
+        <p:txBody>
+          <a:bodyPr wrap="square" lIns="0" tIns="0" rIns="0" bIns="0" rtlCol="0" anchor="ctr"/>
+          <a:lstStyle/>
+          <a:p>
+            <a:pPr indent="0" marL="0">
+              <a:buNone/>
+            </a:pPr>
+            <a:r>
+              <a:rPr lang="en-US" sz="950" b="1" dirty="0">
+                <a:solidFill>
+                  <a:srgbClr val="0068B7"/>
+                </a:solidFill>
+                <a:latin typeface="Aptos" pitchFamily="34" charset="0"/>
+                <a:ea typeface="Aptos" pitchFamily="34" charset="-122"/>
+                <a:cs typeface="Aptos" pitchFamily="34" charset="-120"/>
+              </a:rPr>
+              <a:t>Use this for</a:t>
+            </a:r>
+            <a:endParaRPr lang="en-US" sz="950" dirty="0"/>
+          </a:p>
+        </p:txBody>
+      </p:sp>
+      <p:sp>
+        <p:nvSpPr>
+          <p:cNvPr id="16" name="Text 14"/>
+          <p:cNvSpPr/>
+          <p:nvPr/>
+        </p:nvSpPr>
+        <p:spPr>
+          <a:xfrm>
+            <a:off x="8074152" y="3959352"/>
+            <a:ext cx="2825496" cy="1170432"/>
+          </a:xfrm>
+          <a:prstGeom prst="rect">
+            <a:avLst/>
+          </a:prstGeom>
+          <a:noFill/>
+          <a:ln/>
+        </p:spPr>
+        <p:txBody>
+          <a:bodyPr wrap="square" lIns="0" tIns="0" rIns="0" bIns="0" rtlCol="0" anchor="t">
+            <a:normAutofit/>
+          </a:bodyPr>
+          <a:lstStyle/>
+          <a:p>
+            <a:pPr indent="0" marL="0">
+              <a:buNone/>
+            </a:pPr>
+            <a:r>
+              <a:rPr lang="en-US" sz="1250" dirty="0">
+                <a:solidFill>
+                  <a:srgbClr val="17364A"/>
+                </a:solidFill>
+                <a:latin typeface="Aptos" pitchFamily="34" charset="0"/>
+                <a:ea typeface="Aptos" pitchFamily="34" charset="-122"/>
+                <a:cs typeface="Aptos" pitchFamily="34" charset="-120"/>
+              </a:rPr>
+              <a:t>Connect the concept to public health decisions, safeguards, documentation, or implementation work.</a:t>
+            </a:r>
+            <a:endParaRPr lang="en-US" sz="1250" dirty="0"/>
           </a:p>
         </p:txBody>
       </p:sp>

--- a/downloads/presentations/modules/lesson-32-executive-ai-decision-rights-and-accountability.pptx
+++ b/downloads/presentations/modules/lesson-32-executive-ai-decision-rights-and-accountability.pptx
@@ -2900,6 +2900,45 @@
           </a:p>
         </p:txBody>
       </p:sp>
+      <p:sp>
+        <p:nvSpPr>
+          <p:cNvPr id="8" name="Text 5"/>
+          <p:cNvSpPr/>
+          <p:nvPr/>
+        </p:nvSpPr>
+        <p:spPr>
+          <a:xfrm>
+            <a:off x="11137392" y="6510528"/>
+            <a:ext cx="411480" cy="201168"/>
+          </a:xfrm>
+          <a:prstGeom prst="rect">
+            <a:avLst/>
+          </a:prstGeom>
+          <a:noFill/>
+          <a:ln/>
+        </p:spPr>
+        <p:txBody>
+          <a:bodyPr wrap="square" lIns="0" tIns="0" rIns="0" bIns="0" rtlCol="0" anchor="ctr"/>
+          <a:lstStyle/>
+          <a:p>
+            <a:pPr algn="r" indent="0" marL="0">
+              <a:buNone/>
+            </a:pPr>
+            <a:r>
+              <a:rPr lang="en-US" sz="900" dirty="0">
+                <a:solidFill>
+                  <a:srgbClr val="5F7181"/>
+                </a:solidFill>
+                <a:latin typeface="Aptos" pitchFamily="34" charset="0"/>
+                <a:ea typeface="Aptos" pitchFamily="34" charset="-122"/>
+                <a:cs typeface="Aptos" pitchFamily="34" charset="-120"/>
+              </a:rPr>
+              <a:t>1</a:t>
+            </a:r>
+            <a:endParaRPr lang="en-US" sz="900" dirty="0"/>
+          </a:p>
+        </p:txBody>
+      </p:sp>
     </p:spTree>
   </p:cSld>
   <p:clrMapOvr>
@@ -3093,7 +3132,7 @@
                 <a:ea typeface="Aptos" pitchFamily="34" charset="-122"/>
                 <a:cs typeface="Aptos" pitchFamily="34" charset="-120"/>
               </a:rPr>
-              <a:t>© Paula Soper</a:t>
+              <a:t>Â© Paula Soper</a:t>
             </a:r>
             <a:endParaRPr lang="en-US" sz="800" dirty="0"/>
           </a:p>
@@ -3101,7 +3140,46 @@
       </p:sp>
       <p:sp>
         <p:nvSpPr>
-          <p:cNvPr id="7" name="Shape 5"/>
+          <p:cNvPr id="7" name="Text 5"/>
+          <p:cNvSpPr/>
+          <p:nvPr/>
+        </p:nvSpPr>
+        <p:spPr>
+          <a:xfrm>
+            <a:off x="11137392" y="6510528"/>
+            <a:ext cx="411480" cy="201168"/>
+          </a:xfrm>
+          <a:prstGeom prst="rect">
+            <a:avLst/>
+          </a:prstGeom>
+          <a:noFill/>
+          <a:ln/>
+        </p:spPr>
+        <p:txBody>
+          <a:bodyPr wrap="square" lIns="0" tIns="0" rIns="0" bIns="0" rtlCol="0" anchor="ctr"/>
+          <a:lstStyle/>
+          <a:p>
+            <a:pPr algn="r" indent="0" marL="0">
+              <a:buNone/>
+            </a:pPr>
+            <a:r>
+              <a:rPr lang="en-US" sz="900" dirty="0">
+                <a:solidFill>
+                  <a:srgbClr val="5F7181"/>
+                </a:solidFill>
+                <a:latin typeface="Aptos" pitchFamily="34" charset="0"/>
+                <a:ea typeface="Aptos" pitchFamily="34" charset="-122"/>
+                <a:cs typeface="Aptos" pitchFamily="34" charset="-120"/>
+              </a:rPr>
+              <a:t>10</a:t>
+            </a:r>
+            <a:endParaRPr lang="en-US" sz="900" dirty="0"/>
+          </a:p>
+        </p:txBody>
+      </p:sp>
+      <p:sp>
+        <p:nvSpPr>
+          <p:cNvPr id="8" name="Shape 6"/>
           <p:cNvSpPr/>
           <p:nvPr/>
         </p:nvSpPr>
@@ -3126,7 +3204,7 @@
       </p:sp>
       <p:sp>
         <p:nvSpPr>
-          <p:cNvPr id="8" name="Text 6"/>
+          <p:cNvPr id="9" name="Text 7"/>
           <p:cNvSpPr/>
           <p:nvPr/>
         </p:nvSpPr>
@@ -3165,14 +3243,14 @@
       </p:sp>
       <p:sp>
         <p:nvSpPr>
-          <p:cNvPr id="9" name="Text 7"/>
+          <p:cNvPr id="10" name="Text 8"/>
           <p:cNvSpPr/>
           <p:nvPr/>
         </p:nvSpPr>
         <p:spPr>
           <a:xfrm>
             <a:off x="640080" y="621792"/>
-            <a:ext cx="10881360" cy="566928"/>
+            <a:ext cx="10881360" cy="713232"/>
           </a:xfrm>
           <a:prstGeom prst="rect">
             <a:avLst/>
@@ -3190,7 +3268,7 @@
               <a:buNone/>
             </a:pPr>
             <a:r>
-              <a:rPr lang="en-US" sz="2700" b="1" dirty="0">
+              <a:rPr lang="en-US" sz="3400" b="1" dirty="0">
                 <a:solidFill>
                   <a:srgbClr val="003A63"/>
                 </a:solidFill>
@@ -3200,20 +3278,20 @@
               </a:rPr>
               <a:t>Technical and Governance Deep Dive</a:t>
             </a:r>
-            <a:endParaRPr lang="en-US" sz="2700" dirty="0"/>
-          </a:p>
-        </p:txBody>
-      </p:sp>
-      <p:sp>
-        <p:nvSpPr>
-          <p:cNvPr id="10" name="Text 8"/>
-          <p:cNvSpPr/>
-          <p:nvPr/>
-        </p:nvSpPr>
-        <p:spPr>
-          <a:xfrm>
-            <a:off x="868680" y="1417320"/>
-            <a:ext cx="6675120" cy="4434840"/>
+            <a:endParaRPr lang="en-US" sz="3400" dirty="0"/>
+          </a:p>
+        </p:txBody>
+      </p:sp>
+      <p:sp>
+        <p:nvSpPr>
+          <p:cNvPr id="11" name="Text 9"/>
+          <p:cNvSpPr/>
+          <p:nvPr/>
+        </p:nvSpPr>
+        <p:spPr>
+          <a:xfrm>
+            <a:off x="868680" y="1508760"/>
+            <a:ext cx="6537960" cy="4160520"/>
           </a:xfrm>
           <a:prstGeom prst="rect">
             <a:avLst/>
@@ -3228,7 +3306,7 @@
           <a:lstStyle/>
           <a:p>
             <a:r>
-              <a:rPr lang="en-US" sz="1700" dirty="0">
+              <a:rPr lang="en-US" sz="2100" dirty="0">
                 <a:solidFill>
                   <a:srgbClr val="17364A"/>
                 </a:solidFill>
@@ -3238,11 +3316,11 @@
               </a:rPr>
               <a:t>Decision rights should be defined across the full AI lifecycle.</a:t>
             </a:r>
-            <a:endParaRPr lang="en-US" sz="1700" dirty="0"/>
-          </a:p>
-          <a:p>
-            <a:r>
-              <a:rPr lang="en-US" sz="1700" dirty="0">
+            <a:endParaRPr lang="en-US" sz="2100" dirty="0"/>
+          </a:p>
+          <a:p>
+            <a:r>
+              <a:rPr lang="en-US" sz="2100" dirty="0">
                 <a:solidFill>
                   <a:srgbClr val="17364A"/>
                 </a:solidFill>
@@ -3252,11 +3330,11 @@
               </a:rPr>
               <a:t>During ideation, leadership may decide whether a use case aligns with agency priorities.</a:t>
             </a:r>
-            <a:endParaRPr lang="en-US" sz="1700" dirty="0"/>
-          </a:p>
-          <a:p>
-            <a:r>
-              <a:rPr lang="en-US" sz="1700" dirty="0">
+            <a:endParaRPr lang="en-US" sz="2100" dirty="0"/>
+          </a:p>
+          <a:p>
+            <a:r>
+              <a:rPr lang="en-US" sz="2100" dirty="0">
                 <a:solidFill>
                   <a:srgbClr val="17364A"/>
                 </a:solidFill>
@@ -3266,27 +3344,13 @@
               </a:rPr>
               <a:t>During review, governance may decide whether the use case is low, moderate, or high risk.</a:t>
             </a:r>
-            <a:endParaRPr lang="en-US" sz="1700" dirty="0"/>
-          </a:p>
-          <a:p>
-            <a:r>
-              <a:rPr lang="en-US" sz="1700" dirty="0">
-                <a:solidFill>
-                  <a:srgbClr val="17364A"/>
-                </a:solidFill>
-                <a:latin typeface="Aptos" pitchFamily="34" charset="0"/>
-                <a:ea typeface="Aptos" pitchFamily="34" charset="-122"/>
-                <a:cs typeface="Aptos" pitchFamily="34" charset="-120"/>
-              </a:rPr>
-              <a:t>During procurement, authorized officials decide whether vendor claims, contract language, and technical requirements are.</a:t>
-            </a:r>
-            <a:endParaRPr lang="en-US" sz="1700" dirty="0"/>
-          </a:p>
-        </p:txBody>
-      </p:sp>
-      <p:sp>
-        <p:nvSpPr>
-          <p:cNvPr id="11" name="Shape 9"/>
+            <a:endParaRPr lang="en-US" sz="2100" dirty="0"/>
+          </a:p>
+        </p:txBody>
+      </p:sp>
+      <p:sp>
+        <p:nvSpPr>
+          <p:cNvPr id="12" name="Shape 10"/>
           <p:cNvSpPr/>
           <p:nvPr/>
         </p:nvSpPr>
@@ -3313,14 +3377,14 @@
       </p:sp>
       <p:sp>
         <p:nvSpPr>
-          <p:cNvPr id="12" name="Text 10"/>
+          <p:cNvPr id="13" name="Text 11"/>
           <p:cNvSpPr/>
           <p:nvPr/>
         </p:nvSpPr>
         <p:spPr>
           <a:xfrm>
             <a:off x="8074152" y="1563624"/>
-            <a:ext cx="2825496" cy="201168"/>
+            <a:ext cx="2825496" cy="256032"/>
           </a:xfrm>
           <a:prstGeom prst="rect">
             <a:avLst/>
@@ -3336,7 +3400,7 @@
               <a:buNone/>
             </a:pPr>
             <a:r>
-              <a:rPr lang="en-US" sz="950" b="1" dirty="0">
+              <a:rPr lang="en-US" sz="1300" b="1" dirty="0">
                 <a:solidFill>
                   <a:srgbClr val="0068B7"/>
                 </a:solidFill>
@@ -3346,20 +3410,20 @@
               </a:rPr>
               <a:t>Key idea</a:t>
             </a:r>
-            <a:endParaRPr lang="en-US" sz="950" dirty="0"/>
-          </a:p>
-        </p:txBody>
-      </p:sp>
-      <p:sp>
-        <p:nvSpPr>
-          <p:cNvPr id="13" name="Text 11"/>
-          <p:cNvSpPr/>
-          <p:nvPr/>
-        </p:nvSpPr>
-        <p:spPr>
-          <a:xfrm>
-            <a:off x="8074152" y="1856232"/>
-            <a:ext cx="2825496" cy="1261872"/>
+            <a:endParaRPr lang="en-US" sz="1300" dirty="0"/>
+          </a:p>
+        </p:txBody>
+      </p:sp>
+      <p:sp>
+        <p:nvSpPr>
+          <p:cNvPr id="14" name="Text 12"/>
+          <p:cNvSpPr/>
+          <p:nvPr/>
+        </p:nvSpPr>
+        <p:spPr>
+          <a:xfrm>
+            <a:off x="8074152" y="1920240"/>
+            <a:ext cx="2825496" cy="1188720"/>
           </a:xfrm>
           <a:prstGeom prst="rect">
             <a:avLst/>
@@ -3377,7 +3441,7 @@
               <a:buNone/>
             </a:pPr>
             <a:r>
-              <a:rPr lang="en-US" sz="1250" dirty="0">
+              <a:rPr lang="en-US" sz="1550" dirty="0">
                 <a:solidFill>
                   <a:srgbClr val="17364A"/>
                 </a:solidFill>
@@ -3387,13 +3451,13 @@
               </a:rPr>
               <a:t>Decision rights should be defined across the full AI lifecycle.</a:t>
             </a:r>
-            <a:endParaRPr lang="en-US" sz="1250" dirty="0"/>
-          </a:p>
-        </p:txBody>
-      </p:sp>
-      <p:sp>
-        <p:nvSpPr>
-          <p:cNvPr id="14" name="Shape 12"/>
+            <a:endParaRPr lang="en-US" sz="1550" dirty="0"/>
+          </a:p>
+        </p:txBody>
+      </p:sp>
+      <p:sp>
+        <p:nvSpPr>
+          <p:cNvPr id="15" name="Shape 13"/>
           <p:cNvSpPr/>
           <p:nvPr/>
         </p:nvSpPr>
@@ -3420,14 +3484,14 @@
       </p:sp>
       <p:sp>
         <p:nvSpPr>
-          <p:cNvPr id="15" name="Text 13"/>
+          <p:cNvPr id="16" name="Text 14"/>
           <p:cNvSpPr/>
           <p:nvPr/>
         </p:nvSpPr>
         <p:spPr>
           <a:xfrm>
             <a:off x="8074152" y="3666744"/>
-            <a:ext cx="2825496" cy="201168"/>
+            <a:ext cx="2825496" cy="256032"/>
           </a:xfrm>
           <a:prstGeom prst="rect">
             <a:avLst/>
@@ -3443,7 +3507,7 @@
               <a:buNone/>
             </a:pPr>
             <a:r>
-              <a:rPr lang="en-US" sz="950" b="1" dirty="0">
+              <a:rPr lang="en-US" sz="1300" b="1" dirty="0">
                 <a:solidFill>
                   <a:srgbClr val="0068B7"/>
                 </a:solidFill>
@@ -3453,20 +3517,20 @@
               </a:rPr>
               <a:t>Use this for</a:t>
             </a:r>
-            <a:endParaRPr lang="en-US" sz="950" dirty="0"/>
-          </a:p>
-        </p:txBody>
-      </p:sp>
-      <p:sp>
-        <p:nvSpPr>
-          <p:cNvPr id="16" name="Text 14"/>
-          <p:cNvSpPr/>
-          <p:nvPr/>
-        </p:nvSpPr>
-        <p:spPr>
-          <a:xfrm>
-            <a:off x="8074152" y="3959352"/>
-            <a:ext cx="2825496" cy="1170432"/>
+            <a:endParaRPr lang="en-US" sz="1300" dirty="0"/>
+          </a:p>
+        </p:txBody>
+      </p:sp>
+      <p:sp>
+        <p:nvSpPr>
+          <p:cNvPr id="17" name="Text 15"/>
+          <p:cNvSpPr/>
+          <p:nvPr/>
+        </p:nvSpPr>
+        <p:spPr>
+          <a:xfrm>
+            <a:off x="8074152" y="4023360"/>
+            <a:ext cx="2825496" cy="1097280"/>
           </a:xfrm>
           <a:prstGeom prst="rect">
             <a:avLst/>
@@ -3484,7 +3548,7 @@
               <a:buNone/>
             </a:pPr>
             <a:r>
-              <a:rPr lang="en-US" sz="1250" dirty="0">
+              <a:rPr lang="en-US" sz="1550" dirty="0">
                 <a:solidFill>
                   <a:srgbClr val="17364A"/>
                 </a:solidFill>
@@ -3494,7 +3558,7 @@
               </a:rPr>
               <a:t>Connect the concept to public health decisions, safeguards, documentation, or implementation work.</a:t>
             </a:r>
-            <a:endParaRPr lang="en-US" sz="1250" dirty="0"/>
+            <a:endParaRPr lang="en-US" sz="1550" dirty="0"/>
           </a:p>
         </p:txBody>
       </p:sp>
@@ -3691,7 +3755,7 @@
                 <a:ea typeface="Aptos" pitchFamily="34" charset="-122"/>
                 <a:cs typeface="Aptos" pitchFamily="34" charset="-120"/>
               </a:rPr>
-              <a:t>© Paula Soper</a:t>
+              <a:t>Â© Paula Soper</a:t>
             </a:r>
             <a:endParaRPr lang="en-US" sz="800" dirty="0"/>
           </a:p>
@@ -3699,7 +3763,46 @@
       </p:sp>
       <p:sp>
         <p:nvSpPr>
-          <p:cNvPr id="7" name="Shape 5"/>
+          <p:cNvPr id="7" name="Text 5"/>
+          <p:cNvSpPr/>
+          <p:nvPr/>
+        </p:nvSpPr>
+        <p:spPr>
+          <a:xfrm>
+            <a:off x="11137392" y="6510528"/>
+            <a:ext cx="411480" cy="201168"/>
+          </a:xfrm>
+          <a:prstGeom prst="rect">
+            <a:avLst/>
+          </a:prstGeom>
+          <a:noFill/>
+          <a:ln/>
+        </p:spPr>
+        <p:txBody>
+          <a:bodyPr wrap="square" lIns="0" tIns="0" rIns="0" bIns="0" rtlCol="0" anchor="ctr"/>
+          <a:lstStyle/>
+          <a:p>
+            <a:pPr algn="r" indent="0" marL="0">
+              <a:buNone/>
+            </a:pPr>
+            <a:r>
+              <a:rPr lang="en-US" sz="900" dirty="0">
+                <a:solidFill>
+                  <a:srgbClr val="5F7181"/>
+                </a:solidFill>
+                <a:latin typeface="Aptos" pitchFamily="34" charset="0"/>
+                <a:ea typeface="Aptos" pitchFamily="34" charset="-122"/>
+                <a:cs typeface="Aptos" pitchFamily="34" charset="-120"/>
+              </a:rPr>
+              <a:t>11</a:t>
+            </a:r>
+            <a:endParaRPr lang="en-US" sz="900" dirty="0"/>
+          </a:p>
+        </p:txBody>
+      </p:sp>
+      <p:sp>
+        <p:nvSpPr>
+          <p:cNvPr id="8" name="Shape 6"/>
           <p:cNvSpPr/>
           <p:nvPr/>
         </p:nvSpPr>
@@ -3724,7 +3827,7 @@
       </p:sp>
       <p:sp>
         <p:nvSpPr>
-          <p:cNvPr id="8" name="Text 6"/>
+          <p:cNvPr id="9" name="Text 7"/>
           <p:cNvSpPr/>
           <p:nvPr/>
         </p:nvSpPr>
@@ -3763,14 +3866,14 @@
       </p:sp>
       <p:sp>
         <p:nvSpPr>
-          <p:cNvPr id="9" name="Text 7"/>
+          <p:cNvPr id="10" name="Text 8"/>
           <p:cNvSpPr/>
           <p:nvPr/>
         </p:nvSpPr>
         <p:spPr>
           <a:xfrm>
             <a:off x="640080" y="621792"/>
-            <a:ext cx="10881360" cy="566928"/>
+            <a:ext cx="10881360" cy="713232"/>
           </a:xfrm>
           <a:prstGeom prst="rect">
             <a:avLst/>
@@ -3788,7 +3891,7 @@
               <a:buNone/>
             </a:pPr>
             <a:r>
-              <a:rPr lang="en-US" sz="2700" b="1" dirty="0">
+              <a:rPr lang="en-US" sz="3400" b="1" dirty="0">
                 <a:solidFill>
                   <a:srgbClr val="003A63"/>
                 </a:solidFill>
@@ -3798,20 +3901,20 @@
               </a:rPr>
               <a:t>Risks, Failure Modes, and Guardrails</a:t>
             </a:r>
-            <a:endParaRPr lang="en-US" sz="2700" dirty="0"/>
-          </a:p>
-        </p:txBody>
-      </p:sp>
-      <p:sp>
-        <p:nvSpPr>
-          <p:cNvPr id="10" name="Text 8"/>
-          <p:cNvSpPr/>
-          <p:nvPr/>
-        </p:nvSpPr>
-        <p:spPr>
-          <a:xfrm>
-            <a:off x="868680" y="1417320"/>
-            <a:ext cx="6675120" cy="4434840"/>
+            <a:endParaRPr lang="en-US" sz="3400" dirty="0"/>
+          </a:p>
+        </p:txBody>
+      </p:sp>
+      <p:sp>
+        <p:nvSpPr>
+          <p:cNvPr id="11" name="Text 9"/>
+          <p:cNvSpPr/>
+          <p:nvPr/>
+        </p:nvSpPr>
+        <p:spPr>
+          <a:xfrm>
+            <a:off x="868680" y="1508760"/>
+            <a:ext cx="6537960" cy="4160520"/>
           </a:xfrm>
           <a:prstGeom prst="rect">
             <a:avLst/>
@@ -3826,7 +3929,7 @@
           <a:lstStyle/>
           <a:p>
             <a:r>
-              <a:rPr lang="en-US" sz="1700" dirty="0">
+              <a:rPr lang="en-US" sz="2100" dirty="0">
                 <a:solidFill>
                   <a:srgbClr val="17364A"/>
                 </a:solidFill>
@@ -3836,11 +3939,11 @@
               </a:rPr>
               <a:t>One risk is accountability diffusion.</a:t>
             </a:r>
-            <a:endParaRPr lang="en-US" sz="1700" dirty="0"/>
-          </a:p>
-          <a:p>
-            <a:r>
-              <a:rPr lang="en-US" sz="1700" dirty="0">
+            <a:endParaRPr lang="en-US" sz="2100" dirty="0"/>
+          </a:p>
+          <a:p>
+            <a:r>
+              <a:rPr lang="en-US" sz="2100" dirty="0">
                 <a:solidFill>
                   <a:srgbClr val="17364A"/>
                 </a:solidFill>
@@ -3850,11 +3953,11 @@
               </a:rPr>
               <a:t>When everyone is involved but no one is accountable, important concerns may go unresolved.</a:t>
             </a:r>
-            <a:endParaRPr lang="en-US" sz="1700" dirty="0"/>
-          </a:p>
-          <a:p>
-            <a:r>
-              <a:rPr lang="en-US" sz="1700" dirty="0">
+            <a:endParaRPr lang="en-US" sz="2100" dirty="0"/>
+          </a:p>
+          <a:p>
+            <a:r>
+              <a:rPr lang="en-US" sz="2100" dirty="0">
                 <a:solidFill>
                   <a:srgbClr val="17364A"/>
                 </a:solidFill>
@@ -3864,27 +3967,13 @@
               </a:rPr>
               <a:t>A guardrail is to assign a named program owner and governance owner for every AI use case.</a:t>
             </a:r>
-            <a:endParaRPr lang="en-US" sz="1700" dirty="0"/>
-          </a:p>
-          <a:p>
-            <a:r>
-              <a:rPr lang="en-US" sz="1700" dirty="0">
-                <a:solidFill>
-                  <a:srgbClr val="17364A"/>
-                </a:solidFill>
-                <a:latin typeface="Aptos" pitchFamily="34" charset="0"/>
-                <a:ea typeface="Aptos" pitchFamily="34" charset="-122"/>
-                <a:cs typeface="Aptos" pitchFamily="34" charset="-120"/>
-              </a:rPr>
-              <a:t>Another risk is inappropriate risk acceptance by staff who lack authority.</a:t>
-            </a:r>
-            <a:endParaRPr lang="en-US" sz="1700" dirty="0"/>
-          </a:p>
-        </p:txBody>
-      </p:sp>
-      <p:sp>
-        <p:nvSpPr>
-          <p:cNvPr id="11" name="Shape 9"/>
+            <a:endParaRPr lang="en-US" sz="2100" dirty="0"/>
+          </a:p>
+        </p:txBody>
+      </p:sp>
+      <p:sp>
+        <p:nvSpPr>
+          <p:cNvPr id="12" name="Shape 10"/>
           <p:cNvSpPr/>
           <p:nvPr/>
         </p:nvSpPr>
@@ -3911,14 +4000,14 @@
       </p:sp>
       <p:sp>
         <p:nvSpPr>
-          <p:cNvPr id="12" name="Text 10"/>
+          <p:cNvPr id="13" name="Text 11"/>
           <p:cNvSpPr/>
           <p:nvPr/>
         </p:nvSpPr>
         <p:spPr>
           <a:xfrm>
             <a:off x="8074152" y="1563624"/>
-            <a:ext cx="2825496" cy="201168"/>
+            <a:ext cx="2825496" cy="256032"/>
           </a:xfrm>
           <a:prstGeom prst="rect">
             <a:avLst/>
@@ -3934,7 +4023,7 @@
               <a:buNone/>
             </a:pPr>
             <a:r>
-              <a:rPr lang="en-US" sz="950" b="1" dirty="0">
+              <a:rPr lang="en-US" sz="1300" b="1" dirty="0">
                 <a:solidFill>
                   <a:srgbClr val="0068B7"/>
                 </a:solidFill>
@@ -3944,20 +4033,20 @@
               </a:rPr>
               <a:t>Key idea</a:t>
             </a:r>
-            <a:endParaRPr lang="en-US" sz="950" dirty="0"/>
-          </a:p>
-        </p:txBody>
-      </p:sp>
-      <p:sp>
-        <p:nvSpPr>
-          <p:cNvPr id="13" name="Text 11"/>
-          <p:cNvSpPr/>
-          <p:nvPr/>
-        </p:nvSpPr>
-        <p:spPr>
-          <a:xfrm>
-            <a:off x="8074152" y="1856232"/>
-            <a:ext cx="2825496" cy="1261872"/>
+            <a:endParaRPr lang="en-US" sz="1300" dirty="0"/>
+          </a:p>
+        </p:txBody>
+      </p:sp>
+      <p:sp>
+        <p:nvSpPr>
+          <p:cNvPr id="14" name="Text 12"/>
+          <p:cNvSpPr/>
+          <p:nvPr/>
+        </p:nvSpPr>
+        <p:spPr>
+          <a:xfrm>
+            <a:off x="8074152" y="1920240"/>
+            <a:ext cx="2825496" cy="1188720"/>
           </a:xfrm>
           <a:prstGeom prst="rect">
             <a:avLst/>
@@ -3975,7 +4064,7 @@
               <a:buNone/>
             </a:pPr>
             <a:r>
-              <a:rPr lang="en-US" sz="1250" dirty="0">
+              <a:rPr lang="en-US" sz="1550" dirty="0">
                 <a:solidFill>
                   <a:srgbClr val="17364A"/>
                 </a:solidFill>
@@ -3985,13 +4074,13 @@
               </a:rPr>
               <a:t>One risk is accountability diffusion.</a:t>
             </a:r>
-            <a:endParaRPr lang="en-US" sz="1250" dirty="0"/>
-          </a:p>
-        </p:txBody>
-      </p:sp>
-      <p:sp>
-        <p:nvSpPr>
-          <p:cNvPr id="14" name="Shape 12"/>
+            <a:endParaRPr lang="en-US" sz="1550" dirty="0"/>
+          </a:p>
+        </p:txBody>
+      </p:sp>
+      <p:sp>
+        <p:nvSpPr>
+          <p:cNvPr id="15" name="Shape 13"/>
           <p:cNvSpPr/>
           <p:nvPr/>
         </p:nvSpPr>
@@ -4018,14 +4107,14 @@
       </p:sp>
       <p:sp>
         <p:nvSpPr>
-          <p:cNvPr id="15" name="Text 13"/>
+          <p:cNvPr id="16" name="Text 14"/>
           <p:cNvSpPr/>
           <p:nvPr/>
         </p:nvSpPr>
         <p:spPr>
           <a:xfrm>
             <a:off x="8074152" y="3666744"/>
-            <a:ext cx="2825496" cy="201168"/>
+            <a:ext cx="2825496" cy="256032"/>
           </a:xfrm>
           <a:prstGeom prst="rect">
             <a:avLst/>
@@ -4041,7 +4130,7 @@
               <a:buNone/>
             </a:pPr>
             <a:r>
-              <a:rPr lang="en-US" sz="950" b="1" dirty="0">
+              <a:rPr lang="en-US" sz="1300" b="1" dirty="0">
                 <a:solidFill>
                   <a:srgbClr val="0068B7"/>
                 </a:solidFill>
@@ -4051,20 +4140,20 @@
               </a:rPr>
               <a:t>Use this for</a:t>
             </a:r>
-            <a:endParaRPr lang="en-US" sz="950" dirty="0"/>
-          </a:p>
-        </p:txBody>
-      </p:sp>
-      <p:sp>
-        <p:nvSpPr>
-          <p:cNvPr id="16" name="Text 14"/>
-          <p:cNvSpPr/>
-          <p:nvPr/>
-        </p:nvSpPr>
-        <p:spPr>
-          <a:xfrm>
-            <a:off x="8074152" y="3959352"/>
-            <a:ext cx="2825496" cy="1170432"/>
+            <a:endParaRPr lang="en-US" sz="1300" dirty="0"/>
+          </a:p>
+        </p:txBody>
+      </p:sp>
+      <p:sp>
+        <p:nvSpPr>
+          <p:cNvPr id="17" name="Text 15"/>
+          <p:cNvSpPr/>
+          <p:nvPr/>
+        </p:nvSpPr>
+        <p:spPr>
+          <a:xfrm>
+            <a:off x="8074152" y="4023360"/>
+            <a:ext cx="2825496" cy="1097280"/>
           </a:xfrm>
           <a:prstGeom prst="rect">
             <a:avLst/>
@@ -4082,7 +4171,7 @@
               <a:buNone/>
             </a:pPr>
             <a:r>
-              <a:rPr lang="en-US" sz="1250" dirty="0">
+              <a:rPr lang="en-US" sz="1550" dirty="0">
                 <a:solidFill>
                   <a:srgbClr val="17364A"/>
                 </a:solidFill>
@@ -4092,7 +4181,7 @@
               </a:rPr>
               <a:t>Connect the concept to public health decisions, safeguards, documentation, or implementation work.</a:t>
             </a:r>
-            <a:endParaRPr lang="en-US" sz="1250" dirty="0"/>
+            <a:endParaRPr lang="en-US" sz="1550" dirty="0"/>
           </a:p>
         </p:txBody>
       </p:sp>
@@ -4289,7 +4378,7 @@
                 <a:ea typeface="Aptos" pitchFamily="34" charset="-122"/>
                 <a:cs typeface="Aptos" pitchFamily="34" charset="-120"/>
               </a:rPr>
-              <a:t>© Paula Soper</a:t>
+              <a:t>Â© Paula Soper</a:t>
             </a:r>
             <a:endParaRPr lang="en-US" sz="800" dirty="0"/>
           </a:p>
@@ -4297,7 +4386,46 @@
       </p:sp>
       <p:sp>
         <p:nvSpPr>
-          <p:cNvPr id="7" name="Shape 5"/>
+          <p:cNvPr id="7" name="Text 5"/>
+          <p:cNvSpPr/>
+          <p:nvPr/>
+        </p:nvSpPr>
+        <p:spPr>
+          <a:xfrm>
+            <a:off x="11137392" y="6510528"/>
+            <a:ext cx="411480" cy="201168"/>
+          </a:xfrm>
+          <a:prstGeom prst="rect">
+            <a:avLst/>
+          </a:prstGeom>
+          <a:noFill/>
+          <a:ln/>
+        </p:spPr>
+        <p:txBody>
+          <a:bodyPr wrap="square" lIns="0" tIns="0" rIns="0" bIns="0" rtlCol="0" anchor="ctr"/>
+          <a:lstStyle/>
+          <a:p>
+            <a:pPr algn="r" indent="0" marL="0">
+              <a:buNone/>
+            </a:pPr>
+            <a:r>
+              <a:rPr lang="en-US" sz="900" dirty="0">
+                <a:solidFill>
+                  <a:srgbClr val="5F7181"/>
+                </a:solidFill>
+                <a:latin typeface="Aptos" pitchFamily="34" charset="0"/>
+                <a:ea typeface="Aptos" pitchFamily="34" charset="-122"/>
+                <a:cs typeface="Aptos" pitchFamily="34" charset="-120"/>
+              </a:rPr>
+              <a:t>12</a:t>
+            </a:r>
+            <a:endParaRPr lang="en-US" sz="900" dirty="0"/>
+          </a:p>
+        </p:txBody>
+      </p:sp>
+      <p:sp>
+        <p:nvSpPr>
+          <p:cNvPr id="8" name="Shape 6"/>
           <p:cNvSpPr/>
           <p:nvPr/>
         </p:nvSpPr>
@@ -4322,7 +4450,7 @@
       </p:sp>
       <p:sp>
         <p:nvSpPr>
-          <p:cNvPr id="8" name="Text 6"/>
+          <p:cNvPr id="9" name="Text 7"/>
           <p:cNvSpPr/>
           <p:nvPr/>
         </p:nvSpPr>
@@ -4361,14 +4489,14 @@
       </p:sp>
       <p:sp>
         <p:nvSpPr>
-          <p:cNvPr id="9" name="Text 7"/>
+          <p:cNvPr id="10" name="Text 8"/>
           <p:cNvSpPr/>
           <p:nvPr/>
         </p:nvSpPr>
         <p:spPr>
           <a:xfrm>
             <a:off x="640080" y="621792"/>
-            <a:ext cx="10881360" cy="566928"/>
+            <a:ext cx="10881360" cy="713232"/>
           </a:xfrm>
           <a:prstGeom prst="rect">
             <a:avLst/>
@@ -4386,7 +4514,7 @@
               <a:buNone/>
             </a:pPr>
             <a:r>
-              <a:rPr lang="en-US" sz="2700" b="1" dirty="0">
+              <a:rPr lang="en-US" sz="3400" b="1" dirty="0">
                 <a:solidFill>
                   <a:srgbClr val="003A63"/>
                 </a:solidFill>
@@ -4396,20 +4524,20 @@
               </a:rPr>
               <a:t>Application to AI-Supported Workflows</a:t>
             </a:r>
-            <a:endParaRPr lang="en-US" sz="2700" dirty="0"/>
-          </a:p>
-        </p:txBody>
-      </p:sp>
-      <p:sp>
-        <p:nvSpPr>
-          <p:cNvPr id="10" name="Text 8"/>
-          <p:cNvSpPr/>
-          <p:nvPr/>
-        </p:nvSpPr>
-        <p:spPr>
-          <a:xfrm>
-            <a:off x="868680" y="1417320"/>
-            <a:ext cx="6675120" cy="4434840"/>
+            <a:endParaRPr lang="en-US" sz="3400" dirty="0"/>
+          </a:p>
+        </p:txBody>
+      </p:sp>
+      <p:sp>
+        <p:nvSpPr>
+          <p:cNvPr id="11" name="Text 9"/>
+          <p:cNvSpPr/>
+          <p:nvPr/>
+        </p:nvSpPr>
+        <p:spPr>
+          <a:xfrm>
+            <a:off x="868680" y="1508760"/>
+            <a:ext cx="6537960" cy="4160520"/>
           </a:xfrm>
           <a:prstGeom prst="rect">
             <a:avLst/>
@@ -4424,7 +4552,7 @@
           <a:lstStyle/>
           <a:p>
             <a:r>
-              <a:rPr lang="en-US" sz="1700" dirty="0">
+              <a:rPr lang="en-US" sz="2100" dirty="0">
                 <a:solidFill>
                   <a:srgbClr val="17364A"/>
                 </a:solidFill>
@@ -4434,11 +4562,11 @@
               </a:rPr>
               <a:t>For generative AI, decision rights should clarify who approves public release of AI-assisted content.</a:t>
             </a:r>
-            <a:endParaRPr lang="en-US" sz="1700" dirty="0"/>
-          </a:p>
-          <a:p>
-            <a:r>
-              <a:rPr lang="en-US" sz="1700" dirty="0">
+            <a:endParaRPr lang="en-US" sz="2100" dirty="0"/>
+          </a:p>
+          <a:p>
+            <a:r>
+              <a:rPr lang="en-US" sz="2100" dirty="0">
                 <a:solidFill>
                   <a:srgbClr val="17364A"/>
                 </a:solidFill>
@@ -4446,13 +4574,13 @@
                 <a:ea typeface="Aptos" pitchFamily="34" charset="-122"/>
                 <a:cs typeface="Aptos" pitchFamily="34" charset="-120"/>
               </a:rPr>
-              <a:t>For predictive analytics, leaders should decide whether the score may inform resource allocation or only support review.</a:t>
-            </a:r>
-            <a:endParaRPr lang="en-US" sz="1700" dirty="0"/>
-          </a:p>
-          <a:p>
-            <a:r>
-              <a:rPr lang="en-US" sz="1700" dirty="0">
+              <a:t>For predictive analytics, leaders should decide whether the score may inform resource allocation or.</a:t>
+            </a:r>
+            <a:endParaRPr lang="en-US" sz="2100" dirty="0"/>
+          </a:p>
+          <a:p>
+            <a:r>
+              <a:rPr lang="en-US" sz="2100" dirty="0">
                 <a:solidFill>
                   <a:srgbClr val="17364A"/>
                 </a:solidFill>
@@ -4460,29 +4588,15 @@
                 <a:ea typeface="Aptos" pitchFamily="34" charset="-122"/>
                 <a:cs typeface="Aptos" pitchFamily="34" charset="-120"/>
               </a:rPr>
-              <a:t>For agentic AI, decision rights should define who authorizes system actions, rollback procedures, and changes to permissions.</a:t>
-            </a:r>
-            <a:endParaRPr lang="en-US" sz="1700" dirty="0"/>
-          </a:p>
-          <a:p>
-            <a:r>
-              <a:rPr lang="en-US" sz="1700" dirty="0">
-                <a:solidFill>
-                  <a:srgbClr val="17364A"/>
-                </a:solidFill>
-                <a:latin typeface="Aptos" pitchFamily="34" charset="0"/>
-                <a:ea typeface="Aptos" pitchFamily="34" charset="-122"/>
-                <a:cs typeface="Aptos" pitchFamily="34" charset="-120"/>
-              </a:rPr>
-              <a:t>Accountability should remain tied to public health roles and legal authority.</a:t>
-            </a:r>
-            <a:endParaRPr lang="en-US" sz="1700" dirty="0"/>
-          </a:p>
-        </p:txBody>
-      </p:sp>
-      <p:sp>
-        <p:nvSpPr>
-          <p:cNvPr id="11" name="Shape 9"/>
+              <a:t>For agentic AI, decision rights should define who authorizes system actions, rollback procedures, and.</a:t>
+            </a:r>
+            <a:endParaRPr lang="en-US" sz="2100" dirty="0"/>
+          </a:p>
+        </p:txBody>
+      </p:sp>
+      <p:sp>
+        <p:nvSpPr>
+          <p:cNvPr id="12" name="Shape 10"/>
           <p:cNvSpPr/>
           <p:nvPr/>
         </p:nvSpPr>
@@ -4509,14 +4623,14 @@
       </p:sp>
       <p:sp>
         <p:nvSpPr>
-          <p:cNvPr id="12" name="Text 10"/>
+          <p:cNvPr id="13" name="Text 11"/>
           <p:cNvSpPr/>
           <p:nvPr/>
         </p:nvSpPr>
         <p:spPr>
           <a:xfrm>
             <a:off x="8074152" y="1563624"/>
-            <a:ext cx="2825496" cy="201168"/>
+            <a:ext cx="2825496" cy="256032"/>
           </a:xfrm>
           <a:prstGeom prst="rect">
             <a:avLst/>
@@ -4532,7 +4646,7 @@
               <a:buNone/>
             </a:pPr>
             <a:r>
-              <a:rPr lang="en-US" sz="950" b="1" dirty="0">
+              <a:rPr lang="en-US" sz="1300" b="1" dirty="0">
                 <a:solidFill>
                   <a:srgbClr val="0068B7"/>
                 </a:solidFill>
@@ -4542,20 +4656,20 @@
               </a:rPr>
               <a:t>Key idea</a:t>
             </a:r>
-            <a:endParaRPr lang="en-US" sz="950" dirty="0"/>
-          </a:p>
-        </p:txBody>
-      </p:sp>
-      <p:sp>
-        <p:nvSpPr>
-          <p:cNvPr id="13" name="Text 11"/>
-          <p:cNvSpPr/>
-          <p:nvPr/>
-        </p:nvSpPr>
-        <p:spPr>
-          <a:xfrm>
-            <a:off x="8074152" y="1856232"/>
-            <a:ext cx="2825496" cy="1261872"/>
+            <a:endParaRPr lang="en-US" sz="1300" dirty="0"/>
+          </a:p>
+        </p:txBody>
+      </p:sp>
+      <p:sp>
+        <p:nvSpPr>
+          <p:cNvPr id="14" name="Text 12"/>
+          <p:cNvSpPr/>
+          <p:nvPr/>
+        </p:nvSpPr>
+        <p:spPr>
+          <a:xfrm>
+            <a:off x="8074152" y="1920240"/>
+            <a:ext cx="2825496" cy="1188720"/>
           </a:xfrm>
           <a:prstGeom prst="rect">
             <a:avLst/>
@@ -4573,7 +4687,7 @@
               <a:buNone/>
             </a:pPr>
             <a:r>
-              <a:rPr lang="en-US" sz="1250" dirty="0">
+              <a:rPr lang="en-US" sz="1550" dirty="0">
                 <a:solidFill>
                   <a:srgbClr val="17364A"/>
                 </a:solidFill>
@@ -4583,13 +4697,13 @@
               </a:rPr>
               <a:t>For generative AI, decision rights should clarify who approves public release of AI-assisted content.</a:t>
             </a:r>
-            <a:endParaRPr lang="en-US" sz="1250" dirty="0"/>
-          </a:p>
-        </p:txBody>
-      </p:sp>
-      <p:sp>
-        <p:nvSpPr>
-          <p:cNvPr id="14" name="Shape 12"/>
+            <a:endParaRPr lang="en-US" sz="1550" dirty="0"/>
+          </a:p>
+        </p:txBody>
+      </p:sp>
+      <p:sp>
+        <p:nvSpPr>
+          <p:cNvPr id="15" name="Shape 13"/>
           <p:cNvSpPr/>
           <p:nvPr/>
         </p:nvSpPr>
@@ -4616,14 +4730,14 @@
       </p:sp>
       <p:sp>
         <p:nvSpPr>
-          <p:cNvPr id="15" name="Text 13"/>
+          <p:cNvPr id="16" name="Text 14"/>
           <p:cNvSpPr/>
           <p:nvPr/>
         </p:nvSpPr>
         <p:spPr>
           <a:xfrm>
             <a:off x="8074152" y="3666744"/>
-            <a:ext cx="2825496" cy="201168"/>
+            <a:ext cx="2825496" cy="256032"/>
           </a:xfrm>
           <a:prstGeom prst="rect">
             <a:avLst/>
@@ -4639,7 +4753,7 @@
               <a:buNone/>
             </a:pPr>
             <a:r>
-              <a:rPr lang="en-US" sz="950" b="1" dirty="0">
+              <a:rPr lang="en-US" sz="1300" b="1" dirty="0">
                 <a:solidFill>
                   <a:srgbClr val="0068B7"/>
                 </a:solidFill>
@@ -4649,20 +4763,20 @@
               </a:rPr>
               <a:t>Use this for</a:t>
             </a:r>
-            <a:endParaRPr lang="en-US" sz="950" dirty="0"/>
-          </a:p>
-        </p:txBody>
-      </p:sp>
-      <p:sp>
-        <p:nvSpPr>
-          <p:cNvPr id="16" name="Text 14"/>
-          <p:cNvSpPr/>
-          <p:nvPr/>
-        </p:nvSpPr>
-        <p:spPr>
-          <a:xfrm>
-            <a:off x="8074152" y="3959352"/>
-            <a:ext cx="2825496" cy="1170432"/>
+            <a:endParaRPr lang="en-US" sz="1300" dirty="0"/>
+          </a:p>
+        </p:txBody>
+      </p:sp>
+      <p:sp>
+        <p:nvSpPr>
+          <p:cNvPr id="17" name="Text 15"/>
+          <p:cNvSpPr/>
+          <p:nvPr/>
+        </p:nvSpPr>
+        <p:spPr>
+          <a:xfrm>
+            <a:off x="8074152" y="4023360"/>
+            <a:ext cx="2825496" cy="1097280"/>
           </a:xfrm>
           <a:prstGeom prst="rect">
             <a:avLst/>
@@ -4680,7 +4794,7 @@
               <a:buNone/>
             </a:pPr>
             <a:r>
-              <a:rPr lang="en-US" sz="1250" dirty="0">
+              <a:rPr lang="en-US" sz="1550" dirty="0">
                 <a:solidFill>
                   <a:srgbClr val="17364A"/>
                 </a:solidFill>
@@ -4690,7 +4804,7 @@
               </a:rPr>
               <a:t>Connect the concept to public health decisions, safeguards, documentation, or implementation work.</a:t>
             </a:r>
-            <a:endParaRPr lang="en-US" sz="1250" dirty="0"/>
+            <a:endParaRPr lang="en-US" sz="1550" dirty="0"/>
           </a:p>
         </p:txBody>
       </p:sp>
@@ -4887,7 +5001,7 @@
                 <a:ea typeface="Aptos" pitchFamily="34" charset="-122"/>
                 <a:cs typeface="Aptos" pitchFamily="34" charset="-120"/>
               </a:rPr>
-              <a:t>© Paula Soper</a:t>
+              <a:t>Â© Paula Soper</a:t>
             </a:r>
             <a:endParaRPr lang="en-US" sz="800" dirty="0"/>
           </a:p>
@@ -4895,7 +5009,46 @@
       </p:sp>
       <p:sp>
         <p:nvSpPr>
-          <p:cNvPr id="7" name="Shape 5"/>
+          <p:cNvPr id="7" name="Text 5"/>
+          <p:cNvSpPr/>
+          <p:nvPr/>
+        </p:nvSpPr>
+        <p:spPr>
+          <a:xfrm>
+            <a:off x="11137392" y="6510528"/>
+            <a:ext cx="411480" cy="201168"/>
+          </a:xfrm>
+          <a:prstGeom prst="rect">
+            <a:avLst/>
+          </a:prstGeom>
+          <a:noFill/>
+          <a:ln/>
+        </p:spPr>
+        <p:txBody>
+          <a:bodyPr wrap="square" lIns="0" tIns="0" rIns="0" bIns="0" rtlCol="0" anchor="ctr"/>
+          <a:lstStyle/>
+          <a:p>
+            <a:pPr algn="r" indent="0" marL="0">
+              <a:buNone/>
+            </a:pPr>
+            <a:r>
+              <a:rPr lang="en-US" sz="900" dirty="0">
+                <a:solidFill>
+                  <a:srgbClr val="5F7181"/>
+                </a:solidFill>
+                <a:latin typeface="Aptos" pitchFamily="34" charset="0"/>
+                <a:ea typeface="Aptos" pitchFamily="34" charset="-122"/>
+                <a:cs typeface="Aptos" pitchFamily="34" charset="-120"/>
+              </a:rPr>
+              <a:t>13</a:t>
+            </a:r>
+            <a:endParaRPr lang="en-US" sz="900" dirty="0"/>
+          </a:p>
+        </p:txBody>
+      </p:sp>
+      <p:sp>
+        <p:nvSpPr>
+          <p:cNvPr id="8" name="Shape 6"/>
           <p:cNvSpPr/>
           <p:nvPr/>
         </p:nvSpPr>
@@ -4920,7 +5073,7 @@
       </p:sp>
       <p:sp>
         <p:nvSpPr>
-          <p:cNvPr id="8" name="Text 6"/>
+          <p:cNvPr id="9" name="Text 7"/>
           <p:cNvSpPr/>
           <p:nvPr/>
         </p:nvSpPr>
@@ -4959,14 +5112,14 @@
       </p:sp>
       <p:sp>
         <p:nvSpPr>
-          <p:cNvPr id="9" name="Text 7"/>
+          <p:cNvPr id="10" name="Text 8"/>
           <p:cNvSpPr/>
           <p:nvPr/>
         </p:nvSpPr>
         <p:spPr>
           <a:xfrm>
             <a:off x="640080" y="621792"/>
-            <a:ext cx="10881360" cy="566928"/>
+            <a:ext cx="10881360" cy="713232"/>
           </a:xfrm>
           <a:prstGeom prst="rect">
             <a:avLst/>
@@ -4984,7 +5137,7 @@
               <a:buNone/>
             </a:pPr>
             <a:r>
-              <a:rPr lang="en-US" sz="2700" b="1" dirty="0">
+              <a:rPr lang="en-US" sz="3400" b="1" dirty="0">
                 <a:solidFill>
                   <a:srgbClr val="003A63"/>
                 </a:solidFill>
@@ -4994,20 +5147,20 @@
               </a:rPr>
               <a:t>Reflection Questions</a:t>
             </a:r>
-            <a:endParaRPr lang="en-US" sz="2700" dirty="0"/>
-          </a:p>
-        </p:txBody>
-      </p:sp>
-      <p:sp>
-        <p:nvSpPr>
-          <p:cNvPr id="10" name="Text 8"/>
-          <p:cNvSpPr/>
-          <p:nvPr/>
-        </p:nvSpPr>
-        <p:spPr>
-          <a:xfrm>
-            <a:off x="868680" y="1417320"/>
-            <a:ext cx="6675120" cy="4434840"/>
+            <a:endParaRPr lang="en-US" sz="3400" dirty="0"/>
+          </a:p>
+        </p:txBody>
+      </p:sp>
+      <p:sp>
+        <p:nvSpPr>
+          <p:cNvPr id="11" name="Text 9"/>
+          <p:cNvSpPr/>
+          <p:nvPr/>
+        </p:nvSpPr>
+        <p:spPr>
+          <a:xfrm>
+            <a:off x="868680" y="1508760"/>
+            <a:ext cx="6537960" cy="4160520"/>
           </a:xfrm>
           <a:prstGeom prst="rect">
             <a:avLst/>
@@ -5022,7 +5175,7 @@
           <a:lstStyle/>
           <a:p>
             <a:r>
-              <a:rPr lang="en-US" sz="1700" dirty="0">
+              <a:rPr lang="en-US" sz="2100" dirty="0">
                 <a:solidFill>
                   <a:srgbClr val="17364A"/>
                 </a:solidFill>
@@ -5030,13 +5183,13 @@
                 <a:ea typeface="Aptos" pitchFamily="34" charset="-122"/>
                 <a:cs typeface="Aptos" pitchFamily="34" charset="-120"/>
               </a:rPr>
-              <a:t>Which current or proposed AI use case in your agency raises this leadership or governance issue most clearly?</a:t>
-            </a:r>
-            <a:endParaRPr lang="en-US" sz="1700" dirty="0"/>
-          </a:p>
-          <a:p>
-            <a:r>
-              <a:rPr lang="en-US" sz="1700" dirty="0">
+              <a:t>Which current or proposed AI use case in your agency raises this leadership or governance issue most.</a:t>
+            </a:r>
+            <a:endParaRPr lang="en-US" sz="2100" dirty="0"/>
+          </a:p>
+          <a:p>
+            <a:r>
+              <a:rPr lang="en-US" sz="2100" dirty="0">
                 <a:solidFill>
                   <a:srgbClr val="17364A"/>
                 </a:solidFill>
@@ -5046,11 +5199,11 @@
               </a:rPr>
               <a:t>Who currently has authority to make decisions about this issue, and is that authority documented?</a:t>
             </a:r>
-            <a:endParaRPr lang="en-US" sz="1700" dirty="0"/>
-          </a:p>
-          <a:p>
-            <a:r>
-              <a:rPr lang="en-US" sz="1700" dirty="0">
+            <a:endParaRPr lang="en-US" sz="2100" dirty="0"/>
+          </a:p>
+          <a:p>
+            <a:r>
+              <a:rPr lang="en-US" sz="2100" dirty="0">
                 <a:solidFill>
                   <a:srgbClr val="17364A"/>
                 </a:solidFill>
@@ -5060,13 +5213,13 @@
               </a:rPr>
               <a:t>What evidence would governance or leadership need before approving the use case?</a:t>
             </a:r>
-            <a:endParaRPr lang="en-US" sz="1700" dirty="0"/>
-          </a:p>
-        </p:txBody>
-      </p:sp>
-      <p:sp>
-        <p:nvSpPr>
-          <p:cNvPr id="11" name="Shape 9"/>
+            <a:endParaRPr lang="en-US" sz="2100" dirty="0"/>
+          </a:p>
+        </p:txBody>
+      </p:sp>
+      <p:sp>
+        <p:nvSpPr>
+          <p:cNvPr id="12" name="Shape 10"/>
           <p:cNvSpPr/>
           <p:nvPr/>
         </p:nvSpPr>
@@ -5093,14 +5246,14 @@
       </p:sp>
       <p:sp>
         <p:nvSpPr>
-          <p:cNvPr id="12" name="Text 10"/>
+          <p:cNvPr id="13" name="Text 11"/>
           <p:cNvSpPr/>
           <p:nvPr/>
         </p:nvSpPr>
         <p:spPr>
           <a:xfrm>
             <a:off x="8074152" y="1563624"/>
-            <a:ext cx="2825496" cy="201168"/>
+            <a:ext cx="2825496" cy="256032"/>
           </a:xfrm>
           <a:prstGeom prst="rect">
             <a:avLst/>
@@ -5116,7 +5269,7 @@
               <a:buNone/>
             </a:pPr>
             <a:r>
-              <a:rPr lang="en-US" sz="950" b="1" dirty="0">
+              <a:rPr lang="en-US" sz="1300" b="1" dirty="0">
                 <a:solidFill>
                   <a:srgbClr val="0068B7"/>
                 </a:solidFill>
@@ -5126,20 +5279,20 @@
               </a:rPr>
               <a:t>Key idea</a:t>
             </a:r>
-            <a:endParaRPr lang="en-US" sz="950" dirty="0"/>
-          </a:p>
-        </p:txBody>
-      </p:sp>
-      <p:sp>
-        <p:nvSpPr>
-          <p:cNvPr id="13" name="Text 11"/>
-          <p:cNvSpPr/>
-          <p:nvPr/>
-        </p:nvSpPr>
-        <p:spPr>
-          <a:xfrm>
-            <a:off x="8074152" y="1856232"/>
-            <a:ext cx="2825496" cy="1261872"/>
+            <a:endParaRPr lang="en-US" sz="1300" dirty="0"/>
+          </a:p>
+        </p:txBody>
+      </p:sp>
+      <p:sp>
+        <p:nvSpPr>
+          <p:cNvPr id="14" name="Text 12"/>
+          <p:cNvSpPr/>
+          <p:nvPr/>
+        </p:nvSpPr>
+        <p:spPr>
+          <a:xfrm>
+            <a:off x="8074152" y="1920240"/>
+            <a:ext cx="2825496" cy="1188720"/>
           </a:xfrm>
           <a:prstGeom prst="rect">
             <a:avLst/>
@@ -5157,7 +5310,7 @@
               <a:buNone/>
             </a:pPr>
             <a:r>
-              <a:rPr lang="en-US" sz="1250" dirty="0">
+              <a:rPr lang="en-US" sz="1550" dirty="0">
                 <a:solidFill>
                   <a:srgbClr val="17364A"/>
                 </a:solidFill>
@@ -5165,15 +5318,15 @@
                 <a:ea typeface="Aptos" pitchFamily="34" charset="-122"/>
                 <a:cs typeface="Aptos" pitchFamily="34" charset="-120"/>
               </a:rPr>
-              <a:t>Which current or proposed AI use case in your agency raises this leadership or governance issue most clearly?</a:t>
-            </a:r>
-            <a:endParaRPr lang="en-US" sz="1250" dirty="0"/>
-          </a:p>
-        </p:txBody>
-      </p:sp>
-      <p:sp>
-        <p:nvSpPr>
-          <p:cNvPr id="14" name="Shape 12"/>
+              <a:t>Which current or proposed AI use case in your agency raises this leadership or governance issue most.</a:t>
+            </a:r>
+            <a:endParaRPr lang="en-US" sz="1550" dirty="0"/>
+          </a:p>
+        </p:txBody>
+      </p:sp>
+      <p:sp>
+        <p:nvSpPr>
+          <p:cNvPr id="15" name="Shape 13"/>
           <p:cNvSpPr/>
           <p:nvPr/>
         </p:nvSpPr>
@@ -5200,14 +5353,14 @@
       </p:sp>
       <p:sp>
         <p:nvSpPr>
-          <p:cNvPr id="15" name="Text 13"/>
+          <p:cNvPr id="16" name="Text 14"/>
           <p:cNvSpPr/>
           <p:nvPr/>
         </p:nvSpPr>
         <p:spPr>
           <a:xfrm>
             <a:off x="8074152" y="3666744"/>
-            <a:ext cx="2825496" cy="201168"/>
+            <a:ext cx="2825496" cy="256032"/>
           </a:xfrm>
           <a:prstGeom prst="rect">
             <a:avLst/>
@@ -5223,7 +5376,7 @@
               <a:buNone/>
             </a:pPr>
             <a:r>
-              <a:rPr lang="en-US" sz="950" b="1" dirty="0">
+              <a:rPr lang="en-US" sz="1300" b="1" dirty="0">
                 <a:solidFill>
                   <a:srgbClr val="0068B7"/>
                 </a:solidFill>
@@ -5233,20 +5386,20 @@
               </a:rPr>
               <a:t>Use this for</a:t>
             </a:r>
-            <a:endParaRPr lang="en-US" sz="950" dirty="0"/>
-          </a:p>
-        </p:txBody>
-      </p:sp>
-      <p:sp>
-        <p:nvSpPr>
-          <p:cNvPr id="16" name="Text 14"/>
-          <p:cNvSpPr/>
-          <p:nvPr/>
-        </p:nvSpPr>
-        <p:spPr>
-          <a:xfrm>
-            <a:off x="8074152" y="3959352"/>
-            <a:ext cx="2825496" cy="1170432"/>
+            <a:endParaRPr lang="en-US" sz="1300" dirty="0"/>
+          </a:p>
+        </p:txBody>
+      </p:sp>
+      <p:sp>
+        <p:nvSpPr>
+          <p:cNvPr id="17" name="Text 15"/>
+          <p:cNvSpPr/>
+          <p:nvPr/>
+        </p:nvSpPr>
+        <p:spPr>
+          <a:xfrm>
+            <a:off x="8074152" y="4023360"/>
+            <a:ext cx="2825496" cy="1097280"/>
           </a:xfrm>
           <a:prstGeom prst="rect">
             <a:avLst/>
@@ -5264,7 +5417,7 @@
               <a:buNone/>
             </a:pPr>
             <a:r>
-              <a:rPr lang="en-US" sz="1250" dirty="0">
+              <a:rPr lang="en-US" sz="1550" dirty="0">
                 <a:solidFill>
                   <a:srgbClr val="17364A"/>
                 </a:solidFill>
@@ -5274,7 +5427,7 @@
               </a:rPr>
               <a:t>Connect the concept to public health decisions, safeguards, documentation, or implementation work.</a:t>
             </a:r>
-            <a:endParaRPr lang="en-US" sz="1250" dirty="0"/>
+            <a:endParaRPr lang="en-US" sz="1550" dirty="0"/>
           </a:p>
         </p:txBody>
       </p:sp>
@@ -5471,7 +5624,7 @@
                 <a:ea typeface="Aptos" pitchFamily="34" charset="-122"/>
                 <a:cs typeface="Aptos" pitchFamily="34" charset="-120"/>
               </a:rPr>
-              <a:t>© Paula Soper</a:t>
+              <a:t>Â© Paula Soper</a:t>
             </a:r>
             <a:endParaRPr lang="en-US" sz="800" dirty="0"/>
           </a:p>
@@ -5485,8 +5638,47 @@
         </p:nvSpPr>
         <p:spPr>
           <a:xfrm>
+            <a:off x="11137392" y="6510528"/>
+            <a:ext cx="411480" cy="201168"/>
+          </a:xfrm>
+          <a:prstGeom prst="rect">
+            <a:avLst/>
+          </a:prstGeom>
+          <a:noFill/>
+          <a:ln/>
+        </p:spPr>
+        <p:txBody>
+          <a:bodyPr wrap="square" lIns="0" tIns="0" rIns="0" bIns="0" rtlCol="0" anchor="ctr"/>
+          <a:lstStyle/>
+          <a:p>
+            <a:pPr algn="r" indent="0" marL="0">
+              <a:buNone/>
+            </a:pPr>
+            <a:r>
+              <a:rPr lang="en-US" sz="900" dirty="0">
+                <a:solidFill>
+                  <a:srgbClr val="5F7181"/>
+                </a:solidFill>
+                <a:latin typeface="Aptos" pitchFamily="34" charset="0"/>
+                <a:ea typeface="Aptos" pitchFamily="34" charset="-122"/>
+                <a:cs typeface="Aptos" pitchFamily="34" charset="-120"/>
+              </a:rPr>
+              <a:t>14</a:t>
+            </a:r>
+            <a:endParaRPr lang="en-US" sz="900" dirty="0"/>
+          </a:p>
+        </p:txBody>
+      </p:sp>
+      <p:sp>
+        <p:nvSpPr>
+          <p:cNvPr id="8" name="Text 6"/>
+          <p:cNvSpPr/>
+          <p:nvPr/>
+        </p:nvSpPr>
+        <p:spPr>
+          <a:xfrm>
             <a:off x="640080" y="658368"/>
-            <a:ext cx="10881360" cy="566928"/>
+            <a:ext cx="10881360" cy="713232"/>
           </a:xfrm>
           <a:prstGeom prst="rect">
             <a:avLst/>
@@ -5504,7 +5696,7 @@
               <a:buNone/>
             </a:pPr>
             <a:r>
-              <a:rPr lang="en-US" sz="2700" b="1" dirty="0">
+              <a:rPr lang="en-US" sz="3400" b="1" dirty="0">
                 <a:solidFill>
                   <a:srgbClr val="003A63"/>
                 </a:solidFill>
@@ -5514,20 +5706,20 @@
               </a:rPr>
               <a:t>Reflection Questions Continued</a:t>
             </a:r>
-            <a:endParaRPr lang="en-US" sz="2700" dirty="0"/>
-          </a:p>
-        </p:txBody>
-      </p:sp>
-      <p:sp>
-        <p:nvSpPr>
-          <p:cNvPr id="8" name="Text 6"/>
-          <p:cNvSpPr/>
-          <p:nvPr/>
-        </p:nvSpPr>
-        <p:spPr>
-          <a:xfrm>
-            <a:off x="868680" y="1417320"/>
-            <a:ext cx="6675120" cy="4434840"/>
+            <a:endParaRPr lang="en-US" sz="3400" dirty="0"/>
+          </a:p>
+        </p:txBody>
+      </p:sp>
+      <p:sp>
+        <p:nvSpPr>
+          <p:cNvPr id="9" name="Text 7"/>
+          <p:cNvSpPr/>
+          <p:nvPr/>
+        </p:nvSpPr>
+        <p:spPr>
+          <a:xfrm>
+            <a:off x="868680" y="1508760"/>
+            <a:ext cx="6537960" cy="4160520"/>
           </a:xfrm>
           <a:prstGeom prst="rect">
             <a:avLst/>
@@ -5542,7 +5734,7 @@
           <a:lstStyle/>
           <a:p>
             <a:r>
-              <a:rPr lang="en-US" sz="1700" dirty="0">
+              <a:rPr lang="en-US" sz="2100" dirty="0">
                 <a:solidFill>
                   <a:srgbClr val="17364A"/>
                 </a:solidFill>
@@ -5552,11 +5744,11 @@
               </a:rPr>
               <a:t>Which staff, partners, or communities would be affected if this issue were handled poorly?</a:t>
             </a:r>
-            <a:endParaRPr lang="en-US" sz="1700" dirty="0"/>
-          </a:p>
-          <a:p>
-            <a:r>
-              <a:rPr lang="en-US" sz="1700" dirty="0">
+            <a:endParaRPr lang="en-US" sz="2100" dirty="0"/>
+          </a:p>
+          <a:p>
+            <a:r>
+              <a:rPr lang="en-US" sz="2100" dirty="0">
                 <a:solidFill>
                   <a:srgbClr val="17364A"/>
                 </a:solidFill>
@@ -5566,13 +5758,13 @@
               </a:rPr>
               <a:t>What policy, process, or artifact should be created or updated after this module?</a:t>
             </a:r>
-            <a:endParaRPr lang="en-US" sz="1700" dirty="0"/>
-          </a:p>
-        </p:txBody>
-      </p:sp>
-      <p:sp>
-        <p:nvSpPr>
-          <p:cNvPr id="9" name="Shape 7"/>
+            <a:endParaRPr lang="en-US" sz="2100" dirty="0"/>
+          </a:p>
+        </p:txBody>
+      </p:sp>
+      <p:sp>
+        <p:nvSpPr>
+          <p:cNvPr id="10" name="Shape 8"/>
           <p:cNvSpPr/>
           <p:nvPr/>
         </p:nvSpPr>
@@ -5599,14 +5791,14 @@
       </p:sp>
       <p:sp>
         <p:nvSpPr>
-          <p:cNvPr id="10" name="Text 8"/>
+          <p:cNvPr id="11" name="Text 9"/>
           <p:cNvSpPr/>
           <p:nvPr/>
         </p:nvSpPr>
         <p:spPr>
           <a:xfrm>
             <a:off x="8074152" y="1563624"/>
-            <a:ext cx="2825496" cy="201168"/>
+            <a:ext cx="2825496" cy="256032"/>
           </a:xfrm>
           <a:prstGeom prst="rect">
             <a:avLst/>
@@ -5622,7 +5814,7 @@
               <a:buNone/>
             </a:pPr>
             <a:r>
-              <a:rPr lang="en-US" sz="950" b="1" dirty="0">
+              <a:rPr lang="en-US" sz="1300" b="1" dirty="0">
                 <a:solidFill>
                   <a:srgbClr val="0068B7"/>
                 </a:solidFill>
@@ -5632,20 +5824,20 @@
               </a:rPr>
               <a:t>Key idea</a:t>
             </a:r>
-            <a:endParaRPr lang="en-US" sz="950" dirty="0"/>
-          </a:p>
-        </p:txBody>
-      </p:sp>
-      <p:sp>
-        <p:nvSpPr>
-          <p:cNvPr id="11" name="Text 9"/>
-          <p:cNvSpPr/>
-          <p:nvPr/>
-        </p:nvSpPr>
-        <p:spPr>
-          <a:xfrm>
-            <a:off x="8074152" y="1856232"/>
-            <a:ext cx="2825496" cy="1261872"/>
+            <a:endParaRPr lang="en-US" sz="1300" dirty="0"/>
+          </a:p>
+        </p:txBody>
+      </p:sp>
+      <p:sp>
+        <p:nvSpPr>
+          <p:cNvPr id="12" name="Text 10"/>
+          <p:cNvSpPr/>
+          <p:nvPr/>
+        </p:nvSpPr>
+        <p:spPr>
+          <a:xfrm>
+            <a:off x="8074152" y="1920240"/>
+            <a:ext cx="2825496" cy="1188720"/>
           </a:xfrm>
           <a:prstGeom prst="rect">
             <a:avLst/>
@@ -5663,7 +5855,7 @@
               <a:buNone/>
             </a:pPr>
             <a:r>
-              <a:rPr lang="en-US" sz="1250" dirty="0">
+              <a:rPr lang="en-US" sz="1550" dirty="0">
                 <a:solidFill>
                   <a:srgbClr val="17364A"/>
                 </a:solidFill>
@@ -5673,13 +5865,13 @@
               </a:rPr>
               <a:t>Which staff, partners, or communities would be affected if this issue were handled poorly?</a:t>
             </a:r>
-            <a:endParaRPr lang="en-US" sz="1250" dirty="0"/>
-          </a:p>
-        </p:txBody>
-      </p:sp>
-      <p:sp>
-        <p:nvSpPr>
-          <p:cNvPr id="12" name="Shape 10"/>
+            <a:endParaRPr lang="en-US" sz="1550" dirty="0"/>
+          </a:p>
+        </p:txBody>
+      </p:sp>
+      <p:sp>
+        <p:nvSpPr>
+          <p:cNvPr id="13" name="Shape 11"/>
           <p:cNvSpPr/>
           <p:nvPr/>
         </p:nvSpPr>
@@ -5706,14 +5898,14 @@
       </p:sp>
       <p:sp>
         <p:nvSpPr>
-          <p:cNvPr id="13" name="Text 11"/>
+          <p:cNvPr id="14" name="Text 12"/>
           <p:cNvSpPr/>
           <p:nvPr/>
         </p:nvSpPr>
         <p:spPr>
           <a:xfrm>
             <a:off x="8074152" y="3666744"/>
-            <a:ext cx="2825496" cy="201168"/>
+            <a:ext cx="2825496" cy="256032"/>
           </a:xfrm>
           <a:prstGeom prst="rect">
             <a:avLst/>
@@ -5729,7 +5921,7 @@
               <a:buNone/>
             </a:pPr>
             <a:r>
-              <a:rPr lang="en-US" sz="950" b="1" dirty="0">
+              <a:rPr lang="en-US" sz="1300" b="1" dirty="0">
                 <a:solidFill>
                   <a:srgbClr val="0068B7"/>
                 </a:solidFill>
@@ -5739,20 +5931,20 @@
               </a:rPr>
               <a:t>Use this for</a:t>
             </a:r>
-            <a:endParaRPr lang="en-US" sz="950" dirty="0"/>
-          </a:p>
-        </p:txBody>
-      </p:sp>
-      <p:sp>
-        <p:nvSpPr>
-          <p:cNvPr id="14" name="Text 12"/>
-          <p:cNvSpPr/>
-          <p:nvPr/>
-        </p:nvSpPr>
-        <p:spPr>
-          <a:xfrm>
-            <a:off x="8074152" y="3959352"/>
-            <a:ext cx="2825496" cy="1170432"/>
+            <a:endParaRPr lang="en-US" sz="1300" dirty="0"/>
+          </a:p>
+        </p:txBody>
+      </p:sp>
+      <p:sp>
+        <p:nvSpPr>
+          <p:cNvPr id="15" name="Text 13"/>
+          <p:cNvSpPr/>
+          <p:nvPr/>
+        </p:nvSpPr>
+        <p:spPr>
+          <a:xfrm>
+            <a:off x="8074152" y="4023360"/>
+            <a:ext cx="2825496" cy="1097280"/>
           </a:xfrm>
           <a:prstGeom prst="rect">
             <a:avLst/>
@@ -5770,7 +5962,7 @@
               <a:buNone/>
             </a:pPr>
             <a:r>
-              <a:rPr lang="en-US" sz="1250" dirty="0">
+              <a:rPr lang="en-US" sz="1550" dirty="0">
                 <a:solidFill>
                   <a:srgbClr val="17364A"/>
                 </a:solidFill>
@@ -5780,7 +5972,7 @@
               </a:rPr>
               <a:t>Connect the concept to public health decisions, safeguards, documentation, or implementation work.</a:t>
             </a:r>
-            <a:endParaRPr lang="en-US" sz="1250" dirty="0"/>
+            <a:endParaRPr lang="en-US" sz="1550" dirty="0"/>
           </a:p>
         </p:txBody>
       </p:sp>
@@ -5977,7 +6169,7 @@
                 <a:ea typeface="Aptos" pitchFamily="34" charset="-122"/>
                 <a:cs typeface="Aptos" pitchFamily="34" charset="-120"/>
               </a:rPr>
-              <a:t>© Paula Soper</a:t>
+              <a:t>Â© Paula Soper</a:t>
             </a:r>
             <a:endParaRPr lang="en-US" sz="800" dirty="0"/>
           </a:p>
@@ -5985,7 +6177,46 @@
       </p:sp>
       <p:sp>
         <p:nvSpPr>
-          <p:cNvPr id="7" name="Shape 5"/>
+          <p:cNvPr id="7" name="Text 5"/>
+          <p:cNvSpPr/>
+          <p:nvPr/>
+        </p:nvSpPr>
+        <p:spPr>
+          <a:xfrm>
+            <a:off x="11137392" y="6510528"/>
+            <a:ext cx="411480" cy="201168"/>
+          </a:xfrm>
+          <a:prstGeom prst="rect">
+            <a:avLst/>
+          </a:prstGeom>
+          <a:noFill/>
+          <a:ln/>
+        </p:spPr>
+        <p:txBody>
+          <a:bodyPr wrap="square" lIns="0" tIns="0" rIns="0" bIns="0" rtlCol="0" anchor="ctr"/>
+          <a:lstStyle/>
+          <a:p>
+            <a:pPr algn="r" indent="0" marL="0">
+              <a:buNone/>
+            </a:pPr>
+            <a:r>
+              <a:rPr lang="en-US" sz="900" dirty="0">
+                <a:solidFill>
+                  <a:srgbClr val="5F7181"/>
+                </a:solidFill>
+                <a:latin typeface="Aptos" pitchFamily="34" charset="0"/>
+                <a:ea typeface="Aptos" pitchFamily="34" charset="-122"/>
+                <a:cs typeface="Aptos" pitchFamily="34" charset="-120"/>
+              </a:rPr>
+              <a:t>15</a:t>
+            </a:r>
+            <a:endParaRPr lang="en-US" sz="900" dirty="0"/>
+          </a:p>
+        </p:txBody>
+      </p:sp>
+      <p:sp>
+        <p:nvSpPr>
+          <p:cNvPr id="8" name="Shape 6"/>
           <p:cNvSpPr/>
           <p:nvPr/>
         </p:nvSpPr>
@@ -6010,7 +6241,7 @@
       </p:sp>
       <p:sp>
         <p:nvSpPr>
-          <p:cNvPr id="8" name="Text 6"/>
+          <p:cNvPr id="9" name="Text 7"/>
           <p:cNvSpPr/>
           <p:nvPr/>
         </p:nvSpPr>
@@ -6049,14 +6280,14 @@
       </p:sp>
       <p:sp>
         <p:nvSpPr>
-          <p:cNvPr id="9" name="Text 7"/>
+          <p:cNvPr id="10" name="Text 8"/>
           <p:cNvSpPr/>
           <p:nvPr/>
         </p:nvSpPr>
         <p:spPr>
           <a:xfrm>
             <a:off x="640080" y="621792"/>
-            <a:ext cx="10881360" cy="566928"/>
+            <a:ext cx="10881360" cy="713232"/>
           </a:xfrm>
           <a:prstGeom prst="rect">
             <a:avLst/>
@@ -6074,7 +6305,7 @@
               <a:buNone/>
             </a:pPr>
             <a:r>
-              <a:rPr lang="en-US" sz="2700" b="1" dirty="0">
+              <a:rPr lang="en-US" sz="3400" b="1" dirty="0">
                 <a:solidFill>
                   <a:srgbClr val="003A63"/>
                 </a:solidFill>
@@ -6084,20 +6315,20 @@
               </a:rPr>
               <a:t>Practical Exercise</a:t>
             </a:r>
-            <a:endParaRPr lang="en-US" sz="2700" dirty="0"/>
-          </a:p>
-        </p:txBody>
-      </p:sp>
-      <p:sp>
-        <p:nvSpPr>
-          <p:cNvPr id="10" name="Text 8"/>
-          <p:cNvSpPr/>
-          <p:nvPr/>
-        </p:nvSpPr>
-        <p:spPr>
-          <a:xfrm>
-            <a:off x="868680" y="1417320"/>
-            <a:ext cx="6675120" cy="4434840"/>
+            <a:endParaRPr lang="en-US" sz="3400" dirty="0"/>
+          </a:p>
+        </p:txBody>
+      </p:sp>
+      <p:sp>
+        <p:nvSpPr>
+          <p:cNvPr id="11" name="Text 9"/>
+          <p:cNvSpPr/>
+          <p:nvPr/>
+        </p:nvSpPr>
+        <p:spPr>
+          <a:xfrm>
+            <a:off x="868680" y="1508760"/>
+            <a:ext cx="6537960" cy="4160520"/>
           </a:xfrm>
           <a:prstGeom prst="rect">
             <a:avLst/>
@@ -6112,7 +6343,7 @@
           <a:lstStyle/>
           <a:p>
             <a:r>
-              <a:rPr lang="en-US" sz="1700" dirty="0">
+              <a:rPr lang="en-US" sz="2100" dirty="0">
                 <a:solidFill>
                   <a:srgbClr val="17364A"/>
                 </a:solidFill>
@@ -6122,11 +6353,11 @@
               </a:rPr>
               <a:t>Create a decision-rights matrix for one AI use case.</a:t>
             </a:r>
-            <a:endParaRPr lang="en-US" sz="1700" dirty="0"/>
-          </a:p>
-          <a:p>
-            <a:r>
-              <a:rPr lang="en-US" sz="1700" dirty="0">
+            <a:endParaRPr lang="en-US" sz="2100" dirty="0"/>
+          </a:p>
+          <a:p>
+            <a:r>
+              <a:rPr lang="en-US" sz="2100" dirty="0">
                 <a:solidFill>
                   <a:srgbClr val="17364A"/>
                 </a:solidFill>
@@ -6134,15 +6365,15 @@
                 <a:ea typeface="Aptos" pitchFamily="34" charset="-122"/>
                 <a:cs typeface="Aptos" pitchFamily="34" charset="-120"/>
               </a:rPr>
-              <a:t>Include approval, data access, validation, launch, monitoring, incident escalation, risk acceptance, public communication,.</a:t>
-            </a:r>
-            <a:endParaRPr lang="en-US" sz="1700" dirty="0"/>
-          </a:p>
-        </p:txBody>
-      </p:sp>
-      <p:sp>
-        <p:nvSpPr>
-          <p:cNvPr id="11" name="Shape 9"/>
+              <a:t>Include approval, data access, validation, launch, monitoring, incident escalation, risk acceptance,.</a:t>
+            </a:r>
+            <a:endParaRPr lang="en-US" sz="2100" dirty="0"/>
+          </a:p>
+        </p:txBody>
+      </p:sp>
+      <p:sp>
+        <p:nvSpPr>
+          <p:cNvPr id="12" name="Shape 10"/>
           <p:cNvSpPr/>
           <p:nvPr/>
         </p:nvSpPr>
@@ -6169,14 +6400,14 @@
       </p:sp>
       <p:sp>
         <p:nvSpPr>
-          <p:cNvPr id="12" name="Text 10"/>
+          <p:cNvPr id="13" name="Text 11"/>
           <p:cNvSpPr/>
           <p:nvPr/>
         </p:nvSpPr>
         <p:spPr>
           <a:xfrm>
             <a:off x="8074152" y="1563624"/>
-            <a:ext cx="2825496" cy="201168"/>
+            <a:ext cx="2825496" cy="256032"/>
           </a:xfrm>
           <a:prstGeom prst="rect">
             <a:avLst/>
@@ -6192,7 +6423,7 @@
               <a:buNone/>
             </a:pPr>
             <a:r>
-              <a:rPr lang="en-US" sz="950" b="1" dirty="0">
+              <a:rPr lang="en-US" sz="1300" b="1" dirty="0">
                 <a:solidFill>
                   <a:srgbClr val="0068B7"/>
                 </a:solidFill>
@@ -6202,20 +6433,20 @@
               </a:rPr>
               <a:t>Key idea</a:t>
             </a:r>
-            <a:endParaRPr lang="en-US" sz="950" dirty="0"/>
-          </a:p>
-        </p:txBody>
-      </p:sp>
-      <p:sp>
-        <p:nvSpPr>
-          <p:cNvPr id="13" name="Text 11"/>
-          <p:cNvSpPr/>
-          <p:nvPr/>
-        </p:nvSpPr>
-        <p:spPr>
-          <a:xfrm>
-            <a:off x="8074152" y="1856232"/>
-            <a:ext cx="2825496" cy="1261872"/>
+            <a:endParaRPr lang="en-US" sz="1300" dirty="0"/>
+          </a:p>
+        </p:txBody>
+      </p:sp>
+      <p:sp>
+        <p:nvSpPr>
+          <p:cNvPr id="14" name="Text 12"/>
+          <p:cNvSpPr/>
+          <p:nvPr/>
+        </p:nvSpPr>
+        <p:spPr>
+          <a:xfrm>
+            <a:off x="8074152" y="1920240"/>
+            <a:ext cx="2825496" cy="1188720"/>
           </a:xfrm>
           <a:prstGeom prst="rect">
             <a:avLst/>
@@ -6233,7 +6464,7 @@
               <a:buNone/>
             </a:pPr>
             <a:r>
-              <a:rPr lang="en-US" sz="1250" dirty="0">
+              <a:rPr lang="en-US" sz="1550" dirty="0">
                 <a:solidFill>
                   <a:srgbClr val="17364A"/>
                 </a:solidFill>
@@ -6243,13 +6474,13 @@
               </a:rPr>
               <a:t>Create a decision-rights matrix for one AI use case.</a:t>
             </a:r>
-            <a:endParaRPr lang="en-US" sz="1250" dirty="0"/>
-          </a:p>
-        </p:txBody>
-      </p:sp>
-      <p:sp>
-        <p:nvSpPr>
-          <p:cNvPr id="14" name="Shape 12"/>
+            <a:endParaRPr lang="en-US" sz="1550" dirty="0"/>
+          </a:p>
+        </p:txBody>
+      </p:sp>
+      <p:sp>
+        <p:nvSpPr>
+          <p:cNvPr id="15" name="Shape 13"/>
           <p:cNvSpPr/>
           <p:nvPr/>
         </p:nvSpPr>
@@ -6276,14 +6507,14 @@
       </p:sp>
       <p:sp>
         <p:nvSpPr>
-          <p:cNvPr id="15" name="Text 13"/>
+          <p:cNvPr id="16" name="Text 14"/>
           <p:cNvSpPr/>
           <p:nvPr/>
         </p:nvSpPr>
         <p:spPr>
           <a:xfrm>
             <a:off x="8074152" y="3666744"/>
-            <a:ext cx="2825496" cy="201168"/>
+            <a:ext cx="2825496" cy="256032"/>
           </a:xfrm>
           <a:prstGeom prst="rect">
             <a:avLst/>
@@ -6299,7 +6530,7 @@
               <a:buNone/>
             </a:pPr>
             <a:r>
-              <a:rPr lang="en-US" sz="950" b="1" dirty="0">
+              <a:rPr lang="en-US" sz="1300" b="1" dirty="0">
                 <a:solidFill>
                   <a:srgbClr val="0068B7"/>
                 </a:solidFill>
@@ -6309,20 +6540,20 @@
               </a:rPr>
               <a:t>Use this for</a:t>
             </a:r>
-            <a:endParaRPr lang="en-US" sz="950" dirty="0"/>
-          </a:p>
-        </p:txBody>
-      </p:sp>
-      <p:sp>
-        <p:nvSpPr>
-          <p:cNvPr id="16" name="Text 14"/>
-          <p:cNvSpPr/>
-          <p:nvPr/>
-        </p:nvSpPr>
-        <p:spPr>
-          <a:xfrm>
-            <a:off x="8074152" y="3959352"/>
-            <a:ext cx="2825496" cy="1170432"/>
+            <a:endParaRPr lang="en-US" sz="1300" dirty="0"/>
+          </a:p>
+        </p:txBody>
+      </p:sp>
+      <p:sp>
+        <p:nvSpPr>
+          <p:cNvPr id="17" name="Text 15"/>
+          <p:cNvSpPr/>
+          <p:nvPr/>
+        </p:nvSpPr>
+        <p:spPr>
+          <a:xfrm>
+            <a:off x="8074152" y="4023360"/>
+            <a:ext cx="2825496" cy="1097280"/>
           </a:xfrm>
           <a:prstGeom prst="rect">
             <a:avLst/>
@@ -6340,7 +6571,7 @@
               <a:buNone/>
             </a:pPr>
             <a:r>
-              <a:rPr lang="en-US" sz="1250" dirty="0">
+              <a:rPr lang="en-US" sz="1550" dirty="0">
                 <a:solidFill>
                   <a:srgbClr val="17364A"/>
                 </a:solidFill>
@@ -6350,7 +6581,7 @@
               </a:rPr>
               <a:t>Connect the concept to public health decisions, safeguards, documentation, or implementation work.</a:t>
             </a:r>
-            <a:endParaRPr lang="en-US" sz="1250" dirty="0"/>
+            <a:endParaRPr lang="en-US" sz="1550" dirty="0"/>
           </a:p>
         </p:txBody>
       </p:sp>
@@ -6547,7 +6778,7 @@
                 <a:ea typeface="Aptos" pitchFamily="34" charset="-122"/>
                 <a:cs typeface="Aptos" pitchFamily="34" charset="-120"/>
               </a:rPr>
-              <a:t>© Paula Soper</a:t>
+              <a:t>Â© Paula Soper</a:t>
             </a:r>
             <a:endParaRPr lang="en-US" sz="800" dirty="0"/>
           </a:p>
@@ -6555,7 +6786,46 @@
       </p:sp>
       <p:sp>
         <p:nvSpPr>
-          <p:cNvPr id="7" name="Shape 5"/>
+          <p:cNvPr id="7" name="Text 5"/>
+          <p:cNvSpPr/>
+          <p:nvPr/>
+        </p:nvSpPr>
+        <p:spPr>
+          <a:xfrm>
+            <a:off x="11137392" y="6510528"/>
+            <a:ext cx="411480" cy="201168"/>
+          </a:xfrm>
+          <a:prstGeom prst="rect">
+            <a:avLst/>
+          </a:prstGeom>
+          <a:noFill/>
+          <a:ln/>
+        </p:spPr>
+        <p:txBody>
+          <a:bodyPr wrap="square" lIns="0" tIns="0" rIns="0" bIns="0" rtlCol="0" anchor="ctr"/>
+          <a:lstStyle/>
+          <a:p>
+            <a:pPr algn="r" indent="0" marL="0">
+              <a:buNone/>
+            </a:pPr>
+            <a:r>
+              <a:rPr lang="en-US" sz="900" dirty="0">
+                <a:solidFill>
+                  <a:srgbClr val="5F7181"/>
+                </a:solidFill>
+                <a:latin typeface="Aptos" pitchFamily="34" charset="0"/>
+                <a:ea typeface="Aptos" pitchFamily="34" charset="-122"/>
+                <a:cs typeface="Aptos" pitchFamily="34" charset="-120"/>
+              </a:rPr>
+              <a:t>16</a:t>
+            </a:r>
+            <a:endParaRPr lang="en-US" sz="900" dirty="0"/>
+          </a:p>
+        </p:txBody>
+      </p:sp>
+      <p:sp>
+        <p:nvSpPr>
+          <p:cNvPr id="8" name="Shape 6"/>
           <p:cNvSpPr/>
           <p:nvPr/>
         </p:nvSpPr>
@@ -6580,7 +6850,7 @@
       </p:sp>
       <p:sp>
         <p:nvSpPr>
-          <p:cNvPr id="8" name="Text 6"/>
+          <p:cNvPr id="9" name="Text 7"/>
           <p:cNvSpPr/>
           <p:nvPr/>
         </p:nvSpPr>
@@ -6619,14 +6889,14 @@
       </p:sp>
       <p:sp>
         <p:nvSpPr>
-          <p:cNvPr id="9" name="Text 7"/>
+          <p:cNvPr id="10" name="Text 8"/>
           <p:cNvSpPr/>
           <p:nvPr/>
         </p:nvSpPr>
         <p:spPr>
           <a:xfrm>
             <a:off x="640080" y="621792"/>
-            <a:ext cx="10881360" cy="566928"/>
+            <a:ext cx="10881360" cy="713232"/>
           </a:xfrm>
           <a:prstGeom prst="rect">
             <a:avLst/>
@@ -6644,7 +6914,7 @@
               <a:buNone/>
             </a:pPr>
             <a:r>
-              <a:rPr lang="en-US" sz="2700" b="1" dirty="0">
+              <a:rPr lang="en-US" sz="3400" b="1" dirty="0">
                 <a:solidFill>
                   <a:srgbClr val="003A63"/>
                 </a:solidFill>
@@ -6654,20 +6924,20 @@
               </a:rPr>
               <a:t>Before You Begin</a:t>
             </a:r>
-            <a:endParaRPr lang="en-US" sz="2700" dirty="0"/>
-          </a:p>
-        </p:txBody>
-      </p:sp>
-      <p:sp>
-        <p:nvSpPr>
-          <p:cNvPr id="10" name="Text 8"/>
-          <p:cNvSpPr/>
-          <p:nvPr/>
-        </p:nvSpPr>
-        <p:spPr>
-          <a:xfrm>
-            <a:off x="868680" y="1417320"/>
-            <a:ext cx="6675120" cy="4434840"/>
+            <a:endParaRPr lang="en-US" sz="3400" dirty="0"/>
+          </a:p>
+        </p:txBody>
+      </p:sp>
+      <p:sp>
+        <p:nvSpPr>
+          <p:cNvPr id="11" name="Text 9"/>
+          <p:cNvSpPr/>
+          <p:nvPr/>
+        </p:nvSpPr>
+        <p:spPr>
+          <a:xfrm>
+            <a:off x="868680" y="1508760"/>
+            <a:ext cx="6537960" cy="4160520"/>
           </a:xfrm>
           <a:prstGeom prst="rect">
             <a:avLst/>
@@ -6682,7 +6952,7 @@
           <a:lstStyle/>
           <a:p>
             <a:r>
-              <a:rPr lang="en-US" sz="1700" dirty="0">
+              <a:rPr lang="en-US" sz="2100" dirty="0">
                 <a:solidFill>
                   <a:srgbClr val="17364A"/>
                 </a:solidFill>
@@ -6692,11 +6962,11 @@
               </a:rPr>
               <a:t>Choose a real or realistic public health AI use case.</a:t>
             </a:r>
-            <a:endParaRPr lang="en-US" sz="1700" dirty="0"/>
-          </a:p>
-          <a:p>
-            <a:r>
-              <a:rPr lang="en-US" sz="1700" dirty="0">
+            <a:endParaRPr lang="en-US" sz="2100" dirty="0"/>
+          </a:p>
+          <a:p>
+            <a:r>
+              <a:rPr lang="en-US" sz="2100" dirty="0">
                 <a:solidFill>
                   <a:srgbClr val="17364A"/>
                 </a:solidFill>
@@ -6704,13 +6974,13 @@
                 <a:ea typeface="Aptos" pitchFamily="34" charset="-122"/>
                 <a:cs typeface="Aptos" pitchFamily="34" charset="-120"/>
               </a:rPr>
-              <a:t>Document assumptions, unresolved questions, and which agency roles would need to review the artifact before it is adopted.</a:t>
-            </a:r>
-            <a:endParaRPr lang="en-US" sz="1700" dirty="0"/>
-          </a:p>
-          <a:p>
-            <a:r>
-              <a:rPr lang="en-US" sz="1700" dirty="0">
+              <a:t>Document assumptions, unresolved questions, and which agency roles would need to review the artifact.</a:t>
+            </a:r>
+            <a:endParaRPr lang="en-US" sz="2100" dirty="0"/>
+          </a:p>
+          <a:p>
+            <a:r>
+              <a:rPr lang="en-US" sz="2100" dirty="0">
                 <a:solidFill>
                   <a:srgbClr val="17364A"/>
                 </a:solidFill>
@@ -6718,15 +6988,15 @@
                 <a:ea typeface="Aptos" pitchFamily="34" charset="-122"/>
                 <a:cs typeface="Aptos" pitchFamily="34" charset="-120"/>
               </a:rPr>
-              <a:t>The exercise should produce a work product that could support governance review, leadership discussion, implementation.</a:t>
-            </a:r>
-            <a:endParaRPr lang="en-US" sz="1700" dirty="0"/>
-          </a:p>
-        </p:txBody>
-      </p:sp>
-      <p:sp>
-        <p:nvSpPr>
-          <p:cNvPr id="11" name="Shape 9"/>
+              <a:t>The exercise should produce a work product that could support governance review, leadership discussion,.</a:t>
+            </a:r>
+            <a:endParaRPr lang="en-US" sz="2100" dirty="0"/>
+          </a:p>
+        </p:txBody>
+      </p:sp>
+      <p:sp>
+        <p:nvSpPr>
+          <p:cNvPr id="12" name="Shape 10"/>
           <p:cNvSpPr/>
           <p:nvPr/>
         </p:nvSpPr>
@@ -6753,14 +7023,14 @@
       </p:sp>
       <p:sp>
         <p:nvSpPr>
-          <p:cNvPr id="12" name="Text 10"/>
+          <p:cNvPr id="13" name="Text 11"/>
           <p:cNvSpPr/>
           <p:nvPr/>
         </p:nvSpPr>
         <p:spPr>
           <a:xfrm>
             <a:off x="8074152" y="1563624"/>
-            <a:ext cx="2825496" cy="201168"/>
+            <a:ext cx="2825496" cy="256032"/>
           </a:xfrm>
           <a:prstGeom prst="rect">
             <a:avLst/>
@@ -6776,7 +7046,7 @@
               <a:buNone/>
             </a:pPr>
             <a:r>
-              <a:rPr lang="en-US" sz="950" b="1" dirty="0">
+              <a:rPr lang="en-US" sz="1300" b="1" dirty="0">
                 <a:solidFill>
                   <a:srgbClr val="0068B7"/>
                 </a:solidFill>
@@ -6786,20 +7056,20 @@
               </a:rPr>
               <a:t>Key idea</a:t>
             </a:r>
-            <a:endParaRPr lang="en-US" sz="950" dirty="0"/>
-          </a:p>
-        </p:txBody>
-      </p:sp>
-      <p:sp>
-        <p:nvSpPr>
-          <p:cNvPr id="13" name="Text 11"/>
-          <p:cNvSpPr/>
-          <p:nvPr/>
-        </p:nvSpPr>
-        <p:spPr>
-          <a:xfrm>
-            <a:off x="8074152" y="1856232"/>
-            <a:ext cx="2825496" cy="1261872"/>
+            <a:endParaRPr lang="en-US" sz="1300" dirty="0"/>
+          </a:p>
+        </p:txBody>
+      </p:sp>
+      <p:sp>
+        <p:nvSpPr>
+          <p:cNvPr id="14" name="Text 12"/>
+          <p:cNvSpPr/>
+          <p:nvPr/>
+        </p:nvSpPr>
+        <p:spPr>
+          <a:xfrm>
+            <a:off x="8074152" y="1920240"/>
+            <a:ext cx="2825496" cy="1188720"/>
           </a:xfrm>
           <a:prstGeom prst="rect">
             <a:avLst/>
@@ -6817,7 +7087,7 @@
               <a:buNone/>
             </a:pPr>
             <a:r>
-              <a:rPr lang="en-US" sz="1250" dirty="0">
+              <a:rPr lang="en-US" sz="1550" dirty="0">
                 <a:solidFill>
                   <a:srgbClr val="17364A"/>
                 </a:solidFill>
@@ -6827,13 +7097,13 @@
               </a:rPr>
               <a:t>Choose a real or realistic public health AI use case.</a:t>
             </a:r>
-            <a:endParaRPr lang="en-US" sz="1250" dirty="0"/>
-          </a:p>
-        </p:txBody>
-      </p:sp>
-      <p:sp>
-        <p:nvSpPr>
-          <p:cNvPr id="14" name="Shape 12"/>
+            <a:endParaRPr lang="en-US" sz="1550" dirty="0"/>
+          </a:p>
+        </p:txBody>
+      </p:sp>
+      <p:sp>
+        <p:nvSpPr>
+          <p:cNvPr id="15" name="Shape 13"/>
           <p:cNvSpPr/>
           <p:nvPr/>
         </p:nvSpPr>
@@ -6860,14 +7130,14 @@
       </p:sp>
       <p:sp>
         <p:nvSpPr>
-          <p:cNvPr id="15" name="Text 13"/>
+          <p:cNvPr id="16" name="Text 14"/>
           <p:cNvSpPr/>
           <p:nvPr/>
         </p:nvSpPr>
         <p:spPr>
           <a:xfrm>
             <a:off x="8074152" y="3666744"/>
-            <a:ext cx="2825496" cy="201168"/>
+            <a:ext cx="2825496" cy="256032"/>
           </a:xfrm>
           <a:prstGeom prst="rect">
             <a:avLst/>
@@ -6883,7 +7153,7 @@
               <a:buNone/>
             </a:pPr>
             <a:r>
-              <a:rPr lang="en-US" sz="950" b="1" dirty="0">
+              <a:rPr lang="en-US" sz="1300" b="1" dirty="0">
                 <a:solidFill>
                   <a:srgbClr val="0068B7"/>
                 </a:solidFill>
@@ -6893,20 +7163,20 @@
               </a:rPr>
               <a:t>Use this for</a:t>
             </a:r>
-            <a:endParaRPr lang="en-US" sz="950" dirty="0"/>
-          </a:p>
-        </p:txBody>
-      </p:sp>
-      <p:sp>
-        <p:nvSpPr>
-          <p:cNvPr id="16" name="Text 14"/>
-          <p:cNvSpPr/>
-          <p:nvPr/>
-        </p:nvSpPr>
-        <p:spPr>
-          <a:xfrm>
-            <a:off x="8074152" y="3959352"/>
-            <a:ext cx="2825496" cy="1170432"/>
+            <a:endParaRPr lang="en-US" sz="1300" dirty="0"/>
+          </a:p>
+        </p:txBody>
+      </p:sp>
+      <p:sp>
+        <p:nvSpPr>
+          <p:cNvPr id="17" name="Text 15"/>
+          <p:cNvSpPr/>
+          <p:nvPr/>
+        </p:nvSpPr>
+        <p:spPr>
+          <a:xfrm>
+            <a:off x="8074152" y="4023360"/>
+            <a:ext cx="2825496" cy="1097280"/>
           </a:xfrm>
           <a:prstGeom prst="rect">
             <a:avLst/>
@@ -6924,7 +7194,7 @@
               <a:buNone/>
             </a:pPr>
             <a:r>
-              <a:rPr lang="en-US" sz="1250" dirty="0">
+              <a:rPr lang="en-US" sz="1550" dirty="0">
                 <a:solidFill>
                   <a:srgbClr val="17364A"/>
                 </a:solidFill>
@@ -6934,7 +7204,7 @@
               </a:rPr>
               <a:t>Connect the concept to public health decisions, safeguards, documentation, or implementation work.</a:t>
             </a:r>
-            <a:endParaRPr lang="en-US" sz="1250" dirty="0"/>
+            <a:endParaRPr lang="en-US" sz="1550" dirty="0"/>
           </a:p>
         </p:txBody>
       </p:sp>
@@ -7131,7 +7401,7 @@
                 <a:ea typeface="Aptos" pitchFamily="34" charset="-122"/>
                 <a:cs typeface="Aptos" pitchFamily="34" charset="-120"/>
               </a:rPr>
-              <a:t>© Paula Soper</a:t>
+              <a:t>Â© Paula Soper</a:t>
             </a:r>
             <a:endParaRPr lang="en-US" sz="800" dirty="0"/>
           </a:p>
@@ -7139,7 +7409,46 @@
       </p:sp>
       <p:sp>
         <p:nvSpPr>
-          <p:cNvPr id="7" name="Shape 5"/>
+          <p:cNvPr id="7" name="Text 5"/>
+          <p:cNvSpPr/>
+          <p:nvPr/>
+        </p:nvSpPr>
+        <p:spPr>
+          <a:xfrm>
+            <a:off x="11137392" y="6510528"/>
+            <a:ext cx="411480" cy="201168"/>
+          </a:xfrm>
+          <a:prstGeom prst="rect">
+            <a:avLst/>
+          </a:prstGeom>
+          <a:noFill/>
+          <a:ln/>
+        </p:spPr>
+        <p:txBody>
+          <a:bodyPr wrap="square" lIns="0" tIns="0" rIns="0" bIns="0" rtlCol="0" anchor="ctr"/>
+          <a:lstStyle/>
+          <a:p>
+            <a:pPr algn="r" indent="0" marL="0">
+              <a:buNone/>
+            </a:pPr>
+            <a:r>
+              <a:rPr lang="en-US" sz="900" dirty="0">
+                <a:solidFill>
+                  <a:srgbClr val="5F7181"/>
+                </a:solidFill>
+                <a:latin typeface="Aptos" pitchFamily="34" charset="0"/>
+                <a:ea typeface="Aptos" pitchFamily="34" charset="-122"/>
+                <a:cs typeface="Aptos" pitchFamily="34" charset="-120"/>
+              </a:rPr>
+              <a:t>17</a:t>
+            </a:r>
+            <a:endParaRPr lang="en-US" sz="900" dirty="0"/>
+          </a:p>
+        </p:txBody>
+      </p:sp>
+      <p:sp>
+        <p:nvSpPr>
+          <p:cNvPr id="8" name="Shape 6"/>
           <p:cNvSpPr/>
           <p:nvPr/>
         </p:nvSpPr>
@@ -7164,7 +7473,7 @@
       </p:sp>
       <p:sp>
         <p:nvSpPr>
-          <p:cNvPr id="8" name="Text 6"/>
+          <p:cNvPr id="9" name="Text 7"/>
           <p:cNvSpPr/>
           <p:nvPr/>
         </p:nvSpPr>
@@ -7203,14 +7512,14 @@
       </p:sp>
       <p:sp>
         <p:nvSpPr>
-          <p:cNvPr id="9" name="Text 7"/>
+          <p:cNvPr id="10" name="Text 8"/>
           <p:cNvSpPr/>
           <p:nvPr/>
         </p:nvSpPr>
         <p:spPr>
           <a:xfrm>
             <a:off x="640080" y="621792"/>
-            <a:ext cx="10881360" cy="566928"/>
+            <a:ext cx="10881360" cy="713232"/>
           </a:xfrm>
           <a:prstGeom prst="rect">
             <a:avLst/>
@@ -7228,7 +7537,7 @@
               <a:buNone/>
             </a:pPr>
             <a:r>
-              <a:rPr lang="en-US" sz="2700" b="1" dirty="0">
+              <a:rPr lang="en-US" sz="3400" b="1" dirty="0">
                 <a:solidFill>
                   <a:srgbClr val="003A63"/>
                 </a:solidFill>
@@ -7238,20 +7547,20 @@
               </a:rPr>
               <a:t>Expected Artifact or Evidence</a:t>
             </a:r>
-            <a:endParaRPr lang="en-US" sz="2700" dirty="0"/>
-          </a:p>
-        </p:txBody>
-      </p:sp>
-      <p:sp>
-        <p:nvSpPr>
-          <p:cNvPr id="10" name="Text 8"/>
-          <p:cNvSpPr/>
-          <p:nvPr/>
-        </p:nvSpPr>
-        <p:spPr>
-          <a:xfrm>
-            <a:off x="868680" y="1417320"/>
-            <a:ext cx="6675120" cy="4434840"/>
+            <a:endParaRPr lang="en-US" sz="3400" dirty="0"/>
+          </a:p>
+        </p:txBody>
+      </p:sp>
+      <p:sp>
+        <p:nvSpPr>
+          <p:cNvPr id="11" name="Text 9"/>
+          <p:cNvSpPr/>
+          <p:nvPr/>
+        </p:nvSpPr>
+        <p:spPr>
+          <a:xfrm>
+            <a:off x="868680" y="1508760"/>
+            <a:ext cx="6537960" cy="4160520"/>
           </a:xfrm>
           <a:prstGeom prst="rect">
             <a:avLst/>
@@ -7266,7 +7575,7 @@
           <a:lstStyle/>
           <a:p>
             <a:r>
-              <a:rPr lang="en-US" sz="1700" dirty="0">
+              <a:rPr lang="en-US" sz="2100" dirty="0">
                 <a:solidFill>
                   <a:srgbClr val="17364A"/>
                 </a:solidFill>
@@ -7276,13 +7585,13 @@
               </a:rPr>
               <a:t>Decision-rights matrix; RACI table; risk acceptance thresholds; escalation authority list.</a:t>
             </a:r>
-            <a:endParaRPr lang="en-US" sz="1700" dirty="0"/>
-          </a:p>
-        </p:txBody>
-      </p:sp>
-      <p:sp>
-        <p:nvSpPr>
-          <p:cNvPr id="11" name="Shape 9"/>
+            <a:endParaRPr lang="en-US" sz="2100" dirty="0"/>
+          </a:p>
+        </p:txBody>
+      </p:sp>
+      <p:sp>
+        <p:nvSpPr>
+          <p:cNvPr id="12" name="Shape 10"/>
           <p:cNvSpPr/>
           <p:nvPr/>
         </p:nvSpPr>
@@ -7309,14 +7618,14 @@
       </p:sp>
       <p:sp>
         <p:nvSpPr>
-          <p:cNvPr id="12" name="Text 10"/>
+          <p:cNvPr id="13" name="Text 11"/>
           <p:cNvSpPr/>
           <p:nvPr/>
         </p:nvSpPr>
         <p:spPr>
           <a:xfrm>
             <a:off x="8074152" y="1563624"/>
-            <a:ext cx="2825496" cy="201168"/>
+            <a:ext cx="2825496" cy="256032"/>
           </a:xfrm>
           <a:prstGeom prst="rect">
             <a:avLst/>
@@ -7332,7 +7641,7 @@
               <a:buNone/>
             </a:pPr>
             <a:r>
-              <a:rPr lang="en-US" sz="950" b="1" dirty="0">
+              <a:rPr lang="en-US" sz="1300" b="1" dirty="0">
                 <a:solidFill>
                   <a:srgbClr val="0068B7"/>
                 </a:solidFill>
@@ -7342,20 +7651,20 @@
               </a:rPr>
               <a:t>Key idea</a:t>
             </a:r>
-            <a:endParaRPr lang="en-US" sz="950" dirty="0"/>
-          </a:p>
-        </p:txBody>
-      </p:sp>
-      <p:sp>
-        <p:nvSpPr>
-          <p:cNvPr id="13" name="Text 11"/>
-          <p:cNvSpPr/>
-          <p:nvPr/>
-        </p:nvSpPr>
-        <p:spPr>
-          <a:xfrm>
-            <a:off x="8074152" y="1856232"/>
-            <a:ext cx="2825496" cy="1261872"/>
+            <a:endParaRPr lang="en-US" sz="1300" dirty="0"/>
+          </a:p>
+        </p:txBody>
+      </p:sp>
+      <p:sp>
+        <p:nvSpPr>
+          <p:cNvPr id="14" name="Text 12"/>
+          <p:cNvSpPr/>
+          <p:nvPr/>
+        </p:nvSpPr>
+        <p:spPr>
+          <a:xfrm>
+            <a:off x="8074152" y="1920240"/>
+            <a:ext cx="2825496" cy="1188720"/>
           </a:xfrm>
           <a:prstGeom prst="rect">
             <a:avLst/>
@@ -7373,7 +7682,7 @@
               <a:buNone/>
             </a:pPr>
             <a:r>
-              <a:rPr lang="en-US" sz="1250" dirty="0">
+              <a:rPr lang="en-US" sz="1550" dirty="0">
                 <a:solidFill>
                   <a:srgbClr val="17364A"/>
                 </a:solidFill>
@@ -7383,13 +7692,13 @@
               </a:rPr>
               <a:t>Decision-rights matrix; RACI table; risk acceptance thresholds; escalation authority list.</a:t>
             </a:r>
-            <a:endParaRPr lang="en-US" sz="1250" dirty="0"/>
-          </a:p>
-        </p:txBody>
-      </p:sp>
-      <p:sp>
-        <p:nvSpPr>
-          <p:cNvPr id="14" name="Shape 12"/>
+            <a:endParaRPr lang="en-US" sz="1550" dirty="0"/>
+          </a:p>
+        </p:txBody>
+      </p:sp>
+      <p:sp>
+        <p:nvSpPr>
+          <p:cNvPr id="15" name="Shape 13"/>
           <p:cNvSpPr/>
           <p:nvPr/>
         </p:nvSpPr>
@@ -7416,14 +7725,14 @@
       </p:sp>
       <p:sp>
         <p:nvSpPr>
-          <p:cNvPr id="15" name="Text 13"/>
+          <p:cNvPr id="16" name="Text 14"/>
           <p:cNvSpPr/>
           <p:nvPr/>
         </p:nvSpPr>
         <p:spPr>
           <a:xfrm>
             <a:off x="8074152" y="3666744"/>
-            <a:ext cx="2825496" cy="201168"/>
+            <a:ext cx="2825496" cy="256032"/>
           </a:xfrm>
           <a:prstGeom prst="rect">
             <a:avLst/>
@@ -7439,7 +7748,7 @@
               <a:buNone/>
             </a:pPr>
             <a:r>
-              <a:rPr lang="en-US" sz="950" b="1" dirty="0">
+              <a:rPr lang="en-US" sz="1300" b="1" dirty="0">
                 <a:solidFill>
                   <a:srgbClr val="0068B7"/>
                 </a:solidFill>
@@ -7449,20 +7758,20 @@
               </a:rPr>
               <a:t>Use this for</a:t>
             </a:r>
-            <a:endParaRPr lang="en-US" sz="950" dirty="0"/>
-          </a:p>
-        </p:txBody>
-      </p:sp>
-      <p:sp>
-        <p:nvSpPr>
-          <p:cNvPr id="16" name="Text 14"/>
-          <p:cNvSpPr/>
-          <p:nvPr/>
-        </p:nvSpPr>
-        <p:spPr>
-          <a:xfrm>
-            <a:off x="8074152" y="3959352"/>
-            <a:ext cx="2825496" cy="1170432"/>
+            <a:endParaRPr lang="en-US" sz="1300" dirty="0"/>
+          </a:p>
+        </p:txBody>
+      </p:sp>
+      <p:sp>
+        <p:nvSpPr>
+          <p:cNvPr id="17" name="Text 15"/>
+          <p:cNvSpPr/>
+          <p:nvPr/>
+        </p:nvSpPr>
+        <p:spPr>
+          <a:xfrm>
+            <a:off x="8074152" y="4023360"/>
+            <a:ext cx="2825496" cy="1097280"/>
           </a:xfrm>
           <a:prstGeom prst="rect">
             <a:avLst/>
@@ -7480,7 +7789,7 @@
               <a:buNone/>
             </a:pPr>
             <a:r>
-              <a:rPr lang="en-US" sz="1250" dirty="0">
+              <a:rPr lang="en-US" sz="1550" dirty="0">
                 <a:solidFill>
                   <a:srgbClr val="17364A"/>
                 </a:solidFill>
@@ -7490,7 +7799,7 @@
               </a:rPr>
               <a:t>Connect the concept to public health decisions, safeguards, documentation, or implementation work.</a:t>
             </a:r>
-            <a:endParaRPr lang="en-US" sz="1250" dirty="0"/>
+            <a:endParaRPr lang="en-US" sz="1550" dirty="0"/>
           </a:p>
         </p:txBody>
       </p:sp>
@@ -7687,7 +7996,7 @@
                 <a:ea typeface="Aptos" pitchFamily="34" charset="-122"/>
                 <a:cs typeface="Aptos" pitchFamily="34" charset="-120"/>
               </a:rPr>
-              <a:t>© Paula Soper</a:t>
+              <a:t>Â© Paula Soper</a:t>
             </a:r>
             <a:endParaRPr lang="en-US" sz="800" dirty="0"/>
           </a:p>
@@ -7695,7 +8004,46 @@
       </p:sp>
       <p:sp>
         <p:nvSpPr>
-          <p:cNvPr id="7" name="Shape 5"/>
+          <p:cNvPr id="7" name="Text 5"/>
+          <p:cNvSpPr/>
+          <p:nvPr/>
+        </p:nvSpPr>
+        <p:spPr>
+          <a:xfrm>
+            <a:off x="11137392" y="6510528"/>
+            <a:ext cx="411480" cy="201168"/>
+          </a:xfrm>
+          <a:prstGeom prst="rect">
+            <a:avLst/>
+          </a:prstGeom>
+          <a:noFill/>
+          <a:ln/>
+        </p:spPr>
+        <p:txBody>
+          <a:bodyPr wrap="square" lIns="0" tIns="0" rIns="0" bIns="0" rtlCol="0" anchor="ctr"/>
+          <a:lstStyle/>
+          <a:p>
+            <a:pPr algn="r" indent="0" marL="0">
+              <a:buNone/>
+            </a:pPr>
+            <a:r>
+              <a:rPr lang="en-US" sz="900" dirty="0">
+                <a:solidFill>
+                  <a:srgbClr val="5F7181"/>
+                </a:solidFill>
+                <a:latin typeface="Aptos" pitchFamily="34" charset="0"/>
+                <a:ea typeface="Aptos" pitchFamily="34" charset="-122"/>
+                <a:cs typeface="Aptos" pitchFamily="34" charset="-120"/>
+              </a:rPr>
+              <a:t>18</a:t>
+            </a:r>
+            <a:endParaRPr lang="en-US" sz="900" dirty="0"/>
+          </a:p>
+        </p:txBody>
+      </p:sp>
+      <p:sp>
+        <p:nvSpPr>
+          <p:cNvPr id="8" name="Shape 6"/>
           <p:cNvSpPr/>
           <p:nvPr/>
         </p:nvSpPr>
@@ -7720,7 +8068,7 @@
       </p:sp>
       <p:sp>
         <p:nvSpPr>
-          <p:cNvPr id="8" name="Text 6"/>
+          <p:cNvPr id="9" name="Text 7"/>
           <p:cNvSpPr/>
           <p:nvPr/>
         </p:nvSpPr>
@@ -7759,14 +8107,14 @@
       </p:sp>
       <p:sp>
         <p:nvSpPr>
-          <p:cNvPr id="9" name="Text 7"/>
+          <p:cNvPr id="10" name="Text 8"/>
           <p:cNvSpPr/>
           <p:nvPr/>
         </p:nvSpPr>
         <p:spPr>
           <a:xfrm>
             <a:off x="640080" y="621792"/>
-            <a:ext cx="10881360" cy="566928"/>
+            <a:ext cx="10881360" cy="713232"/>
           </a:xfrm>
           <a:prstGeom prst="rect">
             <a:avLst/>
@@ -7784,7 +8132,7 @@
               <a:buNone/>
             </a:pPr>
             <a:r>
-              <a:rPr lang="en-US" sz="2700" b="1" dirty="0">
+              <a:rPr lang="en-US" sz="3400" b="1" dirty="0">
                 <a:solidFill>
                   <a:srgbClr val="003A63"/>
                 </a:solidFill>
@@ -7794,20 +8142,20 @@
               </a:rPr>
               <a:t>Expected Assignment</a:t>
             </a:r>
-            <a:endParaRPr lang="en-US" sz="2700" dirty="0"/>
-          </a:p>
-        </p:txBody>
-      </p:sp>
-      <p:sp>
-        <p:nvSpPr>
-          <p:cNvPr id="10" name="Text 8"/>
-          <p:cNvSpPr/>
-          <p:nvPr/>
-        </p:nvSpPr>
-        <p:spPr>
-          <a:xfrm>
-            <a:off x="868680" y="1417320"/>
-            <a:ext cx="6675120" cy="4434840"/>
+            <a:endParaRPr lang="en-US" sz="3400" dirty="0"/>
+          </a:p>
+        </p:txBody>
+      </p:sp>
+      <p:sp>
+        <p:nvSpPr>
+          <p:cNvPr id="11" name="Text 9"/>
+          <p:cNvSpPr/>
+          <p:nvPr/>
+        </p:nvSpPr>
+        <p:spPr>
+          <a:xfrm>
+            <a:off x="868680" y="1508760"/>
+            <a:ext cx="6537960" cy="4160520"/>
           </a:xfrm>
           <a:prstGeom prst="rect">
             <a:avLst/>
@@ -7822,7 +8170,7 @@
           <a:lstStyle/>
           <a:p>
             <a:r>
-              <a:rPr lang="en-US" sz="1700" dirty="0">
+              <a:rPr lang="en-US" sz="2100" dirty="0">
                 <a:solidFill>
                   <a:srgbClr val="17364A"/>
                 </a:solidFill>
@@ -7832,13 +8180,13 @@
               </a:rPr>
               <a:t>Decision-rights matrix; RACI table; risk acceptance thresholds; escalation authority list.</a:t>
             </a:r>
-            <a:endParaRPr lang="en-US" sz="1700" dirty="0"/>
-          </a:p>
-        </p:txBody>
-      </p:sp>
-      <p:sp>
-        <p:nvSpPr>
-          <p:cNvPr id="11" name="Shape 9"/>
+            <a:endParaRPr lang="en-US" sz="2100" dirty="0"/>
+          </a:p>
+        </p:txBody>
+      </p:sp>
+      <p:sp>
+        <p:nvSpPr>
+          <p:cNvPr id="12" name="Shape 10"/>
           <p:cNvSpPr/>
           <p:nvPr/>
         </p:nvSpPr>
@@ -7865,14 +8213,14 @@
       </p:sp>
       <p:sp>
         <p:nvSpPr>
-          <p:cNvPr id="12" name="Text 10"/>
+          <p:cNvPr id="13" name="Text 11"/>
           <p:cNvSpPr/>
           <p:nvPr/>
         </p:nvSpPr>
         <p:spPr>
           <a:xfrm>
             <a:off x="8074152" y="1563624"/>
-            <a:ext cx="2825496" cy="201168"/>
+            <a:ext cx="2825496" cy="256032"/>
           </a:xfrm>
           <a:prstGeom prst="rect">
             <a:avLst/>
@@ -7888,7 +8236,7 @@
               <a:buNone/>
             </a:pPr>
             <a:r>
-              <a:rPr lang="en-US" sz="950" b="1" dirty="0">
+              <a:rPr lang="en-US" sz="1300" b="1" dirty="0">
                 <a:solidFill>
                   <a:srgbClr val="0068B7"/>
                 </a:solidFill>
@@ -7898,20 +8246,20 @@
               </a:rPr>
               <a:t>Key idea</a:t>
             </a:r>
-            <a:endParaRPr lang="en-US" sz="950" dirty="0"/>
-          </a:p>
-        </p:txBody>
-      </p:sp>
-      <p:sp>
-        <p:nvSpPr>
-          <p:cNvPr id="13" name="Text 11"/>
-          <p:cNvSpPr/>
-          <p:nvPr/>
-        </p:nvSpPr>
-        <p:spPr>
-          <a:xfrm>
-            <a:off x="8074152" y="1856232"/>
-            <a:ext cx="2825496" cy="1261872"/>
+            <a:endParaRPr lang="en-US" sz="1300" dirty="0"/>
+          </a:p>
+        </p:txBody>
+      </p:sp>
+      <p:sp>
+        <p:nvSpPr>
+          <p:cNvPr id="14" name="Text 12"/>
+          <p:cNvSpPr/>
+          <p:nvPr/>
+        </p:nvSpPr>
+        <p:spPr>
+          <a:xfrm>
+            <a:off x="8074152" y="1920240"/>
+            <a:ext cx="2825496" cy="1188720"/>
           </a:xfrm>
           <a:prstGeom prst="rect">
             <a:avLst/>
@@ -7929,7 +8277,7 @@
               <a:buNone/>
             </a:pPr>
             <a:r>
-              <a:rPr lang="en-US" sz="1250" dirty="0">
+              <a:rPr lang="en-US" sz="1550" dirty="0">
                 <a:solidFill>
                   <a:srgbClr val="17364A"/>
                 </a:solidFill>
@@ -7939,13 +8287,13 @@
               </a:rPr>
               <a:t>Decision-rights matrix; RACI table; risk acceptance thresholds; escalation authority list.</a:t>
             </a:r>
-            <a:endParaRPr lang="en-US" sz="1250" dirty="0"/>
-          </a:p>
-        </p:txBody>
-      </p:sp>
-      <p:sp>
-        <p:nvSpPr>
-          <p:cNvPr id="14" name="Shape 12"/>
+            <a:endParaRPr lang="en-US" sz="1550" dirty="0"/>
+          </a:p>
+        </p:txBody>
+      </p:sp>
+      <p:sp>
+        <p:nvSpPr>
+          <p:cNvPr id="15" name="Shape 13"/>
           <p:cNvSpPr/>
           <p:nvPr/>
         </p:nvSpPr>
@@ -7972,14 +8320,14 @@
       </p:sp>
       <p:sp>
         <p:nvSpPr>
-          <p:cNvPr id="15" name="Text 13"/>
+          <p:cNvPr id="16" name="Text 14"/>
           <p:cNvSpPr/>
           <p:nvPr/>
         </p:nvSpPr>
         <p:spPr>
           <a:xfrm>
             <a:off x="8074152" y="3666744"/>
-            <a:ext cx="2825496" cy="201168"/>
+            <a:ext cx="2825496" cy="256032"/>
           </a:xfrm>
           <a:prstGeom prst="rect">
             <a:avLst/>
@@ -7995,7 +8343,7 @@
               <a:buNone/>
             </a:pPr>
             <a:r>
-              <a:rPr lang="en-US" sz="950" b="1" dirty="0">
+              <a:rPr lang="en-US" sz="1300" b="1" dirty="0">
                 <a:solidFill>
                   <a:srgbClr val="0068B7"/>
                 </a:solidFill>
@@ -8005,20 +8353,20 @@
               </a:rPr>
               <a:t>Use this for</a:t>
             </a:r>
-            <a:endParaRPr lang="en-US" sz="950" dirty="0"/>
-          </a:p>
-        </p:txBody>
-      </p:sp>
-      <p:sp>
-        <p:nvSpPr>
-          <p:cNvPr id="16" name="Text 14"/>
-          <p:cNvSpPr/>
-          <p:nvPr/>
-        </p:nvSpPr>
-        <p:spPr>
-          <a:xfrm>
-            <a:off x="8074152" y="3959352"/>
-            <a:ext cx="2825496" cy="1170432"/>
+            <a:endParaRPr lang="en-US" sz="1300" dirty="0"/>
+          </a:p>
+        </p:txBody>
+      </p:sp>
+      <p:sp>
+        <p:nvSpPr>
+          <p:cNvPr id="17" name="Text 15"/>
+          <p:cNvSpPr/>
+          <p:nvPr/>
+        </p:nvSpPr>
+        <p:spPr>
+          <a:xfrm>
+            <a:off x="8074152" y="4023360"/>
+            <a:ext cx="2825496" cy="1097280"/>
           </a:xfrm>
           <a:prstGeom prst="rect">
             <a:avLst/>
@@ -8036,7 +8384,7 @@
               <a:buNone/>
             </a:pPr>
             <a:r>
-              <a:rPr lang="en-US" sz="1250" dirty="0">
+              <a:rPr lang="en-US" sz="1550" dirty="0">
                 <a:solidFill>
                   <a:srgbClr val="17364A"/>
                 </a:solidFill>
@@ -8046,7 +8394,7 @@
               </a:rPr>
               <a:t>Connect the concept to public health decisions, safeguards, documentation, or implementation work.</a:t>
             </a:r>
-            <a:endParaRPr lang="en-US" sz="1250" dirty="0"/>
+            <a:endParaRPr lang="en-US" sz="1550" dirty="0"/>
           </a:p>
         </p:txBody>
       </p:sp>
@@ -8243,7 +8591,7 @@
                 <a:ea typeface="Aptos" pitchFamily="34" charset="-122"/>
                 <a:cs typeface="Aptos" pitchFamily="34" charset="-120"/>
               </a:rPr>
-              <a:t>© Paula Soper</a:t>
+              <a:t>Â© Paula Soper</a:t>
             </a:r>
             <a:endParaRPr lang="en-US" sz="800" dirty="0"/>
           </a:p>
@@ -8251,7 +8599,46 @@
       </p:sp>
       <p:sp>
         <p:nvSpPr>
-          <p:cNvPr id="7" name="Shape 5"/>
+          <p:cNvPr id="7" name="Text 5"/>
+          <p:cNvSpPr/>
+          <p:nvPr/>
+        </p:nvSpPr>
+        <p:spPr>
+          <a:xfrm>
+            <a:off x="11137392" y="6510528"/>
+            <a:ext cx="411480" cy="201168"/>
+          </a:xfrm>
+          <a:prstGeom prst="rect">
+            <a:avLst/>
+          </a:prstGeom>
+          <a:noFill/>
+          <a:ln/>
+        </p:spPr>
+        <p:txBody>
+          <a:bodyPr wrap="square" lIns="0" tIns="0" rIns="0" bIns="0" rtlCol="0" anchor="ctr"/>
+          <a:lstStyle/>
+          <a:p>
+            <a:pPr algn="r" indent="0" marL="0">
+              <a:buNone/>
+            </a:pPr>
+            <a:r>
+              <a:rPr lang="en-US" sz="900" dirty="0">
+                <a:solidFill>
+                  <a:srgbClr val="5F7181"/>
+                </a:solidFill>
+                <a:latin typeface="Aptos" pitchFamily="34" charset="0"/>
+                <a:ea typeface="Aptos" pitchFamily="34" charset="-122"/>
+                <a:cs typeface="Aptos" pitchFamily="34" charset="-120"/>
+              </a:rPr>
+              <a:t>19</a:t>
+            </a:r>
+            <a:endParaRPr lang="en-US" sz="900" dirty="0"/>
+          </a:p>
+        </p:txBody>
+      </p:sp>
+      <p:sp>
+        <p:nvSpPr>
+          <p:cNvPr id="8" name="Shape 6"/>
           <p:cNvSpPr/>
           <p:nvPr/>
         </p:nvSpPr>
@@ -8276,7 +8663,7 @@
       </p:sp>
       <p:sp>
         <p:nvSpPr>
-          <p:cNvPr id="8" name="Text 6"/>
+          <p:cNvPr id="9" name="Text 7"/>
           <p:cNvSpPr/>
           <p:nvPr/>
         </p:nvSpPr>
@@ -8315,14 +8702,14 @@
       </p:sp>
       <p:sp>
         <p:nvSpPr>
-          <p:cNvPr id="9" name="Text 7"/>
+          <p:cNvPr id="10" name="Text 8"/>
           <p:cNvSpPr/>
           <p:nvPr/>
         </p:nvSpPr>
         <p:spPr>
           <a:xfrm>
             <a:off x="640080" y="621792"/>
-            <a:ext cx="10881360" cy="566928"/>
+            <a:ext cx="10881360" cy="713232"/>
           </a:xfrm>
           <a:prstGeom prst="rect">
             <a:avLst/>
@@ -8340,7 +8727,7 @@
               <a:buNone/>
             </a:pPr>
             <a:r>
-              <a:rPr lang="en-US" sz="2700" b="1" dirty="0">
+              <a:rPr lang="en-US" sz="3400" b="1" dirty="0">
                 <a:solidFill>
                   <a:srgbClr val="003A63"/>
                 </a:solidFill>
@@ -8350,20 +8737,20 @@
               </a:rPr>
               <a:t>Knowledge Check</a:t>
             </a:r>
-            <a:endParaRPr lang="en-US" sz="2700" dirty="0"/>
-          </a:p>
-        </p:txBody>
-      </p:sp>
-      <p:sp>
-        <p:nvSpPr>
-          <p:cNvPr id="10" name="Text 8"/>
-          <p:cNvSpPr/>
-          <p:nvPr/>
-        </p:nvSpPr>
-        <p:spPr>
-          <a:xfrm>
-            <a:off x="868680" y="1417320"/>
-            <a:ext cx="6675120" cy="4434840"/>
+            <a:endParaRPr lang="en-US" sz="3400" dirty="0"/>
+          </a:p>
+        </p:txBody>
+      </p:sp>
+      <p:sp>
+        <p:nvSpPr>
+          <p:cNvPr id="11" name="Text 9"/>
+          <p:cNvSpPr/>
+          <p:nvPr/>
+        </p:nvSpPr>
+        <p:spPr>
+          <a:xfrm>
+            <a:off x="868680" y="1508760"/>
+            <a:ext cx="6537960" cy="4160520"/>
           </a:xfrm>
           <a:prstGeom prst="rect">
             <a:avLst/>
@@ -8378,7 +8765,7 @@
           <a:lstStyle/>
           <a:p>
             <a:r>
-              <a:rPr lang="en-US" sz="1700" dirty="0">
+              <a:rPr lang="en-US" sz="2100" dirty="0">
                 <a:solidFill>
                   <a:srgbClr val="17364A"/>
                 </a:solidFill>
@@ -8388,11 +8775,11 @@
               </a:rPr>
               <a:t>1. What is the strongest reason this module topic belongs in AI leadership and governance training?</a:t>
             </a:r>
-            <a:endParaRPr lang="en-US" sz="1700" dirty="0"/>
-          </a:p>
-          <a:p>
-            <a:r>
-              <a:rPr lang="en-US" sz="1700" dirty="0">
+            <a:endParaRPr lang="en-US" sz="2100" dirty="0"/>
+          </a:p>
+          <a:p>
+            <a:r>
+              <a:rPr lang="en-US" sz="2100" dirty="0">
                 <a:solidFill>
                   <a:srgbClr val="17364A"/>
                 </a:solidFill>
@@ -8402,11 +8789,11 @@
               </a:rPr>
               <a:t>2. Which practice best supports accountable public health AI governance?</a:t>
             </a:r>
-            <a:endParaRPr lang="en-US" sz="1700" dirty="0"/>
-          </a:p>
-          <a:p>
-            <a:r>
-              <a:rPr lang="en-US" sz="1700" dirty="0">
+            <a:endParaRPr lang="en-US" sz="2100" dirty="0"/>
+          </a:p>
+          <a:p>
+            <a:r>
+              <a:rPr lang="en-US" sz="2100" dirty="0">
                 <a:solidFill>
                   <a:srgbClr val="17364A"/>
                 </a:solidFill>
@@ -8416,27 +8803,13 @@
               </a:rPr>
               <a:t>3. When should an AI use case be escalated for leadership or governance review?</a:t>
             </a:r>
-            <a:endParaRPr lang="en-US" sz="1700" dirty="0"/>
-          </a:p>
-          <a:p>
-            <a:r>
-              <a:rPr lang="en-US" sz="1700" dirty="0">
-                <a:solidFill>
-                  <a:srgbClr val="17364A"/>
-                </a:solidFill>
-                <a:latin typeface="Aptos" pitchFamily="34" charset="0"/>
-                <a:ea typeface="Aptos" pitchFamily="34" charset="-122"/>
-                <a:cs typeface="Aptos" pitchFamily="34" charset="-120"/>
-              </a:rPr>
-              <a:t>4. What is weak evidence of completion for a leadership and governance module?</a:t>
-            </a:r>
-            <a:endParaRPr lang="en-US" sz="1700" dirty="0"/>
-          </a:p>
-        </p:txBody>
-      </p:sp>
-      <p:sp>
-        <p:nvSpPr>
-          <p:cNvPr id="11" name="Shape 9"/>
+            <a:endParaRPr lang="en-US" sz="2100" dirty="0"/>
+          </a:p>
+        </p:txBody>
+      </p:sp>
+      <p:sp>
+        <p:nvSpPr>
+          <p:cNvPr id="12" name="Shape 10"/>
           <p:cNvSpPr/>
           <p:nvPr/>
         </p:nvSpPr>
@@ -8463,14 +8836,14 @@
       </p:sp>
       <p:sp>
         <p:nvSpPr>
-          <p:cNvPr id="12" name="Text 10"/>
+          <p:cNvPr id="13" name="Text 11"/>
           <p:cNvSpPr/>
           <p:nvPr/>
         </p:nvSpPr>
         <p:spPr>
           <a:xfrm>
             <a:off x="8074152" y="1563624"/>
-            <a:ext cx="2825496" cy="201168"/>
+            <a:ext cx="2825496" cy="256032"/>
           </a:xfrm>
           <a:prstGeom prst="rect">
             <a:avLst/>
@@ -8486,7 +8859,7 @@
               <a:buNone/>
             </a:pPr>
             <a:r>
-              <a:rPr lang="en-US" sz="950" b="1" dirty="0">
+              <a:rPr lang="en-US" sz="1300" b="1" dirty="0">
                 <a:solidFill>
                   <a:srgbClr val="0068B7"/>
                 </a:solidFill>
@@ -8496,20 +8869,20 @@
               </a:rPr>
               <a:t>Key idea</a:t>
             </a:r>
-            <a:endParaRPr lang="en-US" sz="950" dirty="0"/>
-          </a:p>
-        </p:txBody>
-      </p:sp>
-      <p:sp>
-        <p:nvSpPr>
-          <p:cNvPr id="13" name="Text 11"/>
-          <p:cNvSpPr/>
-          <p:nvPr/>
-        </p:nvSpPr>
-        <p:spPr>
-          <a:xfrm>
-            <a:off x="8074152" y="1856232"/>
-            <a:ext cx="2825496" cy="1261872"/>
+            <a:endParaRPr lang="en-US" sz="1300" dirty="0"/>
+          </a:p>
+        </p:txBody>
+      </p:sp>
+      <p:sp>
+        <p:nvSpPr>
+          <p:cNvPr id="14" name="Text 12"/>
+          <p:cNvSpPr/>
+          <p:nvPr/>
+        </p:nvSpPr>
+        <p:spPr>
+          <a:xfrm>
+            <a:off x="8074152" y="1920240"/>
+            <a:ext cx="2825496" cy="1188720"/>
           </a:xfrm>
           <a:prstGeom prst="rect">
             <a:avLst/>
@@ -8527,7 +8900,7 @@
               <a:buNone/>
             </a:pPr>
             <a:r>
-              <a:rPr lang="en-US" sz="1250" dirty="0">
+              <a:rPr lang="en-US" sz="1550" dirty="0">
                 <a:solidFill>
                   <a:srgbClr val="17364A"/>
                 </a:solidFill>
@@ -8537,13 +8910,13 @@
               </a:rPr>
               <a:t>1. What is the strongest reason this module topic belongs in AI leadership and governance training?</a:t>
             </a:r>
-            <a:endParaRPr lang="en-US" sz="1250" dirty="0"/>
-          </a:p>
-        </p:txBody>
-      </p:sp>
-      <p:sp>
-        <p:nvSpPr>
-          <p:cNvPr id="14" name="Shape 12"/>
+            <a:endParaRPr lang="en-US" sz="1550" dirty="0"/>
+          </a:p>
+        </p:txBody>
+      </p:sp>
+      <p:sp>
+        <p:nvSpPr>
+          <p:cNvPr id="15" name="Shape 13"/>
           <p:cNvSpPr/>
           <p:nvPr/>
         </p:nvSpPr>
@@ -8570,14 +8943,14 @@
       </p:sp>
       <p:sp>
         <p:nvSpPr>
-          <p:cNvPr id="15" name="Text 13"/>
+          <p:cNvPr id="16" name="Text 14"/>
           <p:cNvSpPr/>
           <p:nvPr/>
         </p:nvSpPr>
         <p:spPr>
           <a:xfrm>
             <a:off x="8074152" y="3666744"/>
-            <a:ext cx="2825496" cy="201168"/>
+            <a:ext cx="2825496" cy="256032"/>
           </a:xfrm>
           <a:prstGeom prst="rect">
             <a:avLst/>
@@ -8593,7 +8966,7 @@
               <a:buNone/>
             </a:pPr>
             <a:r>
-              <a:rPr lang="en-US" sz="950" b="1" dirty="0">
+              <a:rPr lang="en-US" sz="1300" b="1" dirty="0">
                 <a:solidFill>
                   <a:srgbClr val="0068B7"/>
                 </a:solidFill>
@@ -8603,20 +8976,20 @@
               </a:rPr>
               <a:t>Use this for</a:t>
             </a:r>
-            <a:endParaRPr lang="en-US" sz="950" dirty="0"/>
-          </a:p>
-        </p:txBody>
-      </p:sp>
-      <p:sp>
-        <p:nvSpPr>
-          <p:cNvPr id="16" name="Text 14"/>
-          <p:cNvSpPr/>
-          <p:nvPr/>
-        </p:nvSpPr>
-        <p:spPr>
-          <a:xfrm>
-            <a:off x="8074152" y="3959352"/>
-            <a:ext cx="2825496" cy="1170432"/>
+            <a:endParaRPr lang="en-US" sz="1300" dirty="0"/>
+          </a:p>
+        </p:txBody>
+      </p:sp>
+      <p:sp>
+        <p:nvSpPr>
+          <p:cNvPr id="17" name="Text 15"/>
+          <p:cNvSpPr/>
+          <p:nvPr/>
+        </p:nvSpPr>
+        <p:spPr>
+          <a:xfrm>
+            <a:off x="8074152" y="4023360"/>
+            <a:ext cx="2825496" cy="1097280"/>
           </a:xfrm>
           <a:prstGeom prst="rect">
             <a:avLst/>
@@ -8634,7 +9007,7 @@
               <a:buNone/>
             </a:pPr>
             <a:r>
-              <a:rPr lang="en-US" sz="1250" dirty="0">
+              <a:rPr lang="en-US" sz="1550" dirty="0">
                 <a:solidFill>
                   <a:srgbClr val="17364A"/>
                 </a:solidFill>
@@ -8644,7 +9017,7 @@
               </a:rPr>
               <a:t>Connect the concept to public health decisions, safeguards, documentation, or implementation work.</a:t>
             </a:r>
-            <a:endParaRPr lang="en-US" sz="1250" dirty="0"/>
+            <a:endParaRPr lang="en-US" sz="1550" dirty="0"/>
           </a:p>
         </p:txBody>
       </p:sp>
@@ -8841,7 +9214,7 @@
                 <a:ea typeface="Aptos" pitchFamily="34" charset="-122"/>
                 <a:cs typeface="Aptos" pitchFamily="34" charset="-120"/>
               </a:rPr>
-              <a:t>© Paula Soper</a:t>
+              <a:t>Â© Paula Soper</a:t>
             </a:r>
             <a:endParaRPr lang="en-US" sz="800" dirty="0"/>
           </a:p>
@@ -8855,8 +9228,47 @@
         </p:nvSpPr>
         <p:spPr>
           <a:xfrm>
+            <a:off x="11137392" y="6510528"/>
+            <a:ext cx="411480" cy="201168"/>
+          </a:xfrm>
+          <a:prstGeom prst="rect">
+            <a:avLst/>
+          </a:prstGeom>
+          <a:noFill/>
+          <a:ln/>
+        </p:spPr>
+        <p:txBody>
+          <a:bodyPr wrap="square" lIns="0" tIns="0" rIns="0" bIns="0" rtlCol="0" anchor="ctr"/>
+          <a:lstStyle/>
+          <a:p>
+            <a:pPr algn="r" indent="0" marL="0">
+              <a:buNone/>
+            </a:pPr>
+            <a:r>
+              <a:rPr lang="en-US" sz="900" dirty="0">
+                <a:solidFill>
+                  <a:srgbClr val="5F7181"/>
+                </a:solidFill>
+                <a:latin typeface="Aptos" pitchFamily="34" charset="0"/>
+                <a:ea typeface="Aptos" pitchFamily="34" charset="-122"/>
+                <a:cs typeface="Aptos" pitchFamily="34" charset="-120"/>
+              </a:rPr>
+              <a:t>2</a:t>
+            </a:r>
+            <a:endParaRPr lang="en-US" sz="900" dirty="0"/>
+          </a:p>
+        </p:txBody>
+      </p:sp>
+      <p:sp>
+        <p:nvSpPr>
+          <p:cNvPr id="8" name="Text 6"/>
+          <p:cNvSpPr/>
+          <p:nvPr/>
+        </p:nvSpPr>
+        <p:spPr>
+          <a:xfrm>
             <a:off x="640080" y="658368"/>
-            <a:ext cx="10881360" cy="566928"/>
+            <a:ext cx="10881360" cy="713232"/>
           </a:xfrm>
           <a:prstGeom prst="rect">
             <a:avLst/>
@@ -8874,7 +9286,7 @@
               <a:buNone/>
             </a:pPr>
             <a:r>
-              <a:rPr lang="en-US" sz="2700" b="1" dirty="0">
+              <a:rPr lang="en-US" sz="3400" b="1" dirty="0">
                 <a:solidFill>
                   <a:srgbClr val="003A63"/>
                 </a:solidFill>
@@ -8884,20 +9296,20 @@
               </a:rPr>
               <a:t>What this module helps you do</a:t>
             </a:r>
-            <a:endParaRPr lang="en-US" sz="2700" dirty="0"/>
-          </a:p>
-        </p:txBody>
-      </p:sp>
-      <p:sp>
-        <p:nvSpPr>
-          <p:cNvPr id="8" name="Text 6"/>
-          <p:cNvSpPr/>
-          <p:nvPr/>
-        </p:nvSpPr>
-        <p:spPr>
-          <a:xfrm>
-            <a:off x="868680" y="1417320"/>
-            <a:ext cx="6675120" cy="3291840"/>
+            <a:endParaRPr lang="en-US" sz="3400" dirty="0"/>
+          </a:p>
+        </p:txBody>
+      </p:sp>
+      <p:sp>
+        <p:nvSpPr>
+          <p:cNvPr id="9" name="Text 7"/>
+          <p:cNvSpPr/>
+          <p:nvPr/>
+        </p:nvSpPr>
+        <p:spPr>
+          <a:xfrm>
+            <a:off x="868680" y="1508760"/>
+            <a:ext cx="6446520" cy="2926080"/>
           </a:xfrm>
           <a:prstGeom prst="rect">
             <a:avLst/>
@@ -8912,7 +9324,7 @@
           <a:lstStyle/>
           <a:p>
             <a:r>
-              <a:rPr lang="en-US" sz="1700" dirty="0">
+              <a:rPr lang="en-US" sz="2100" dirty="0">
                 <a:solidFill>
                   <a:srgbClr val="17364A"/>
                 </a:solidFill>
@@ -8922,11 +9334,11 @@
               </a:rPr>
               <a:t>AI governance can only work when decision rights are clear.</a:t>
             </a:r>
-            <a:endParaRPr lang="en-US" sz="1700" dirty="0"/>
-          </a:p>
-          <a:p>
-            <a:r>
-              <a:rPr lang="en-US" sz="1700" dirty="0">
+            <a:endParaRPr lang="en-US" sz="2100" dirty="0"/>
+          </a:p>
+          <a:p>
+            <a:r>
+              <a:rPr lang="en-US" sz="2100" dirty="0">
                 <a:solidFill>
                   <a:srgbClr val="17364A"/>
                 </a:solidFill>
@@ -8934,13 +9346,13 @@
                 <a:ea typeface="Aptos" pitchFamily="34" charset="-122"/>
                 <a:cs typeface="Aptos" pitchFamily="34" charset="-120"/>
               </a:rPr>
-              <a:t>Leaders need to know who can approve a pilot, who can accept residual risk, who can authorize use of sensitive data, who can pause a tool, and who.</a:t>
-            </a:r>
-            <a:endParaRPr lang="en-US" sz="1700" dirty="0"/>
-          </a:p>
-          <a:p>
-            <a:r>
-              <a:rPr lang="en-US" sz="1700" dirty="0">
+              <a:t>Leaders need to know who can approve a pilot, who can accept residual risk, who can authorize use of sensitive.</a:t>
+            </a:r>
+            <a:endParaRPr lang="en-US" sz="2100" dirty="0"/>
+          </a:p>
+          <a:p>
+            <a:r>
+              <a:rPr lang="en-US" sz="2100" dirty="0">
                 <a:solidFill>
                   <a:srgbClr val="17364A"/>
                 </a:solidFill>
@@ -8948,29 +9360,15 @@
                 <a:ea typeface="Aptos" pitchFamily="34" charset="-122"/>
                 <a:cs typeface="Aptos" pitchFamily="34" charset="-120"/>
               </a:rPr>
-              <a:t>Ambiguous accountability is especially risky in public health because AI outputs may influence investigations, communications, referrals, resource.</a:t>
-            </a:r>
-            <a:endParaRPr lang="en-US" sz="1700" dirty="0"/>
-          </a:p>
-          <a:p>
-            <a:r>
-              <a:rPr lang="en-US" sz="1700" dirty="0">
-                <a:solidFill>
-                  <a:srgbClr val="17364A"/>
-                </a:solidFill>
-                <a:latin typeface="Aptos" pitchFamily="34" charset="0"/>
-                <a:ea typeface="Aptos" pitchFamily="34" charset="-122"/>
-                <a:cs typeface="Aptos" pitchFamily="34" charset="-120"/>
-              </a:rPr>
-              <a:t>This module focuses on executive decision rights and accountability structures.</a:t>
-            </a:r>
-            <a:endParaRPr lang="en-US" sz="1700" dirty="0"/>
-          </a:p>
-        </p:txBody>
-      </p:sp>
-      <p:sp>
-        <p:nvSpPr>
-          <p:cNvPr id="9" name="Shape 7"/>
+              <a:t>Ambiguous accountability is especially risky in public health because AI outputs may influence investigations,.</a:t>
+            </a:r>
+            <a:endParaRPr lang="en-US" sz="2100" dirty="0"/>
+          </a:p>
+        </p:txBody>
+      </p:sp>
+      <p:sp>
+        <p:nvSpPr>
+          <p:cNvPr id="10" name="Shape 8"/>
           <p:cNvSpPr/>
           <p:nvPr/>
         </p:nvSpPr>
@@ -8997,14 +9395,14 @@
       </p:sp>
       <p:sp>
         <p:nvSpPr>
-          <p:cNvPr id="10" name="Text 8"/>
+          <p:cNvPr id="11" name="Text 9"/>
           <p:cNvSpPr/>
           <p:nvPr/>
         </p:nvSpPr>
         <p:spPr>
           <a:xfrm>
             <a:off x="8074152" y="1563624"/>
-            <a:ext cx="2825496" cy="201168"/>
+            <a:ext cx="2825496" cy="256032"/>
           </a:xfrm>
           <a:prstGeom prst="rect">
             <a:avLst/>
@@ -9020,7 +9418,7 @@
               <a:buNone/>
             </a:pPr>
             <a:r>
-              <a:rPr lang="en-US" sz="950" b="1" dirty="0">
+              <a:rPr lang="en-US" sz="1300" b="1" dirty="0">
                 <a:solidFill>
                   <a:srgbClr val="0068B7"/>
                 </a:solidFill>
@@ -9030,20 +9428,20 @@
               </a:rPr>
               <a:t>Module details</a:t>
             </a:r>
-            <a:endParaRPr lang="en-US" sz="950" dirty="0"/>
-          </a:p>
-        </p:txBody>
-      </p:sp>
-      <p:sp>
-        <p:nvSpPr>
-          <p:cNvPr id="11" name="Text 9"/>
-          <p:cNvSpPr/>
-          <p:nvPr/>
-        </p:nvSpPr>
-        <p:spPr>
-          <a:xfrm>
-            <a:off x="8074152" y="1856232"/>
-            <a:ext cx="2825496" cy="1353312"/>
+            <a:endParaRPr lang="en-US" sz="1300" dirty="0"/>
+          </a:p>
+        </p:txBody>
+      </p:sp>
+      <p:sp>
+        <p:nvSpPr>
+          <p:cNvPr id="12" name="Text 10"/>
+          <p:cNvSpPr/>
+          <p:nvPr/>
+        </p:nvSpPr>
+        <p:spPr>
+          <a:xfrm>
+            <a:off x="8074152" y="1920240"/>
+            <a:ext cx="2825496" cy="1280160"/>
           </a:xfrm>
           <a:prstGeom prst="rect">
             <a:avLst/>
@@ -9061,7 +9459,7 @@
               <a:buNone/>
             </a:pPr>
             <a:r>
-              <a:rPr lang="en-US" sz="1250" dirty="0">
+              <a:rPr lang="en-US" sz="1550" dirty="0">
                 <a:solidFill>
                   <a:srgbClr val="17364A"/>
                 </a:solidFill>
@@ -9071,14 +9469,14 @@
               </a:rPr>
               <a:t>Level: advanced/leadership</a:t>
             </a:r>
-            <a:endParaRPr lang="en-US" sz="1250" dirty="0"/>
+            <a:endParaRPr lang="en-US" sz="1550" dirty="0"/>
           </a:p>
           <a:p>
             <a:pPr indent="0" marL="0">
               <a:buNone/>
             </a:pPr>
             <a:r>
-              <a:rPr lang="en-US" sz="1250" dirty="0">
+              <a:rPr lang="en-US" sz="1550" dirty="0">
                 <a:solidFill>
                   <a:srgbClr val="17364A"/>
                 </a:solidFill>
@@ -9088,14 +9486,14 @@
               </a:rPr>
               <a:t>Primary track: Public Health Executive Leadership Track</a:t>
             </a:r>
-            <a:endParaRPr lang="en-US" sz="1250" dirty="0"/>
+            <a:endParaRPr lang="en-US" sz="1550" dirty="0"/>
           </a:p>
           <a:p>
             <a:pPr indent="0" marL="0">
               <a:buNone/>
             </a:pPr>
             <a:r>
-              <a:rPr lang="en-US" sz="1250" dirty="0">
+              <a:rPr lang="en-US" sz="1550" dirty="0">
                 <a:solidFill>
                   <a:srgbClr val="17364A"/>
                 </a:solidFill>
@@ -9105,32 +9503,32 @@
               </a:rPr>
               <a:t>Appears in tracks: governance-security</a:t>
             </a:r>
-            <a:endParaRPr lang="en-US" sz="1250" dirty="0"/>
-          </a:p>
-        </p:txBody>
-      </p:sp>
-      <p:sp>
-        <p:nvSpPr>
-          <p:cNvPr id="12" name="Shape 10"/>
-          <p:cNvSpPr/>
-          <p:nvPr/>
-        </p:nvSpPr>
-        <p:spPr>
-          <a:xfrm>
-            <a:off x="7909560" y="3611880"/>
-            <a:ext cx="3154680" cy="1783080"/>
+            <a:endParaRPr lang="en-US" sz="1550" dirty="0"/>
+          </a:p>
+        </p:txBody>
+      </p:sp>
+      <p:sp>
+        <p:nvSpPr>
+          <p:cNvPr id="13" name="Shape 11"/>
+          <p:cNvSpPr/>
+          <p:nvPr/>
+        </p:nvSpPr>
+        <p:spPr>
+          <a:xfrm>
+            <a:off x="7635240" y="3730752"/>
+            <a:ext cx="1033272" cy="749808"/>
           </a:xfrm>
           <a:prstGeom prst="roundRect">
             <a:avLst>
-              <a:gd name="adj" fmla="val 6154"/>
+              <a:gd name="adj" fmla="val 14634"/>
             </a:avLst>
           </a:prstGeom>
           <a:solidFill>
-            <a:srgbClr val="EEF8ED"/>
+            <a:srgbClr val="0068B7"/>
           </a:solidFill>
           <a:ln w="12700">
             <a:solidFill>
-              <a:srgbClr val="B9D7E6"/>
+              <a:srgbClr val="0068B7"/>
             </a:solidFill>
             <a:prstDash val="solid"/>
           </a:ln>
@@ -9138,81 +9536,256 @@
       </p:sp>
       <p:sp>
         <p:nvSpPr>
-          <p:cNvPr id="13" name="Text 11"/>
-          <p:cNvSpPr/>
-          <p:nvPr/>
-        </p:nvSpPr>
-        <p:spPr>
-          <a:xfrm>
-            <a:off x="8074152" y="3758184"/>
-            <a:ext cx="2825496" cy="201168"/>
-          </a:xfrm>
-          <a:prstGeom prst="rect">
-            <a:avLst/>
-          </a:prstGeom>
-          <a:noFill/>
-          <a:ln/>
-        </p:spPr>
-        <p:txBody>
-          <a:bodyPr wrap="square" lIns="0" tIns="0" rIns="0" bIns="0" rtlCol="0" anchor="ctr"/>
-          <a:lstStyle/>
-          <a:p>
-            <a:pPr indent="0" marL="0">
-              <a:buNone/>
-            </a:pPr>
-            <a:r>
-              <a:rPr lang="en-US" sz="950" b="1" dirty="0">
-                <a:solidFill>
-                  <a:srgbClr val="0068B7"/>
-                </a:solidFill>
-                <a:latin typeface="Aptos" pitchFamily="34" charset="0"/>
-                <a:ea typeface="Aptos" pitchFamily="34" charset="-122"/>
-                <a:cs typeface="Aptos" pitchFamily="34" charset="-120"/>
-              </a:rPr>
-              <a:t>Learning approach</a:t>
-            </a:r>
-            <a:endParaRPr lang="en-US" sz="950" dirty="0"/>
-          </a:p>
-        </p:txBody>
-      </p:sp>
-      <p:sp>
-        <p:nvSpPr>
           <p:cNvPr id="14" name="Text 12"/>
           <p:cNvSpPr/>
           <p:nvPr/>
         </p:nvSpPr>
         <p:spPr>
           <a:xfrm>
-            <a:off x="8074152" y="4050792"/>
-            <a:ext cx="2825496" cy="1216152"/>
-          </a:xfrm>
-          <a:prstGeom prst="rect">
-            <a:avLst/>
-          </a:prstGeom>
-          <a:noFill/>
-          <a:ln/>
-        </p:spPr>
-        <p:txBody>
-          <a:bodyPr wrap="square" lIns="0" tIns="0" rIns="0" bIns="0" rtlCol="0" anchor="t">
+            <a:off x="7708392" y="3922776"/>
+            <a:ext cx="886968" cy="310896"/>
+          </a:xfrm>
+          <a:prstGeom prst="rect">
+            <a:avLst/>
+          </a:prstGeom>
+          <a:noFill/>
+          <a:ln/>
+        </p:spPr>
+        <p:txBody>
+          <a:bodyPr wrap="square" lIns="0" tIns="0" rIns="0" bIns="0" rtlCol="0" anchor="ctr">
             <a:normAutofit/>
           </a:bodyPr>
           <a:lstStyle/>
           <a:p>
-            <a:pPr indent="0" marL="0">
-              <a:buNone/>
-            </a:pPr>
-            <a:r>
-              <a:rPr lang="en-US" sz="1250" dirty="0">
-                <a:solidFill>
-                  <a:srgbClr val="17364A"/>
-                </a:solidFill>
-                <a:latin typeface="Aptos" pitchFamily="34" charset="0"/>
-                <a:ea typeface="Aptos" pitchFamily="34" charset="-122"/>
-                <a:cs typeface="Aptos" pitchFamily="34" charset="-120"/>
-              </a:rPr>
-              <a:t>Review the core ideas, complete the practical exercise, check your understanding, and use the related plays and tools to apply the lesson.</a:t>
-            </a:r>
-            <a:endParaRPr lang="en-US" sz="1250" dirty="0"/>
+            <a:pPr algn="ctr" indent="0" marL="0">
+              <a:buNone/>
+            </a:pPr>
+            <a:r>
+              <a:rPr lang="en-US" sz="1500" b="1" dirty="0">
+                <a:solidFill>
+                  <a:srgbClr val="FFFFFF"/>
+                </a:solidFill>
+                <a:latin typeface="Aptos" pitchFamily="34" charset="0"/>
+                <a:ea typeface="Aptos" pitchFamily="34" charset="-122"/>
+                <a:cs typeface="Aptos" pitchFamily="34" charset="-120"/>
+              </a:rPr>
+              <a:t>Learn</a:t>
+            </a:r>
+            <a:endParaRPr lang="en-US" sz="1500" dirty="0"/>
+          </a:p>
+        </p:txBody>
+      </p:sp>
+      <p:sp>
+        <p:nvSpPr>
+          <p:cNvPr id="15" name="Text 13"/>
+          <p:cNvSpPr/>
+          <p:nvPr/>
+        </p:nvSpPr>
+        <p:spPr>
+          <a:xfrm>
+            <a:off x="8695944" y="3941064"/>
+            <a:ext cx="201168" cy="256032"/>
+          </a:xfrm>
+          <a:prstGeom prst="rect">
+            <a:avLst/>
+          </a:prstGeom>
+          <a:noFill/>
+          <a:ln/>
+        </p:spPr>
+        <p:txBody>
+          <a:bodyPr wrap="square" lIns="0" tIns="0" rIns="0" bIns="0" rtlCol="0" anchor="ctr"/>
+          <a:lstStyle/>
+          <a:p>
+            <a:pPr algn="ctr" indent="0" marL="0">
+              <a:buNone/>
+            </a:pPr>
+            <a:r>
+              <a:rPr lang="en-US" sz="1800" b="1" dirty="0">
+                <a:solidFill>
+                  <a:srgbClr val="0068B7"/>
+                </a:solidFill>
+                <a:latin typeface="Aptos" pitchFamily="34" charset="0"/>
+                <a:ea typeface="Aptos" pitchFamily="34" charset="-122"/>
+                <a:cs typeface="Aptos" pitchFamily="34" charset="-120"/>
+              </a:rPr>
+              <a:t>â†’</a:t>
+            </a:r>
+            <a:endParaRPr lang="en-US" sz="1800" dirty="0"/>
+          </a:p>
+        </p:txBody>
+      </p:sp>
+      <p:sp>
+        <p:nvSpPr>
+          <p:cNvPr id="16" name="Shape 14"/>
+          <p:cNvSpPr/>
+          <p:nvPr/>
+        </p:nvSpPr>
+        <p:spPr>
+          <a:xfrm>
+            <a:off x="8924544" y="3730752"/>
+            <a:ext cx="1033272" cy="749808"/>
+          </a:xfrm>
+          <a:prstGeom prst="roundRect">
+            <a:avLst>
+              <a:gd name="adj" fmla="val 14634"/>
+            </a:avLst>
+          </a:prstGeom>
+          <a:solidFill>
+            <a:srgbClr val="2F8A28"/>
+          </a:solidFill>
+          <a:ln w="12700">
+            <a:solidFill>
+              <a:srgbClr val="2F8A28"/>
+            </a:solidFill>
+            <a:prstDash val="solid"/>
+          </a:ln>
+        </p:spPr>
+      </p:sp>
+      <p:sp>
+        <p:nvSpPr>
+          <p:cNvPr id="17" name="Text 15"/>
+          <p:cNvSpPr/>
+          <p:nvPr/>
+        </p:nvSpPr>
+        <p:spPr>
+          <a:xfrm>
+            <a:off x="8997696" y="3922776"/>
+            <a:ext cx="886968" cy="310896"/>
+          </a:xfrm>
+          <a:prstGeom prst="rect">
+            <a:avLst/>
+          </a:prstGeom>
+          <a:noFill/>
+          <a:ln/>
+        </p:spPr>
+        <p:txBody>
+          <a:bodyPr wrap="square" lIns="0" tIns="0" rIns="0" bIns="0" rtlCol="0" anchor="ctr">
+            <a:normAutofit/>
+          </a:bodyPr>
+          <a:lstStyle/>
+          <a:p>
+            <a:pPr algn="ctr" indent="0" marL="0">
+              <a:buNone/>
+            </a:pPr>
+            <a:r>
+              <a:rPr lang="en-US" sz="1500" b="1" dirty="0">
+                <a:solidFill>
+                  <a:srgbClr val="FFFFFF"/>
+                </a:solidFill>
+                <a:latin typeface="Aptos" pitchFamily="34" charset="0"/>
+                <a:ea typeface="Aptos" pitchFamily="34" charset="-122"/>
+                <a:cs typeface="Aptos" pitchFamily="34" charset="-120"/>
+              </a:rPr>
+              <a:t>Apply</a:t>
+            </a:r>
+            <a:endParaRPr lang="en-US" sz="1500" dirty="0"/>
+          </a:p>
+        </p:txBody>
+      </p:sp>
+      <p:sp>
+        <p:nvSpPr>
+          <p:cNvPr id="18" name="Text 16"/>
+          <p:cNvSpPr/>
+          <p:nvPr/>
+        </p:nvSpPr>
+        <p:spPr>
+          <a:xfrm>
+            <a:off x="9985248" y="3941064"/>
+            <a:ext cx="201168" cy="256032"/>
+          </a:xfrm>
+          <a:prstGeom prst="rect">
+            <a:avLst/>
+          </a:prstGeom>
+          <a:noFill/>
+          <a:ln/>
+        </p:spPr>
+        <p:txBody>
+          <a:bodyPr wrap="square" lIns="0" tIns="0" rIns="0" bIns="0" rtlCol="0" anchor="ctr"/>
+          <a:lstStyle/>
+          <a:p>
+            <a:pPr algn="ctr" indent="0" marL="0">
+              <a:buNone/>
+            </a:pPr>
+            <a:r>
+              <a:rPr lang="en-US" sz="1800" b="1" dirty="0">
+                <a:solidFill>
+                  <a:srgbClr val="0068B7"/>
+                </a:solidFill>
+                <a:latin typeface="Aptos" pitchFamily="34" charset="0"/>
+                <a:ea typeface="Aptos" pitchFamily="34" charset="-122"/>
+                <a:cs typeface="Aptos" pitchFamily="34" charset="-120"/>
+              </a:rPr>
+              <a:t>â†’</a:t>
+            </a:r>
+            <a:endParaRPr lang="en-US" sz="1800" dirty="0"/>
+          </a:p>
+        </p:txBody>
+      </p:sp>
+      <p:sp>
+        <p:nvSpPr>
+          <p:cNvPr id="19" name="Shape 17"/>
+          <p:cNvSpPr/>
+          <p:nvPr/>
+        </p:nvSpPr>
+        <p:spPr>
+          <a:xfrm>
+            <a:off x="10213848" y="3730752"/>
+            <a:ext cx="1033272" cy="749808"/>
+          </a:xfrm>
+          <a:prstGeom prst="roundRect">
+            <a:avLst>
+              <a:gd name="adj" fmla="val 14634"/>
+            </a:avLst>
+          </a:prstGeom>
+          <a:solidFill>
+            <a:srgbClr val="6A4CA3"/>
+          </a:solidFill>
+          <a:ln w="12700">
+            <a:solidFill>
+              <a:srgbClr val="6A4CA3"/>
+            </a:solidFill>
+            <a:prstDash val="solid"/>
+          </a:ln>
+        </p:spPr>
+      </p:sp>
+      <p:sp>
+        <p:nvSpPr>
+          <p:cNvPr id="20" name="Text 18"/>
+          <p:cNvSpPr/>
+          <p:nvPr/>
+        </p:nvSpPr>
+        <p:spPr>
+          <a:xfrm>
+            <a:off x="10287000" y="3922776"/>
+            <a:ext cx="886968" cy="310896"/>
+          </a:xfrm>
+          <a:prstGeom prst="rect">
+            <a:avLst/>
+          </a:prstGeom>
+          <a:noFill/>
+          <a:ln/>
+        </p:spPr>
+        <p:txBody>
+          <a:bodyPr wrap="square" lIns="0" tIns="0" rIns="0" bIns="0" rtlCol="0" anchor="ctr">
+            <a:normAutofit/>
+          </a:bodyPr>
+          <a:lstStyle/>
+          <a:p>
+            <a:pPr algn="ctr" indent="0" marL="0">
+              <a:buNone/>
+            </a:pPr>
+            <a:r>
+              <a:rPr lang="en-US" sz="1500" b="1" dirty="0">
+                <a:solidFill>
+                  <a:srgbClr val="FFFFFF"/>
+                </a:solidFill>
+                <a:latin typeface="Aptos" pitchFamily="34" charset="0"/>
+                <a:ea typeface="Aptos" pitchFamily="34" charset="-122"/>
+                <a:cs typeface="Aptos" pitchFamily="34" charset="-120"/>
+              </a:rPr>
+              <a:t>Document</a:t>
+            </a:r>
+            <a:endParaRPr lang="en-US" sz="1500" dirty="0"/>
           </a:p>
         </p:txBody>
       </p:sp>
@@ -9409,7 +9982,7 @@
                 <a:ea typeface="Aptos" pitchFamily="34" charset="-122"/>
                 <a:cs typeface="Aptos" pitchFamily="34" charset="-120"/>
               </a:rPr>
-              <a:t>© Paula Soper</a:t>
+              <a:t>Â© Paula Soper</a:t>
             </a:r>
             <a:endParaRPr lang="en-US" sz="800" dirty="0"/>
           </a:p>
@@ -9417,7 +9990,46 @@
       </p:sp>
       <p:sp>
         <p:nvSpPr>
-          <p:cNvPr id="7" name="Shape 5"/>
+          <p:cNvPr id="7" name="Text 5"/>
+          <p:cNvSpPr/>
+          <p:nvPr/>
+        </p:nvSpPr>
+        <p:spPr>
+          <a:xfrm>
+            <a:off x="11137392" y="6510528"/>
+            <a:ext cx="411480" cy="201168"/>
+          </a:xfrm>
+          <a:prstGeom prst="rect">
+            <a:avLst/>
+          </a:prstGeom>
+          <a:noFill/>
+          <a:ln/>
+        </p:spPr>
+        <p:txBody>
+          <a:bodyPr wrap="square" lIns="0" tIns="0" rIns="0" bIns="0" rtlCol="0" anchor="ctr"/>
+          <a:lstStyle/>
+          <a:p>
+            <a:pPr algn="r" indent="0" marL="0">
+              <a:buNone/>
+            </a:pPr>
+            <a:r>
+              <a:rPr lang="en-US" sz="900" dirty="0">
+                <a:solidFill>
+                  <a:srgbClr val="5F7181"/>
+                </a:solidFill>
+                <a:latin typeface="Aptos" pitchFamily="34" charset="0"/>
+                <a:ea typeface="Aptos" pitchFamily="34" charset="-122"/>
+                <a:cs typeface="Aptos" pitchFamily="34" charset="-120"/>
+              </a:rPr>
+              <a:t>20</a:t>
+            </a:r>
+            <a:endParaRPr lang="en-US" sz="900" dirty="0"/>
+          </a:p>
+        </p:txBody>
+      </p:sp>
+      <p:sp>
+        <p:nvSpPr>
+          <p:cNvPr id="8" name="Shape 6"/>
           <p:cNvSpPr/>
           <p:nvPr/>
         </p:nvSpPr>
@@ -9442,7 +10054,7 @@
       </p:sp>
       <p:sp>
         <p:nvSpPr>
-          <p:cNvPr id="8" name="Text 6"/>
+          <p:cNvPr id="9" name="Text 7"/>
           <p:cNvSpPr/>
           <p:nvPr/>
         </p:nvSpPr>
@@ -9481,14 +10093,14 @@
       </p:sp>
       <p:sp>
         <p:nvSpPr>
-          <p:cNvPr id="9" name="Text 7"/>
+          <p:cNvPr id="10" name="Text 8"/>
           <p:cNvSpPr/>
           <p:nvPr/>
         </p:nvSpPr>
         <p:spPr>
           <a:xfrm>
             <a:off x="640080" y="621792"/>
-            <a:ext cx="10881360" cy="566928"/>
+            <a:ext cx="10881360" cy="713232"/>
           </a:xfrm>
           <a:prstGeom prst="rect">
             <a:avLst/>
@@ -9506,7 +10118,7 @@
               <a:buNone/>
             </a:pPr>
             <a:r>
-              <a:rPr lang="en-US" sz="2700" b="1" dirty="0">
+              <a:rPr lang="en-US" sz="3400" b="1" dirty="0">
                 <a:solidFill>
                   <a:srgbClr val="003A63"/>
                 </a:solidFill>
@@ -9516,20 +10128,20 @@
               </a:rPr>
               <a:t>References and Resources</a:t>
             </a:r>
-            <a:endParaRPr lang="en-US" sz="2700" dirty="0"/>
-          </a:p>
-        </p:txBody>
-      </p:sp>
-      <p:sp>
-        <p:nvSpPr>
-          <p:cNvPr id="10" name="Text 8"/>
-          <p:cNvSpPr/>
-          <p:nvPr/>
-        </p:nvSpPr>
-        <p:spPr>
-          <a:xfrm>
-            <a:off x="868680" y="1417320"/>
-            <a:ext cx="6675120" cy="4434840"/>
+            <a:endParaRPr lang="en-US" sz="3400" dirty="0"/>
+          </a:p>
+        </p:txBody>
+      </p:sp>
+      <p:sp>
+        <p:nvSpPr>
+          <p:cNvPr id="11" name="Text 9"/>
+          <p:cNvSpPr/>
+          <p:nvPr/>
+        </p:nvSpPr>
+        <p:spPr>
+          <a:xfrm>
+            <a:off x="868680" y="1508760"/>
+            <a:ext cx="6537960" cy="4160520"/>
           </a:xfrm>
           <a:prstGeom prst="rect">
             <a:avLst/>
@@ -9544,7 +10156,7 @@
           <a:lstStyle/>
           <a:p>
             <a:r>
-              <a:rPr lang="en-US" sz="1700" dirty="0">
+              <a:rPr lang="en-US" sz="2100" dirty="0">
                 <a:solidFill>
                   <a:srgbClr val="17364A"/>
                 </a:solidFill>
@@ -9552,13 +10164,13 @@
                 <a:ea typeface="Aptos" pitchFamily="34" charset="-122"/>
                 <a:cs typeface="Aptos" pitchFamily="34" charset="-120"/>
               </a:rPr>
-              <a:t>NIST Artificial Intelligence Risk Management Framework (AI RMF 1.0): https://www.nist.gov/itl/ai-risk-management-framework</a:t>
-            </a:r>
-            <a:endParaRPr lang="en-US" sz="1700" dirty="0"/>
-          </a:p>
-          <a:p>
-            <a:r>
-              <a:rPr lang="en-US" sz="1700" dirty="0">
+              <a:t>NIST Artificial Intelligence Risk Management Framework (AI RMF 1.0):.</a:t>
+            </a:r>
+            <a:endParaRPr lang="en-US" sz="2100" dirty="0"/>
+          </a:p>
+          <a:p>
+            <a:r>
+              <a:rPr lang="en-US" sz="2100" dirty="0">
                 <a:solidFill>
                   <a:srgbClr val="17364A"/>
                 </a:solidFill>
@@ -9568,11 +10180,11 @@
               </a:rPr>
               <a:t>NIST Generative AI Profile:.</a:t>
             </a:r>
-            <a:endParaRPr lang="en-US" sz="1700" dirty="0"/>
-          </a:p>
-          <a:p>
-            <a:r>
-              <a:rPr lang="en-US" sz="1700" dirty="0">
+            <a:endParaRPr lang="en-US" sz="2100" dirty="0"/>
+          </a:p>
+          <a:p>
+            <a:r>
+              <a:rPr lang="en-US" sz="2100" dirty="0">
                 <a:solidFill>
                   <a:srgbClr val="17364A"/>
                 </a:solidFill>
@@ -9582,27 +10194,13 @@
               </a:rPr>
               <a:t>NIST Privacy Framework</a:t>
             </a:r>
-            <a:endParaRPr lang="en-US" sz="1700" dirty="0"/>
-          </a:p>
-          <a:p>
-            <a:r>
-              <a:rPr lang="en-US" sz="1700" dirty="0">
-                <a:solidFill>
-                  <a:srgbClr val="17364A"/>
-                </a:solidFill>
-                <a:latin typeface="Aptos" pitchFamily="34" charset="0"/>
-                <a:ea typeface="Aptos" pitchFamily="34" charset="-122"/>
-                <a:cs typeface="Aptos" pitchFamily="34" charset="-120"/>
-              </a:rPr>
-              <a:t>CDC Public Health Data Strategy and Data Modernization resources:.</a:t>
-            </a:r>
-            <a:endParaRPr lang="en-US" sz="1700" dirty="0"/>
-          </a:p>
-        </p:txBody>
-      </p:sp>
-      <p:sp>
-        <p:nvSpPr>
-          <p:cNvPr id="11" name="Shape 9"/>
+            <a:endParaRPr lang="en-US" sz="2100" dirty="0"/>
+          </a:p>
+        </p:txBody>
+      </p:sp>
+      <p:sp>
+        <p:nvSpPr>
+          <p:cNvPr id="12" name="Shape 10"/>
           <p:cNvSpPr/>
           <p:nvPr/>
         </p:nvSpPr>
@@ -9629,14 +10227,14 @@
       </p:sp>
       <p:sp>
         <p:nvSpPr>
-          <p:cNvPr id="12" name="Text 10"/>
+          <p:cNvPr id="13" name="Text 11"/>
           <p:cNvSpPr/>
           <p:nvPr/>
         </p:nvSpPr>
         <p:spPr>
           <a:xfrm>
             <a:off x="8074152" y="1563624"/>
-            <a:ext cx="2825496" cy="201168"/>
+            <a:ext cx="2825496" cy="256032"/>
           </a:xfrm>
           <a:prstGeom prst="rect">
             <a:avLst/>
@@ -9652,7 +10250,7 @@
               <a:buNone/>
             </a:pPr>
             <a:r>
-              <a:rPr lang="en-US" sz="950" b="1" dirty="0">
+              <a:rPr lang="en-US" sz="1300" b="1" dirty="0">
                 <a:solidFill>
                   <a:srgbClr val="0068B7"/>
                 </a:solidFill>
@@ -9662,20 +10260,20 @@
               </a:rPr>
               <a:t>Key idea</a:t>
             </a:r>
-            <a:endParaRPr lang="en-US" sz="950" dirty="0"/>
-          </a:p>
-        </p:txBody>
-      </p:sp>
-      <p:sp>
-        <p:nvSpPr>
-          <p:cNvPr id="13" name="Text 11"/>
-          <p:cNvSpPr/>
-          <p:nvPr/>
-        </p:nvSpPr>
-        <p:spPr>
-          <a:xfrm>
-            <a:off x="8074152" y="1856232"/>
-            <a:ext cx="2825496" cy="1261872"/>
+            <a:endParaRPr lang="en-US" sz="1300" dirty="0"/>
+          </a:p>
+        </p:txBody>
+      </p:sp>
+      <p:sp>
+        <p:nvSpPr>
+          <p:cNvPr id="14" name="Text 12"/>
+          <p:cNvSpPr/>
+          <p:nvPr/>
+        </p:nvSpPr>
+        <p:spPr>
+          <a:xfrm>
+            <a:off x="8074152" y="1920240"/>
+            <a:ext cx="2825496" cy="1188720"/>
           </a:xfrm>
           <a:prstGeom prst="rect">
             <a:avLst/>
@@ -9693,7 +10291,7 @@
               <a:buNone/>
             </a:pPr>
             <a:r>
-              <a:rPr lang="en-US" sz="1250" dirty="0">
+              <a:rPr lang="en-US" sz="1550" dirty="0">
                 <a:solidFill>
                   <a:srgbClr val="17364A"/>
                 </a:solidFill>
@@ -9701,15 +10299,15 @@
                 <a:ea typeface="Aptos" pitchFamily="34" charset="-122"/>
                 <a:cs typeface="Aptos" pitchFamily="34" charset="-120"/>
               </a:rPr>
-              <a:t>NIST Artificial Intelligence Risk Management Framework (AI RMF 1.0): https://www.nist.gov/itl/ai-risk-management-framework</a:t>
-            </a:r>
-            <a:endParaRPr lang="en-US" sz="1250" dirty="0"/>
-          </a:p>
-        </p:txBody>
-      </p:sp>
-      <p:sp>
-        <p:nvSpPr>
-          <p:cNvPr id="14" name="Shape 12"/>
+              <a:t>NIST Artificial Intelligence Risk Management Framework (AI RMF 1.0):.</a:t>
+            </a:r>
+            <a:endParaRPr lang="en-US" sz="1550" dirty="0"/>
+          </a:p>
+        </p:txBody>
+      </p:sp>
+      <p:sp>
+        <p:nvSpPr>
+          <p:cNvPr id="15" name="Shape 13"/>
           <p:cNvSpPr/>
           <p:nvPr/>
         </p:nvSpPr>
@@ -9736,14 +10334,14 @@
       </p:sp>
       <p:sp>
         <p:nvSpPr>
-          <p:cNvPr id="15" name="Text 13"/>
+          <p:cNvPr id="16" name="Text 14"/>
           <p:cNvSpPr/>
           <p:nvPr/>
         </p:nvSpPr>
         <p:spPr>
           <a:xfrm>
             <a:off x="8074152" y="3666744"/>
-            <a:ext cx="2825496" cy="201168"/>
+            <a:ext cx="2825496" cy="256032"/>
           </a:xfrm>
           <a:prstGeom prst="rect">
             <a:avLst/>
@@ -9759,7 +10357,7 @@
               <a:buNone/>
             </a:pPr>
             <a:r>
-              <a:rPr lang="en-US" sz="950" b="1" dirty="0">
+              <a:rPr lang="en-US" sz="1300" b="1" dirty="0">
                 <a:solidFill>
                   <a:srgbClr val="0068B7"/>
                 </a:solidFill>
@@ -9769,20 +10367,20 @@
               </a:rPr>
               <a:t>Use this for</a:t>
             </a:r>
-            <a:endParaRPr lang="en-US" sz="950" dirty="0"/>
-          </a:p>
-        </p:txBody>
-      </p:sp>
-      <p:sp>
-        <p:nvSpPr>
-          <p:cNvPr id="16" name="Text 14"/>
-          <p:cNvSpPr/>
-          <p:nvPr/>
-        </p:nvSpPr>
-        <p:spPr>
-          <a:xfrm>
-            <a:off x="8074152" y="3959352"/>
-            <a:ext cx="2825496" cy="1170432"/>
+            <a:endParaRPr lang="en-US" sz="1300" dirty="0"/>
+          </a:p>
+        </p:txBody>
+      </p:sp>
+      <p:sp>
+        <p:nvSpPr>
+          <p:cNvPr id="17" name="Text 15"/>
+          <p:cNvSpPr/>
+          <p:nvPr/>
+        </p:nvSpPr>
+        <p:spPr>
+          <a:xfrm>
+            <a:off x="8074152" y="4023360"/>
+            <a:ext cx="2825496" cy="1097280"/>
           </a:xfrm>
           <a:prstGeom prst="rect">
             <a:avLst/>
@@ -9800,7 +10398,7 @@
               <a:buNone/>
             </a:pPr>
             <a:r>
-              <a:rPr lang="en-US" sz="1250" dirty="0">
+              <a:rPr lang="en-US" sz="1550" dirty="0">
                 <a:solidFill>
                   <a:srgbClr val="17364A"/>
                 </a:solidFill>
@@ -9810,7 +10408,7 @@
               </a:rPr>
               <a:t>Connect the concept to public health decisions, safeguards, documentation, or implementation work.</a:t>
             </a:r>
-            <a:endParaRPr lang="en-US" sz="1250" dirty="0"/>
+            <a:endParaRPr lang="en-US" sz="1550" dirty="0"/>
           </a:p>
         </p:txBody>
       </p:sp>
@@ -10007,7 +10605,7 @@
                 <a:ea typeface="Aptos" pitchFamily="34" charset="-122"/>
                 <a:cs typeface="Aptos" pitchFamily="34" charset="-120"/>
               </a:rPr>
-              <a:t>© Paula Soper</a:t>
+              <a:t>Â© Paula Soper</a:t>
             </a:r>
             <a:endParaRPr lang="en-US" sz="800" dirty="0"/>
           </a:p>
@@ -10021,8 +10619,47 @@
         </p:nvSpPr>
         <p:spPr>
           <a:xfrm>
+            <a:off x="11137392" y="6510528"/>
+            <a:ext cx="411480" cy="201168"/>
+          </a:xfrm>
+          <a:prstGeom prst="rect">
+            <a:avLst/>
+          </a:prstGeom>
+          <a:noFill/>
+          <a:ln/>
+        </p:spPr>
+        <p:txBody>
+          <a:bodyPr wrap="square" lIns="0" tIns="0" rIns="0" bIns="0" rtlCol="0" anchor="ctr"/>
+          <a:lstStyle/>
+          <a:p>
+            <a:pPr algn="r" indent="0" marL="0">
+              <a:buNone/>
+            </a:pPr>
+            <a:r>
+              <a:rPr lang="en-US" sz="900" dirty="0">
+                <a:solidFill>
+                  <a:srgbClr val="5F7181"/>
+                </a:solidFill>
+                <a:latin typeface="Aptos" pitchFamily="34" charset="0"/>
+                <a:ea typeface="Aptos" pitchFamily="34" charset="-122"/>
+                <a:cs typeface="Aptos" pitchFamily="34" charset="-120"/>
+              </a:rPr>
+              <a:t>21</a:t>
+            </a:r>
+            <a:endParaRPr lang="en-US" sz="900" dirty="0"/>
+          </a:p>
+        </p:txBody>
+      </p:sp>
+      <p:sp>
+        <p:nvSpPr>
+          <p:cNvPr id="8" name="Text 6"/>
+          <p:cNvSpPr/>
+          <p:nvPr/>
+        </p:nvSpPr>
+        <p:spPr>
+          <a:xfrm>
             <a:off x="640080" y="658368"/>
-            <a:ext cx="10881360" cy="566928"/>
+            <a:ext cx="10881360" cy="713232"/>
           </a:xfrm>
           <a:prstGeom prst="rect">
             <a:avLst/>
@@ -10040,7 +10677,7 @@
               <a:buNone/>
             </a:pPr>
             <a:r>
-              <a:rPr lang="en-US" sz="2700" b="1" dirty="0">
+              <a:rPr lang="en-US" sz="3400" b="1" dirty="0">
                 <a:solidFill>
                   <a:srgbClr val="003A63"/>
                 </a:solidFill>
@@ -10050,20 +10687,20 @@
               </a:rPr>
               <a:t>References and Resources Continued</a:t>
             </a:r>
-            <a:endParaRPr lang="en-US" sz="2700" dirty="0"/>
-          </a:p>
-        </p:txBody>
-      </p:sp>
-      <p:sp>
-        <p:nvSpPr>
-          <p:cNvPr id="8" name="Text 6"/>
-          <p:cNvSpPr/>
-          <p:nvPr/>
-        </p:nvSpPr>
-        <p:spPr>
-          <a:xfrm>
-            <a:off x="868680" y="1417320"/>
-            <a:ext cx="6675120" cy="4434840"/>
+            <a:endParaRPr lang="en-US" sz="3400" dirty="0"/>
+          </a:p>
+        </p:txBody>
+      </p:sp>
+      <p:sp>
+        <p:nvSpPr>
+          <p:cNvPr id="9" name="Text 7"/>
+          <p:cNvSpPr/>
+          <p:nvPr/>
+        </p:nvSpPr>
+        <p:spPr>
+          <a:xfrm>
+            <a:off x="868680" y="1508760"/>
+            <a:ext cx="6537960" cy="4160520"/>
           </a:xfrm>
           <a:prstGeom prst="rect">
             <a:avLst/>
@@ -10078,7 +10715,7 @@
           <a:lstStyle/>
           <a:p>
             <a:r>
-              <a:rPr lang="en-US" sz="1700" dirty="0">
+              <a:rPr lang="en-US" sz="2100" dirty="0">
                 <a:solidFill>
                   <a:srgbClr val="17364A"/>
                 </a:solidFill>
@@ -10086,13 +10723,13 @@
                 <a:ea typeface="Aptos" pitchFamily="34" charset="-122"/>
                 <a:cs typeface="Aptos" pitchFamily="34" charset="-120"/>
               </a:rPr>
-              <a:t>OMB Memorandum M-24-10 on federal AI governance, risk management, and innovation, where relevant to public-sector governance.</a:t>
-            </a:r>
-            <a:endParaRPr lang="en-US" sz="1700" dirty="0"/>
-          </a:p>
-          <a:p>
-            <a:r>
-              <a:rPr lang="en-US" sz="1700" dirty="0">
+              <a:t>OMB Memorandum M-24-10 on federal AI governance, risk management, and innovation, where relevant to.</a:t>
+            </a:r>
+            <a:endParaRPr lang="en-US" sz="2100" dirty="0"/>
+          </a:p>
+          <a:p>
+            <a:r>
+              <a:rPr lang="en-US" sz="2100" dirty="0">
                 <a:solidFill>
                   <a:srgbClr val="17364A"/>
                 </a:solidFill>
@@ -10100,15 +10737,15 @@
                 <a:ea typeface="Aptos" pitchFamily="34" charset="-122"/>
                 <a:cs typeface="Aptos" pitchFamily="34" charset="-120"/>
               </a:rPr>
-              <a:t>Agency strategic plans, procurement policies, privacy policies, cybersecurity policies, records policies, and equity plans</a:t>
-            </a:r>
-            <a:endParaRPr lang="en-US" sz="1700" dirty="0"/>
-          </a:p>
-        </p:txBody>
-      </p:sp>
-      <p:sp>
-        <p:nvSpPr>
-          <p:cNvPr id="9" name="Shape 7"/>
+              <a:t>Agency strategic plans, procurement policies, privacy policies, cybersecurity policies, records.</a:t>
+            </a:r>
+            <a:endParaRPr lang="en-US" sz="2100" dirty="0"/>
+          </a:p>
+        </p:txBody>
+      </p:sp>
+      <p:sp>
+        <p:nvSpPr>
+          <p:cNvPr id="10" name="Shape 8"/>
           <p:cNvSpPr/>
           <p:nvPr/>
         </p:nvSpPr>
@@ -10135,14 +10772,14 @@
       </p:sp>
       <p:sp>
         <p:nvSpPr>
-          <p:cNvPr id="10" name="Text 8"/>
+          <p:cNvPr id="11" name="Text 9"/>
           <p:cNvSpPr/>
           <p:nvPr/>
         </p:nvSpPr>
         <p:spPr>
           <a:xfrm>
             <a:off x="8074152" y="1563624"/>
-            <a:ext cx="2825496" cy="201168"/>
+            <a:ext cx="2825496" cy="256032"/>
           </a:xfrm>
           <a:prstGeom prst="rect">
             <a:avLst/>
@@ -10158,7 +10795,7 @@
               <a:buNone/>
             </a:pPr>
             <a:r>
-              <a:rPr lang="en-US" sz="950" b="1" dirty="0">
+              <a:rPr lang="en-US" sz="1300" b="1" dirty="0">
                 <a:solidFill>
                   <a:srgbClr val="0068B7"/>
                 </a:solidFill>
@@ -10168,20 +10805,20 @@
               </a:rPr>
               <a:t>Key idea</a:t>
             </a:r>
-            <a:endParaRPr lang="en-US" sz="950" dirty="0"/>
-          </a:p>
-        </p:txBody>
-      </p:sp>
-      <p:sp>
-        <p:nvSpPr>
-          <p:cNvPr id="11" name="Text 9"/>
-          <p:cNvSpPr/>
-          <p:nvPr/>
-        </p:nvSpPr>
-        <p:spPr>
-          <a:xfrm>
-            <a:off x="8074152" y="1856232"/>
-            <a:ext cx="2825496" cy="1261872"/>
+            <a:endParaRPr lang="en-US" sz="1300" dirty="0"/>
+          </a:p>
+        </p:txBody>
+      </p:sp>
+      <p:sp>
+        <p:nvSpPr>
+          <p:cNvPr id="12" name="Text 10"/>
+          <p:cNvSpPr/>
+          <p:nvPr/>
+        </p:nvSpPr>
+        <p:spPr>
+          <a:xfrm>
+            <a:off x="8074152" y="1920240"/>
+            <a:ext cx="2825496" cy="1188720"/>
           </a:xfrm>
           <a:prstGeom prst="rect">
             <a:avLst/>
@@ -10199,7 +10836,7 @@
               <a:buNone/>
             </a:pPr>
             <a:r>
-              <a:rPr lang="en-US" sz="1250" dirty="0">
+              <a:rPr lang="en-US" sz="1550" dirty="0">
                 <a:solidFill>
                   <a:srgbClr val="17364A"/>
                 </a:solidFill>
@@ -10207,15 +10844,15 @@
                 <a:ea typeface="Aptos" pitchFamily="34" charset="-122"/>
                 <a:cs typeface="Aptos" pitchFamily="34" charset="-120"/>
               </a:rPr>
-              <a:t>OMB Memorandum M-24-10 on federal AI governance, risk management, and innovation, where relevant to public-sector governance.</a:t>
-            </a:r>
-            <a:endParaRPr lang="en-US" sz="1250" dirty="0"/>
-          </a:p>
-        </p:txBody>
-      </p:sp>
-      <p:sp>
-        <p:nvSpPr>
-          <p:cNvPr id="12" name="Shape 10"/>
+              <a:t>OMB Memorandum M-24-10 on federal AI governance, risk management, and innovation, where relevant to.</a:t>
+            </a:r>
+            <a:endParaRPr lang="en-US" sz="1550" dirty="0"/>
+          </a:p>
+        </p:txBody>
+      </p:sp>
+      <p:sp>
+        <p:nvSpPr>
+          <p:cNvPr id="13" name="Shape 11"/>
           <p:cNvSpPr/>
           <p:nvPr/>
         </p:nvSpPr>
@@ -10242,14 +10879,14 @@
       </p:sp>
       <p:sp>
         <p:nvSpPr>
-          <p:cNvPr id="13" name="Text 11"/>
+          <p:cNvPr id="14" name="Text 12"/>
           <p:cNvSpPr/>
           <p:nvPr/>
         </p:nvSpPr>
         <p:spPr>
           <a:xfrm>
             <a:off x="8074152" y="3666744"/>
-            <a:ext cx="2825496" cy="201168"/>
+            <a:ext cx="2825496" cy="256032"/>
           </a:xfrm>
           <a:prstGeom prst="rect">
             <a:avLst/>
@@ -10265,7 +10902,7 @@
               <a:buNone/>
             </a:pPr>
             <a:r>
-              <a:rPr lang="en-US" sz="950" b="1" dirty="0">
+              <a:rPr lang="en-US" sz="1300" b="1" dirty="0">
                 <a:solidFill>
                   <a:srgbClr val="0068B7"/>
                 </a:solidFill>
@@ -10275,20 +10912,20 @@
               </a:rPr>
               <a:t>Use this for</a:t>
             </a:r>
-            <a:endParaRPr lang="en-US" sz="950" dirty="0"/>
-          </a:p>
-        </p:txBody>
-      </p:sp>
-      <p:sp>
-        <p:nvSpPr>
-          <p:cNvPr id="14" name="Text 12"/>
-          <p:cNvSpPr/>
-          <p:nvPr/>
-        </p:nvSpPr>
-        <p:spPr>
-          <a:xfrm>
-            <a:off x="8074152" y="3959352"/>
-            <a:ext cx="2825496" cy="1170432"/>
+            <a:endParaRPr lang="en-US" sz="1300" dirty="0"/>
+          </a:p>
+        </p:txBody>
+      </p:sp>
+      <p:sp>
+        <p:nvSpPr>
+          <p:cNvPr id="15" name="Text 13"/>
+          <p:cNvSpPr/>
+          <p:nvPr/>
+        </p:nvSpPr>
+        <p:spPr>
+          <a:xfrm>
+            <a:off x="8074152" y="4023360"/>
+            <a:ext cx="2825496" cy="1097280"/>
           </a:xfrm>
           <a:prstGeom prst="rect">
             <a:avLst/>
@@ -10306,7 +10943,7 @@
               <a:buNone/>
             </a:pPr>
             <a:r>
-              <a:rPr lang="en-US" sz="1250" dirty="0">
+              <a:rPr lang="en-US" sz="1550" dirty="0">
                 <a:solidFill>
                   <a:srgbClr val="17364A"/>
                 </a:solidFill>
@@ -10316,7 +10953,7 @@
               </a:rPr>
               <a:t>Connect the concept to public health decisions, safeguards, documentation, or implementation work.</a:t>
             </a:r>
-            <a:endParaRPr lang="en-US" sz="1250" dirty="0"/>
+            <a:endParaRPr lang="en-US" sz="1550" dirty="0"/>
           </a:p>
         </p:txBody>
       </p:sp>
@@ -10513,7 +11150,7 @@
                 <a:ea typeface="Aptos" pitchFamily="34" charset="-122"/>
                 <a:cs typeface="Aptos" pitchFamily="34" charset="-120"/>
               </a:rPr>
-              <a:t>© Paula Soper</a:t>
+              <a:t>Â© Paula Soper</a:t>
             </a:r>
             <a:endParaRPr lang="en-US" sz="800" dirty="0"/>
           </a:p>
@@ -10527,8 +11164,47 @@
         </p:nvSpPr>
         <p:spPr>
           <a:xfrm>
+            <a:off x="11137392" y="6510528"/>
+            <a:ext cx="411480" cy="201168"/>
+          </a:xfrm>
+          <a:prstGeom prst="rect">
+            <a:avLst/>
+          </a:prstGeom>
+          <a:noFill/>
+          <a:ln/>
+        </p:spPr>
+        <p:txBody>
+          <a:bodyPr wrap="square" lIns="0" tIns="0" rIns="0" bIns="0" rtlCol="0" anchor="ctr"/>
+          <a:lstStyle/>
+          <a:p>
+            <a:pPr algn="r" indent="0" marL="0">
+              <a:buNone/>
+            </a:pPr>
+            <a:r>
+              <a:rPr lang="en-US" sz="900" dirty="0">
+                <a:solidFill>
+                  <a:srgbClr val="5F7181"/>
+                </a:solidFill>
+                <a:latin typeface="Aptos" pitchFamily="34" charset="0"/>
+                <a:ea typeface="Aptos" pitchFamily="34" charset="-122"/>
+                <a:cs typeface="Aptos" pitchFamily="34" charset="-120"/>
+              </a:rPr>
+              <a:t>3</a:t>
+            </a:r>
+            <a:endParaRPr lang="en-US" sz="900" dirty="0"/>
+          </a:p>
+        </p:txBody>
+      </p:sp>
+      <p:sp>
+        <p:nvSpPr>
+          <p:cNvPr id="8" name="Text 6"/>
+          <p:cNvSpPr/>
+          <p:nvPr/>
+        </p:nvSpPr>
+        <p:spPr>
+          <a:xfrm>
             <a:off x="640080" y="658368"/>
-            <a:ext cx="10881360" cy="566928"/>
+            <a:ext cx="10881360" cy="713232"/>
           </a:xfrm>
           <a:prstGeom prst="rect">
             <a:avLst/>
@@ -10546,7 +11222,7 @@
               <a:buNone/>
             </a:pPr>
             <a:r>
-              <a:rPr lang="en-US" sz="2700" b="1" dirty="0">
+              <a:rPr lang="en-US" sz="3400" b="1" dirty="0">
                 <a:solidFill>
                   <a:srgbClr val="003A63"/>
                 </a:solidFill>
@@ -10556,20 +11232,20 @@
               </a:rPr>
               <a:t>How this module connects to the playbook</a:t>
             </a:r>
-            <a:endParaRPr lang="en-US" sz="2700" dirty="0"/>
-          </a:p>
-        </p:txBody>
-      </p:sp>
-      <p:sp>
-        <p:nvSpPr>
-          <p:cNvPr id="8" name="Text 6"/>
-          <p:cNvSpPr/>
-          <p:nvPr/>
-        </p:nvSpPr>
-        <p:spPr>
-          <a:xfrm>
-            <a:off x="868680" y="1417320"/>
-            <a:ext cx="6903720" cy="4480560"/>
+            <a:endParaRPr lang="en-US" sz="3400" dirty="0"/>
+          </a:p>
+        </p:txBody>
+      </p:sp>
+      <p:sp>
+        <p:nvSpPr>
+          <p:cNvPr id="9" name="Text 7"/>
+          <p:cNvSpPr/>
+          <p:nvPr/>
+        </p:nvSpPr>
+        <p:spPr>
+          <a:xfrm>
+            <a:off x="868680" y="1508760"/>
+            <a:ext cx="6812280" cy="3977640"/>
           </a:xfrm>
           <a:prstGeom prst="rect">
             <a:avLst/>
@@ -10584,7 +11260,7 @@
           <a:lstStyle/>
           <a:p>
             <a:r>
-              <a:rPr lang="en-US" sz="1540" dirty="0">
+              <a:rPr lang="en-US" sz="1900" dirty="0">
                 <a:solidFill>
                   <a:srgbClr val="17364A"/>
                 </a:solidFill>
@@ -10592,13 +11268,13 @@
                 <a:ea typeface="Aptos" pitchFamily="34" charset="-122"/>
                 <a:cs typeface="Aptos" pitchFamily="34" charset="-120"/>
               </a:rPr>
-              <a:t>Play 11: Build and Deploy AI Solutions - This lesson informs Play 11 by helping learners connect the lesson topic to build and deploy.</a:t>
-            </a:r>
-            <a:endParaRPr lang="en-US" sz="1540" dirty="0"/>
-          </a:p>
-          <a:p>
-            <a:r>
-              <a:rPr lang="en-US" sz="1540" dirty="0">
+              <a:t>Play 11: Build and Deploy AI Solutions - This lesson informs Play 11 by helping learners connect the lesson.</a:t>
+            </a:r>
+            <a:endParaRPr lang="en-US" sz="1900" dirty="0"/>
+          </a:p>
+          <a:p>
+            <a:r>
+              <a:rPr lang="en-US" sz="1900" dirty="0">
                 <a:solidFill>
                   <a:srgbClr val="17364A"/>
                 </a:solidFill>
@@ -10606,13 +11282,13 @@
                 <a:ea typeface="Aptos" pitchFamily="34" charset="-122"/>
                 <a:cs typeface="Aptos" pitchFamily="34" charset="-120"/>
               </a:rPr>
-              <a:t>Play 1: Vision &amp; Guardrails - This lesson informs Play 1 by helping learners connect the lesson topic to vision &amp; guardrails work in.</a:t>
-            </a:r>
-            <a:endParaRPr lang="en-US" sz="1540" dirty="0"/>
-          </a:p>
-          <a:p>
-            <a:r>
-              <a:rPr lang="en-US" sz="1540" dirty="0">
+              <a:t>Play 1: Vision &amp; Guardrails - This lesson informs Play 1 by helping learners connect the lesson topic to.</a:t>
+            </a:r>
+            <a:endParaRPr lang="en-US" sz="1900" dirty="0"/>
+          </a:p>
+          <a:p>
+            <a:r>
+              <a:rPr lang="en-US" sz="1900" dirty="0">
                 <a:solidFill>
                   <a:srgbClr val="17364A"/>
                 </a:solidFill>
@@ -10620,13 +11296,13 @@
                 <a:ea typeface="Aptos" pitchFamily="34" charset="-122"/>
                 <a:cs typeface="Aptos" pitchFamily="34" charset="-120"/>
               </a:rPr>
-              <a:t>Play 3: Establish AI Governance - This lesson informs Play 3 by helping learners connect the lesson topic to establish ai governance.</a:t>
-            </a:r>
-            <a:endParaRPr lang="en-US" sz="1540" dirty="0"/>
-          </a:p>
-          <a:p>
-            <a:r>
-              <a:rPr lang="en-US" sz="1540" dirty="0">
+              <a:t>Play 3: Establish AI Governance - This lesson informs Play 3 by helping learners connect the lesson topic to.</a:t>
+            </a:r>
+            <a:endParaRPr lang="en-US" sz="1900" dirty="0"/>
+          </a:p>
+          <a:p>
+            <a:r>
+              <a:rPr lang="en-US" sz="1900" dirty="0">
                 <a:solidFill>
                   <a:srgbClr val="17364A"/>
                 </a:solidFill>
@@ -10634,15 +11310,15 @@
                 <a:ea typeface="Aptos" pitchFamily="34" charset="-122"/>
                 <a:cs typeface="Aptos" pitchFamily="34" charset="-120"/>
               </a:rPr>
-              <a:t>Play 7: Prioritize Use Cases - This lesson informs Play 7 by helping learners connect the lesson topic to prioritize use cases work.</a:t>
-            </a:r>
-            <a:endParaRPr lang="en-US" sz="1540" dirty="0"/>
-          </a:p>
-        </p:txBody>
-      </p:sp>
-      <p:sp>
-        <p:nvSpPr>
-          <p:cNvPr id="9" name="Shape 7"/>
+              <a:t>Play 7: Prioritize Use Cases - This lesson informs Play 7 by helping learners connect the lesson topic to.</a:t>
+            </a:r>
+            <a:endParaRPr lang="en-US" sz="1900" dirty="0"/>
+          </a:p>
+        </p:txBody>
+      </p:sp>
+      <p:sp>
+        <p:nvSpPr>
+          <p:cNvPr id="10" name="Shape 8"/>
           <p:cNvSpPr/>
           <p:nvPr/>
         </p:nvSpPr>
@@ -10669,14 +11345,14 @@
       </p:sp>
       <p:sp>
         <p:nvSpPr>
-          <p:cNvPr id="10" name="Text 8"/>
+          <p:cNvPr id="11" name="Text 9"/>
           <p:cNvSpPr/>
           <p:nvPr/>
         </p:nvSpPr>
         <p:spPr>
           <a:xfrm>
             <a:off x="8211312" y="1563624"/>
-            <a:ext cx="2734056" cy="201168"/>
+            <a:ext cx="2734056" cy="256032"/>
           </a:xfrm>
           <a:prstGeom prst="rect">
             <a:avLst/>
@@ -10692,7 +11368,7 @@
               <a:buNone/>
             </a:pPr>
             <a:r>
-              <a:rPr lang="en-US" sz="950" b="1" dirty="0">
+              <a:rPr lang="en-US" sz="1300" b="1" dirty="0">
                 <a:solidFill>
                   <a:srgbClr val="0068B7"/>
                 </a:solidFill>
@@ -10702,20 +11378,20 @@
               </a:rPr>
               <a:t>Apply the lesson</a:t>
             </a:r>
-            <a:endParaRPr lang="en-US" sz="950" dirty="0"/>
-          </a:p>
-        </p:txBody>
-      </p:sp>
-      <p:sp>
-        <p:nvSpPr>
-          <p:cNvPr id="11" name="Text 9"/>
-          <p:cNvSpPr/>
-          <p:nvPr/>
-        </p:nvSpPr>
-        <p:spPr>
-          <a:xfrm>
-            <a:off x="8211312" y="1856232"/>
-            <a:ext cx="2734056" cy="1536192"/>
+            <a:endParaRPr lang="en-US" sz="1300" dirty="0"/>
+          </a:p>
+        </p:txBody>
+      </p:sp>
+      <p:sp>
+        <p:nvSpPr>
+          <p:cNvPr id="12" name="Text 10"/>
+          <p:cNvSpPr/>
+          <p:nvPr/>
+        </p:nvSpPr>
+        <p:spPr>
+          <a:xfrm>
+            <a:off x="8211312" y="1920240"/>
+            <a:ext cx="2734056" cy="1463040"/>
           </a:xfrm>
           <a:prstGeom prst="rect">
             <a:avLst/>
@@ -10733,7 +11409,7 @@
               <a:buNone/>
             </a:pPr>
             <a:r>
-              <a:rPr lang="en-US" sz="1250" dirty="0">
+              <a:rPr lang="en-US" sz="1550" dirty="0">
                 <a:solidFill>
                   <a:srgbClr val="17364A"/>
                 </a:solidFill>
@@ -10743,32 +11419,32 @@
               </a:rPr>
               <a:t>Use the related plays to identify decisions, participants, timing, approvals, and documentation needed for responsible implementation.</a:t>
             </a:r>
-            <a:endParaRPr lang="en-US" sz="1250" dirty="0"/>
-          </a:p>
-        </p:txBody>
-      </p:sp>
-      <p:sp>
-        <p:nvSpPr>
-          <p:cNvPr id="12" name="Shape 10"/>
-          <p:cNvSpPr/>
-          <p:nvPr/>
-        </p:nvSpPr>
-        <p:spPr>
-          <a:xfrm>
-            <a:off x="8046720" y="3794760"/>
-            <a:ext cx="3063240" cy="1508760"/>
+            <a:endParaRPr lang="en-US" sz="1550" dirty="0"/>
+          </a:p>
+        </p:txBody>
+      </p:sp>
+      <p:sp>
+        <p:nvSpPr>
+          <p:cNvPr id="13" name="Shape 11"/>
+          <p:cNvSpPr/>
+          <p:nvPr/>
+        </p:nvSpPr>
+        <p:spPr>
+          <a:xfrm>
+            <a:off x="7818120" y="3977640"/>
+            <a:ext cx="972312" cy="749808"/>
           </a:xfrm>
           <a:prstGeom prst="roundRect">
             <a:avLst>
-              <a:gd name="adj" fmla="val 7273"/>
+              <a:gd name="adj" fmla="val 14634"/>
             </a:avLst>
           </a:prstGeom>
           <a:solidFill>
-            <a:srgbClr val="FFF4D9"/>
+            <a:srgbClr val="0068B7"/>
           </a:solidFill>
           <a:ln w="12700">
             <a:solidFill>
-              <a:srgbClr val="B9D7E6"/>
+              <a:srgbClr val="0068B7"/>
             </a:solidFill>
             <a:prstDash val="solid"/>
           </a:ln>
@@ -10776,81 +11452,256 @@
       </p:sp>
       <p:sp>
         <p:nvSpPr>
-          <p:cNvPr id="13" name="Text 11"/>
-          <p:cNvSpPr/>
-          <p:nvPr/>
-        </p:nvSpPr>
-        <p:spPr>
-          <a:xfrm>
-            <a:off x="8211312" y="3941064"/>
-            <a:ext cx="2734056" cy="201168"/>
-          </a:xfrm>
-          <a:prstGeom prst="rect">
-            <a:avLst/>
-          </a:prstGeom>
-          <a:noFill/>
-          <a:ln/>
-        </p:spPr>
-        <p:txBody>
-          <a:bodyPr wrap="square" lIns="0" tIns="0" rIns="0" bIns="0" rtlCol="0" anchor="ctr"/>
-          <a:lstStyle/>
-          <a:p>
-            <a:pPr indent="0" marL="0">
-              <a:buNone/>
-            </a:pPr>
-            <a:r>
-              <a:rPr lang="en-US" sz="950" b="1" dirty="0">
-                <a:solidFill>
-                  <a:srgbClr val="0068B7"/>
-                </a:solidFill>
-                <a:latin typeface="Aptos" pitchFamily="34" charset="0"/>
-                <a:ea typeface="Aptos" pitchFamily="34" charset="-122"/>
-                <a:cs typeface="Aptos" pitchFamily="34" charset="-120"/>
-              </a:rPr>
-              <a:t>Keep in mind</a:t>
-            </a:r>
-            <a:endParaRPr lang="en-US" sz="950" dirty="0"/>
-          </a:p>
-        </p:txBody>
-      </p:sp>
-      <p:sp>
-        <p:nvSpPr>
           <p:cNvPr id="14" name="Text 12"/>
           <p:cNvSpPr/>
           <p:nvPr/>
         </p:nvSpPr>
         <p:spPr>
           <a:xfrm>
-            <a:off x="8211312" y="4233672"/>
-            <a:ext cx="2734056" cy="941832"/>
-          </a:xfrm>
-          <a:prstGeom prst="rect">
-            <a:avLst/>
-          </a:prstGeom>
-          <a:noFill/>
-          <a:ln/>
-        </p:spPr>
-        <p:txBody>
-          <a:bodyPr wrap="square" lIns="0" tIns="0" rIns="0" bIns="0" rtlCol="0" anchor="t">
+            <a:off x="7891272" y="4169664"/>
+            <a:ext cx="826008" cy="310896"/>
+          </a:xfrm>
+          <a:prstGeom prst="rect">
+            <a:avLst/>
+          </a:prstGeom>
+          <a:noFill/>
+          <a:ln/>
+        </p:spPr>
+        <p:txBody>
+          <a:bodyPr wrap="square" lIns="0" tIns="0" rIns="0" bIns="0" rtlCol="0" anchor="ctr">
             <a:normAutofit/>
           </a:bodyPr>
           <a:lstStyle/>
           <a:p>
-            <a:pPr indent="0" marL="0">
-              <a:buNone/>
-            </a:pPr>
-            <a:r>
-              <a:rPr lang="en-US" sz="1250" dirty="0">
-                <a:solidFill>
-                  <a:srgbClr val="17364A"/>
-                </a:solidFill>
-                <a:latin typeface="Aptos" pitchFamily="34" charset="0"/>
-                <a:ea typeface="Aptos" pitchFamily="34" charset="-122"/>
-                <a:cs typeface="Aptos" pitchFamily="34" charset="-120"/>
-              </a:rPr>
-              <a:t>The playbook connection helps turn training into agency work, not just individual knowledge.</a:t>
-            </a:r>
-            <a:endParaRPr lang="en-US" sz="1250" dirty="0"/>
+            <a:pPr algn="ctr" indent="0" marL="0">
+              <a:buNone/>
+            </a:pPr>
+            <a:r>
+              <a:rPr lang="en-US" sz="1500" b="1" dirty="0">
+                <a:solidFill>
+                  <a:srgbClr val="FFFFFF"/>
+                </a:solidFill>
+                <a:latin typeface="Aptos" pitchFamily="34" charset="0"/>
+                <a:ea typeface="Aptos" pitchFamily="34" charset="-122"/>
+                <a:cs typeface="Aptos" pitchFamily="34" charset="-120"/>
+              </a:rPr>
+              <a:t>Lesson</a:t>
+            </a:r>
+            <a:endParaRPr lang="en-US" sz="1500" dirty="0"/>
+          </a:p>
+        </p:txBody>
+      </p:sp>
+      <p:sp>
+        <p:nvSpPr>
+          <p:cNvPr id="15" name="Text 13"/>
+          <p:cNvSpPr/>
+          <p:nvPr/>
+        </p:nvSpPr>
+        <p:spPr>
+          <a:xfrm>
+            <a:off x="8817864" y="4187952"/>
+            <a:ext cx="201168" cy="256032"/>
+          </a:xfrm>
+          <a:prstGeom prst="rect">
+            <a:avLst/>
+          </a:prstGeom>
+          <a:noFill/>
+          <a:ln/>
+        </p:spPr>
+        <p:txBody>
+          <a:bodyPr wrap="square" lIns="0" tIns="0" rIns="0" bIns="0" rtlCol="0" anchor="ctr"/>
+          <a:lstStyle/>
+          <a:p>
+            <a:pPr algn="ctr" indent="0" marL="0">
+              <a:buNone/>
+            </a:pPr>
+            <a:r>
+              <a:rPr lang="en-US" sz="1800" b="1" dirty="0">
+                <a:solidFill>
+                  <a:srgbClr val="0068B7"/>
+                </a:solidFill>
+                <a:latin typeface="Aptos" pitchFamily="34" charset="0"/>
+                <a:ea typeface="Aptos" pitchFamily="34" charset="-122"/>
+                <a:cs typeface="Aptos" pitchFamily="34" charset="-120"/>
+              </a:rPr>
+              <a:t>â†’</a:t>
+            </a:r>
+            <a:endParaRPr lang="en-US" sz="1800" dirty="0"/>
+          </a:p>
+        </p:txBody>
+      </p:sp>
+      <p:sp>
+        <p:nvSpPr>
+          <p:cNvPr id="16" name="Shape 14"/>
+          <p:cNvSpPr/>
+          <p:nvPr/>
+        </p:nvSpPr>
+        <p:spPr>
+          <a:xfrm>
+            <a:off x="9046464" y="3977640"/>
+            <a:ext cx="972312" cy="749808"/>
+          </a:xfrm>
+          <a:prstGeom prst="roundRect">
+            <a:avLst>
+              <a:gd name="adj" fmla="val 14634"/>
+            </a:avLst>
+          </a:prstGeom>
+          <a:solidFill>
+            <a:srgbClr val="2F8A28"/>
+          </a:solidFill>
+          <a:ln w="12700">
+            <a:solidFill>
+              <a:srgbClr val="2F8A28"/>
+            </a:solidFill>
+            <a:prstDash val="solid"/>
+          </a:ln>
+        </p:spPr>
+      </p:sp>
+      <p:sp>
+        <p:nvSpPr>
+          <p:cNvPr id="17" name="Text 15"/>
+          <p:cNvSpPr/>
+          <p:nvPr/>
+        </p:nvSpPr>
+        <p:spPr>
+          <a:xfrm>
+            <a:off x="9119616" y="4169664"/>
+            <a:ext cx="826008" cy="310896"/>
+          </a:xfrm>
+          <a:prstGeom prst="rect">
+            <a:avLst/>
+          </a:prstGeom>
+          <a:noFill/>
+          <a:ln/>
+        </p:spPr>
+        <p:txBody>
+          <a:bodyPr wrap="square" lIns="0" tIns="0" rIns="0" bIns="0" rtlCol="0" anchor="ctr">
+            <a:normAutofit/>
+          </a:bodyPr>
+          <a:lstStyle/>
+          <a:p>
+            <a:pPr algn="ctr" indent="0" marL="0">
+              <a:buNone/>
+            </a:pPr>
+            <a:r>
+              <a:rPr lang="en-US" sz="1500" b="1" dirty="0">
+                <a:solidFill>
+                  <a:srgbClr val="FFFFFF"/>
+                </a:solidFill>
+                <a:latin typeface="Aptos" pitchFamily="34" charset="0"/>
+                <a:ea typeface="Aptos" pitchFamily="34" charset="-122"/>
+                <a:cs typeface="Aptos" pitchFamily="34" charset="-120"/>
+              </a:rPr>
+              <a:t>Plays</a:t>
+            </a:r>
+            <a:endParaRPr lang="en-US" sz="1500" dirty="0"/>
+          </a:p>
+        </p:txBody>
+      </p:sp>
+      <p:sp>
+        <p:nvSpPr>
+          <p:cNvPr id="18" name="Text 16"/>
+          <p:cNvSpPr/>
+          <p:nvPr/>
+        </p:nvSpPr>
+        <p:spPr>
+          <a:xfrm>
+            <a:off x="10046208" y="4187952"/>
+            <a:ext cx="201168" cy="256032"/>
+          </a:xfrm>
+          <a:prstGeom prst="rect">
+            <a:avLst/>
+          </a:prstGeom>
+          <a:noFill/>
+          <a:ln/>
+        </p:spPr>
+        <p:txBody>
+          <a:bodyPr wrap="square" lIns="0" tIns="0" rIns="0" bIns="0" rtlCol="0" anchor="ctr"/>
+          <a:lstStyle/>
+          <a:p>
+            <a:pPr algn="ctr" indent="0" marL="0">
+              <a:buNone/>
+            </a:pPr>
+            <a:r>
+              <a:rPr lang="en-US" sz="1800" b="1" dirty="0">
+                <a:solidFill>
+                  <a:srgbClr val="0068B7"/>
+                </a:solidFill>
+                <a:latin typeface="Aptos" pitchFamily="34" charset="0"/>
+                <a:ea typeface="Aptos" pitchFamily="34" charset="-122"/>
+                <a:cs typeface="Aptos" pitchFamily="34" charset="-120"/>
+              </a:rPr>
+              <a:t>â†’</a:t>
+            </a:r>
+            <a:endParaRPr lang="en-US" sz="1800" dirty="0"/>
+          </a:p>
+        </p:txBody>
+      </p:sp>
+      <p:sp>
+        <p:nvSpPr>
+          <p:cNvPr id="19" name="Shape 17"/>
+          <p:cNvSpPr/>
+          <p:nvPr/>
+        </p:nvSpPr>
+        <p:spPr>
+          <a:xfrm>
+            <a:off x="10274808" y="3977640"/>
+            <a:ext cx="972312" cy="749808"/>
+          </a:xfrm>
+          <a:prstGeom prst="roundRect">
+            <a:avLst>
+              <a:gd name="adj" fmla="val 14634"/>
+            </a:avLst>
+          </a:prstGeom>
+          <a:solidFill>
+            <a:srgbClr val="6A4CA3"/>
+          </a:solidFill>
+          <a:ln w="12700">
+            <a:solidFill>
+              <a:srgbClr val="6A4CA3"/>
+            </a:solidFill>
+            <a:prstDash val="solid"/>
+          </a:ln>
+        </p:spPr>
+      </p:sp>
+      <p:sp>
+        <p:nvSpPr>
+          <p:cNvPr id="20" name="Text 18"/>
+          <p:cNvSpPr/>
+          <p:nvPr/>
+        </p:nvSpPr>
+        <p:spPr>
+          <a:xfrm>
+            <a:off x="10347960" y="4169664"/>
+            <a:ext cx="826008" cy="310896"/>
+          </a:xfrm>
+          <a:prstGeom prst="rect">
+            <a:avLst/>
+          </a:prstGeom>
+          <a:noFill/>
+          <a:ln/>
+        </p:spPr>
+        <p:txBody>
+          <a:bodyPr wrap="square" lIns="0" tIns="0" rIns="0" bIns="0" rtlCol="0" anchor="ctr">
+            <a:normAutofit/>
+          </a:bodyPr>
+          <a:lstStyle/>
+          <a:p>
+            <a:pPr algn="ctr" indent="0" marL="0">
+              <a:buNone/>
+            </a:pPr>
+            <a:r>
+              <a:rPr lang="en-US" sz="1500" b="1" dirty="0">
+                <a:solidFill>
+                  <a:srgbClr val="FFFFFF"/>
+                </a:solidFill>
+                <a:latin typeface="Aptos" pitchFamily="34" charset="0"/>
+                <a:ea typeface="Aptos" pitchFamily="34" charset="-122"/>
+                <a:cs typeface="Aptos" pitchFamily="34" charset="-120"/>
+              </a:rPr>
+              <a:t>Action</a:t>
+            </a:r>
+            <a:endParaRPr lang="en-US" sz="1500" dirty="0"/>
           </a:p>
         </p:txBody>
       </p:sp>
@@ -11047,7 +11898,7 @@
                 <a:ea typeface="Aptos" pitchFamily="34" charset="-122"/>
                 <a:cs typeface="Aptos" pitchFamily="34" charset="-120"/>
               </a:rPr>
-              <a:t>© Paula Soper</a:t>
+              <a:t>Â© Paula Soper</a:t>
             </a:r>
             <a:endParaRPr lang="en-US" sz="800" dirty="0"/>
           </a:p>
@@ -11061,8 +11912,47 @@
         </p:nvSpPr>
         <p:spPr>
           <a:xfrm>
+            <a:off x="11137392" y="6510528"/>
+            <a:ext cx="411480" cy="201168"/>
+          </a:xfrm>
+          <a:prstGeom prst="rect">
+            <a:avLst/>
+          </a:prstGeom>
+          <a:noFill/>
+          <a:ln/>
+        </p:spPr>
+        <p:txBody>
+          <a:bodyPr wrap="square" lIns="0" tIns="0" rIns="0" bIns="0" rtlCol="0" anchor="ctr"/>
+          <a:lstStyle/>
+          <a:p>
+            <a:pPr algn="r" indent="0" marL="0">
+              <a:buNone/>
+            </a:pPr>
+            <a:r>
+              <a:rPr lang="en-US" sz="900" dirty="0">
+                <a:solidFill>
+                  <a:srgbClr val="5F7181"/>
+                </a:solidFill>
+                <a:latin typeface="Aptos" pitchFamily="34" charset="0"/>
+                <a:ea typeface="Aptos" pitchFamily="34" charset="-122"/>
+                <a:cs typeface="Aptos" pitchFamily="34" charset="-120"/>
+              </a:rPr>
+              <a:t>4</a:t>
+            </a:r>
+            <a:endParaRPr lang="en-US" sz="900" dirty="0"/>
+          </a:p>
+        </p:txBody>
+      </p:sp>
+      <p:sp>
+        <p:nvSpPr>
+          <p:cNvPr id="8" name="Text 6"/>
+          <p:cNvSpPr/>
+          <p:nvPr/>
+        </p:nvSpPr>
+        <p:spPr>
+          <a:xfrm>
             <a:off x="640080" y="658368"/>
-            <a:ext cx="10881360" cy="566928"/>
+            <a:ext cx="10881360" cy="713232"/>
           </a:xfrm>
           <a:prstGeom prst="rect">
             <a:avLst/>
@@ -11080,7 +11970,7 @@
               <a:buNone/>
             </a:pPr>
             <a:r>
-              <a:rPr lang="en-US" sz="2700" b="1" dirty="0">
+              <a:rPr lang="en-US" sz="3400" b="1" dirty="0">
                 <a:solidFill>
                   <a:srgbClr val="003A63"/>
                 </a:solidFill>
@@ -11090,20 +11980,20 @@
               </a:rPr>
               <a:t>Related toolkit resources</a:t>
             </a:r>
-            <a:endParaRPr lang="en-US" sz="2700" dirty="0"/>
-          </a:p>
-        </p:txBody>
-      </p:sp>
-      <p:sp>
-        <p:nvSpPr>
-          <p:cNvPr id="8" name="Text 6"/>
-          <p:cNvSpPr/>
-          <p:nvPr/>
-        </p:nvSpPr>
-        <p:spPr>
-          <a:xfrm>
-            <a:off x="868680" y="1417320"/>
-            <a:ext cx="6903720" cy="4480560"/>
+            <a:endParaRPr lang="en-US" sz="3400" dirty="0"/>
+          </a:p>
+        </p:txBody>
+      </p:sp>
+      <p:sp>
+        <p:nvSpPr>
+          <p:cNvPr id="9" name="Text 7"/>
+          <p:cNvSpPr/>
+          <p:nvPr/>
+        </p:nvSpPr>
+        <p:spPr>
+          <a:xfrm>
+            <a:off x="868680" y="1508760"/>
+            <a:ext cx="6812280" cy="3977640"/>
           </a:xfrm>
           <a:prstGeom prst="rect">
             <a:avLst/>
@@ -11118,7 +12008,7 @@
           <a:lstStyle/>
           <a:p>
             <a:r>
-              <a:rPr lang="en-US" sz="1460" dirty="0">
+              <a:rPr lang="en-US" sz="1850" dirty="0">
                 <a:solidFill>
                   <a:srgbClr val="17364A"/>
                 </a:solidFill>
@@ -11126,13 +12016,13 @@
                 <a:ea typeface="Aptos" pitchFamily="34" charset="-122"/>
                 <a:cs typeface="Aptos" pitchFamily="34" charset="-120"/>
               </a:rPr>
-              <a:t>Tool 32: Vendor Evaluation Checklist (Checklist) - Use this tool to complete or strengthen the practical exercise for the module.</a:t>
-            </a:r>
-            <a:endParaRPr lang="en-US" sz="1460" dirty="0"/>
-          </a:p>
-          <a:p>
-            <a:r>
-              <a:rPr lang="en-US" sz="1460" dirty="0">
+              <a:t>Tool 32: Vendor Evaluation Checklist (Checklist) - Use this tool to complete or strengthen the practical.</a:t>
+            </a:r>
+            <a:endParaRPr lang="en-US" sz="1850" dirty="0"/>
+          </a:p>
+          <a:p>
+            <a:r>
+              <a:rPr lang="en-US" sz="1850" dirty="0">
                 <a:solidFill>
                   <a:srgbClr val="17364A"/>
                 </a:solidFill>
@@ -11140,13 +12030,13 @@
                 <a:ea typeface="Aptos" pitchFamily="34" charset="-122"/>
                 <a:cs typeface="Aptos" pitchFamily="34" charset="-120"/>
               </a:rPr>
-              <a:t>Tool 34: STLT AI Procurement and Vendor Addendum (Checklist) - Use this tool to complete or strengthen the practical exercise for the.</a:t>
-            </a:r>
-            <a:endParaRPr lang="en-US" sz="1460" dirty="0"/>
-          </a:p>
-          <a:p>
-            <a:r>
-              <a:rPr lang="en-US" sz="1460" dirty="0">
+              <a:t>Tool 34: STLT AI Procurement and Vendor Addendum (Checklist) - Use this tool to complete or strengthen the.</a:t>
+            </a:r>
+            <a:endParaRPr lang="en-US" sz="1850" dirty="0"/>
+          </a:p>
+          <a:p>
+            <a:r>
+              <a:rPr lang="en-US" sz="1850" dirty="0">
                 <a:solidFill>
                   <a:srgbClr val="17364A"/>
                 </a:solidFill>
@@ -11154,13 +12044,13 @@
                 <a:ea typeface="Aptos" pitchFamily="34" charset="-122"/>
                 <a:cs typeface="Aptos" pitchFamily="34" charset="-120"/>
               </a:rPr>
-              <a:t>Tool 3: Equity Impact Assessment Checklist (Checklist) - Use this tool to complete or strengthen the practical exercise for the.</a:t>
-            </a:r>
-            <a:endParaRPr lang="en-US" sz="1460" dirty="0"/>
-          </a:p>
-          <a:p>
-            <a:r>
-              <a:rPr lang="en-US" sz="1460" dirty="0">
+              <a:t>Tool 3: Equity Impact Assessment Checklist (Checklist) - Use this tool to complete or strengthen the.</a:t>
+            </a:r>
+            <a:endParaRPr lang="en-US" sz="1850" dirty="0"/>
+          </a:p>
+          <a:p>
+            <a:r>
+              <a:rPr lang="en-US" sz="1850" dirty="0">
                 <a:solidFill>
                   <a:srgbClr val="17364A"/>
                 </a:solidFill>
@@ -11168,29 +12058,15 @@
                 <a:ea typeface="Aptos" pitchFamily="34" charset="-122"/>
                 <a:cs typeface="Aptos" pitchFamily="34" charset="-120"/>
               </a:rPr>
-              <a:t>Tool 4: AI Policy Landscape Scan (Worksheet) - Use AI Policy Landscape Scan to translate this lesson into a documented public health.</a:t>
-            </a:r>
-            <a:endParaRPr lang="en-US" sz="1460" dirty="0"/>
-          </a:p>
-          <a:p>
-            <a:r>
-              <a:rPr lang="en-US" sz="1460" dirty="0">
-                <a:solidFill>
-                  <a:srgbClr val="17364A"/>
-                </a:solidFill>
-                <a:latin typeface="Aptos" pitchFamily="34" charset="0"/>
-                <a:ea typeface="Aptos" pitchFamily="34" charset="-122"/>
-                <a:cs typeface="Aptos" pitchFamily="34" charset="-120"/>
-              </a:rPr>
-              <a:t>Tool 5: AI Environmental and Resource Impact Review (Checklist) - Use AI Environmental and Resource Impact Review to translate this.</a:t>
-            </a:r>
-            <a:endParaRPr lang="en-US" sz="1460" dirty="0"/>
-          </a:p>
-        </p:txBody>
-      </p:sp>
-      <p:sp>
-        <p:nvSpPr>
-          <p:cNvPr id="9" name="Shape 7"/>
+              <a:t>Tool 4: AI Policy Landscape Scan (Worksheet) - Use AI Policy Landscape Scan to translate this lesson into a.</a:t>
+            </a:r>
+            <a:endParaRPr lang="en-US" sz="1850" dirty="0"/>
+          </a:p>
+        </p:txBody>
+      </p:sp>
+      <p:sp>
+        <p:nvSpPr>
+          <p:cNvPr id="10" name="Shape 8"/>
           <p:cNvSpPr/>
           <p:nvPr/>
         </p:nvSpPr>
@@ -11217,14 +12093,14 @@
       </p:sp>
       <p:sp>
         <p:nvSpPr>
-          <p:cNvPr id="10" name="Text 8"/>
+          <p:cNvPr id="11" name="Text 9"/>
           <p:cNvSpPr/>
           <p:nvPr/>
         </p:nvSpPr>
         <p:spPr>
           <a:xfrm>
             <a:off x="8211312" y="1563624"/>
-            <a:ext cx="2734056" cy="201168"/>
+            <a:ext cx="2734056" cy="256032"/>
           </a:xfrm>
           <a:prstGeom prst="rect">
             <a:avLst/>
@@ -11240,7 +12116,7 @@
               <a:buNone/>
             </a:pPr>
             <a:r>
-              <a:rPr lang="en-US" sz="950" b="1" dirty="0">
+              <a:rPr lang="en-US" sz="1300" b="1" dirty="0">
                 <a:solidFill>
                   <a:srgbClr val="0068B7"/>
                 </a:solidFill>
@@ -11250,20 +12126,20 @@
               </a:rPr>
               <a:t>Use the tools</a:t>
             </a:r>
-            <a:endParaRPr lang="en-US" sz="950" dirty="0"/>
-          </a:p>
-        </p:txBody>
-      </p:sp>
-      <p:sp>
-        <p:nvSpPr>
-          <p:cNvPr id="11" name="Text 9"/>
-          <p:cNvSpPr/>
-          <p:nvPr/>
-        </p:nvSpPr>
-        <p:spPr>
-          <a:xfrm>
-            <a:off x="8211312" y="1856232"/>
-            <a:ext cx="2734056" cy="1536192"/>
+            <a:endParaRPr lang="en-US" sz="1300" dirty="0"/>
+          </a:p>
+        </p:txBody>
+      </p:sp>
+      <p:sp>
+        <p:nvSpPr>
+          <p:cNvPr id="12" name="Text 10"/>
+          <p:cNvSpPr/>
+          <p:nvPr/>
+        </p:nvSpPr>
+        <p:spPr>
+          <a:xfrm>
+            <a:off x="8211312" y="1920240"/>
+            <a:ext cx="2734056" cy="1463040"/>
           </a:xfrm>
           <a:prstGeom prst="rect">
             <a:avLst/>
@@ -11281,7 +12157,7 @@
               <a:buNone/>
             </a:pPr>
             <a:r>
-              <a:rPr lang="en-US" sz="1250" dirty="0">
+              <a:rPr lang="en-US" sz="1550" dirty="0">
                 <a:solidFill>
                   <a:srgbClr val="17364A"/>
                 </a:solidFill>
@@ -11291,32 +12167,32 @@
               </a:rPr>
               <a:t>Use linked tools when your department needs a structured worksheet, template, checklist, review process, or documentation artifact.</a:t>
             </a:r>
-            <a:endParaRPr lang="en-US" sz="1250" dirty="0"/>
-          </a:p>
-        </p:txBody>
-      </p:sp>
-      <p:sp>
-        <p:nvSpPr>
-          <p:cNvPr id="12" name="Shape 10"/>
-          <p:cNvSpPr/>
-          <p:nvPr/>
-        </p:nvSpPr>
-        <p:spPr>
-          <a:xfrm>
-            <a:off x="8046720" y="3794760"/>
-            <a:ext cx="3063240" cy="1508760"/>
+            <a:endParaRPr lang="en-US" sz="1550" dirty="0"/>
+          </a:p>
+        </p:txBody>
+      </p:sp>
+      <p:sp>
+        <p:nvSpPr>
+          <p:cNvPr id="13" name="Shape 11"/>
+          <p:cNvSpPr/>
+          <p:nvPr/>
+        </p:nvSpPr>
+        <p:spPr>
+          <a:xfrm>
+            <a:off x="7818120" y="3977640"/>
+            <a:ext cx="972312" cy="749808"/>
           </a:xfrm>
           <a:prstGeom prst="roundRect">
             <a:avLst>
-              <a:gd name="adj" fmla="val 7273"/>
+              <a:gd name="adj" fmla="val 14634"/>
             </a:avLst>
           </a:prstGeom>
           <a:solidFill>
-            <a:srgbClr val="EEF8ED"/>
+            <a:srgbClr val="0068B7"/>
           </a:solidFill>
           <a:ln w="12700">
             <a:solidFill>
-              <a:srgbClr val="B9D7E6"/>
+              <a:srgbClr val="0068B7"/>
             </a:solidFill>
             <a:prstDash val="solid"/>
           </a:ln>
@@ -11324,81 +12200,256 @@
       </p:sp>
       <p:sp>
         <p:nvSpPr>
-          <p:cNvPr id="13" name="Text 11"/>
-          <p:cNvSpPr/>
-          <p:nvPr/>
-        </p:nvSpPr>
-        <p:spPr>
-          <a:xfrm>
-            <a:off x="8211312" y="3941064"/>
-            <a:ext cx="2734056" cy="201168"/>
-          </a:xfrm>
-          <a:prstGeom prst="rect">
-            <a:avLst/>
-          </a:prstGeom>
-          <a:noFill/>
-          <a:ln/>
-        </p:spPr>
-        <p:txBody>
-          <a:bodyPr wrap="square" lIns="0" tIns="0" rIns="0" bIns="0" rtlCol="0" anchor="ctr"/>
-          <a:lstStyle/>
-          <a:p>
-            <a:pPr indent="0" marL="0">
-              <a:buNone/>
-            </a:pPr>
-            <a:r>
-              <a:rPr lang="en-US" sz="950" b="1" dirty="0">
-                <a:solidFill>
-                  <a:srgbClr val="0068B7"/>
-                </a:solidFill>
-                <a:latin typeface="Aptos" pitchFamily="34" charset="0"/>
-                <a:ea typeface="Aptos" pitchFamily="34" charset="-122"/>
-                <a:cs typeface="Aptos" pitchFamily="34" charset="-120"/>
-              </a:rPr>
-              <a:t>Avoid duplication</a:t>
-            </a:r>
-            <a:endParaRPr lang="en-US" sz="950" dirty="0"/>
-          </a:p>
-        </p:txBody>
-      </p:sp>
-      <p:sp>
-        <p:nvSpPr>
           <p:cNvPr id="14" name="Text 12"/>
           <p:cNvSpPr/>
           <p:nvPr/>
         </p:nvSpPr>
         <p:spPr>
           <a:xfrm>
-            <a:off x="8211312" y="4233672"/>
-            <a:ext cx="2734056" cy="941832"/>
-          </a:xfrm>
-          <a:prstGeom prst="rect">
-            <a:avLst/>
-          </a:prstGeom>
-          <a:noFill/>
-          <a:ln/>
-        </p:spPr>
-        <p:txBody>
-          <a:bodyPr wrap="square" lIns="0" tIns="0" rIns="0" bIns="0" rtlCol="0" anchor="t">
+            <a:off x="7891272" y="4169664"/>
+            <a:ext cx="826008" cy="310896"/>
+          </a:xfrm>
+          <a:prstGeom prst="rect">
+            <a:avLst/>
+          </a:prstGeom>
+          <a:noFill/>
+          <a:ln/>
+        </p:spPr>
+        <p:txBody>
+          <a:bodyPr wrap="square" lIns="0" tIns="0" rIns="0" bIns="0" rtlCol="0" anchor="ctr">
             <a:normAutofit/>
           </a:bodyPr>
           <a:lstStyle/>
           <a:p>
-            <a:pPr indent="0" marL="0">
-              <a:buNone/>
-            </a:pPr>
-            <a:r>
-              <a:rPr lang="en-US" sz="1250" dirty="0">
-                <a:solidFill>
-                  <a:srgbClr val="17364A"/>
-                </a:solidFill>
-                <a:latin typeface="Aptos" pitchFamily="34" charset="0"/>
-                <a:ea typeface="Aptos" pitchFamily="34" charset="-122"/>
-                <a:cs typeface="Aptos" pitchFamily="34" charset="-120"/>
-              </a:rPr>
-              <a:t>If your department already has a strong equivalent tool, adapt or use the existing process instead of recreating it.</a:t>
-            </a:r>
-            <a:endParaRPr lang="en-US" sz="1250" dirty="0"/>
+            <a:pPr algn="ctr" indent="0" marL="0">
+              <a:buNone/>
+            </a:pPr>
+            <a:r>
+              <a:rPr lang="en-US" sz="1500" b="1" dirty="0">
+                <a:solidFill>
+                  <a:srgbClr val="FFFFFF"/>
+                </a:solidFill>
+                <a:latin typeface="Aptos" pitchFamily="34" charset="0"/>
+                <a:ea typeface="Aptos" pitchFamily="34" charset="-122"/>
+                <a:cs typeface="Aptos" pitchFamily="34" charset="-120"/>
+              </a:rPr>
+              <a:t>Concept</a:t>
+            </a:r>
+            <a:endParaRPr lang="en-US" sz="1500" dirty="0"/>
+          </a:p>
+        </p:txBody>
+      </p:sp>
+      <p:sp>
+        <p:nvSpPr>
+          <p:cNvPr id="15" name="Text 13"/>
+          <p:cNvSpPr/>
+          <p:nvPr/>
+        </p:nvSpPr>
+        <p:spPr>
+          <a:xfrm>
+            <a:off x="8817864" y="4187952"/>
+            <a:ext cx="201168" cy="256032"/>
+          </a:xfrm>
+          <a:prstGeom prst="rect">
+            <a:avLst/>
+          </a:prstGeom>
+          <a:noFill/>
+          <a:ln/>
+        </p:spPr>
+        <p:txBody>
+          <a:bodyPr wrap="square" lIns="0" tIns="0" rIns="0" bIns="0" rtlCol="0" anchor="ctr"/>
+          <a:lstStyle/>
+          <a:p>
+            <a:pPr algn="ctr" indent="0" marL="0">
+              <a:buNone/>
+            </a:pPr>
+            <a:r>
+              <a:rPr lang="en-US" sz="1800" b="1" dirty="0">
+                <a:solidFill>
+                  <a:srgbClr val="0068B7"/>
+                </a:solidFill>
+                <a:latin typeface="Aptos" pitchFamily="34" charset="0"/>
+                <a:ea typeface="Aptos" pitchFamily="34" charset="-122"/>
+                <a:cs typeface="Aptos" pitchFamily="34" charset="-120"/>
+              </a:rPr>
+              <a:t>â†’</a:t>
+            </a:r>
+            <a:endParaRPr lang="en-US" sz="1800" dirty="0"/>
+          </a:p>
+        </p:txBody>
+      </p:sp>
+      <p:sp>
+        <p:nvSpPr>
+          <p:cNvPr id="16" name="Shape 14"/>
+          <p:cNvSpPr/>
+          <p:nvPr/>
+        </p:nvSpPr>
+        <p:spPr>
+          <a:xfrm>
+            <a:off x="9046464" y="3977640"/>
+            <a:ext cx="972312" cy="749808"/>
+          </a:xfrm>
+          <a:prstGeom prst="roundRect">
+            <a:avLst>
+              <a:gd name="adj" fmla="val 14634"/>
+            </a:avLst>
+          </a:prstGeom>
+          <a:solidFill>
+            <a:srgbClr val="2F8A28"/>
+          </a:solidFill>
+          <a:ln w="12700">
+            <a:solidFill>
+              <a:srgbClr val="2F8A28"/>
+            </a:solidFill>
+            <a:prstDash val="solid"/>
+          </a:ln>
+        </p:spPr>
+      </p:sp>
+      <p:sp>
+        <p:nvSpPr>
+          <p:cNvPr id="17" name="Text 15"/>
+          <p:cNvSpPr/>
+          <p:nvPr/>
+        </p:nvSpPr>
+        <p:spPr>
+          <a:xfrm>
+            <a:off x="9119616" y="4169664"/>
+            <a:ext cx="826008" cy="310896"/>
+          </a:xfrm>
+          <a:prstGeom prst="rect">
+            <a:avLst/>
+          </a:prstGeom>
+          <a:noFill/>
+          <a:ln/>
+        </p:spPr>
+        <p:txBody>
+          <a:bodyPr wrap="square" lIns="0" tIns="0" rIns="0" bIns="0" rtlCol="0" anchor="ctr">
+            <a:normAutofit/>
+          </a:bodyPr>
+          <a:lstStyle/>
+          <a:p>
+            <a:pPr algn="ctr" indent="0" marL="0">
+              <a:buNone/>
+            </a:pPr>
+            <a:r>
+              <a:rPr lang="en-US" sz="1500" b="1" dirty="0">
+                <a:solidFill>
+                  <a:srgbClr val="FFFFFF"/>
+                </a:solidFill>
+                <a:latin typeface="Aptos" pitchFamily="34" charset="0"/>
+                <a:ea typeface="Aptos" pitchFamily="34" charset="-122"/>
+                <a:cs typeface="Aptos" pitchFamily="34" charset="-120"/>
+              </a:rPr>
+              <a:t>Tool</a:t>
+            </a:r>
+            <a:endParaRPr lang="en-US" sz="1500" dirty="0"/>
+          </a:p>
+        </p:txBody>
+      </p:sp>
+      <p:sp>
+        <p:nvSpPr>
+          <p:cNvPr id="18" name="Text 16"/>
+          <p:cNvSpPr/>
+          <p:nvPr/>
+        </p:nvSpPr>
+        <p:spPr>
+          <a:xfrm>
+            <a:off x="10046208" y="4187952"/>
+            <a:ext cx="201168" cy="256032"/>
+          </a:xfrm>
+          <a:prstGeom prst="rect">
+            <a:avLst/>
+          </a:prstGeom>
+          <a:noFill/>
+          <a:ln/>
+        </p:spPr>
+        <p:txBody>
+          <a:bodyPr wrap="square" lIns="0" tIns="0" rIns="0" bIns="0" rtlCol="0" anchor="ctr"/>
+          <a:lstStyle/>
+          <a:p>
+            <a:pPr algn="ctr" indent="0" marL="0">
+              <a:buNone/>
+            </a:pPr>
+            <a:r>
+              <a:rPr lang="en-US" sz="1800" b="1" dirty="0">
+                <a:solidFill>
+                  <a:srgbClr val="0068B7"/>
+                </a:solidFill>
+                <a:latin typeface="Aptos" pitchFamily="34" charset="0"/>
+                <a:ea typeface="Aptos" pitchFamily="34" charset="-122"/>
+                <a:cs typeface="Aptos" pitchFamily="34" charset="-120"/>
+              </a:rPr>
+              <a:t>â†’</a:t>
+            </a:r>
+            <a:endParaRPr lang="en-US" sz="1800" dirty="0"/>
+          </a:p>
+        </p:txBody>
+      </p:sp>
+      <p:sp>
+        <p:nvSpPr>
+          <p:cNvPr id="19" name="Shape 17"/>
+          <p:cNvSpPr/>
+          <p:nvPr/>
+        </p:nvSpPr>
+        <p:spPr>
+          <a:xfrm>
+            <a:off x="10274808" y="3977640"/>
+            <a:ext cx="972312" cy="749808"/>
+          </a:xfrm>
+          <a:prstGeom prst="roundRect">
+            <a:avLst>
+              <a:gd name="adj" fmla="val 14634"/>
+            </a:avLst>
+          </a:prstGeom>
+          <a:solidFill>
+            <a:srgbClr val="D69A2D"/>
+          </a:solidFill>
+          <a:ln w="12700">
+            <a:solidFill>
+              <a:srgbClr val="D69A2D"/>
+            </a:solidFill>
+            <a:prstDash val="solid"/>
+          </a:ln>
+        </p:spPr>
+      </p:sp>
+      <p:sp>
+        <p:nvSpPr>
+          <p:cNvPr id="20" name="Text 18"/>
+          <p:cNvSpPr/>
+          <p:nvPr/>
+        </p:nvSpPr>
+        <p:spPr>
+          <a:xfrm>
+            <a:off x="10347960" y="4169664"/>
+            <a:ext cx="826008" cy="310896"/>
+          </a:xfrm>
+          <a:prstGeom prst="rect">
+            <a:avLst/>
+          </a:prstGeom>
+          <a:noFill/>
+          <a:ln/>
+        </p:spPr>
+        <p:txBody>
+          <a:bodyPr wrap="square" lIns="0" tIns="0" rIns="0" bIns="0" rtlCol="0" anchor="ctr">
+            <a:normAutofit/>
+          </a:bodyPr>
+          <a:lstStyle/>
+          <a:p>
+            <a:pPr algn="ctr" indent="0" marL="0">
+              <a:buNone/>
+            </a:pPr>
+            <a:r>
+              <a:rPr lang="en-US" sz="1500" b="1" dirty="0">
+                <a:solidFill>
+                  <a:srgbClr val="FFFFFF"/>
+                </a:solidFill>
+                <a:latin typeface="Aptos" pitchFamily="34" charset="0"/>
+                <a:ea typeface="Aptos" pitchFamily="34" charset="-122"/>
+                <a:cs typeface="Aptos" pitchFamily="34" charset="-120"/>
+              </a:rPr>
+              <a:t>Artifact</a:t>
+            </a:r>
+            <a:endParaRPr lang="en-US" sz="1500" dirty="0"/>
           </a:p>
         </p:txBody>
       </p:sp>
@@ -11595,7 +12646,7 @@
                 <a:ea typeface="Aptos" pitchFamily="34" charset="-122"/>
                 <a:cs typeface="Aptos" pitchFamily="34" charset="-120"/>
               </a:rPr>
-              <a:t>© Paula Soper</a:t>
+              <a:t>Â© Paula Soper</a:t>
             </a:r>
             <a:endParaRPr lang="en-US" sz="800" dirty="0"/>
           </a:p>
@@ -11603,7 +12654,46 @@
       </p:sp>
       <p:sp>
         <p:nvSpPr>
-          <p:cNvPr id="7" name="Shape 5"/>
+          <p:cNvPr id="7" name="Text 5"/>
+          <p:cNvSpPr/>
+          <p:nvPr/>
+        </p:nvSpPr>
+        <p:spPr>
+          <a:xfrm>
+            <a:off x="11137392" y="6510528"/>
+            <a:ext cx="411480" cy="201168"/>
+          </a:xfrm>
+          <a:prstGeom prst="rect">
+            <a:avLst/>
+          </a:prstGeom>
+          <a:noFill/>
+          <a:ln/>
+        </p:spPr>
+        <p:txBody>
+          <a:bodyPr wrap="square" lIns="0" tIns="0" rIns="0" bIns="0" rtlCol="0" anchor="ctr"/>
+          <a:lstStyle/>
+          <a:p>
+            <a:pPr algn="r" indent="0" marL="0">
+              <a:buNone/>
+            </a:pPr>
+            <a:r>
+              <a:rPr lang="en-US" sz="900" dirty="0">
+                <a:solidFill>
+                  <a:srgbClr val="5F7181"/>
+                </a:solidFill>
+                <a:latin typeface="Aptos" pitchFamily="34" charset="0"/>
+                <a:ea typeface="Aptos" pitchFamily="34" charset="-122"/>
+                <a:cs typeface="Aptos" pitchFamily="34" charset="-120"/>
+              </a:rPr>
+              <a:t>5</a:t>
+            </a:r>
+            <a:endParaRPr lang="en-US" sz="900" dirty="0"/>
+          </a:p>
+        </p:txBody>
+      </p:sp>
+      <p:sp>
+        <p:nvSpPr>
+          <p:cNvPr id="8" name="Shape 6"/>
           <p:cNvSpPr/>
           <p:nvPr/>
         </p:nvSpPr>
@@ -11628,7 +12718,7 @@
       </p:sp>
       <p:sp>
         <p:nvSpPr>
-          <p:cNvPr id="8" name="Text 6"/>
+          <p:cNvPr id="9" name="Text 7"/>
           <p:cNvSpPr/>
           <p:nvPr/>
         </p:nvSpPr>
@@ -11667,14 +12757,14 @@
       </p:sp>
       <p:sp>
         <p:nvSpPr>
-          <p:cNvPr id="9" name="Text 7"/>
+          <p:cNvPr id="10" name="Text 8"/>
           <p:cNvSpPr/>
           <p:nvPr/>
         </p:nvSpPr>
         <p:spPr>
           <a:xfrm>
             <a:off x="640080" y="621792"/>
-            <a:ext cx="10881360" cy="566928"/>
+            <a:ext cx="10881360" cy="713232"/>
           </a:xfrm>
           <a:prstGeom prst="rect">
             <a:avLst/>
@@ -11692,7 +12782,7 @@
               <a:buNone/>
             </a:pPr>
             <a:r>
-              <a:rPr lang="en-US" sz="2700" b="1" dirty="0">
+              <a:rPr lang="en-US" sz="3400" b="1" dirty="0">
                 <a:solidFill>
                   <a:srgbClr val="003A63"/>
                 </a:solidFill>
@@ -11702,20 +12792,20 @@
               </a:rPr>
               <a:t>Learning Objectives</a:t>
             </a:r>
-            <a:endParaRPr lang="en-US" sz="2700" dirty="0"/>
-          </a:p>
-        </p:txBody>
-      </p:sp>
-      <p:sp>
-        <p:nvSpPr>
-          <p:cNvPr id="10" name="Text 8"/>
-          <p:cNvSpPr/>
-          <p:nvPr/>
-        </p:nvSpPr>
-        <p:spPr>
-          <a:xfrm>
-            <a:off x="868680" y="1417320"/>
-            <a:ext cx="6675120" cy="4434840"/>
+            <a:endParaRPr lang="en-US" sz="3400" dirty="0"/>
+          </a:p>
+        </p:txBody>
+      </p:sp>
+      <p:sp>
+        <p:nvSpPr>
+          <p:cNvPr id="11" name="Text 9"/>
+          <p:cNvSpPr/>
+          <p:nvPr/>
+        </p:nvSpPr>
+        <p:spPr>
+          <a:xfrm>
+            <a:off x="868680" y="1508760"/>
+            <a:ext cx="6537960" cy="4160520"/>
           </a:xfrm>
           <a:prstGeom prst="rect">
             <a:avLst/>
@@ -11730,7 +12820,7 @@
           <a:lstStyle/>
           <a:p>
             <a:r>
-              <a:rPr lang="en-US" sz="1700" dirty="0">
+              <a:rPr lang="en-US" sz="2100" dirty="0">
                 <a:solidFill>
                   <a:srgbClr val="17364A"/>
                 </a:solidFill>
@@ -11740,11 +12830,11 @@
               </a:rPr>
               <a:t>Explain why AI accountability must be assigned to people and roles rather than to tools or vendors.</a:t>
             </a:r>
-            <a:endParaRPr lang="en-US" sz="1700" dirty="0"/>
-          </a:p>
-          <a:p>
-            <a:r>
-              <a:rPr lang="en-US" sz="1700" dirty="0">
+            <a:endParaRPr lang="en-US" sz="2100" dirty="0"/>
+          </a:p>
+          <a:p>
+            <a:r>
+              <a:rPr lang="en-US" sz="2100" dirty="0">
                 <a:solidFill>
                   <a:srgbClr val="17364A"/>
                 </a:solidFill>
@@ -11752,13 +12842,13 @@
                 <a:ea typeface="Aptos" pitchFamily="34" charset="-122"/>
                 <a:cs typeface="Aptos" pitchFamily="34" charset="-120"/>
               </a:rPr>
-              <a:t>Identify executive, program, technical, privacy, legal, security, and governance responsibilities for AI decisions.</a:t>
-            </a:r>
-            <a:endParaRPr lang="en-US" sz="1700" dirty="0"/>
-          </a:p>
-          <a:p>
-            <a:r>
-              <a:rPr lang="en-US" sz="1700" dirty="0">
+              <a:t>Identify executive, program, technical, privacy, legal, security, and governance responsibilities for.</a:t>
+            </a:r>
+            <a:endParaRPr lang="en-US" sz="2100" dirty="0"/>
+          </a:p>
+          <a:p>
+            <a:r>
+              <a:rPr lang="en-US" sz="2100" dirty="0">
                 <a:solidFill>
                   <a:srgbClr val="17364A"/>
                 </a:solidFill>
@@ -11766,29 +12856,15 @@
                 <a:ea typeface="Aptos" pitchFamily="34" charset="-122"/>
                 <a:cs typeface="Aptos" pitchFamily="34" charset="-120"/>
               </a:rPr>
-              <a:t>Create a decision-rights matrix for AI use case approval, risk acceptance, monitoring, escalation, and retirement.</a:t>
-            </a:r>
-            <a:endParaRPr lang="en-US" sz="1700" dirty="0"/>
-          </a:p>
-          <a:p>
-            <a:r>
-              <a:rPr lang="en-US" sz="1700" dirty="0">
-                <a:solidFill>
-                  <a:srgbClr val="17364A"/>
-                </a:solidFill>
-                <a:latin typeface="Aptos" pitchFamily="34" charset="0"/>
-                <a:ea typeface="Aptos" pitchFamily="34" charset="-122"/>
-                <a:cs typeface="Aptos" pitchFamily="34" charset="-120"/>
-              </a:rPr>
-              <a:t>Distinguish between consultative input, approval authority, and operational ownership.</a:t>
-            </a:r>
-            <a:endParaRPr lang="en-US" sz="1700" dirty="0"/>
-          </a:p>
-        </p:txBody>
-      </p:sp>
-      <p:sp>
-        <p:nvSpPr>
-          <p:cNvPr id="11" name="Shape 9"/>
+              <a:t>Create a decision-rights matrix for AI use case approval, risk acceptance, monitoring, escalation, and.</a:t>
+            </a:r>
+            <a:endParaRPr lang="en-US" sz="2100" dirty="0"/>
+          </a:p>
+        </p:txBody>
+      </p:sp>
+      <p:sp>
+        <p:nvSpPr>
+          <p:cNvPr id="12" name="Shape 10"/>
           <p:cNvSpPr/>
           <p:nvPr/>
         </p:nvSpPr>
@@ -11815,14 +12891,14 @@
       </p:sp>
       <p:sp>
         <p:nvSpPr>
-          <p:cNvPr id="12" name="Text 10"/>
+          <p:cNvPr id="13" name="Text 11"/>
           <p:cNvSpPr/>
           <p:nvPr/>
         </p:nvSpPr>
         <p:spPr>
           <a:xfrm>
             <a:off x="8074152" y="1563624"/>
-            <a:ext cx="2825496" cy="201168"/>
+            <a:ext cx="2825496" cy="256032"/>
           </a:xfrm>
           <a:prstGeom prst="rect">
             <a:avLst/>
@@ -11838,7 +12914,7 @@
               <a:buNone/>
             </a:pPr>
             <a:r>
-              <a:rPr lang="en-US" sz="950" b="1" dirty="0">
+              <a:rPr lang="en-US" sz="1300" b="1" dirty="0">
                 <a:solidFill>
                   <a:srgbClr val="0068B7"/>
                 </a:solidFill>
@@ -11848,20 +12924,20 @@
               </a:rPr>
               <a:t>Key idea</a:t>
             </a:r>
-            <a:endParaRPr lang="en-US" sz="950" dirty="0"/>
-          </a:p>
-        </p:txBody>
-      </p:sp>
-      <p:sp>
-        <p:nvSpPr>
-          <p:cNvPr id="13" name="Text 11"/>
-          <p:cNvSpPr/>
-          <p:nvPr/>
-        </p:nvSpPr>
-        <p:spPr>
-          <a:xfrm>
-            <a:off x="8074152" y="1856232"/>
-            <a:ext cx="2825496" cy="1261872"/>
+            <a:endParaRPr lang="en-US" sz="1300" dirty="0"/>
+          </a:p>
+        </p:txBody>
+      </p:sp>
+      <p:sp>
+        <p:nvSpPr>
+          <p:cNvPr id="14" name="Text 12"/>
+          <p:cNvSpPr/>
+          <p:nvPr/>
+        </p:nvSpPr>
+        <p:spPr>
+          <a:xfrm>
+            <a:off x="8074152" y="1920240"/>
+            <a:ext cx="2825496" cy="1188720"/>
           </a:xfrm>
           <a:prstGeom prst="rect">
             <a:avLst/>
@@ -11879,7 +12955,7 @@
               <a:buNone/>
             </a:pPr>
             <a:r>
-              <a:rPr lang="en-US" sz="1250" dirty="0">
+              <a:rPr lang="en-US" sz="1550" dirty="0">
                 <a:solidFill>
                   <a:srgbClr val="17364A"/>
                 </a:solidFill>
@@ -11889,13 +12965,13 @@
               </a:rPr>
               <a:t>Explain why AI accountability must be assigned to people and roles rather than to tools or vendors.</a:t>
             </a:r>
-            <a:endParaRPr lang="en-US" sz="1250" dirty="0"/>
-          </a:p>
-        </p:txBody>
-      </p:sp>
-      <p:sp>
-        <p:nvSpPr>
-          <p:cNvPr id="14" name="Shape 12"/>
+            <a:endParaRPr lang="en-US" sz="1550" dirty="0"/>
+          </a:p>
+        </p:txBody>
+      </p:sp>
+      <p:sp>
+        <p:nvSpPr>
+          <p:cNvPr id="15" name="Shape 13"/>
           <p:cNvSpPr/>
           <p:nvPr/>
         </p:nvSpPr>
@@ -11922,14 +12998,14 @@
       </p:sp>
       <p:sp>
         <p:nvSpPr>
-          <p:cNvPr id="15" name="Text 13"/>
+          <p:cNvPr id="16" name="Text 14"/>
           <p:cNvSpPr/>
           <p:nvPr/>
         </p:nvSpPr>
         <p:spPr>
           <a:xfrm>
             <a:off x="8074152" y="3666744"/>
-            <a:ext cx="2825496" cy="201168"/>
+            <a:ext cx="2825496" cy="256032"/>
           </a:xfrm>
           <a:prstGeom prst="rect">
             <a:avLst/>
@@ -11945,7 +13021,7 @@
               <a:buNone/>
             </a:pPr>
             <a:r>
-              <a:rPr lang="en-US" sz="950" b="1" dirty="0">
+              <a:rPr lang="en-US" sz="1300" b="1" dirty="0">
                 <a:solidFill>
                   <a:srgbClr val="0068B7"/>
                 </a:solidFill>
@@ -11955,20 +13031,20 @@
               </a:rPr>
               <a:t>Use this for</a:t>
             </a:r>
-            <a:endParaRPr lang="en-US" sz="950" dirty="0"/>
-          </a:p>
-        </p:txBody>
-      </p:sp>
-      <p:sp>
-        <p:nvSpPr>
-          <p:cNvPr id="16" name="Text 14"/>
-          <p:cNvSpPr/>
-          <p:nvPr/>
-        </p:nvSpPr>
-        <p:spPr>
-          <a:xfrm>
-            <a:off x="8074152" y="3959352"/>
-            <a:ext cx="2825496" cy="1170432"/>
+            <a:endParaRPr lang="en-US" sz="1300" dirty="0"/>
+          </a:p>
+        </p:txBody>
+      </p:sp>
+      <p:sp>
+        <p:nvSpPr>
+          <p:cNvPr id="17" name="Text 15"/>
+          <p:cNvSpPr/>
+          <p:nvPr/>
+        </p:nvSpPr>
+        <p:spPr>
+          <a:xfrm>
+            <a:off x="8074152" y="4023360"/>
+            <a:ext cx="2825496" cy="1097280"/>
           </a:xfrm>
           <a:prstGeom prst="rect">
             <a:avLst/>
@@ -11986,7 +13062,7 @@
               <a:buNone/>
             </a:pPr>
             <a:r>
-              <a:rPr lang="en-US" sz="1250" dirty="0">
+              <a:rPr lang="en-US" sz="1550" dirty="0">
                 <a:solidFill>
                   <a:srgbClr val="17364A"/>
                 </a:solidFill>
@@ -11996,7 +13072,7 @@
               </a:rPr>
               <a:t>Connect the concept to public health decisions, safeguards, documentation, or implementation work.</a:t>
             </a:r>
-            <a:endParaRPr lang="en-US" sz="1250" dirty="0"/>
+            <a:endParaRPr lang="en-US" sz="1550" dirty="0"/>
           </a:p>
         </p:txBody>
       </p:sp>
@@ -12193,7 +13269,7 @@
                 <a:ea typeface="Aptos" pitchFamily="34" charset="-122"/>
                 <a:cs typeface="Aptos" pitchFamily="34" charset="-120"/>
               </a:rPr>
-              <a:t>© Paula Soper</a:t>
+              <a:t>Â© Paula Soper</a:t>
             </a:r>
             <a:endParaRPr lang="en-US" sz="800" dirty="0"/>
           </a:p>
@@ -12201,7 +13277,46 @@
       </p:sp>
       <p:sp>
         <p:nvSpPr>
-          <p:cNvPr id="7" name="Shape 5"/>
+          <p:cNvPr id="7" name="Text 5"/>
+          <p:cNvSpPr/>
+          <p:nvPr/>
+        </p:nvSpPr>
+        <p:spPr>
+          <a:xfrm>
+            <a:off x="11137392" y="6510528"/>
+            <a:ext cx="411480" cy="201168"/>
+          </a:xfrm>
+          <a:prstGeom prst="rect">
+            <a:avLst/>
+          </a:prstGeom>
+          <a:noFill/>
+          <a:ln/>
+        </p:spPr>
+        <p:txBody>
+          <a:bodyPr wrap="square" lIns="0" tIns="0" rIns="0" bIns="0" rtlCol="0" anchor="ctr"/>
+          <a:lstStyle/>
+          <a:p>
+            <a:pPr algn="r" indent="0" marL="0">
+              <a:buNone/>
+            </a:pPr>
+            <a:r>
+              <a:rPr lang="en-US" sz="900" dirty="0">
+                <a:solidFill>
+                  <a:srgbClr val="5F7181"/>
+                </a:solidFill>
+                <a:latin typeface="Aptos" pitchFamily="34" charset="0"/>
+                <a:ea typeface="Aptos" pitchFamily="34" charset="-122"/>
+                <a:cs typeface="Aptos" pitchFamily="34" charset="-120"/>
+              </a:rPr>
+              <a:t>6</a:t>
+            </a:r>
+            <a:endParaRPr lang="en-US" sz="900" dirty="0"/>
+          </a:p>
+        </p:txBody>
+      </p:sp>
+      <p:sp>
+        <p:nvSpPr>
+          <p:cNvPr id="8" name="Shape 6"/>
           <p:cNvSpPr/>
           <p:nvPr/>
         </p:nvSpPr>
@@ -12226,7 +13341,7 @@
       </p:sp>
       <p:sp>
         <p:nvSpPr>
-          <p:cNvPr id="8" name="Text 6"/>
+          <p:cNvPr id="9" name="Text 7"/>
           <p:cNvSpPr/>
           <p:nvPr/>
         </p:nvSpPr>
@@ -12265,14 +13380,14 @@
       </p:sp>
       <p:sp>
         <p:nvSpPr>
-          <p:cNvPr id="9" name="Text 7"/>
+          <p:cNvPr id="10" name="Text 8"/>
           <p:cNvSpPr/>
           <p:nvPr/>
         </p:nvSpPr>
         <p:spPr>
           <a:xfrm>
             <a:off x="640080" y="621792"/>
-            <a:ext cx="10881360" cy="566928"/>
+            <a:ext cx="10881360" cy="713232"/>
           </a:xfrm>
           <a:prstGeom prst="rect">
             <a:avLst/>
@@ -12290,7 +13405,7 @@
               <a:buNone/>
             </a:pPr>
             <a:r>
-              <a:rPr lang="en-US" sz="2700" b="1" dirty="0">
+              <a:rPr lang="en-US" sz="3400" b="1" dirty="0">
                 <a:solidFill>
                   <a:srgbClr val="003A63"/>
                 </a:solidFill>
@@ -12300,20 +13415,20 @@
               </a:rPr>
               <a:t>Module Overview</a:t>
             </a:r>
-            <a:endParaRPr lang="en-US" sz="2700" dirty="0"/>
-          </a:p>
-        </p:txBody>
-      </p:sp>
-      <p:sp>
-        <p:nvSpPr>
-          <p:cNvPr id="10" name="Text 8"/>
-          <p:cNvSpPr/>
-          <p:nvPr/>
-        </p:nvSpPr>
-        <p:spPr>
-          <a:xfrm>
-            <a:off x="868680" y="1417320"/>
-            <a:ext cx="6675120" cy="4434840"/>
+            <a:endParaRPr lang="en-US" sz="3400" dirty="0"/>
+          </a:p>
+        </p:txBody>
+      </p:sp>
+      <p:sp>
+        <p:nvSpPr>
+          <p:cNvPr id="11" name="Text 9"/>
+          <p:cNvSpPr/>
+          <p:nvPr/>
+        </p:nvSpPr>
+        <p:spPr>
+          <a:xfrm>
+            <a:off x="868680" y="1508760"/>
+            <a:ext cx="6537960" cy="4160520"/>
           </a:xfrm>
           <a:prstGeom prst="rect">
             <a:avLst/>
@@ -12328,7 +13443,7 @@
           <a:lstStyle/>
           <a:p>
             <a:r>
-              <a:rPr lang="en-US" sz="1700" dirty="0">
+              <a:rPr lang="en-US" sz="2100" dirty="0">
                 <a:solidFill>
                   <a:srgbClr val="17364A"/>
                 </a:solidFill>
@@ -12338,11 +13453,11 @@
               </a:rPr>
               <a:t>AI governance can only work when decision rights are clear.</a:t>
             </a:r>
-            <a:endParaRPr lang="en-US" sz="1700" dirty="0"/>
-          </a:p>
-          <a:p>
-            <a:r>
-              <a:rPr lang="en-US" sz="1700" dirty="0">
+            <a:endParaRPr lang="en-US" sz="2100" dirty="0"/>
+          </a:p>
+          <a:p>
+            <a:r>
+              <a:rPr lang="en-US" sz="2100" dirty="0">
                 <a:solidFill>
                   <a:srgbClr val="17364A"/>
                 </a:solidFill>
@@ -12350,13 +13465,13 @@
                 <a:ea typeface="Aptos" pitchFamily="34" charset="-122"/>
                 <a:cs typeface="Aptos" pitchFamily="34" charset="-120"/>
               </a:rPr>
-              <a:t>Leaders need to know who can approve a pilot, who can accept residual risk, who can authorize use of sensitive data, who.</a:t>
-            </a:r>
-            <a:endParaRPr lang="en-US" sz="1700" dirty="0"/>
-          </a:p>
-          <a:p>
-            <a:r>
-              <a:rPr lang="en-US" sz="1700" dirty="0">
+              <a:t>Leaders need to know who can approve a pilot, who can accept residual risk, who can authorize use of.</a:t>
+            </a:r>
+            <a:endParaRPr lang="en-US" sz="2100" dirty="0"/>
+          </a:p>
+          <a:p>
+            <a:r>
+              <a:rPr lang="en-US" sz="2100" dirty="0">
                 <a:solidFill>
                   <a:srgbClr val="17364A"/>
                 </a:solidFill>
@@ -12364,29 +13479,15 @@
                 <a:ea typeface="Aptos" pitchFamily="34" charset="-122"/>
                 <a:cs typeface="Aptos" pitchFamily="34" charset="-120"/>
               </a:rPr>
-              <a:t>Ambiguous accountability is especially risky in public health because AI outputs may influence investigations,.</a:t>
-            </a:r>
-            <a:endParaRPr lang="en-US" sz="1700" dirty="0"/>
-          </a:p>
-          <a:p>
-            <a:r>
-              <a:rPr lang="en-US" sz="1700" dirty="0">
-                <a:solidFill>
-                  <a:srgbClr val="17364A"/>
-                </a:solidFill>
-                <a:latin typeface="Aptos" pitchFamily="34" charset="0"/>
-                <a:ea typeface="Aptos" pitchFamily="34" charset="-122"/>
-                <a:cs typeface="Aptos" pitchFamily="34" charset="-120"/>
-              </a:rPr>
-              <a:t>This module focuses on executive decision rights and accountability structures.</a:t>
-            </a:r>
-            <a:endParaRPr lang="en-US" sz="1700" dirty="0"/>
-          </a:p>
-        </p:txBody>
-      </p:sp>
-      <p:sp>
-        <p:nvSpPr>
-          <p:cNvPr id="11" name="Shape 9"/>
+              <a:t>Ambiguous accountability is especially risky in public health because AI outputs may influence.</a:t>
+            </a:r>
+            <a:endParaRPr lang="en-US" sz="2100" dirty="0"/>
+          </a:p>
+        </p:txBody>
+      </p:sp>
+      <p:sp>
+        <p:nvSpPr>
+          <p:cNvPr id="12" name="Shape 10"/>
           <p:cNvSpPr/>
           <p:nvPr/>
         </p:nvSpPr>
@@ -12413,14 +13514,14 @@
       </p:sp>
       <p:sp>
         <p:nvSpPr>
-          <p:cNvPr id="12" name="Text 10"/>
+          <p:cNvPr id="13" name="Text 11"/>
           <p:cNvSpPr/>
           <p:nvPr/>
         </p:nvSpPr>
         <p:spPr>
           <a:xfrm>
             <a:off x="8074152" y="1563624"/>
-            <a:ext cx="2825496" cy="201168"/>
+            <a:ext cx="2825496" cy="256032"/>
           </a:xfrm>
           <a:prstGeom prst="rect">
             <a:avLst/>
@@ -12436,7 +13537,7 @@
               <a:buNone/>
             </a:pPr>
             <a:r>
-              <a:rPr lang="en-US" sz="950" b="1" dirty="0">
+              <a:rPr lang="en-US" sz="1300" b="1" dirty="0">
                 <a:solidFill>
                   <a:srgbClr val="0068B7"/>
                 </a:solidFill>
@@ -12446,20 +13547,20 @@
               </a:rPr>
               <a:t>Key idea</a:t>
             </a:r>
-            <a:endParaRPr lang="en-US" sz="950" dirty="0"/>
-          </a:p>
-        </p:txBody>
-      </p:sp>
-      <p:sp>
-        <p:nvSpPr>
-          <p:cNvPr id="13" name="Text 11"/>
-          <p:cNvSpPr/>
-          <p:nvPr/>
-        </p:nvSpPr>
-        <p:spPr>
-          <a:xfrm>
-            <a:off x="8074152" y="1856232"/>
-            <a:ext cx="2825496" cy="1261872"/>
+            <a:endParaRPr lang="en-US" sz="1300" dirty="0"/>
+          </a:p>
+        </p:txBody>
+      </p:sp>
+      <p:sp>
+        <p:nvSpPr>
+          <p:cNvPr id="14" name="Text 12"/>
+          <p:cNvSpPr/>
+          <p:nvPr/>
+        </p:nvSpPr>
+        <p:spPr>
+          <a:xfrm>
+            <a:off x="8074152" y="1920240"/>
+            <a:ext cx="2825496" cy="1188720"/>
           </a:xfrm>
           <a:prstGeom prst="rect">
             <a:avLst/>
@@ -12477,7 +13578,7 @@
               <a:buNone/>
             </a:pPr>
             <a:r>
-              <a:rPr lang="en-US" sz="1250" dirty="0">
+              <a:rPr lang="en-US" sz="1550" dirty="0">
                 <a:solidFill>
                   <a:srgbClr val="17364A"/>
                 </a:solidFill>
@@ -12487,13 +13588,13 @@
               </a:rPr>
               <a:t>AI governance can only work when decision rights are clear.</a:t>
             </a:r>
-            <a:endParaRPr lang="en-US" sz="1250" dirty="0"/>
-          </a:p>
-        </p:txBody>
-      </p:sp>
-      <p:sp>
-        <p:nvSpPr>
-          <p:cNvPr id="14" name="Shape 12"/>
+            <a:endParaRPr lang="en-US" sz="1550" dirty="0"/>
+          </a:p>
+        </p:txBody>
+      </p:sp>
+      <p:sp>
+        <p:nvSpPr>
+          <p:cNvPr id="15" name="Shape 13"/>
           <p:cNvSpPr/>
           <p:nvPr/>
         </p:nvSpPr>
@@ -12520,14 +13621,14 @@
       </p:sp>
       <p:sp>
         <p:nvSpPr>
-          <p:cNvPr id="15" name="Text 13"/>
+          <p:cNvPr id="16" name="Text 14"/>
           <p:cNvSpPr/>
           <p:nvPr/>
         </p:nvSpPr>
         <p:spPr>
           <a:xfrm>
             <a:off x="8074152" y="3666744"/>
-            <a:ext cx="2825496" cy="201168"/>
+            <a:ext cx="2825496" cy="256032"/>
           </a:xfrm>
           <a:prstGeom prst="rect">
             <a:avLst/>
@@ -12543,7 +13644,7 @@
               <a:buNone/>
             </a:pPr>
             <a:r>
-              <a:rPr lang="en-US" sz="950" b="1" dirty="0">
+              <a:rPr lang="en-US" sz="1300" b="1" dirty="0">
                 <a:solidFill>
                   <a:srgbClr val="0068B7"/>
                 </a:solidFill>
@@ -12553,20 +13654,20 @@
               </a:rPr>
               <a:t>Use this for</a:t>
             </a:r>
-            <a:endParaRPr lang="en-US" sz="950" dirty="0"/>
-          </a:p>
-        </p:txBody>
-      </p:sp>
-      <p:sp>
-        <p:nvSpPr>
-          <p:cNvPr id="16" name="Text 14"/>
-          <p:cNvSpPr/>
-          <p:nvPr/>
-        </p:nvSpPr>
-        <p:spPr>
-          <a:xfrm>
-            <a:off x="8074152" y="3959352"/>
-            <a:ext cx="2825496" cy="1170432"/>
+            <a:endParaRPr lang="en-US" sz="1300" dirty="0"/>
+          </a:p>
+        </p:txBody>
+      </p:sp>
+      <p:sp>
+        <p:nvSpPr>
+          <p:cNvPr id="17" name="Text 15"/>
+          <p:cNvSpPr/>
+          <p:nvPr/>
+        </p:nvSpPr>
+        <p:spPr>
+          <a:xfrm>
+            <a:off x="8074152" y="4023360"/>
+            <a:ext cx="2825496" cy="1097280"/>
           </a:xfrm>
           <a:prstGeom prst="rect">
             <a:avLst/>
@@ -12584,7 +13685,7 @@
               <a:buNone/>
             </a:pPr>
             <a:r>
-              <a:rPr lang="en-US" sz="1250" dirty="0">
+              <a:rPr lang="en-US" sz="1550" dirty="0">
                 <a:solidFill>
                   <a:srgbClr val="17364A"/>
                 </a:solidFill>
@@ -12594,7 +13695,7 @@
               </a:rPr>
               <a:t>Connect the concept to public health decisions, safeguards, documentation, or implementation work.</a:t>
             </a:r>
-            <a:endParaRPr lang="en-US" sz="1250" dirty="0"/>
+            <a:endParaRPr lang="en-US" sz="1550" dirty="0"/>
           </a:p>
         </p:txBody>
       </p:sp>
@@ -12791,7 +13892,7 @@
                 <a:ea typeface="Aptos" pitchFamily="34" charset="-122"/>
                 <a:cs typeface="Aptos" pitchFamily="34" charset="-120"/>
               </a:rPr>
-              <a:t>© Paula Soper</a:t>
+              <a:t>Â© Paula Soper</a:t>
             </a:r>
             <a:endParaRPr lang="en-US" sz="800" dirty="0"/>
           </a:p>
@@ -12799,7 +13900,46 @@
       </p:sp>
       <p:sp>
         <p:nvSpPr>
-          <p:cNvPr id="7" name="Shape 5"/>
+          <p:cNvPr id="7" name="Text 5"/>
+          <p:cNvSpPr/>
+          <p:nvPr/>
+        </p:nvSpPr>
+        <p:spPr>
+          <a:xfrm>
+            <a:off x="11137392" y="6510528"/>
+            <a:ext cx="411480" cy="201168"/>
+          </a:xfrm>
+          <a:prstGeom prst="rect">
+            <a:avLst/>
+          </a:prstGeom>
+          <a:noFill/>
+          <a:ln/>
+        </p:spPr>
+        <p:txBody>
+          <a:bodyPr wrap="square" lIns="0" tIns="0" rIns="0" bIns="0" rtlCol="0" anchor="ctr"/>
+          <a:lstStyle/>
+          <a:p>
+            <a:pPr algn="r" indent="0" marL="0">
+              <a:buNone/>
+            </a:pPr>
+            <a:r>
+              <a:rPr lang="en-US" sz="900" dirty="0">
+                <a:solidFill>
+                  <a:srgbClr val="5F7181"/>
+                </a:solidFill>
+                <a:latin typeface="Aptos" pitchFamily="34" charset="0"/>
+                <a:ea typeface="Aptos" pitchFamily="34" charset="-122"/>
+                <a:cs typeface="Aptos" pitchFamily="34" charset="-120"/>
+              </a:rPr>
+              <a:t>7</a:t>
+            </a:r>
+            <a:endParaRPr lang="en-US" sz="900" dirty="0"/>
+          </a:p>
+        </p:txBody>
+      </p:sp>
+      <p:sp>
+        <p:nvSpPr>
+          <p:cNvPr id="8" name="Shape 6"/>
           <p:cNvSpPr/>
           <p:nvPr/>
         </p:nvSpPr>
@@ -12824,7 +13964,7 @@
       </p:sp>
       <p:sp>
         <p:nvSpPr>
-          <p:cNvPr id="8" name="Text 6"/>
+          <p:cNvPr id="9" name="Text 7"/>
           <p:cNvSpPr/>
           <p:nvPr/>
         </p:nvSpPr>
@@ -12863,14 +14003,14 @@
       </p:sp>
       <p:sp>
         <p:nvSpPr>
-          <p:cNvPr id="9" name="Text 7"/>
+          <p:cNvPr id="10" name="Text 8"/>
           <p:cNvSpPr/>
           <p:nvPr/>
         </p:nvSpPr>
         <p:spPr>
           <a:xfrm>
             <a:off x="640080" y="621792"/>
-            <a:ext cx="10881360" cy="566928"/>
+            <a:ext cx="10881360" cy="713232"/>
           </a:xfrm>
           <a:prstGeom prst="rect">
             <a:avLst/>
@@ -12888,7 +14028,7 @@
               <a:buNone/>
             </a:pPr>
             <a:r>
-              <a:rPr lang="en-US" sz="2700" b="1" dirty="0">
+              <a:rPr lang="en-US" sz="3400" b="1" dirty="0">
                 <a:solidFill>
                   <a:srgbClr val="003A63"/>
                 </a:solidFill>
@@ -12898,20 +14038,20 @@
               </a:rPr>
               <a:t>Jurisdiction and Agency Policy Note</a:t>
             </a:r>
-            <a:endParaRPr lang="en-US" sz="2700" dirty="0"/>
-          </a:p>
-        </p:txBody>
-      </p:sp>
-      <p:sp>
-        <p:nvSpPr>
-          <p:cNvPr id="10" name="Text 8"/>
-          <p:cNvSpPr/>
-          <p:nvPr/>
-        </p:nvSpPr>
-        <p:spPr>
-          <a:xfrm>
-            <a:off x="868680" y="1417320"/>
-            <a:ext cx="6675120" cy="4434840"/>
+            <a:endParaRPr lang="en-US" sz="3400" dirty="0"/>
+          </a:p>
+        </p:txBody>
+      </p:sp>
+      <p:sp>
+        <p:nvSpPr>
+          <p:cNvPr id="11" name="Text 9"/>
+          <p:cNvSpPr/>
+          <p:nvPr/>
+        </p:nvSpPr>
+        <p:spPr>
+          <a:xfrm>
+            <a:off x="868680" y="1508760"/>
+            <a:ext cx="6537960" cy="4160520"/>
           </a:xfrm>
           <a:prstGeom prst="rect">
             <a:avLst/>
@@ -12926,7 +14066,7 @@
           <a:lstStyle/>
           <a:p>
             <a:r>
-              <a:rPr lang="en-US" sz="1700" dirty="0">
+              <a:rPr lang="en-US" sz="2100" dirty="0">
                 <a:solidFill>
                   <a:srgbClr val="17364A"/>
                 </a:solidFill>
@@ -12936,11 +14076,11 @@
               </a:rPr>
               <a:t>This module provides national-level training guidance for public health agencies and partners.</a:t>
             </a:r>
-            <a:endParaRPr lang="en-US" sz="1700" dirty="0"/>
-          </a:p>
-          <a:p>
-            <a:r>
-              <a:rPr lang="en-US" sz="1700" dirty="0">
+            <a:endParaRPr lang="en-US" sz="2100" dirty="0"/>
+          </a:p>
+          <a:p>
+            <a:r>
+              <a:rPr lang="en-US" sz="2100" dirty="0">
                 <a:solidFill>
                   <a:srgbClr val="17364A"/>
                 </a:solidFill>
@@ -12948,13 +14088,13 @@
                 <a:ea typeface="Aptos" pitchFamily="34" charset="-122"/>
                 <a:cs typeface="Aptos" pitchFamily="34" charset="-120"/>
               </a:rPr>
-              <a:t>It is not legal advice and does not replace review by agency legal counsel, privacy officers, procurement officials, civil.</a:t>
-            </a:r>
-            <a:endParaRPr lang="en-US" sz="1700" dirty="0"/>
-          </a:p>
-          <a:p>
-            <a:r>
-              <a:rPr lang="en-US" sz="1700" dirty="0">
+              <a:t>It is not legal advice and does not replace review by agency legal counsel, privacy officers,.</a:t>
+            </a:r>
+            <a:endParaRPr lang="en-US" sz="2100" dirty="0"/>
+          </a:p>
+          <a:p>
+            <a:r>
+              <a:rPr lang="en-US" sz="2100" dirty="0">
                 <a:solidFill>
                   <a:srgbClr val="17364A"/>
                 </a:solidFill>
@@ -12962,29 +14102,15 @@
                 <a:ea typeface="Aptos" pitchFamily="34" charset="-122"/>
                 <a:cs typeface="Aptos" pitchFamily="34" charset="-120"/>
               </a:rPr>
-              <a:t>Requirements may vary by state, locality, territory, Tribe, agency, funding source, data-sharing agreement, emergency.</a:t>
-            </a:r>
-            <a:endParaRPr lang="en-US" sz="1700" dirty="0"/>
-          </a:p>
-          <a:p>
-            <a:r>
-              <a:rPr lang="en-US" sz="1700" dirty="0">
-                <a:solidFill>
-                  <a:srgbClr val="17364A"/>
-                </a:solidFill>
-                <a:latin typeface="Aptos" pitchFamily="34" charset="0"/>
-                <a:ea typeface="Aptos" pitchFamily="34" charset="-122"/>
-                <a:cs typeface="Aptos" pitchFamily="34" charset="-120"/>
-              </a:rPr>
-              <a:t>Learners should use this module to identify the issues that require review and should confirm applicable requirements.</a:t>
-            </a:r>
-            <a:endParaRPr lang="en-US" sz="1700" dirty="0"/>
-          </a:p>
-        </p:txBody>
-      </p:sp>
-      <p:sp>
-        <p:nvSpPr>
-          <p:cNvPr id="11" name="Shape 9"/>
+              <a:t>Requirements may vary by state, locality, territory, Tribe, agency, funding source, data-sharing.</a:t>
+            </a:r>
+            <a:endParaRPr lang="en-US" sz="2100" dirty="0"/>
+          </a:p>
+        </p:txBody>
+      </p:sp>
+      <p:sp>
+        <p:nvSpPr>
+          <p:cNvPr id="12" name="Shape 10"/>
           <p:cNvSpPr/>
           <p:nvPr/>
         </p:nvSpPr>
@@ -13011,14 +14137,14 @@
       </p:sp>
       <p:sp>
         <p:nvSpPr>
-          <p:cNvPr id="12" name="Text 10"/>
+          <p:cNvPr id="13" name="Text 11"/>
           <p:cNvSpPr/>
           <p:nvPr/>
         </p:nvSpPr>
         <p:spPr>
           <a:xfrm>
             <a:off x="8074152" y="1563624"/>
-            <a:ext cx="2825496" cy="201168"/>
+            <a:ext cx="2825496" cy="256032"/>
           </a:xfrm>
           <a:prstGeom prst="rect">
             <a:avLst/>
@@ -13034,7 +14160,7 @@
               <a:buNone/>
             </a:pPr>
             <a:r>
-              <a:rPr lang="en-US" sz="950" b="1" dirty="0">
+              <a:rPr lang="en-US" sz="1300" b="1" dirty="0">
                 <a:solidFill>
                   <a:srgbClr val="0068B7"/>
                 </a:solidFill>
@@ -13044,20 +14170,20 @@
               </a:rPr>
               <a:t>Key idea</a:t>
             </a:r>
-            <a:endParaRPr lang="en-US" sz="950" dirty="0"/>
-          </a:p>
-        </p:txBody>
-      </p:sp>
-      <p:sp>
-        <p:nvSpPr>
-          <p:cNvPr id="13" name="Text 11"/>
-          <p:cNvSpPr/>
-          <p:nvPr/>
-        </p:nvSpPr>
-        <p:spPr>
-          <a:xfrm>
-            <a:off x="8074152" y="1856232"/>
-            <a:ext cx="2825496" cy="1261872"/>
+            <a:endParaRPr lang="en-US" sz="1300" dirty="0"/>
+          </a:p>
+        </p:txBody>
+      </p:sp>
+      <p:sp>
+        <p:nvSpPr>
+          <p:cNvPr id="14" name="Text 12"/>
+          <p:cNvSpPr/>
+          <p:nvPr/>
+        </p:nvSpPr>
+        <p:spPr>
+          <a:xfrm>
+            <a:off x="8074152" y="1920240"/>
+            <a:ext cx="2825496" cy="1188720"/>
           </a:xfrm>
           <a:prstGeom prst="rect">
             <a:avLst/>
@@ -13075,7 +14201,7 @@
               <a:buNone/>
             </a:pPr>
             <a:r>
-              <a:rPr lang="en-US" sz="1250" dirty="0">
+              <a:rPr lang="en-US" sz="1550" dirty="0">
                 <a:solidFill>
                   <a:srgbClr val="17364A"/>
                 </a:solidFill>
@@ -13085,13 +14211,13 @@
               </a:rPr>
               <a:t>This module provides national-level training guidance for public health agencies and partners.</a:t>
             </a:r>
-            <a:endParaRPr lang="en-US" sz="1250" dirty="0"/>
-          </a:p>
-        </p:txBody>
-      </p:sp>
-      <p:sp>
-        <p:nvSpPr>
-          <p:cNvPr id="14" name="Shape 12"/>
+            <a:endParaRPr lang="en-US" sz="1550" dirty="0"/>
+          </a:p>
+        </p:txBody>
+      </p:sp>
+      <p:sp>
+        <p:nvSpPr>
+          <p:cNvPr id="15" name="Shape 13"/>
           <p:cNvSpPr/>
           <p:nvPr/>
         </p:nvSpPr>
@@ -13118,14 +14244,14 @@
       </p:sp>
       <p:sp>
         <p:nvSpPr>
-          <p:cNvPr id="15" name="Text 13"/>
+          <p:cNvPr id="16" name="Text 14"/>
           <p:cNvSpPr/>
           <p:nvPr/>
         </p:nvSpPr>
         <p:spPr>
           <a:xfrm>
             <a:off x="8074152" y="3666744"/>
-            <a:ext cx="2825496" cy="201168"/>
+            <a:ext cx="2825496" cy="256032"/>
           </a:xfrm>
           <a:prstGeom prst="rect">
             <a:avLst/>
@@ -13141,7 +14267,7 @@
               <a:buNone/>
             </a:pPr>
             <a:r>
-              <a:rPr lang="en-US" sz="950" b="1" dirty="0">
+              <a:rPr lang="en-US" sz="1300" b="1" dirty="0">
                 <a:solidFill>
                   <a:srgbClr val="0068B7"/>
                 </a:solidFill>
@@ -13151,20 +14277,20 @@
               </a:rPr>
               <a:t>Use this for</a:t>
             </a:r>
-            <a:endParaRPr lang="en-US" sz="950" dirty="0"/>
-          </a:p>
-        </p:txBody>
-      </p:sp>
-      <p:sp>
-        <p:nvSpPr>
-          <p:cNvPr id="16" name="Text 14"/>
-          <p:cNvSpPr/>
-          <p:nvPr/>
-        </p:nvSpPr>
-        <p:spPr>
-          <a:xfrm>
-            <a:off x="8074152" y="3959352"/>
-            <a:ext cx="2825496" cy="1170432"/>
+            <a:endParaRPr lang="en-US" sz="1300" dirty="0"/>
+          </a:p>
+        </p:txBody>
+      </p:sp>
+      <p:sp>
+        <p:nvSpPr>
+          <p:cNvPr id="17" name="Text 15"/>
+          <p:cNvSpPr/>
+          <p:nvPr/>
+        </p:nvSpPr>
+        <p:spPr>
+          <a:xfrm>
+            <a:off x="8074152" y="4023360"/>
+            <a:ext cx="2825496" cy="1097280"/>
           </a:xfrm>
           <a:prstGeom prst="rect">
             <a:avLst/>
@@ -13182,7 +14308,7 @@
               <a:buNone/>
             </a:pPr>
             <a:r>
-              <a:rPr lang="en-US" sz="1250" dirty="0">
+              <a:rPr lang="en-US" sz="1550" dirty="0">
                 <a:solidFill>
                   <a:srgbClr val="17364A"/>
                 </a:solidFill>
@@ -13192,7 +14318,7 @@
               </a:rPr>
               <a:t>Connect the concept to public health decisions, safeguards, documentation, or implementation work.</a:t>
             </a:r>
-            <a:endParaRPr lang="en-US" sz="1250" dirty="0"/>
+            <a:endParaRPr lang="en-US" sz="1550" dirty="0"/>
           </a:p>
         </p:txBody>
       </p:sp>
@@ -13389,7 +14515,7 @@
                 <a:ea typeface="Aptos" pitchFamily="34" charset="-122"/>
                 <a:cs typeface="Aptos" pitchFamily="34" charset="-120"/>
               </a:rPr>
-              <a:t>© Paula Soper</a:t>
+              <a:t>Â© Paula Soper</a:t>
             </a:r>
             <a:endParaRPr lang="en-US" sz="800" dirty="0"/>
           </a:p>
@@ -13397,7 +14523,46 @@
       </p:sp>
       <p:sp>
         <p:nvSpPr>
-          <p:cNvPr id="7" name="Shape 5"/>
+          <p:cNvPr id="7" name="Text 5"/>
+          <p:cNvSpPr/>
+          <p:nvPr/>
+        </p:nvSpPr>
+        <p:spPr>
+          <a:xfrm>
+            <a:off x="11137392" y="6510528"/>
+            <a:ext cx="411480" cy="201168"/>
+          </a:xfrm>
+          <a:prstGeom prst="rect">
+            <a:avLst/>
+          </a:prstGeom>
+          <a:noFill/>
+          <a:ln/>
+        </p:spPr>
+        <p:txBody>
+          <a:bodyPr wrap="square" lIns="0" tIns="0" rIns="0" bIns="0" rtlCol="0" anchor="ctr"/>
+          <a:lstStyle/>
+          <a:p>
+            <a:pPr algn="r" indent="0" marL="0">
+              <a:buNone/>
+            </a:pPr>
+            <a:r>
+              <a:rPr lang="en-US" sz="900" dirty="0">
+                <a:solidFill>
+                  <a:srgbClr val="5F7181"/>
+                </a:solidFill>
+                <a:latin typeface="Aptos" pitchFamily="34" charset="0"/>
+                <a:ea typeface="Aptos" pitchFamily="34" charset="-122"/>
+                <a:cs typeface="Aptos" pitchFamily="34" charset="-120"/>
+              </a:rPr>
+              <a:t>8</a:t>
+            </a:r>
+            <a:endParaRPr lang="en-US" sz="900" dirty="0"/>
+          </a:p>
+        </p:txBody>
+      </p:sp>
+      <p:sp>
+        <p:nvSpPr>
+          <p:cNvPr id="8" name="Shape 6"/>
           <p:cNvSpPr/>
           <p:nvPr/>
         </p:nvSpPr>
@@ -13422,7 +14587,7 @@
       </p:sp>
       <p:sp>
         <p:nvSpPr>
-          <p:cNvPr id="8" name="Text 6"/>
+          <p:cNvPr id="9" name="Text 7"/>
           <p:cNvSpPr/>
           <p:nvPr/>
         </p:nvSpPr>
@@ -13461,14 +14626,14 @@
       </p:sp>
       <p:sp>
         <p:nvSpPr>
-          <p:cNvPr id="9" name="Text 7"/>
+          <p:cNvPr id="10" name="Text 8"/>
           <p:cNvSpPr/>
           <p:nvPr/>
         </p:nvSpPr>
         <p:spPr>
           <a:xfrm>
             <a:off x="640080" y="621792"/>
-            <a:ext cx="10881360" cy="566928"/>
+            <a:ext cx="10881360" cy="713232"/>
           </a:xfrm>
           <a:prstGeom prst="rect">
             <a:avLst/>
@@ -13486,7 +14651,7 @@
               <a:buNone/>
             </a:pPr>
             <a:r>
-              <a:rPr lang="en-US" sz="2700" b="1" dirty="0">
+              <a:rPr lang="en-US" sz="3400" b="1" dirty="0">
                 <a:solidFill>
                   <a:srgbClr val="003A63"/>
                 </a:solidFill>
@@ -13496,20 +14661,20 @@
               </a:rPr>
               <a:t>Why This Topic Matters for Public Health AI</a:t>
             </a:r>
-            <a:endParaRPr lang="en-US" sz="2700" dirty="0"/>
-          </a:p>
-        </p:txBody>
-      </p:sp>
-      <p:sp>
-        <p:nvSpPr>
-          <p:cNvPr id="10" name="Text 8"/>
-          <p:cNvSpPr/>
-          <p:nvPr/>
-        </p:nvSpPr>
-        <p:spPr>
-          <a:xfrm>
-            <a:off x="868680" y="1417320"/>
-            <a:ext cx="6675120" cy="4434840"/>
+            <a:endParaRPr lang="en-US" sz="3400" dirty="0"/>
+          </a:p>
+        </p:txBody>
+      </p:sp>
+      <p:sp>
+        <p:nvSpPr>
+          <p:cNvPr id="11" name="Text 9"/>
+          <p:cNvSpPr/>
+          <p:nvPr/>
+        </p:nvSpPr>
+        <p:spPr>
+          <a:xfrm>
+            <a:off x="868680" y="1508760"/>
+            <a:ext cx="6537960" cy="4160520"/>
           </a:xfrm>
           <a:prstGeom prst="rect">
             <a:avLst/>
@@ -13524,7 +14689,7 @@
           <a:lstStyle/>
           <a:p>
             <a:r>
-              <a:rPr lang="en-US" sz="1700" dirty="0">
+              <a:rPr lang="en-US" sz="2100" dirty="0">
                 <a:solidFill>
                   <a:srgbClr val="17364A"/>
                 </a:solidFill>
@@ -13534,11 +14699,11 @@
               </a:rPr>
               <a:t>AI systems can distribute responsibility across many actors.</a:t>
             </a:r>
-            <a:endParaRPr lang="en-US" sz="1700" dirty="0"/>
-          </a:p>
-          <a:p>
-            <a:r>
-              <a:rPr lang="en-US" sz="1700" dirty="0">
+            <a:endParaRPr lang="en-US" sz="2100" dirty="0"/>
+          </a:p>
+          <a:p>
+            <a:r>
+              <a:rPr lang="en-US" sz="2100" dirty="0">
                 <a:solidFill>
                   <a:srgbClr val="17364A"/>
                 </a:solidFill>
@@ -13546,13 +14711,13 @@
                 <a:ea typeface="Aptos" pitchFamily="34" charset="-122"/>
                 <a:cs typeface="Aptos" pitchFamily="34" charset="-120"/>
               </a:rPr>
-              <a:t>A vendor may provide the model, IT may manage access, a program may define the workflow, an epidemiologist may review the.</a:t>
-            </a:r>
-            <a:endParaRPr lang="en-US" sz="1700" dirty="0"/>
-          </a:p>
-          <a:p>
-            <a:r>
-              <a:rPr lang="en-US" sz="1700" dirty="0">
+              <a:t>A vendor may provide the model, IT may manage access, a program may define the workflow, an.</a:t>
+            </a:r>
+            <a:endParaRPr lang="en-US" sz="2100" dirty="0"/>
+          </a:p>
+          <a:p>
+            <a:r>
+              <a:rPr lang="en-US" sz="2100" dirty="0">
                 <a:solidFill>
                   <a:srgbClr val="17364A"/>
                 </a:solidFill>
@@ -13560,29 +14725,15 @@
                 <a:ea typeface="Aptos" pitchFamily="34" charset="-122"/>
                 <a:cs typeface="Aptos" pitchFamily="34" charset="-120"/>
               </a:rPr>
-              <a:t>Without a formal accountability model, each actor may assume that another party is responsible for validation, monitoring,.</a:t>
-            </a:r>
-            <a:endParaRPr lang="en-US" sz="1700" dirty="0"/>
-          </a:p>
-          <a:p>
-            <a:r>
-              <a:rPr lang="en-US" sz="1700" dirty="0">
-                <a:solidFill>
-                  <a:srgbClr val="17364A"/>
-                </a:solidFill>
-                <a:latin typeface="Aptos" pitchFamily="34" charset="0"/>
-                <a:ea typeface="Aptos" pitchFamily="34" charset="-122"/>
-                <a:cs typeface="Aptos" pitchFamily="34" charset="-120"/>
-              </a:rPr>
-              <a:t>Clear decision rights support trust and speed.</a:t>
-            </a:r>
-            <a:endParaRPr lang="en-US" sz="1700" dirty="0"/>
-          </a:p>
-        </p:txBody>
-      </p:sp>
-      <p:sp>
-        <p:nvSpPr>
-          <p:cNvPr id="11" name="Shape 9"/>
+              <a:t>Without a formal accountability model, each actor may assume that another party is responsible for.</a:t>
+            </a:r>
+            <a:endParaRPr lang="en-US" sz="2100" dirty="0"/>
+          </a:p>
+        </p:txBody>
+      </p:sp>
+      <p:sp>
+        <p:nvSpPr>
+          <p:cNvPr id="12" name="Shape 10"/>
           <p:cNvSpPr/>
           <p:nvPr/>
         </p:nvSpPr>
@@ -13609,14 +14760,14 @@
       </p:sp>
       <p:sp>
         <p:nvSpPr>
-          <p:cNvPr id="12" name="Text 10"/>
+          <p:cNvPr id="13" name="Text 11"/>
           <p:cNvSpPr/>
           <p:nvPr/>
         </p:nvSpPr>
         <p:spPr>
           <a:xfrm>
             <a:off x="8074152" y="1563624"/>
-            <a:ext cx="2825496" cy="201168"/>
+            <a:ext cx="2825496" cy="256032"/>
           </a:xfrm>
           <a:prstGeom prst="rect">
             <a:avLst/>
@@ -13632,7 +14783,7 @@
               <a:buNone/>
             </a:pPr>
             <a:r>
-              <a:rPr lang="en-US" sz="950" b="1" dirty="0">
+              <a:rPr lang="en-US" sz="1300" b="1" dirty="0">
                 <a:solidFill>
                   <a:srgbClr val="0068B7"/>
                 </a:solidFill>
@@ -13642,20 +14793,20 @@
               </a:rPr>
               <a:t>Key idea</a:t>
             </a:r>
-            <a:endParaRPr lang="en-US" sz="950" dirty="0"/>
-          </a:p>
-        </p:txBody>
-      </p:sp>
-      <p:sp>
-        <p:nvSpPr>
-          <p:cNvPr id="13" name="Text 11"/>
-          <p:cNvSpPr/>
-          <p:nvPr/>
-        </p:nvSpPr>
-        <p:spPr>
-          <a:xfrm>
-            <a:off x="8074152" y="1856232"/>
-            <a:ext cx="2825496" cy="1261872"/>
+            <a:endParaRPr lang="en-US" sz="1300" dirty="0"/>
+          </a:p>
+        </p:txBody>
+      </p:sp>
+      <p:sp>
+        <p:nvSpPr>
+          <p:cNvPr id="14" name="Text 12"/>
+          <p:cNvSpPr/>
+          <p:nvPr/>
+        </p:nvSpPr>
+        <p:spPr>
+          <a:xfrm>
+            <a:off x="8074152" y="1920240"/>
+            <a:ext cx="2825496" cy="1188720"/>
           </a:xfrm>
           <a:prstGeom prst="rect">
             <a:avLst/>
@@ -13673,7 +14824,7 @@
               <a:buNone/>
             </a:pPr>
             <a:r>
-              <a:rPr lang="en-US" sz="1250" dirty="0">
+              <a:rPr lang="en-US" sz="1550" dirty="0">
                 <a:solidFill>
                   <a:srgbClr val="17364A"/>
                 </a:solidFill>
@@ -13683,13 +14834,13 @@
               </a:rPr>
               <a:t>AI systems can distribute responsibility across many actors.</a:t>
             </a:r>
-            <a:endParaRPr lang="en-US" sz="1250" dirty="0"/>
-          </a:p>
-        </p:txBody>
-      </p:sp>
-      <p:sp>
-        <p:nvSpPr>
-          <p:cNvPr id="14" name="Shape 12"/>
+            <a:endParaRPr lang="en-US" sz="1550" dirty="0"/>
+          </a:p>
+        </p:txBody>
+      </p:sp>
+      <p:sp>
+        <p:nvSpPr>
+          <p:cNvPr id="15" name="Shape 13"/>
           <p:cNvSpPr/>
           <p:nvPr/>
         </p:nvSpPr>
@@ -13716,14 +14867,14 @@
       </p:sp>
       <p:sp>
         <p:nvSpPr>
-          <p:cNvPr id="15" name="Text 13"/>
+          <p:cNvPr id="16" name="Text 14"/>
           <p:cNvSpPr/>
           <p:nvPr/>
         </p:nvSpPr>
         <p:spPr>
           <a:xfrm>
             <a:off x="8074152" y="3666744"/>
-            <a:ext cx="2825496" cy="201168"/>
+            <a:ext cx="2825496" cy="256032"/>
           </a:xfrm>
           <a:prstGeom prst="rect">
             <a:avLst/>
@@ -13739,7 +14890,7 @@
               <a:buNone/>
             </a:pPr>
             <a:r>
-              <a:rPr lang="en-US" sz="950" b="1" dirty="0">
+              <a:rPr lang="en-US" sz="1300" b="1" dirty="0">
                 <a:solidFill>
                   <a:srgbClr val="0068B7"/>
                 </a:solidFill>
@@ -13749,20 +14900,20 @@
               </a:rPr>
               <a:t>Use this for</a:t>
             </a:r>
-            <a:endParaRPr lang="en-US" sz="950" dirty="0"/>
-          </a:p>
-        </p:txBody>
-      </p:sp>
-      <p:sp>
-        <p:nvSpPr>
-          <p:cNvPr id="16" name="Text 14"/>
-          <p:cNvSpPr/>
-          <p:nvPr/>
-        </p:nvSpPr>
-        <p:spPr>
-          <a:xfrm>
-            <a:off x="8074152" y="3959352"/>
-            <a:ext cx="2825496" cy="1170432"/>
+            <a:endParaRPr lang="en-US" sz="1300" dirty="0"/>
+          </a:p>
+        </p:txBody>
+      </p:sp>
+      <p:sp>
+        <p:nvSpPr>
+          <p:cNvPr id="17" name="Text 15"/>
+          <p:cNvSpPr/>
+          <p:nvPr/>
+        </p:nvSpPr>
+        <p:spPr>
+          <a:xfrm>
+            <a:off x="8074152" y="4023360"/>
+            <a:ext cx="2825496" cy="1097280"/>
           </a:xfrm>
           <a:prstGeom prst="rect">
             <a:avLst/>
@@ -13780,7 +14931,7 @@
               <a:buNone/>
             </a:pPr>
             <a:r>
-              <a:rPr lang="en-US" sz="1250" dirty="0">
+              <a:rPr lang="en-US" sz="1550" dirty="0">
                 <a:solidFill>
                   <a:srgbClr val="17364A"/>
                 </a:solidFill>
@@ -13790,7 +14941,7 @@
               </a:rPr>
               <a:t>Connect the concept to public health decisions, safeguards, documentation, or implementation work.</a:t>
             </a:r>
-            <a:endParaRPr lang="en-US" sz="1250" dirty="0"/>
+            <a:endParaRPr lang="en-US" sz="1550" dirty="0"/>
           </a:p>
         </p:txBody>
       </p:sp>
@@ -13987,7 +15138,7 @@
                 <a:ea typeface="Aptos" pitchFamily="34" charset="-122"/>
                 <a:cs typeface="Aptos" pitchFamily="34" charset="-120"/>
               </a:rPr>
-              <a:t>© Paula Soper</a:t>
+              <a:t>Â© Paula Soper</a:t>
             </a:r>
             <a:endParaRPr lang="en-US" sz="800" dirty="0"/>
           </a:p>
@@ -13995,7 +15146,46 @@
       </p:sp>
       <p:sp>
         <p:nvSpPr>
-          <p:cNvPr id="7" name="Shape 5"/>
+          <p:cNvPr id="7" name="Text 5"/>
+          <p:cNvSpPr/>
+          <p:nvPr/>
+        </p:nvSpPr>
+        <p:spPr>
+          <a:xfrm>
+            <a:off x="11137392" y="6510528"/>
+            <a:ext cx="411480" cy="201168"/>
+          </a:xfrm>
+          <a:prstGeom prst="rect">
+            <a:avLst/>
+          </a:prstGeom>
+          <a:noFill/>
+          <a:ln/>
+        </p:spPr>
+        <p:txBody>
+          <a:bodyPr wrap="square" lIns="0" tIns="0" rIns="0" bIns="0" rtlCol="0" anchor="ctr"/>
+          <a:lstStyle/>
+          <a:p>
+            <a:pPr algn="r" indent="0" marL="0">
+              <a:buNone/>
+            </a:pPr>
+            <a:r>
+              <a:rPr lang="en-US" sz="900" dirty="0">
+                <a:solidFill>
+                  <a:srgbClr val="5F7181"/>
+                </a:solidFill>
+                <a:latin typeface="Aptos" pitchFamily="34" charset="0"/>
+                <a:ea typeface="Aptos" pitchFamily="34" charset="-122"/>
+                <a:cs typeface="Aptos" pitchFamily="34" charset="-120"/>
+              </a:rPr>
+              <a:t>9</a:t>
+            </a:r>
+            <a:endParaRPr lang="en-US" sz="900" dirty="0"/>
+          </a:p>
+        </p:txBody>
+      </p:sp>
+      <p:sp>
+        <p:nvSpPr>
+          <p:cNvPr id="8" name="Shape 6"/>
           <p:cNvSpPr/>
           <p:nvPr/>
         </p:nvSpPr>
@@ -14020,7 +15210,7 @@
       </p:sp>
       <p:sp>
         <p:nvSpPr>
-          <p:cNvPr id="8" name="Text 6"/>
+          <p:cNvPr id="9" name="Text 7"/>
           <p:cNvSpPr/>
           <p:nvPr/>
         </p:nvSpPr>
@@ -14059,14 +15249,14 @@
       </p:sp>
       <p:sp>
         <p:nvSpPr>
-          <p:cNvPr id="9" name="Text 7"/>
+          <p:cNvPr id="10" name="Text 8"/>
           <p:cNvSpPr/>
           <p:nvPr/>
         </p:nvSpPr>
         <p:spPr>
           <a:xfrm>
             <a:off x="640080" y="621792"/>
-            <a:ext cx="10881360" cy="566928"/>
+            <a:ext cx="10881360" cy="713232"/>
           </a:xfrm>
           <a:prstGeom prst="rect">
             <a:avLst/>
@@ -14084,7 +15274,7 @@
               <a:buNone/>
             </a:pPr>
             <a:r>
-              <a:rPr lang="en-US" sz="2700" b="1" dirty="0">
+              <a:rPr lang="en-US" sz="3400" b="1" dirty="0">
                 <a:solidFill>
                   <a:srgbClr val="003A63"/>
                 </a:solidFill>
@@ -14094,20 +15284,20 @@
               </a:rPr>
               <a:t>Public Health Example</a:t>
             </a:r>
-            <a:endParaRPr lang="en-US" sz="2700" dirty="0"/>
-          </a:p>
-        </p:txBody>
-      </p:sp>
-      <p:sp>
-        <p:nvSpPr>
-          <p:cNvPr id="10" name="Text 8"/>
-          <p:cNvSpPr/>
-          <p:nvPr/>
-        </p:nvSpPr>
-        <p:spPr>
-          <a:xfrm>
-            <a:off x="868680" y="1417320"/>
-            <a:ext cx="6675120" cy="4434840"/>
+            <a:endParaRPr lang="en-US" sz="3400" dirty="0"/>
+          </a:p>
+        </p:txBody>
+      </p:sp>
+      <p:sp>
+        <p:nvSpPr>
+          <p:cNvPr id="11" name="Text 9"/>
+          <p:cNvSpPr/>
+          <p:nvPr/>
+        </p:nvSpPr>
+        <p:spPr>
+          <a:xfrm>
+            <a:off x="868680" y="1508760"/>
+            <a:ext cx="6537960" cy="4160520"/>
           </a:xfrm>
           <a:prstGeom prst="rect">
             <a:avLst/>
@@ -14122,7 +15312,7 @@
           <a:lstStyle/>
           <a:p>
             <a:r>
-              <a:rPr lang="en-US" sz="1700" dirty="0">
+              <a:rPr lang="en-US" sz="2100" dirty="0">
                 <a:solidFill>
                   <a:srgbClr val="17364A"/>
                 </a:solidFill>
@@ -14130,13 +15320,13 @@
                 <a:ea typeface="Aptos" pitchFamily="34" charset="-122"/>
                 <a:cs typeface="Aptos" pitchFamily="34" charset="-120"/>
               </a:rPr>
-              <a:t>A local health department implements an AI-assisted tool to classify incoming environmental health complaints by topic and.</a:t>
-            </a:r>
-            <a:endParaRPr lang="en-US" sz="1700" dirty="0"/>
-          </a:p>
-          <a:p>
-            <a:r>
-              <a:rPr lang="en-US" sz="1700" dirty="0">
+              <a:t>A local health department implements an AI-assisted tool to classify incoming environmental health.</a:t>
+            </a:r>
+            <a:endParaRPr lang="en-US" sz="2100" dirty="0"/>
+          </a:p>
+          <a:p>
+            <a:r>
+              <a:rPr lang="en-US" sz="2100" dirty="0">
                 <a:solidFill>
                   <a:srgbClr val="17364A"/>
                 </a:solidFill>
@@ -14144,13 +15334,13 @@
                 <a:ea typeface="Aptos" pitchFamily="34" charset="-122"/>
                 <a:cs typeface="Aptos" pitchFamily="34" charset="-120"/>
               </a:rPr>
-              <a:t>The vendor configured the model, IT manages access, environmental health staff review the queue, and the program director.</a:t>
-            </a:r>
-            <a:endParaRPr lang="en-US" sz="1700" dirty="0"/>
-          </a:p>
-          <a:p>
-            <a:r>
-              <a:rPr lang="en-US" sz="1700" dirty="0">
+              <a:t>The vendor configured the model, IT manages access, environmental health staff review the queue, and.</a:t>
+            </a:r>
+            <a:endParaRPr lang="en-US" sz="2100" dirty="0"/>
+          </a:p>
+          <a:p>
+            <a:r>
+              <a:rPr lang="en-US" sz="2100" dirty="0">
                 <a:solidFill>
                   <a:srgbClr val="17364A"/>
                 </a:solidFill>
@@ -14160,27 +15350,13 @@
               </a:rPr>
               <a:t>A complaint is misclassified and a serious housing-related concern is not routed for timely follow-up.</a:t>
             </a:r>
-            <a:endParaRPr lang="en-US" sz="1700" dirty="0"/>
-          </a:p>
-          <a:p>
-            <a:r>
-              <a:rPr lang="en-US" sz="1700" dirty="0">
-                <a:solidFill>
-                  <a:srgbClr val="17364A"/>
-                </a:solidFill>
-                <a:latin typeface="Aptos" pitchFamily="34" charset="0"/>
-                <a:ea typeface="Aptos" pitchFamily="34" charset="-122"/>
-                <a:cs typeface="Aptos" pitchFamily="34" charset="-120"/>
-              </a:rPr>
-              <a:t>A decision-rights matrix helps the agency respond.</a:t>
-            </a:r>
-            <a:endParaRPr lang="en-US" sz="1700" dirty="0"/>
-          </a:p>
-        </p:txBody>
-      </p:sp>
-      <p:sp>
-        <p:nvSpPr>
-          <p:cNvPr id="11" name="Shape 9"/>
+            <a:endParaRPr lang="en-US" sz="2100" dirty="0"/>
+          </a:p>
+        </p:txBody>
+      </p:sp>
+      <p:sp>
+        <p:nvSpPr>
+          <p:cNvPr id="12" name="Shape 10"/>
           <p:cNvSpPr/>
           <p:nvPr/>
         </p:nvSpPr>
@@ -14207,14 +15383,14 @@
       </p:sp>
       <p:sp>
         <p:nvSpPr>
-          <p:cNvPr id="12" name="Text 10"/>
+          <p:cNvPr id="13" name="Text 11"/>
           <p:cNvSpPr/>
           <p:nvPr/>
         </p:nvSpPr>
         <p:spPr>
           <a:xfrm>
             <a:off x="8074152" y="1563624"/>
-            <a:ext cx="2825496" cy="201168"/>
+            <a:ext cx="2825496" cy="256032"/>
           </a:xfrm>
           <a:prstGeom prst="rect">
             <a:avLst/>
@@ -14230,7 +15406,7 @@
               <a:buNone/>
             </a:pPr>
             <a:r>
-              <a:rPr lang="en-US" sz="950" b="1" dirty="0">
+              <a:rPr lang="en-US" sz="1300" b="1" dirty="0">
                 <a:solidFill>
                   <a:srgbClr val="0068B7"/>
                 </a:solidFill>
@@ -14240,20 +15416,20 @@
               </a:rPr>
               <a:t>Key idea</a:t>
             </a:r>
-            <a:endParaRPr lang="en-US" sz="950" dirty="0"/>
-          </a:p>
-        </p:txBody>
-      </p:sp>
-      <p:sp>
-        <p:nvSpPr>
-          <p:cNvPr id="13" name="Text 11"/>
-          <p:cNvSpPr/>
-          <p:nvPr/>
-        </p:nvSpPr>
-        <p:spPr>
-          <a:xfrm>
-            <a:off x="8074152" y="1856232"/>
-            <a:ext cx="2825496" cy="1261872"/>
+            <a:endParaRPr lang="en-US" sz="1300" dirty="0"/>
+          </a:p>
+        </p:txBody>
+      </p:sp>
+      <p:sp>
+        <p:nvSpPr>
+          <p:cNvPr id="14" name="Text 12"/>
+          <p:cNvSpPr/>
+          <p:nvPr/>
+        </p:nvSpPr>
+        <p:spPr>
+          <a:xfrm>
+            <a:off x="8074152" y="1920240"/>
+            <a:ext cx="2825496" cy="1188720"/>
           </a:xfrm>
           <a:prstGeom prst="rect">
             <a:avLst/>
@@ -14271,7 +15447,7 @@
               <a:buNone/>
             </a:pPr>
             <a:r>
-              <a:rPr lang="en-US" sz="1250" dirty="0">
+              <a:rPr lang="en-US" sz="1550" dirty="0">
                 <a:solidFill>
                   <a:srgbClr val="17364A"/>
                 </a:solidFill>
@@ -14279,15 +15455,15 @@
                 <a:ea typeface="Aptos" pitchFamily="34" charset="-122"/>
                 <a:cs typeface="Aptos" pitchFamily="34" charset="-120"/>
               </a:rPr>
-              <a:t>A local health department implements an AI-assisted tool to classify incoming environmental health complaints by topic and.</a:t>
-            </a:r>
-            <a:endParaRPr lang="en-US" sz="1250" dirty="0"/>
-          </a:p>
-        </p:txBody>
-      </p:sp>
-      <p:sp>
-        <p:nvSpPr>
-          <p:cNvPr id="14" name="Shape 12"/>
+              <a:t>A local health department implements an AI-assisted tool to classify incoming environmental health.</a:t>
+            </a:r>
+            <a:endParaRPr lang="en-US" sz="1550" dirty="0"/>
+          </a:p>
+        </p:txBody>
+      </p:sp>
+      <p:sp>
+        <p:nvSpPr>
+          <p:cNvPr id="15" name="Shape 13"/>
           <p:cNvSpPr/>
           <p:nvPr/>
         </p:nvSpPr>
@@ -14314,14 +15490,14 @@
       </p:sp>
       <p:sp>
         <p:nvSpPr>
-          <p:cNvPr id="15" name="Text 13"/>
+          <p:cNvPr id="16" name="Text 14"/>
           <p:cNvSpPr/>
           <p:nvPr/>
         </p:nvSpPr>
         <p:spPr>
           <a:xfrm>
             <a:off x="8074152" y="3666744"/>
-            <a:ext cx="2825496" cy="201168"/>
+            <a:ext cx="2825496" cy="256032"/>
           </a:xfrm>
           <a:prstGeom prst="rect">
             <a:avLst/>
@@ -14337,7 +15513,7 @@
               <a:buNone/>
             </a:pPr>
             <a:r>
-              <a:rPr lang="en-US" sz="950" b="1" dirty="0">
+              <a:rPr lang="en-US" sz="1300" b="1" dirty="0">
                 <a:solidFill>
                   <a:srgbClr val="0068B7"/>
                 </a:solidFill>
@@ -14347,20 +15523,20 @@
               </a:rPr>
               <a:t>Use this for</a:t>
             </a:r>
-            <a:endParaRPr lang="en-US" sz="950" dirty="0"/>
-          </a:p>
-        </p:txBody>
-      </p:sp>
-      <p:sp>
-        <p:nvSpPr>
-          <p:cNvPr id="16" name="Text 14"/>
-          <p:cNvSpPr/>
-          <p:nvPr/>
-        </p:nvSpPr>
-        <p:spPr>
-          <a:xfrm>
-            <a:off x="8074152" y="3959352"/>
-            <a:ext cx="2825496" cy="1170432"/>
+            <a:endParaRPr lang="en-US" sz="1300" dirty="0"/>
+          </a:p>
+        </p:txBody>
+      </p:sp>
+      <p:sp>
+        <p:nvSpPr>
+          <p:cNvPr id="17" name="Text 15"/>
+          <p:cNvSpPr/>
+          <p:nvPr/>
+        </p:nvSpPr>
+        <p:spPr>
+          <a:xfrm>
+            <a:off x="8074152" y="4023360"/>
+            <a:ext cx="2825496" cy="1097280"/>
           </a:xfrm>
           <a:prstGeom prst="rect">
             <a:avLst/>
@@ -14378,7 +15554,7 @@
               <a:buNone/>
             </a:pPr>
             <a:r>
-              <a:rPr lang="en-US" sz="1250" dirty="0">
+              <a:rPr lang="en-US" sz="1550" dirty="0">
                 <a:solidFill>
                   <a:srgbClr val="17364A"/>
                 </a:solidFill>
@@ -14388,7 +15564,7 @@
               </a:rPr>
               <a:t>Connect the concept to public health decisions, safeguards, documentation, or implementation work.</a:t>
             </a:r>
-            <a:endParaRPr lang="en-US" sz="1250" dirty="0"/>
+            <a:endParaRPr lang="en-US" sz="1550" dirty="0"/>
           </a:p>
         </p:txBody>
       </p:sp>
